--- a/Temporal_IO_es.pptx
+++ b/Temporal_IO_es.pptx
@@ -5,21 +5,20 @@
     <p:sldMasterId id="2147483648" r:id="rId1"/>
   </p:sldMasterIdLst>
   <p:notesMasterIdLst>
-    <p:notesMasterId r:id="rId14"/>
+    <p:notesMasterId r:id="rId13"/>
   </p:notesMasterIdLst>
   <p:sldIdLst>
     <p:sldId id="256" r:id="rId2"/>
     <p:sldId id="257" r:id="rId3"/>
-    <p:sldId id="258" r:id="rId4"/>
-    <p:sldId id="259" r:id="rId5"/>
-    <p:sldId id="260" r:id="rId6"/>
-    <p:sldId id="261" r:id="rId7"/>
-    <p:sldId id="262" r:id="rId8"/>
-    <p:sldId id="263" r:id="rId9"/>
-    <p:sldId id="264" r:id="rId10"/>
-    <p:sldId id="265" r:id="rId11"/>
-    <p:sldId id="266" r:id="rId12"/>
-    <p:sldId id="267" r:id="rId13"/>
+    <p:sldId id="268" r:id="rId4"/>
+    <p:sldId id="258" r:id="rId5"/>
+    <p:sldId id="259" r:id="rId6"/>
+    <p:sldId id="260" r:id="rId7"/>
+    <p:sldId id="261" r:id="rId8"/>
+    <p:sldId id="264" r:id="rId9"/>
+    <p:sldId id="265" r:id="rId10"/>
+    <p:sldId id="266" r:id="rId11"/>
+    <p:sldId id="267" r:id="rId12"/>
   </p:sldIdLst>
   <p:sldSz cx="9144000" cy="5143500" type="screen16x9"/>
   <p:notesSz cx="5143500" cy="9144000"/>
@@ -482,90 +481,6 @@
             <a:fld id="{F7021451-1387-4CA6-816F-3879F97B5CBC}" type="slidenum">
               <a:rPr lang="en-US"/>
               <a:t>11</a:t>
-            </a:fld>
-            <a:endParaRPr lang="en-US"/>
-          </a:p>
-        </p:txBody>
-      </p:sp>
-    </p:spTree>
-    <p:extLst>
-      <p:ext uri="{BB962C8B-B14F-4D97-AF65-F5344CB8AC3E}">
-        <p14:creationId xmlns:p14="http://schemas.microsoft.com/office/powerpoint/2010/main" val="1024086991"/>
-      </p:ext>
-    </p:extLst>
-  </p:cSld>
-  <p:clrMapOvr>
-    <a:masterClrMapping/>
-  </p:clrMapOvr>
-</p:notes>
-</file>
-
-<file path=ppt/notesSlides/notesSlide12.xml><?xml version="1.0" encoding="utf-8"?>
-<p:notes xmlns:a="http://schemas.openxmlformats.org/drawingml/2006/main" xmlns:r="http://schemas.openxmlformats.org/officeDocument/2006/relationships" xmlns:p="http://schemas.openxmlformats.org/presentationml/2006/main">
-  <p:cSld>
-    <p:spTree>
-      <p:nvGrpSpPr>
-        <p:cNvPr id="1" name=""/>
-        <p:cNvGrpSpPr/>
-        <p:nvPr/>
-      </p:nvGrpSpPr>
-      <p:grpSpPr>
-        <a:xfrm>
-          <a:off x="0" y="0"/>
-          <a:ext cx="0" cy="0"/>
-          <a:chOff x="0" y="0"/>
-          <a:chExt cx="0" cy="0"/>
-        </a:xfrm>
-      </p:grpSpPr>
-      <p:sp>
-        <p:nvSpPr>
-          <p:cNvPr id="2" name="Slide Image Placeholder 1"/>
-          <p:cNvSpPr>
-            <a:spLocks noGrp="1" noRot="1" noChangeAspect="1"/>
-          </p:cNvSpPr>
-          <p:nvPr>
-            <p:ph type="sldImg"/>
-          </p:nvPr>
-        </p:nvSpPr>
-        <p:spPr/>
-      </p:sp>
-      <p:sp>
-        <p:nvSpPr>
-          <p:cNvPr id="3" name="Notes Placeholder 2"/>
-          <p:cNvSpPr>
-            <a:spLocks noGrp="1"/>
-          </p:cNvSpPr>
-          <p:nvPr>
-            <p:ph type="body" idx="1"/>
-          </p:nvPr>
-        </p:nvSpPr>
-        <p:spPr/>
-        <p:txBody>
-          <a:bodyPr/>
-          <a:lstStyle/>
-          <a:p>
-            <a:endParaRPr lang="en-US" dirty="0"/>
-          </a:p>
-        </p:txBody>
-      </p:sp>
-      <p:sp>
-        <p:nvSpPr>
-          <p:cNvPr id="4" name="Slide Number Placeholder 3"/>
-          <p:cNvSpPr>
-            <a:spLocks noGrp="1"/>
-          </p:cNvSpPr>
-          <p:nvPr>
-            <p:ph type="sldNum" sz="quarter" idx="10"/>
-          </p:nvPr>
-        </p:nvSpPr>
-        <p:spPr/>
-        <p:txBody>
-          <a:bodyPr/>
-          <a:lstStyle/>
-          <a:p>
-            <a:fld id="{F7021451-1387-4CA6-816F-3879F97B5CBC}" type="slidenum">
-              <a:rPr lang="en-US"/>
-              <a:t>12</a:t>
             </a:fld>
             <a:endParaRPr lang="en-US"/>
           </a:p>
@@ -2069,1707 +1984,6 @@
 
 <file path=ppt/slides/slide10.xml><?xml version="1.0" encoding="utf-8"?>
 <p:sld xmlns:a="http://schemas.openxmlformats.org/drawingml/2006/main" xmlns:r="http://schemas.openxmlformats.org/officeDocument/2006/relationships" xmlns:p="http://schemas.openxmlformats.org/presentationml/2006/main">
-  <p:cSld name="Slide 10">
-    <p:bg>
-      <p:bgPr>
-        <a:gradFill>
-          <a:gsLst>
-            <a:gs pos="0">
-              <a:schemeClr val="accent3">
-                <a:lumMod val="5000"/>
-                <a:lumOff val="95000"/>
-              </a:schemeClr>
-            </a:gs>
-            <a:gs pos="74000">
-              <a:schemeClr val="accent3">
-                <a:lumMod val="45000"/>
-                <a:lumOff val="55000"/>
-              </a:schemeClr>
-            </a:gs>
-            <a:gs pos="83000">
-              <a:schemeClr val="accent3">
-                <a:lumMod val="45000"/>
-                <a:lumOff val="55000"/>
-              </a:schemeClr>
-            </a:gs>
-            <a:gs pos="100000">
-              <a:schemeClr val="accent3">
-                <a:lumMod val="30000"/>
-                <a:lumOff val="70000"/>
-              </a:schemeClr>
-            </a:gs>
-          </a:gsLst>
-          <a:lin ang="5400000" scaled="1"/>
-        </a:gradFill>
-        <a:effectLst/>
-      </p:bgPr>
-    </p:bg>
-    <p:spTree>
-      <p:nvGrpSpPr>
-        <p:cNvPr id="1" name=""/>
-        <p:cNvGrpSpPr/>
-        <p:nvPr/>
-      </p:nvGrpSpPr>
-      <p:grpSpPr>
-        <a:xfrm>
-          <a:off x="0" y="0"/>
-          <a:ext cx="0" cy="0"/>
-          <a:chOff x="0" y="0"/>
-          <a:chExt cx="0" cy="0"/>
-        </a:xfrm>
-      </p:grpSpPr>
-      <p:sp>
-        <p:nvSpPr>
-          <p:cNvPr id="2" name="Shape 0"/>
-          <p:cNvSpPr/>
-          <p:nvPr/>
-        </p:nvSpPr>
-        <p:spPr>
-          <a:xfrm>
-            <a:off x="0" y="0"/>
-            <a:ext cx="9144000" cy="822960"/>
-          </a:xfrm>
-          <a:prstGeom prst="rect">
-            <a:avLst/>
-          </a:prstGeom>
-          <a:solidFill>
-            <a:srgbClr val="1B6CA8"/>
-          </a:solidFill>
-          <a:ln w="12700">
-            <a:solidFill>
-              <a:srgbClr val="1B6CA8"/>
-            </a:solidFill>
-            <a:prstDash val="solid"/>
-          </a:ln>
-        </p:spPr>
-        <p:txBody>
-          <a:bodyPr/>
-          <a:lstStyle/>
-          <a:p>
-            <a:endParaRPr lang="pt-PT"/>
-          </a:p>
-        </p:txBody>
-      </p:sp>
-      <p:sp>
-        <p:nvSpPr>
-          <p:cNvPr id="3" name="Text 1"/>
-          <p:cNvSpPr/>
-          <p:nvPr/>
-        </p:nvSpPr>
-        <p:spPr>
-          <a:xfrm>
-            <a:off x="457200" y="0"/>
-            <a:ext cx="8229600" cy="822960"/>
-          </a:xfrm>
-          <a:prstGeom prst="rect">
-            <a:avLst/>
-          </a:prstGeom>
-          <a:noFill/>
-          <a:ln/>
-        </p:spPr>
-        <p:txBody>
-          <a:bodyPr wrap="square" lIns="0" tIns="0" rIns="0" bIns="0" rtlCol="0" anchor="ctr"/>
-          <a:lstStyle/>
-          <a:p>
-            <a:pPr marL="0" indent="0">
-              <a:buNone/>
-            </a:pPr>
-            <a:r>
-              <a:rPr lang="en-US" sz="2400" b="1" dirty="0">
-                <a:solidFill>
-                  <a:srgbClr val="FFFFFF"/>
-                </a:solidFill>
-              </a:rPr>
-              <a:t>05  /  Fluxo de Execução</a:t>
-            </a:r>
-            <a:endParaRPr lang="en-US" sz="2400" dirty="0"/>
-          </a:p>
-        </p:txBody>
-      </p:sp>
-      <p:sp>
-        <p:nvSpPr>
-          <p:cNvPr id="4" name="Shape 2"/>
-          <p:cNvSpPr/>
-          <p:nvPr/>
-        </p:nvSpPr>
-        <p:spPr>
-          <a:xfrm>
-            <a:off x="274320" y="1005840"/>
-            <a:ext cx="2743200" cy="1325880"/>
-          </a:xfrm>
-          <a:prstGeom prst="rect">
-            <a:avLst/>
-          </a:prstGeom>
-          <a:solidFill>
-            <a:srgbClr val="112236"/>
-          </a:solidFill>
-          <a:ln w="19050">
-            <a:solidFill>
-              <a:srgbClr val="2D9CDB"/>
-            </a:solidFill>
-            <a:prstDash val="solid"/>
-          </a:ln>
-          <a:effectLst>
-            <a:outerShdw blurRad="101600" dist="38100" dir="8100000" algn="bl" rotWithShape="0">
-              <a:srgbClr val="000000">
-                <a:alpha val="18000"/>
-              </a:srgbClr>
-            </a:outerShdw>
-          </a:effectLst>
-        </p:spPr>
-        <p:txBody>
-          <a:bodyPr/>
-          <a:lstStyle/>
-          <a:p>
-            <a:endParaRPr lang="pt-PT"/>
-          </a:p>
-        </p:txBody>
-      </p:sp>
-      <p:sp>
-        <p:nvSpPr>
-          <p:cNvPr id="5" name="Shape 3"/>
-          <p:cNvSpPr/>
-          <p:nvPr/>
-        </p:nvSpPr>
-        <p:spPr>
-          <a:xfrm>
-            <a:off x="365760" y="1097280"/>
-            <a:ext cx="502920" cy="502920"/>
-          </a:xfrm>
-          <a:prstGeom prst="ellipse">
-            <a:avLst/>
-          </a:prstGeom>
-          <a:solidFill>
-            <a:srgbClr val="2D9CDB"/>
-          </a:solidFill>
-          <a:ln w="12700">
-            <a:solidFill>
-              <a:srgbClr val="2D9CDB"/>
-            </a:solidFill>
-            <a:prstDash val="solid"/>
-          </a:ln>
-        </p:spPr>
-        <p:txBody>
-          <a:bodyPr/>
-          <a:lstStyle/>
-          <a:p>
-            <a:endParaRPr lang="pt-PT"/>
-          </a:p>
-        </p:txBody>
-      </p:sp>
-      <p:sp>
-        <p:nvSpPr>
-          <p:cNvPr id="6" name="Text 4"/>
-          <p:cNvSpPr/>
-          <p:nvPr/>
-        </p:nvSpPr>
-        <p:spPr>
-          <a:xfrm>
-            <a:off x="365760" y="1097280"/>
-            <a:ext cx="502920" cy="502920"/>
-          </a:xfrm>
-          <a:prstGeom prst="rect">
-            <a:avLst/>
-          </a:prstGeom>
-          <a:noFill/>
-          <a:ln/>
-        </p:spPr>
-        <p:txBody>
-          <a:bodyPr wrap="square" lIns="0" tIns="0" rIns="0" bIns="0" rtlCol="0" anchor="ctr"/>
-          <a:lstStyle/>
-          <a:p>
-            <a:pPr marL="0" indent="0" algn="ctr">
-              <a:buNone/>
-            </a:pPr>
-            <a:r>
-              <a:rPr lang="en-US" sz="1600" b="1" dirty="0">
-                <a:solidFill>
-                  <a:srgbClr val="0D1B2A"/>
-                </a:solidFill>
-              </a:rPr>
-              <a:t>1</a:t>
-            </a:r>
-            <a:endParaRPr lang="en-US" sz="1600" dirty="0"/>
-          </a:p>
-        </p:txBody>
-      </p:sp>
-      <p:sp>
-        <p:nvSpPr>
-          <p:cNvPr id="7" name="Text 5"/>
-          <p:cNvSpPr/>
-          <p:nvPr/>
-        </p:nvSpPr>
-        <p:spPr>
-          <a:xfrm>
-            <a:off x="960120" y="1078992"/>
-            <a:ext cx="1965960" cy="1097280"/>
-          </a:xfrm>
-          <a:prstGeom prst="rect">
-            <a:avLst/>
-          </a:prstGeom>
-          <a:noFill/>
-          <a:ln/>
-        </p:spPr>
-        <p:txBody>
-          <a:bodyPr wrap="square" rtlCol="0" anchor="ctr"/>
-          <a:lstStyle/>
-          <a:p>
-            <a:pPr marL="0" indent="0">
-              <a:buNone/>
-            </a:pPr>
-            <a:r>
-              <a:rPr lang="en-US" sz="1200" dirty="0" err="1">
-                <a:solidFill>
-                  <a:srgbClr val="FFFFFF"/>
-                </a:solidFill>
-              </a:rPr>
-              <a:t>Cliente</a:t>
-            </a:r>
-            <a:r>
-              <a:rPr lang="en-US" sz="1200" dirty="0">
-                <a:solidFill>
-                  <a:srgbClr val="FFFFFF"/>
-                </a:solidFill>
-              </a:rPr>
-              <a:t> </a:t>
-            </a:r>
-            <a:r>
-              <a:rPr lang="en-US" sz="1200" dirty="0" err="1">
-                <a:solidFill>
-                  <a:srgbClr val="FFFFFF"/>
-                </a:solidFill>
-              </a:rPr>
-              <a:t>inicia</a:t>
-            </a:r>
-            <a:r>
-              <a:rPr lang="en-US" sz="1200" dirty="0">
-                <a:solidFill>
-                  <a:srgbClr val="FFFFFF"/>
-                </a:solidFill>
-              </a:rPr>
-              <a:t> </a:t>
-            </a:r>
-            <a:r>
-              <a:rPr lang="en-US" sz="1200" dirty="0" err="1">
-                <a:solidFill>
-                  <a:srgbClr val="FFFFFF"/>
-                </a:solidFill>
-              </a:rPr>
-              <a:t>el</a:t>
-            </a:r>
-            <a:r>
-              <a:rPr lang="en-US" sz="1200" dirty="0">
-                <a:solidFill>
-                  <a:srgbClr val="FFFFFF"/>
-                </a:solidFill>
-              </a:rPr>
-              <a:t> </a:t>
-            </a:r>
-            <a:r>
-              <a:rPr lang="en-US" sz="1200" dirty="0" err="1">
-                <a:solidFill>
-                  <a:srgbClr val="FFFFFF"/>
-                </a:solidFill>
-              </a:rPr>
-              <a:t>flujo</a:t>
-            </a:r>
-            <a:r>
-              <a:rPr lang="en-US" sz="1200" dirty="0">
-                <a:solidFill>
-                  <a:srgbClr val="FFFFFF"/>
-                </a:solidFill>
-              </a:rPr>
-              <a:t> de </a:t>
-            </a:r>
-            <a:r>
-              <a:rPr lang="en-US" sz="1200" dirty="0" err="1">
-                <a:solidFill>
-                  <a:srgbClr val="FFFFFF"/>
-                </a:solidFill>
-              </a:rPr>
-              <a:t>trabajo</a:t>
-            </a:r>
-            <a:r>
-              <a:rPr lang="en-US" sz="1200" dirty="0">
-                <a:solidFill>
-                  <a:srgbClr val="FFFFFF"/>
-                </a:solidFill>
-              </a:rPr>
-              <a:t>.</a:t>
-            </a:r>
-            <a:endParaRPr lang="en-US" sz="1200" dirty="0"/>
-          </a:p>
-        </p:txBody>
-      </p:sp>
-      <p:sp>
-        <p:nvSpPr>
-          <p:cNvPr id="8" name="Text 6"/>
-          <p:cNvSpPr/>
-          <p:nvPr/>
-        </p:nvSpPr>
-        <p:spPr>
-          <a:xfrm>
-            <a:off x="3017520" y="1463040"/>
-            <a:ext cx="228600" cy="411480"/>
-          </a:xfrm>
-          <a:prstGeom prst="rect">
-            <a:avLst/>
-          </a:prstGeom>
-          <a:noFill/>
-          <a:ln/>
-        </p:spPr>
-        <p:txBody>
-          <a:bodyPr wrap="square" rtlCol="0" anchor="ctr"/>
-          <a:lstStyle/>
-          <a:p>
-            <a:pPr marL="0" indent="0" algn="ctr">
-              <a:buNone/>
-            </a:pPr>
-            <a:r>
-              <a:rPr lang="en-US" sz="1600" dirty="0">
-                <a:solidFill>
-                  <a:srgbClr val="8FA3B3"/>
-                </a:solidFill>
-              </a:rPr>
-              <a:t>→</a:t>
-            </a:r>
-            <a:endParaRPr lang="en-US" sz="1600" dirty="0"/>
-          </a:p>
-        </p:txBody>
-      </p:sp>
-      <p:sp>
-        <p:nvSpPr>
-          <p:cNvPr id="9" name="Shape 7"/>
-          <p:cNvSpPr/>
-          <p:nvPr/>
-        </p:nvSpPr>
-        <p:spPr>
-          <a:xfrm>
-            <a:off x="3200400" y="1005840"/>
-            <a:ext cx="2743200" cy="1325880"/>
-          </a:xfrm>
-          <a:prstGeom prst="rect">
-            <a:avLst/>
-          </a:prstGeom>
-          <a:solidFill>
-            <a:srgbClr val="112236"/>
-          </a:solidFill>
-          <a:ln w="19050">
-            <a:solidFill>
-              <a:srgbClr val="1B6CA8"/>
-            </a:solidFill>
-            <a:prstDash val="solid"/>
-          </a:ln>
-          <a:effectLst>
-            <a:outerShdw blurRad="101600" dist="38100" dir="8100000" algn="bl" rotWithShape="0">
-              <a:srgbClr val="000000">
-                <a:alpha val="18000"/>
-              </a:srgbClr>
-            </a:outerShdw>
-          </a:effectLst>
-        </p:spPr>
-        <p:txBody>
-          <a:bodyPr/>
-          <a:lstStyle/>
-          <a:p>
-            <a:endParaRPr lang="pt-PT"/>
-          </a:p>
-        </p:txBody>
-      </p:sp>
-      <p:sp>
-        <p:nvSpPr>
-          <p:cNvPr id="10" name="Shape 8"/>
-          <p:cNvSpPr/>
-          <p:nvPr/>
-        </p:nvSpPr>
-        <p:spPr>
-          <a:xfrm>
-            <a:off x="3291840" y="1097280"/>
-            <a:ext cx="502920" cy="502920"/>
-          </a:xfrm>
-          <a:prstGeom prst="ellipse">
-            <a:avLst/>
-          </a:prstGeom>
-          <a:solidFill>
-            <a:srgbClr val="1B6CA8"/>
-          </a:solidFill>
-          <a:ln w="12700">
-            <a:solidFill>
-              <a:srgbClr val="1B6CA8"/>
-            </a:solidFill>
-            <a:prstDash val="solid"/>
-          </a:ln>
-        </p:spPr>
-        <p:txBody>
-          <a:bodyPr/>
-          <a:lstStyle/>
-          <a:p>
-            <a:endParaRPr lang="pt-PT"/>
-          </a:p>
-        </p:txBody>
-      </p:sp>
-      <p:sp>
-        <p:nvSpPr>
-          <p:cNvPr id="11" name="Text 9"/>
-          <p:cNvSpPr/>
-          <p:nvPr/>
-        </p:nvSpPr>
-        <p:spPr>
-          <a:xfrm>
-            <a:off x="3291840" y="1097280"/>
-            <a:ext cx="502920" cy="502920"/>
-          </a:xfrm>
-          <a:prstGeom prst="rect">
-            <a:avLst/>
-          </a:prstGeom>
-          <a:noFill/>
-          <a:ln/>
-        </p:spPr>
-        <p:txBody>
-          <a:bodyPr wrap="square" lIns="0" tIns="0" rIns="0" bIns="0" rtlCol="0" anchor="ctr"/>
-          <a:lstStyle/>
-          <a:p>
-            <a:pPr marL="0" indent="0" algn="ctr">
-              <a:buNone/>
-            </a:pPr>
-            <a:r>
-              <a:rPr lang="en-US" sz="1600" b="1" dirty="0">
-                <a:solidFill>
-                  <a:srgbClr val="0D1B2A"/>
-                </a:solidFill>
-              </a:rPr>
-              <a:t>2</a:t>
-            </a:r>
-            <a:endParaRPr lang="en-US" sz="1600" dirty="0"/>
-          </a:p>
-        </p:txBody>
-      </p:sp>
-      <p:sp>
-        <p:nvSpPr>
-          <p:cNvPr id="12" name="Text 10"/>
-          <p:cNvSpPr/>
-          <p:nvPr/>
-        </p:nvSpPr>
-        <p:spPr>
-          <a:xfrm>
-            <a:off x="3886200" y="1078992"/>
-            <a:ext cx="1965960" cy="1097280"/>
-          </a:xfrm>
-          <a:prstGeom prst="rect">
-            <a:avLst/>
-          </a:prstGeom>
-          <a:noFill/>
-          <a:ln/>
-        </p:spPr>
-        <p:txBody>
-          <a:bodyPr wrap="square" rtlCol="0" anchor="ctr"/>
-          <a:lstStyle/>
-          <a:p>
-            <a:pPr marL="0" indent="0">
-              <a:buNone/>
-            </a:pPr>
-            <a:r>
-              <a:rPr lang="en-US" sz="1200" dirty="0">
-                <a:solidFill>
-                  <a:srgbClr val="FFFFFF"/>
-                </a:solidFill>
-              </a:rPr>
-              <a:t>Temporal Service </a:t>
-            </a:r>
-            <a:r>
-              <a:rPr lang="en-US" sz="1200" dirty="0" err="1">
-                <a:solidFill>
-                  <a:srgbClr val="FFFFFF"/>
-                </a:solidFill>
-              </a:rPr>
-              <a:t>registra</a:t>
-            </a:r>
-            <a:r>
-              <a:rPr lang="en-US" sz="1200" dirty="0">
-                <a:solidFill>
-                  <a:srgbClr val="FFFFFF"/>
-                </a:solidFill>
-              </a:rPr>
-              <a:t> </a:t>
-            </a:r>
-            <a:r>
-              <a:rPr lang="en-US" sz="1200" dirty="0" err="1">
-                <a:solidFill>
-                  <a:srgbClr val="FFFFFF"/>
-                </a:solidFill>
-              </a:rPr>
-              <a:t>el</a:t>
-            </a:r>
-            <a:r>
-              <a:rPr lang="en-US" sz="1200" dirty="0">
-                <a:solidFill>
-                  <a:srgbClr val="FFFFFF"/>
-                </a:solidFill>
-              </a:rPr>
-              <a:t> </a:t>
-            </a:r>
-            <a:r>
-              <a:rPr lang="en-US" sz="1200" dirty="0" err="1">
-                <a:solidFill>
-                  <a:srgbClr val="FFFFFF"/>
-                </a:solidFill>
-              </a:rPr>
-              <a:t>evento</a:t>
-            </a:r>
-            <a:r>
-              <a:rPr lang="en-US" sz="1200" dirty="0">
-                <a:solidFill>
-                  <a:srgbClr val="FFFFFF"/>
-                </a:solidFill>
-              </a:rPr>
-              <a:t>.</a:t>
-            </a:r>
-            <a:endParaRPr lang="en-US" sz="1200" dirty="0"/>
-          </a:p>
-        </p:txBody>
-      </p:sp>
-      <p:sp>
-        <p:nvSpPr>
-          <p:cNvPr id="13" name="Text 11"/>
-          <p:cNvSpPr/>
-          <p:nvPr/>
-        </p:nvSpPr>
-        <p:spPr>
-          <a:xfrm>
-            <a:off x="5943600" y="1463040"/>
-            <a:ext cx="228600" cy="411480"/>
-          </a:xfrm>
-          <a:prstGeom prst="rect">
-            <a:avLst/>
-          </a:prstGeom>
-          <a:noFill/>
-          <a:ln/>
-        </p:spPr>
-        <p:txBody>
-          <a:bodyPr wrap="square" rtlCol="0" anchor="ctr"/>
-          <a:lstStyle/>
-          <a:p>
-            <a:pPr marL="0" indent="0" algn="ctr">
-              <a:buNone/>
-            </a:pPr>
-            <a:r>
-              <a:rPr lang="en-US" sz="1600" dirty="0">
-                <a:solidFill>
-                  <a:srgbClr val="8FA3B3"/>
-                </a:solidFill>
-              </a:rPr>
-              <a:t>→</a:t>
-            </a:r>
-            <a:endParaRPr lang="en-US" sz="1600" dirty="0"/>
-          </a:p>
-        </p:txBody>
-      </p:sp>
-      <p:sp>
-        <p:nvSpPr>
-          <p:cNvPr id="14" name="Shape 12"/>
-          <p:cNvSpPr/>
-          <p:nvPr/>
-        </p:nvSpPr>
-        <p:spPr>
-          <a:xfrm>
-            <a:off x="6126480" y="1005840"/>
-            <a:ext cx="2743200" cy="1325880"/>
-          </a:xfrm>
-          <a:prstGeom prst="rect">
-            <a:avLst/>
-          </a:prstGeom>
-          <a:solidFill>
-            <a:srgbClr val="112236"/>
-          </a:solidFill>
-          <a:ln w="19050">
-            <a:solidFill>
-              <a:srgbClr val="9B59B6"/>
-            </a:solidFill>
-            <a:prstDash val="solid"/>
-          </a:ln>
-          <a:effectLst>
-            <a:outerShdw blurRad="101600" dist="38100" dir="8100000" algn="bl" rotWithShape="0">
-              <a:srgbClr val="000000">
-                <a:alpha val="18000"/>
-              </a:srgbClr>
-            </a:outerShdw>
-          </a:effectLst>
-        </p:spPr>
-        <p:txBody>
-          <a:bodyPr/>
-          <a:lstStyle/>
-          <a:p>
-            <a:endParaRPr lang="pt-PT"/>
-          </a:p>
-        </p:txBody>
-      </p:sp>
-      <p:sp>
-        <p:nvSpPr>
-          <p:cNvPr id="15" name="Shape 13"/>
-          <p:cNvSpPr/>
-          <p:nvPr/>
-        </p:nvSpPr>
-        <p:spPr>
-          <a:xfrm>
-            <a:off x="6217920" y="1097280"/>
-            <a:ext cx="502920" cy="502920"/>
-          </a:xfrm>
-          <a:prstGeom prst="ellipse">
-            <a:avLst/>
-          </a:prstGeom>
-          <a:solidFill>
-            <a:srgbClr val="9B59B6"/>
-          </a:solidFill>
-          <a:ln w="12700">
-            <a:solidFill>
-              <a:srgbClr val="9B59B6"/>
-            </a:solidFill>
-            <a:prstDash val="solid"/>
-          </a:ln>
-        </p:spPr>
-        <p:txBody>
-          <a:bodyPr/>
-          <a:lstStyle/>
-          <a:p>
-            <a:endParaRPr lang="pt-PT"/>
-          </a:p>
-        </p:txBody>
-      </p:sp>
-      <p:sp>
-        <p:nvSpPr>
-          <p:cNvPr id="16" name="Text 14"/>
-          <p:cNvSpPr/>
-          <p:nvPr/>
-        </p:nvSpPr>
-        <p:spPr>
-          <a:xfrm>
-            <a:off x="6217920" y="1097280"/>
-            <a:ext cx="502920" cy="502920"/>
-          </a:xfrm>
-          <a:prstGeom prst="rect">
-            <a:avLst/>
-          </a:prstGeom>
-          <a:noFill/>
-          <a:ln/>
-        </p:spPr>
-        <p:txBody>
-          <a:bodyPr wrap="square" lIns="0" tIns="0" rIns="0" bIns="0" rtlCol="0" anchor="ctr"/>
-          <a:lstStyle/>
-          <a:p>
-            <a:pPr marL="0" indent="0" algn="ctr">
-              <a:buNone/>
-            </a:pPr>
-            <a:r>
-              <a:rPr lang="en-US" sz="1600" b="1" dirty="0">
-                <a:solidFill>
-                  <a:srgbClr val="0D1B2A"/>
-                </a:solidFill>
-              </a:rPr>
-              <a:t>3</a:t>
-            </a:r>
-            <a:endParaRPr lang="en-US" sz="1600" dirty="0"/>
-          </a:p>
-        </p:txBody>
-      </p:sp>
-      <p:sp>
-        <p:nvSpPr>
-          <p:cNvPr id="17" name="Text 15"/>
-          <p:cNvSpPr/>
-          <p:nvPr/>
-        </p:nvSpPr>
-        <p:spPr>
-          <a:xfrm>
-            <a:off x="6812280" y="1078992"/>
-            <a:ext cx="1965960" cy="1097280"/>
-          </a:xfrm>
-          <a:prstGeom prst="rect">
-            <a:avLst/>
-          </a:prstGeom>
-          <a:noFill/>
-          <a:ln/>
-        </p:spPr>
-        <p:txBody>
-          <a:bodyPr wrap="square" rtlCol="0" anchor="ctr"/>
-          <a:lstStyle/>
-          <a:p>
-            <a:pPr marL="0" indent="0">
-              <a:buNone/>
-            </a:pPr>
-            <a:r>
-              <a:rPr lang="en-US" sz="1200" dirty="0">
-                <a:solidFill>
-                  <a:srgbClr val="FFFFFF"/>
-                </a:solidFill>
-              </a:rPr>
-              <a:t>Las </a:t>
-            </a:r>
-            <a:r>
-              <a:rPr lang="en-US" sz="1200" dirty="0" err="1">
-                <a:solidFill>
-                  <a:srgbClr val="FFFFFF"/>
-                </a:solidFill>
-              </a:rPr>
-              <a:t>tareas</a:t>
-            </a:r>
-            <a:r>
-              <a:rPr lang="en-US" sz="1200" dirty="0">
-                <a:solidFill>
-                  <a:srgbClr val="FFFFFF"/>
-                </a:solidFill>
-              </a:rPr>
-              <a:t> se </a:t>
-            </a:r>
-            <a:r>
-              <a:rPr lang="en-US" sz="1200" dirty="0" err="1">
-                <a:solidFill>
-                  <a:srgbClr val="FFFFFF"/>
-                </a:solidFill>
-              </a:rPr>
-              <a:t>programan</a:t>
-            </a:r>
-            <a:r>
-              <a:rPr lang="en-US" sz="1200" dirty="0">
-                <a:solidFill>
-                  <a:srgbClr val="FFFFFF"/>
-                </a:solidFill>
-              </a:rPr>
-              <a:t> </a:t>
-            </a:r>
-            <a:r>
-              <a:rPr lang="en-US" sz="1200" dirty="0" err="1">
-                <a:solidFill>
-                  <a:srgbClr val="FFFFFF"/>
-                </a:solidFill>
-              </a:rPr>
-              <a:t>en</a:t>
-            </a:r>
-            <a:r>
-              <a:rPr lang="en-US" sz="1200" dirty="0">
-                <a:solidFill>
-                  <a:srgbClr val="FFFFFF"/>
-                </a:solidFill>
-              </a:rPr>
-              <a:t> Task Queue.</a:t>
-            </a:r>
-            <a:endParaRPr lang="en-US" sz="1200" dirty="0"/>
-          </a:p>
-        </p:txBody>
-      </p:sp>
-      <p:sp>
-        <p:nvSpPr>
-          <p:cNvPr id="18" name="Shape 16"/>
-          <p:cNvSpPr/>
-          <p:nvPr/>
-        </p:nvSpPr>
-        <p:spPr>
-          <a:xfrm>
-            <a:off x="274320" y="2651760"/>
-            <a:ext cx="2743200" cy="1325880"/>
-          </a:xfrm>
-          <a:prstGeom prst="rect">
-            <a:avLst/>
-          </a:prstGeom>
-          <a:solidFill>
-            <a:srgbClr val="112236"/>
-          </a:solidFill>
-          <a:ln w="19050">
-            <a:solidFill>
-              <a:srgbClr val="E67E22"/>
-            </a:solidFill>
-            <a:prstDash val="solid"/>
-          </a:ln>
-          <a:effectLst>
-            <a:outerShdw blurRad="101600" dist="38100" dir="8100000" algn="bl" rotWithShape="0">
-              <a:srgbClr val="000000">
-                <a:alpha val="18000"/>
-              </a:srgbClr>
-            </a:outerShdw>
-          </a:effectLst>
-        </p:spPr>
-        <p:txBody>
-          <a:bodyPr/>
-          <a:lstStyle/>
-          <a:p>
-            <a:endParaRPr lang="pt-PT"/>
-          </a:p>
-        </p:txBody>
-      </p:sp>
-      <p:sp>
-        <p:nvSpPr>
-          <p:cNvPr id="19" name="Shape 17"/>
-          <p:cNvSpPr/>
-          <p:nvPr/>
-        </p:nvSpPr>
-        <p:spPr>
-          <a:xfrm>
-            <a:off x="365760" y="2743200"/>
-            <a:ext cx="502920" cy="502920"/>
-          </a:xfrm>
-          <a:prstGeom prst="ellipse">
-            <a:avLst/>
-          </a:prstGeom>
-          <a:solidFill>
-            <a:srgbClr val="E67E22"/>
-          </a:solidFill>
-          <a:ln w="12700">
-            <a:solidFill>
-              <a:srgbClr val="E67E22"/>
-            </a:solidFill>
-            <a:prstDash val="solid"/>
-          </a:ln>
-        </p:spPr>
-        <p:txBody>
-          <a:bodyPr/>
-          <a:lstStyle/>
-          <a:p>
-            <a:endParaRPr lang="pt-PT"/>
-          </a:p>
-        </p:txBody>
-      </p:sp>
-      <p:sp>
-        <p:nvSpPr>
-          <p:cNvPr id="20" name="Text 18"/>
-          <p:cNvSpPr/>
-          <p:nvPr/>
-        </p:nvSpPr>
-        <p:spPr>
-          <a:xfrm>
-            <a:off x="365760" y="2743200"/>
-            <a:ext cx="502920" cy="502920"/>
-          </a:xfrm>
-          <a:prstGeom prst="rect">
-            <a:avLst/>
-          </a:prstGeom>
-          <a:noFill/>
-          <a:ln/>
-        </p:spPr>
-        <p:txBody>
-          <a:bodyPr wrap="square" lIns="0" tIns="0" rIns="0" bIns="0" rtlCol="0" anchor="ctr"/>
-          <a:lstStyle/>
-          <a:p>
-            <a:pPr marL="0" indent="0" algn="ctr">
-              <a:buNone/>
-            </a:pPr>
-            <a:r>
-              <a:rPr lang="en-US" sz="1600" b="1" dirty="0">
-                <a:solidFill>
-                  <a:srgbClr val="0D1B2A"/>
-                </a:solidFill>
-              </a:rPr>
-              <a:t>4</a:t>
-            </a:r>
-            <a:endParaRPr lang="en-US" sz="1600" dirty="0"/>
-          </a:p>
-        </p:txBody>
-      </p:sp>
-      <p:sp>
-        <p:nvSpPr>
-          <p:cNvPr id="21" name="Text 19"/>
-          <p:cNvSpPr/>
-          <p:nvPr/>
-        </p:nvSpPr>
-        <p:spPr>
-          <a:xfrm>
-            <a:off x="960120" y="2724912"/>
-            <a:ext cx="1965960" cy="1097280"/>
-          </a:xfrm>
-          <a:prstGeom prst="rect">
-            <a:avLst/>
-          </a:prstGeom>
-          <a:noFill/>
-          <a:ln/>
-        </p:spPr>
-        <p:txBody>
-          <a:bodyPr wrap="square" rtlCol="0" anchor="ctr"/>
-          <a:lstStyle/>
-          <a:p>
-            <a:pPr marL="0" indent="0">
-              <a:buNone/>
-            </a:pPr>
-            <a:r>
-              <a:rPr lang="en-US" sz="1200" dirty="0">
-                <a:solidFill>
-                  <a:srgbClr val="FFFFFF"/>
-                </a:solidFill>
-              </a:rPr>
-              <a:t>Worker consume y </a:t>
-            </a:r>
-            <a:r>
-              <a:rPr lang="en-US" sz="1200" dirty="0" err="1">
-                <a:solidFill>
-                  <a:srgbClr val="FFFFFF"/>
-                </a:solidFill>
-              </a:rPr>
-              <a:t>ejecuta</a:t>
-            </a:r>
-            <a:r>
-              <a:rPr lang="en-US" sz="1200" dirty="0">
-                <a:solidFill>
-                  <a:srgbClr val="FFFFFF"/>
-                </a:solidFill>
-              </a:rPr>
-              <a:t> la </a:t>
-            </a:r>
-            <a:r>
-              <a:rPr lang="en-US" sz="1200" dirty="0" err="1">
-                <a:solidFill>
-                  <a:srgbClr val="FFFFFF"/>
-                </a:solidFill>
-              </a:rPr>
-              <a:t>tarea</a:t>
-            </a:r>
-            <a:r>
-              <a:rPr lang="en-US" sz="1200" dirty="0">
-                <a:solidFill>
-                  <a:srgbClr val="FFFFFF"/>
-                </a:solidFill>
-              </a:rPr>
-              <a:t>.</a:t>
-            </a:r>
-            <a:endParaRPr lang="en-US" sz="1200" dirty="0"/>
-          </a:p>
-        </p:txBody>
-      </p:sp>
-      <p:sp>
-        <p:nvSpPr>
-          <p:cNvPr id="22" name="Text 20"/>
-          <p:cNvSpPr/>
-          <p:nvPr/>
-        </p:nvSpPr>
-        <p:spPr>
-          <a:xfrm>
-            <a:off x="3017520" y="3108960"/>
-            <a:ext cx="228600" cy="411480"/>
-          </a:xfrm>
-          <a:prstGeom prst="rect">
-            <a:avLst/>
-          </a:prstGeom>
-          <a:noFill/>
-          <a:ln/>
-        </p:spPr>
-        <p:txBody>
-          <a:bodyPr wrap="square" rtlCol="0" anchor="ctr"/>
-          <a:lstStyle/>
-          <a:p>
-            <a:pPr marL="0" indent="0" algn="ctr">
-              <a:buNone/>
-            </a:pPr>
-            <a:r>
-              <a:rPr lang="en-US" sz="1600" dirty="0">
-                <a:solidFill>
-                  <a:srgbClr val="8FA3B3"/>
-                </a:solidFill>
-              </a:rPr>
-              <a:t>→</a:t>
-            </a:r>
-            <a:endParaRPr lang="en-US" sz="1600" dirty="0"/>
-          </a:p>
-        </p:txBody>
-      </p:sp>
-      <p:sp>
-        <p:nvSpPr>
-          <p:cNvPr id="23" name="Shape 21"/>
-          <p:cNvSpPr/>
-          <p:nvPr/>
-        </p:nvSpPr>
-        <p:spPr>
-          <a:xfrm>
-            <a:off x="3200400" y="2651760"/>
-            <a:ext cx="2743200" cy="1325880"/>
-          </a:xfrm>
-          <a:prstGeom prst="rect">
-            <a:avLst/>
-          </a:prstGeom>
-          <a:solidFill>
-            <a:srgbClr val="112236"/>
-          </a:solidFill>
-          <a:ln w="19050">
-            <a:solidFill>
-              <a:srgbClr val="27AE60"/>
-            </a:solidFill>
-            <a:prstDash val="solid"/>
-          </a:ln>
-          <a:effectLst>
-            <a:outerShdw blurRad="101600" dist="38100" dir="8100000" algn="bl" rotWithShape="0">
-              <a:srgbClr val="000000">
-                <a:alpha val="18000"/>
-              </a:srgbClr>
-            </a:outerShdw>
-          </a:effectLst>
-        </p:spPr>
-        <p:txBody>
-          <a:bodyPr/>
-          <a:lstStyle/>
-          <a:p>
-            <a:endParaRPr lang="pt-PT"/>
-          </a:p>
-        </p:txBody>
-      </p:sp>
-      <p:sp>
-        <p:nvSpPr>
-          <p:cNvPr id="24" name="Shape 22"/>
-          <p:cNvSpPr/>
-          <p:nvPr/>
-        </p:nvSpPr>
-        <p:spPr>
-          <a:xfrm>
-            <a:off x="3291840" y="2743200"/>
-            <a:ext cx="502920" cy="502920"/>
-          </a:xfrm>
-          <a:prstGeom prst="ellipse">
-            <a:avLst/>
-          </a:prstGeom>
-          <a:solidFill>
-            <a:srgbClr val="27AE60"/>
-          </a:solidFill>
-          <a:ln w="12700">
-            <a:solidFill>
-              <a:srgbClr val="27AE60"/>
-            </a:solidFill>
-            <a:prstDash val="solid"/>
-          </a:ln>
-        </p:spPr>
-        <p:txBody>
-          <a:bodyPr/>
-          <a:lstStyle/>
-          <a:p>
-            <a:endParaRPr lang="pt-PT"/>
-          </a:p>
-        </p:txBody>
-      </p:sp>
-      <p:sp>
-        <p:nvSpPr>
-          <p:cNvPr id="25" name="Text 23"/>
-          <p:cNvSpPr/>
-          <p:nvPr/>
-        </p:nvSpPr>
-        <p:spPr>
-          <a:xfrm>
-            <a:off x="3291840" y="2743200"/>
-            <a:ext cx="502920" cy="502920"/>
-          </a:xfrm>
-          <a:prstGeom prst="rect">
-            <a:avLst/>
-          </a:prstGeom>
-          <a:noFill/>
-          <a:ln/>
-        </p:spPr>
-        <p:txBody>
-          <a:bodyPr wrap="square" lIns="0" tIns="0" rIns="0" bIns="0" rtlCol="0" anchor="ctr"/>
-          <a:lstStyle/>
-          <a:p>
-            <a:pPr marL="0" indent="0" algn="ctr">
-              <a:buNone/>
-            </a:pPr>
-            <a:r>
-              <a:rPr lang="en-US" sz="1600" b="1" dirty="0">
-                <a:solidFill>
-                  <a:srgbClr val="0D1B2A"/>
-                </a:solidFill>
-              </a:rPr>
-              <a:t>5</a:t>
-            </a:r>
-            <a:endParaRPr lang="en-US" sz="1600" dirty="0"/>
-          </a:p>
-        </p:txBody>
-      </p:sp>
-      <p:sp>
-        <p:nvSpPr>
-          <p:cNvPr id="26" name="Text 24"/>
-          <p:cNvSpPr/>
-          <p:nvPr/>
-        </p:nvSpPr>
-        <p:spPr>
-          <a:xfrm>
-            <a:off x="3886200" y="2724912"/>
-            <a:ext cx="1965960" cy="1097280"/>
-          </a:xfrm>
-          <a:prstGeom prst="rect">
-            <a:avLst/>
-          </a:prstGeom>
-          <a:noFill/>
-          <a:ln/>
-        </p:spPr>
-        <p:txBody>
-          <a:bodyPr wrap="square" rtlCol="0" anchor="ctr"/>
-          <a:lstStyle/>
-          <a:p>
-            <a:pPr marL="0" indent="0">
-              <a:buNone/>
-            </a:pPr>
-            <a:r>
-              <a:rPr lang="en-US" sz="1200" dirty="0">
-                <a:solidFill>
-                  <a:srgbClr val="FFFFFF"/>
-                </a:solidFill>
-              </a:rPr>
-              <a:t>Activity </a:t>
-            </a:r>
-            <a:r>
-              <a:rPr lang="en-US" sz="1200" dirty="0" err="1">
-                <a:solidFill>
-                  <a:srgbClr val="FFFFFF"/>
-                </a:solidFill>
-              </a:rPr>
-              <a:t>realiza</a:t>
-            </a:r>
-            <a:r>
-              <a:rPr lang="en-US" sz="1200" dirty="0">
-                <a:solidFill>
-                  <a:srgbClr val="FFFFFF"/>
-                </a:solidFill>
-              </a:rPr>
-              <a:t> la </a:t>
-            </a:r>
-            <a:r>
-              <a:rPr lang="en-US" sz="1200" dirty="0" err="1">
-                <a:solidFill>
-                  <a:srgbClr val="FFFFFF"/>
-                </a:solidFill>
-              </a:rPr>
-              <a:t>operación</a:t>
-            </a:r>
-            <a:r>
-              <a:rPr lang="en-US" sz="1200" dirty="0">
-                <a:solidFill>
-                  <a:srgbClr val="FFFFFF"/>
-                </a:solidFill>
-              </a:rPr>
-              <a:t> externa.</a:t>
-            </a:r>
-            <a:endParaRPr lang="en-US" sz="1200" dirty="0"/>
-          </a:p>
-        </p:txBody>
-      </p:sp>
-      <p:sp>
-        <p:nvSpPr>
-          <p:cNvPr id="27" name="Text 25"/>
-          <p:cNvSpPr/>
-          <p:nvPr/>
-        </p:nvSpPr>
-        <p:spPr>
-          <a:xfrm>
-            <a:off x="5943600" y="3108960"/>
-            <a:ext cx="228600" cy="411480"/>
-          </a:xfrm>
-          <a:prstGeom prst="rect">
-            <a:avLst/>
-          </a:prstGeom>
-          <a:noFill/>
-          <a:ln/>
-        </p:spPr>
-        <p:txBody>
-          <a:bodyPr wrap="square" rtlCol="0" anchor="ctr"/>
-          <a:lstStyle/>
-          <a:p>
-            <a:pPr marL="0" indent="0" algn="ctr">
-              <a:buNone/>
-            </a:pPr>
-            <a:r>
-              <a:rPr lang="en-US" sz="1600" dirty="0">
-                <a:solidFill>
-                  <a:srgbClr val="8FA3B3"/>
-                </a:solidFill>
-              </a:rPr>
-              <a:t>→</a:t>
-            </a:r>
-            <a:endParaRPr lang="en-US" sz="1600" dirty="0"/>
-          </a:p>
-        </p:txBody>
-      </p:sp>
-      <p:sp>
-        <p:nvSpPr>
-          <p:cNvPr id="28" name="Shape 26"/>
-          <p:cNvSpPr/>
-          <p:nvPr/>
-        </p:nvSpPr>
-        <p:spPr>
-          <a:xfrm>
-            <a:off x="6126480" y="2651760"/>
-            <a:ext cx="2743200" cy="1325880"/>
-          </a:xfrm>
-          <a:prstGeom prst="rect">
-            <a:avLst/>
-          </a:prstGeom>
-          <a:solidFill>
-            <a:srgbClr val="112236"/>
-          </a:solidFill>
-          <a:ln w="19050">
-            <a:solidFill>
-              <a:srgbClr val="00D4AA"/>
-            </a:solidFill>
-            <a:prstDash val="solid"/>
-          </a:ln>
-          <a:effectLst>
-            <a:outerShdw blurRad="101600" dist="38100" dir="8100000" algn="bl" rotWithShape="0">
-              <a:srgbClr val="000000">
-                <a:alpha val="18000"/>
-              </a:srgbClr>
-            </a:outerShdw>
-          </a:effectLst>
-        </p:spPr>
-        <p:txBody>
-          <a:bodyPr/>
-          <a:lstStyle/>
-          <a:p>
-            <a:endParaRPr lang="pt-PT"/>
-          </a:p>
-        </p:txBody>
-      </p:sp>
-      <p:sp>
-        <p:nvSpPr>
-          <p:cNvPr id="29" name="Shape 27"/>
-          <p:cNvSpPr/>
-          <p:nvPr/>
-        </p:nvSpPr>
-        <p:spPr>
-          <a:xfrm>
-            <a:off x="6217920" y="2743200"/>
-            <a:ext cx="502920" cy="502920"/>
-          </a:xfrm>
-          <a:prstGeom prst="ellipse">
-            <a:avLst/>
-          </a:prstGeom>
-          <a:solidFill>
-            <a:srgbClr val="00D4AA"/>
-          </a:solidFill>
-          <a:ln w="12700">
-            <a:solidFill>
-              <a:srgbClr val="00D4AA"/>
-            </a:solidFill>
-            <a:prstDash val="solid"/>
-          </a:ln>
-        </p:spPr>
-        <p:txBody>
-          <a:bodyPr/>
-          <a:lstStyle/>
-          <a:p>
-            <a:endParaRPr lang="pt-PT"/>
-          </a:p>
-        </p:txBody>
-      </p:sp>
-      <p:sp>
-        <p:nvSpPr>
-          <p:cNvPr id="30" name="Text 28"/>
-          <p:cNvSpPr/>
-          <p:nvPr/>
-        </p:nvSpPr>
-        <p:spPr>
-          <a:xfrm>
-            <a:off x="6217920" y="2743200"/>
-            <a:ext cx="502920" cy="502920"/>
-          </a:xfrm>
-          <a:prstGeom prst="rect">
-            <a:avLst/>
-          </a:prstGeom>
-          <a:noFill/>
-          <a:ln/>
-        </p:spPr>
-        <p:txBody>
-          <a:bodyPr wrap="square" lIns="0" tIns="0" rIns="0" bIns="0" rtlCol="0" anchor="ctr"/>
-          <a:lstStyle/>
-          <a:p>
-            <a:pPr marL="0" indent="0" algn="ctr">
-              <a:buNone/>
-            </a:pPr>
-            <a:r>
-              <a:rPr lang="en-US" sz="1600" b="1" dirty="0">
-                <a:solidFill>
-                  <a:srgbClr val="0D1B2A"/>
-                </a:solidFill>
-              </a:rPr>
-              <a:t>6</a:t>
-            </a:r>
-            <a:endParaRPr lang="en-US" sz="1600" dirty="0"/>
-          </a:p>
-        </p:txBody>
-      </p:sp>
-      <p:sp>
-        <p:nvSpPr>
-          <p:cNvPr id="31" name="Text 29"/>
-          <p:cNvSpPr/>
-          <p:nvPr/>
-        </p:nvSpPr>
-        <p:spPr>
-          <a:xfrm>
-            <a:off x="6812280" y="2724912"/>
-            <a:ext cx="1965960" cy="1097280"/>
-          </a:xfrm>
-          <a:prstGeom prst="rect">
-            <a:avLst/>
-          </a:prstGeom>
-          <a:noFill/>
-          <a:ln/>
-        </p:spPr>
-        <p:txBody>
-          <a:bodyPr wrap="square" rtlCol="0" anchor="ctr"/>
-          <a:lstStyle/>
-          <a:p>
-            <a:pPr marL="0" indent="0">
-              <a:buNone/>
-            </a:pPr>
-            <a:r>
-              <a:rPr lang="en-US" sz="1200" dirty="0">
-                <a:solidFill>
-                  <a:srgbClr val="FFFFFF"/>
-                </a:solidFill>
-              </a:rPr>
-              <a:t>Se </a:t>
-            </a:r>
-            <a:r>
-              <a:rPr lang="en-US" sz="1200" dirty="0" err="1">
-                <a:solidFill>
-                  <a:srgbClr val="FFFFFF"/>
-                </a:solidFill>
-              </a:rPr>
-              <a:t>devuelve</a:t>
-            </a:r>
-            <a:r>
-              <a:rPr lang="en-US" sz="1200" dirty="0">
-                <a:solidFill>
-                  <a:srgbClr val="FFFFFF"/>
-                </a:solidFill>
-              </a:rPr>
-              <a:t> </a:t>
-            </a:r>
-            <a:r>
-              <a:rPr lang="en-US" sz="1200" dirty="0" err="1">
-                <a:solidFill>
-                  <a:srgbClr val="FFFFFF"/>
-                </a:solidFill>
-              </a:rPr>
-              <a:t>el</a:t>
-            </a:r>
-            <a:r>
-              <a:rPr lang="en-US" sz="1200" dirty="0">
-                <a:solidFill>
-                  <a:srgbClr val="FFFFFF"/>
-                </a:solidFill>
-              </a:rPr>
-              <a:t> </a:t>
-            </a:r>
-            <a:r>
-              <a:rPr lang="en-US" sz="1200" dirty="0" err="1">
-                <a:solidFill>
-                  <a:srgbClr val="FFFFFF"/>
-                </a:solidFill>
-              </a:rPr>
-              <a:t>resultado</a:t>
-            </a:r>
-            <a:r>
-              <a:rPr lang="en-US" sz="1200" dirty="0">
-                <a:solidFill>
-                  <a:srgbClr val="FFFFFF"/>
-                </a:solidFill>
-              </a:rPr>
-              <a:t> y se </a:t>
-            </a:r>
-            <a:r>
-              <a:rPr lang="en-US" sz="1200" dirty="0" err="1">
-                <a:solidFill>
-                  <a:srgbClr val="FFFFFF"/>
-                </a:solidFill>
-              </a:rPr>
-              <a:t>actualiza</a:t>
-            </a:r>
-            <a:r>
-              <a:rPr lang="en-US" sz="1200" dirty="0">
-                <a:solidFill>
-                  <a:srgbClr val="FFFFFF"/>
-                </a:solidFill>
-              </a:rPr>
-              <a:t> </a:t>
-            </a:r>
-            <a:r>
-              <a:rPr lang="en-US" sz="1200" dirty="0" err="1">
-                <a:solidFill>
-                  <a:srgbClr val="FFFFFF"/>
-                </a:solidFill>
-              </a:rPr>
-              <a:t>el</a:t>
-            </a:r>
-            <a:r>
-              <a:rPr lang="en-US" sz="1200" dirty="0">
-                <a:solidFill>
-                  <a:srgbClr val="FFFFFF"/>
-                </a:solidFill>
-              </a:rPr>
-              <a:t> </a:t>
-            </a:r>
-            <a:r>
-              <a:rPr lang="en-US" sz="1200" dirty="0" err="1">
-                <a:solidFill>
-                  <a:srgbClr val="FFFFFF"/>
-                </a:solidFill>
-              </a:rPr>
-              <a:t>historial</a:t>
-            </a:r>
-            <a:r>
-              <a:rPr lang="en-US" sz="1200" dirty="0">
-                <a:solidFill>
-                  <a:srgbClr val="FFFFFF"/>
-                </a:solidFill>
-              </a:rPr>
-              <a:t>.</a:t>
-            </a:r>
-            <a:endParaRPr lang="en-US" sz="1200" dirty="0"/>
-          </a:p>
-        </p:txBody>
-      </p:sp>
-      <p:sp>
-        <p:nvSpPr>
-          <p:cNvPr id="32" name="Shape 30"/>
-          <p:cNvSpPr/>
-          <p:nvPr/>
-        </p:nvSpPr>
-        <p:spPr>
-          <a:xfrm>
-            <a:off x="274320" y="4434840"/>
-            <a:ext cx="8595360" cy="457200"/>
-          </a:xfrm>
-          <a:prstGeom prst="rect">
-            <a:avLst/>
-          </a:prstGeom>
-          <a:solidFill>
-            <a:srgbClr val="1B6CA8"/>
-          </a:solidFill>
-          <a:ln w="12700">
-            <a:solidFill>
-              <a:srgbClr val="1B6CA8"/>
-            </a:solidFill>
-            <a:prstDash val="solid"/>
-          </a:ln>
-        </p:spPr>
-        <p:txBody>
-          <a:bodyPr/>
-          <a:lstStyle/>
-          <a:p>
-            <a:endParaRPr lang="pt-PT"/>
-          </a:p>
-        </p:txBody>
-      </p:sp>
-      <p:sp>
-        <p:nvSpPr>
-          <p:cNvPr id="33" name="Text 31"/>
-          <p:cNvSpPr/>
-          <p:nvPr/>
-        </p:nvSpPr>
-        <p:spPr>
-          <a:xfrm>
-            <a:off x="457200" y="4434840"/>
-            <a:ext cx="8229600" cy="457200"/>
-          </a:xfrm>
-          <a:prstGeom prst="rect">
-            <a:avLst/>
-          </a:prstGeom>
-          <a:noFill/>
-          <a:ln/>
-        </p:spPr>
-        <p:txBody>
-          <a:bodyPr wrap="square" rtlCol="0" anchor="ctr"/>
-          <a:lstStyle/>
-          <a:p>
-            <a:pPr marL="0" indent="0">
-              <a:buNone/>
-            </a:pPr>
-            <a:r>
-              <a:rPr lang="en-US" sz="1100" i="1" dirty="0">
-                <a:solidFill>
-                  <a:srgbClr val="FFFFFF"/>
-                </a:solidFill>
-              </a:rPr>
-              <a:t>🔄  En </a:t>
-            </a:r>
-            <a:r>
-              <a:rPr lang="en-US" sz="1100" i="1" dirty="0" err="1">
-                <a:solidFill>
-                  <a:srgbClr val="FFFFFF"/>
-                </a:solidFill>
-              </a:rPr>
-              <a:t>caso</a:t>
-            </a:r>
-            <a:r>
-              <a:rPr lang="en-US" sz="1100" i="1" dirty="0">
-                <a:solidFill>
-                  <a:srgbClr val="FFFFFF"/>
-                </a:solidFill>
-              </a:rPr>
-              <a:t> de </a:t>
-            </a:r>
-            <a:r>
-              <a:rPr lang="en-US" sz="1100" i="1" dirty="0" err="1">
-                <a:solidFill>
-                  <a:srgbClr val="FFFFFF"/>
-                </a:solidFill>
-              </a:rPr>
-              <a:t>fallo</a:t>
-            </a:r>
-            <a:r>
-              <a:rPr lang="en-US" sz="1100" i="1" dirty="0">
-                <a:solidFill>
-                  <a:srgbClr val="FFFFFF"/>
-                </a:solidFill>
-              </a:rPr>
-              <a:t>: Temporal </a:t>
-            </a:r>
-            <a:r>
-              <a:rPr lang="en-US" sz="1100" i="1" dirty="0" err="1">
-                <a:solidFill>
-                  <a:srgbClr val="FFFFFF"/>
-                </a:solidFill>
-              </a:rPr>
-              <a:t>aplica</a:t>
-            </a:r>
-            <a:r>
-              <a:rPr lang="en-US" sz="1100" i="1" dirty="0">
-                <a:solidFill>
-                  <a:srgbClr val="FFFFFF"/>
-                </a:solidFill>
-              </a:rPr>
-              <a:t> las </a:t>
-            </a:r>
-            <a:r>
-              <a:rPr lang="en-US" sz="1100" i="1" dirty="0" err="1">
-                <a:solidFill>
-                  <a:srgbClr val="FFFFFF"/>
-                </a:solidFill>
-              </a:rPr>
-              <a:t>políticas</a:t>
-            </a:r>
-            <a:r>
-              <a:rPr lang="en-US" sz="1100" i="1" dirty="0">
-                <a:solidFill>
-                  <a:srgbClr val="FFFFFF"/>
-                </a:solidFill>
-              </a:rPr>
-              <a:t> de </a:t>
-            </a:r>
-            <a:r>
-              <a:rPr lang="en-US" sz="1100" i="1" dirty="0" err="1">
-                <a:solidFill>
-                  <a:srgbClr val="FFFFFF"/>
-                </a:solidFill>
-              </a:rPr>
-              <a:t>reintento</a:t>
-            </a:r>
-            <a:r>
-              <a:rPr lang="en-US" sz="1100" i="1" dirty="0">
-                <a:solidFill>
-                  <a:srgbClr val="FFFFFF"/>
-                </a:solidFill>
-              </a:rPr>
-              <a:t> y </a:t>
-            </a:r>
-            <a:r>
-              <a:rPr lang="en-US" sz="1100" i="1" dirty="0" err="1">
-                <a:solidFill>
-                  <a:srgbClr val="FFFFFF"/>
-                </a:solidFill>
-              </a:rPr>
-              <a:t>reanuda</a:t>
-            </a:r>
-            <a:r>
-              <a:rPr lang="en-US" sz="1100" i="1" dirty="0">
-                <a:solidFill>
-                  <a:srgbClr val="FFFFFF"/>
-                </a:solidFill>
-              </a:rPr>
-              <a:t> la </a:t>
-            </a:r>
-            <a:r>
-              <a:rPr lang="en-US" sz="1100" i="1" dirty="0" err="1">
-                <a:solidFill>
-                  <a:srgbClr val="FFFFFF"/>
-                </a:solidFill>
-              </a:rPr>
-              <a:t>ejecución</a:t>
-            </a:r>
-            <a:r>
-              <a:rPr lang="en-US" sz="1100" i="1" dirty="0">
-                <a:solidFill>
-                  <a:srgbClr val="FFFFFF"/>
-                </a:solidFill>
-              </a:rPr>
-              <a:t> </a:t>
-            </a:r>
-            <a:r>
-              <a:rPr lang="en-US" sz="1100" i="1" dirty="0" err="1">
-                <a:solidFill>
-                  <a:srgbClr val="FFFFFF"/>
-                </a:solidFill>
-              </a:rPr>
-              <a:t>en</a:t>
-            </a:r>
-            <a:r>
-              <a:rPr lang="en-US" sz="1100" i="1" dirty="0">
-                <a:solidFill>
-                  <a:srgbClr val="FFFFFF"/>
-                </a:solidFill>
-              </a:rPr>
-              <a:t> </a:t>
-            </a:r>
-            <a:r>
-              <a:rPr lang="en-US" sz="1100" i="1" dirty="0" err="1">
-                <a:solidFill>
-                  <a:srgbClr val="FFFFFF"/>
-                </a:solidFill>
-              </a:rPr>
-              <a:t>función</a:t>
-            </a:r>
-            <a:r>
-              <a:rPr lang="en-US" sz="1100" i="1" dirty="0">
-                <a:solidFill>
-                  <a:srgbClr val="FFFFFF"/>
-                </a:solidFill>
-              </a:rPr>
-              <a:t> del </a:t>
-            </a:r>
-            <a:r>
-              <a:rPr lang="en-US" sz="1100" i="1" dirty="0" err="1">
-                <a:solidFill>
-                  <a:srgbClr val="FFFFFF"/>
-                </a:solidFill>
-              </a:rPr>
-              <a:t>historial</a:t>
-            </a:r>
-            <a:r>
-              <a:rPr lang="en-US" sz="1100" i="1" dirty="0">
-                <a:solidFill>
-                  <a:srgbClr val="FFFFFF"/>
-                </a:solidFill>
-              </a:rPr>
-              <a:t> de </a:t>
-            </a:r>
-            <a:r>
-              <a:rPr lang="en-US" sz="1100" i="1" dirty="0" err="1">
-                <a:solidFill>
-                  <a:srgbClr val="FFFFFF"/>
-                </a:solidFill>
-              </a:rPr>
-              <a:t>eventos</a:t>
-            </a:r>
-            <a:r>
-              <a:rPr lang="en-US" sz="1100" i="1" dirty="0">
-                <a:solidFill>
-                  <a:srgbClr val="FFFFFF"/>
-                </a:solidFill>
-              </a:rPr>
-              <a:t>.</a:t>
-            </a:r>
-            <a:endParaRPr lang="en-US" sz="1100" dirty="0"/>
-          </a:p>
-        </p:txBody>
-      </p:sp>
-    </p:spTree>
-  </p:cSld>
-  <p:clrMapOvr>
-    <a:masterClrMapping/>
-  </p:clrMapOvr>
-</p:sld>
-</file>
-
-<file path=ppt/slides/slide11.xml><?xml version="1.0" encoding="utf-8"?>
-<p:sld xmlns:a="http://schemas.openxmlformats.org/drawingml/2006/main" xmlns:r="http://schemas.openxmlformats.org/officeDocument/2006/relationships" xmlns:p="http://schemas.openxmlformats.org/presentationml/2006/main">
   <p:cSld name="Slide 11">
     <p:bg>
       <p:bgPr>
@@ -3881,7 +2095,7 @@
                   <a:srgbClr val="FFFFFF"/>
                 </a:solidFill>
               </a:rPr>
-              <a:t>06  / </a:t>
+              <a:t>08  / </a:t>
             </a:r>
             <a:r>
               <a:rPr lang="en-US" sz="2400" b="1" dirty="0" err="1">
@@ -5108,7 +3322,7 @@
 </p:sld>
 </file>
 
-<file path=ppt/slides/slide12.xml><?xml version="1.0" encoding="utf-8"?>
+<file path=ppt/slides/slide11.xml><?xml version="1.0" encoding="utf-8"?>
 <p:sld xmlns:a="http://schemas.openxmlformats.org/drawingml/2006/main" xmlns:r="http://schemas.openxmlformats.org/officeDocument/2006/relationships" xmlns:p="http://schemas.openxmlformats.org/presentationml/2006/main">
   <p:cSld name="Slide 12">
     <p:bg>
@@ -5707,13 +3921,19 @@
       </p:sp>
       <p:sp>
         <p:nvSpPr>
-          <p:cNvPr id="4" name="Shape 2"/>
-          <p:cNvSpPr/>
-          <p:nvPr/>
-        </p:nvSpPr>
-        <p:spPr>
-          <a:xfrm>
-            <a:off x="457200" y="1143000"/>
+          <p:cNvPr id="28" name="Shape 2">
+            <a:extLst>
+              <a:ext uri="{FF2B5EF4-FFF2-40B4-BE49-F238E27FC236}">
+                <a16:creationId xmlns:a16="http://schemas.microsoft.com/office/drawing/2014/main" id="{E5CBE0D5-37D5-65C1-EED0-5C2D08344305}"/>
+              </a:ext>
+            </a:extLst>
+          </p:cNvPr>
+          <p:cNvSpPr/>
+          <p:nvPr/>
+        </p:nvSpPr>
+        <p:spPr>
+          <a:xfrm>
+            <a:off x="457200" y="2057404"/>
             <a:ext cx="4114800" cy="777240"/>
           </a:xfrm>
           <a:prstGeom prst="rect">
@@ -5746,13 +3966,19 @@
       </p:sp>
       <p:sp>
         <p:nvSpPr>
-          <p:cNvPr id="5" name="Shape 3"/>
-          <p:cNvSpPr/>
-          <p:nvPr/>
-        </p:nvSpPr>
-        <p:spPr>
-          <a:xfrm>
-            <a:off x="457200" y="1143000"/>
+          <p:cNvPr id="29" name="Shape 3">
+            <a:extLst>
+              <a:ext uri="{FF2B5EF4-FFF2-40B4-BE49-F238E27FC236}">
+                <a16:creationId xmlns:a16="http://schemas.microsoft.com/office/drawing/2014/main" id="{669FBD2C-1C25-4DA0-819D-C299F7B9E1E9}"/>
+              </a:ext>
+            </a:extLst>
+          </p:cNvPr>
+          <p:cNvSpPr/>
+          <p:nvPr/>
+        </p:nvSpPr>
+        <p:spPr>
+          <a:xfrm>
+            <a:off x="457200" y="2057404"/>
             <a:ext cx="502920" cy="777240"/>
           </a:xfrm>
           <a:prstGeom prst="rect">
@@ -5778,13 +4004,19 @@
       </p:sp>
       <p:sp>
         <p:nvSpPr>
-          <p:cNvPr id="6" name="Text 4"/>
-          <p:cNvSpPr/>
-          <p:nvPr/>
-        </p:nvSpPr>
-        <p:spPr>
-          <a:xfrm>
-            <a:off x="457200" y="1143000"/>
+          <p:cNvPr id="30" name="Text 4">
+            <a:extLst>
+              <a:ext uri="{FF2B5EF4-FFF2-40B4-BE49-F238E27FC236}">
+                <a16:creationId xmlns:a16="http://schemas.microsoft.com/office/drawing/2014/main" id="{126D0715-123B-7016-E806-686A310F1FFC}"/>
+              </a:ext>
+            </a:extLst>
+          </p:cNvPr>
+          <p:cNvSpPr/>
+          <p:nvPr/>
+        </p:nvSpPr>
+        <p:spPr>
+          <a:xfrm>
+            <a:off x="457200" y="2057404"/>
             <a:ext cx="502920" cy="777240"/>
           </a:xfrm>
           <a:prstGeom prst="rect">
@@ -5806,7 +4038,7 @@
                   <a:srgbClr val="0D1B2A"/>
                 </a:solidFill>
               </a:rPr>
-              <a:t>01</a:t>
+              <a:t>02</a:t>
             </a:r>
             <a:endParaRPr lang="en-US" sz="1300" dirty="0"/>
           </a:p>
@@ -5814,13 +4046,19 @@
       </p:sp>
       <p:sp>
         <p:nvSpPr>
-          <p:cNvPr id="7" name="Text 5"/>
-          <p:cNvSpPr/>
-          <p:nvPr/>
-        </p:nvSpPr>
-        <p:spPr>
-          <a:xfrm>
-            <a:off x="1051560" y="1143000"/>
+          <p:cNvPr id="31" name="Text 5">
+            <a:extLst>
+              <a:ext uri="{FF2B5EF4-FFF2-40B4-BE49-F238E27FC236}">
+                <a16:creationId xmlns:a16="http://schemas.microsoft.com/office/drawing/2014/main" id="{7047130D-F635-95F7-2DFD-9CF141453A6E}"/>
+              </a:ext>
+            </a:extLst>
+          </p:cNvPr>
+          <p:cNvSpPr/>
+          <p:nvPr/>
+        </p:nvSpPr>
+        <p:spPr>
+          <a:xfrm>
+            <a:off x="1051560" y="2057404"/>
             <a:ext cx="3429000" cy="777240"/>
           </a:xfrm>
           <a:prstGeom prst="rect">
@@ -5837,20 +4075,12 @@
               <a:buNone/>
             </a:pPr>
             <a:r>
-              <a:rPr lang="en-US" sz="1300" dirty="0" err="1">
-                <a:solidFill>
-                  <a:srgbClr val="FFFFFF"/>
-                </a:solidFill>
-              </a:rPr>
-              <a:t>Qué</a:t>
-            </a:r>
-            <a:r>
               <a:rPr lang="en-US" sz="1300" dirty="0">
                 <a:solidFill>
                   <a:srgbClr val="FFFFFF"/>
                 </a:solidFill>
               </a:rPr>
-              <a:t> es Temporal IO?</a:t>
+              <a:t>Que es Temporal IO?</a:t>
             </a:r>
             <a:endParaRPr lang="en-US" sz="1300" dirty="0"/>
           </a:p>
@@ -5858,13 +4088,19 @@
       </p:sp>
       <p:sp>
         <p:nvSpPr>
-          <p:cNvPr id="8" name="Shape 6"/>
-          <p:cNvSpPr/>
-          <p:nvPr/>
-        </p:nvSpPr>
-        <p:spPr>
-          <a:xfrm>
-            <a:off x="457200" y="2286000"/>
+          <p:cNvPr id="32" name="Shape 6">
+            <a:extLst>
+              <a:ext uri="{FF2B5EF4-FFF2-40B4-BE49-F238E27FC236}">
+                <a16:creationId xmlns:a16="http://schemas.microsoft.com/office/drawing/2014/main" id="{09AF871C-7CD2-E491-FD62-5483E930796F}"/>
+              </a:ext>
+            </a:extLst>
+          </p:cNvPr>
+          <p:cNvSpPr/>
+          <p:nvPr/>
+        </p:nvSpPr>
+        <p:spPr>
+          <a:xfrm>
+            <a:off x="457200" y="3032409"/>
             <a:ext cx="4114800" cy="777240"/>
           </a:xfrm>
           <a:prstGeom prst="rect">
@@ -5897,13 +4133,19 @@
       </p:sp>
       <p:sp>
         <p:nvSpPr>
-          <p:cNvPr id="9" name="Shape 7"/>
-          <p:cNvSpPr/>
-          <p:nvPr/>
-        </p:nvSpPr>
-        <p:spPr>
-          <a:xfrm>
-            <a:off x="457200" y="2286000"/>
+          <p:cNvPr id="33" name="Shape 7">
+            <a:extLst>
+              <a:ext uri="{FF2B5EF4-FFF2-40B4-BE49-F238E27FC236}">
+                <a16:creationId xmlns:a16="http://schemas.microsoft.com/office/drawing/2014/main" id="{D39D75CF-E755-12CC-C4AC-FA50B3DF41C7}"/>
+              </a:ext>
+            </a:extLst>
+          </p:cNvPr>
+          <p:cNvSpPr/>
+          <p:nvPr/>
+        </p:nvSpPr>
+        <p:spPr>
+          <a:xfrm>
+            <a:off x="457200" y="3032409"/>
             <a:ext cx="502920" cy="777240"/>
           </a:xfrm>
           <a:prstGeom prst="rect">
@@ -5929,13 +4171,19 @@
       </p:sp>
       <p:sp>
         <p:nvSpPr>
-          <p:cNvPr id="10" name="Text 8"/>
-          <p:cNvSpPr/>
-          <p:nvPr/>
-        </p:nvSpPr>
-        <p:spPr>
-          <a:xfrm>
-            <a:off x="457200" y="2286000"/>
+          <p:cNvPr id="34" name="Text 8">
+            <a:extLst>
+              <a:ext uri="{FF2B5EF4-FFF2-40B4-BE49-F238E27FC236}">
+                <a16:creationId xmlns:a16="http://schemas.microsoft.com/office/drawing/2014/main" id="{5071DB4E-6726-667E-969C-661B4681B364}"/>
+              </a:ext>
+            </a:extLst>
+          </p:cNvPr>
+          <p:cNvSpPr/>
+          <p:nvPr/>
+        </p:nvSpPr>
+        <p:spPr>
+          <a:xfrm>
+            <a:off x="457200" y="3032409"/>
             <a:ext cx="502920" cy="777240"/>
           </a:xfrm>
           <a:prstGeom prst="rect">
@@ -5957,7 +4205,7 @@
                   <a:srgbClr val="0D1B2A"/>
                 </a:solidFill>
               </a:rPr>
-              <a:t>02</a:t>
+              <a:t>03</a:t>
             </a:r>
             <a:endParaRPr lang="en-US" sz="1300" dirty="0"/>
           </a:p>
@@ -5965,13 +4213,19 @@
       </p:sp>
       <p:sp>
         <p:nvSpPr>
-          <p:cNvPr id="11" name="Text 9"/>
-          <p:cNvSpPr/>
-          <p:nvPr/>
-        </p:nvSpPr>
-        <p:spPr>
-          <a:xfrm>
-            <a:off x="1051560" y="2286000"/>
+          <p:cNvPr id="35" name="Text 9">
+            <a:extLst>
+              <a:ext uri="{FF2B5EF4-FFF2-40B4-BE49-F238E27FC236}">
+                <a16:creationId xmlns:a16="http://schemas.microsoft.com/office/drawing/2014/main" id="{D076EB2D-EA03-BE1E-2F4A-355C2438AAC6}"/>
+              </a:ext>
+            </a:extLst>
+          </p:cNvPr>
+          <p:cNvSpPr/>
+          <p:nvPr/>
+        </p:nvSpPr>
+        <p:spPr>
+          <a:xfrm>
+            <a:off x="1051560" y="3032409"/>
             <a:ext cx="3429000" cy="777240"/>
           </a:xfrm>
           <a:prstGeom prst="rect">
@@ -5993,23 +4247,7 @@
                   <a:srgbClr val="FFFFFF"/>
                 </a:solidFill>
               </a:rPr>
-              <a:t>Por </a:t>
-            </a:r>
-            <a:r>
-              <a:rPr lang="en-US" sz="1300" dirty="0" err="1">
-                <a:solidFill>
-                  <a:srgbClr val="FFFFFF"/>
-                </a:solidFill>
-              </a:rPr>
-              <a:t>qué</a:t>
-            </a:r>
-            <a:r>
-              <a:rPr lang="en-US" sz="1300" dirty="0">
-                <a:solidFill>
-                  <a:srgbClr val="FFFFFF"/>
-                </a:solidFill>
-              </a:rPr>
-              <a:t> usar Temporal IO?</a:t>
+              <a:t>Por que usar Temporal IO?</a:t>
             </a:r>
             <a:endParaRPr lang="en-US" sz="1300" dirty="0"/>
           </a:p>
@@ -6017,13 +4255,19 @@
       </p:sp>
       <p:sp>
         <p:nvSpPr>
-          <p:cNvPr id="12" name="Shape 10"/>
-          <p:cNvSpPr/>
-          <p:nvPr/>
-        </p:nvSpPr>
-        <p:spPr>
-          <a:xfrm>
-            <a:off x="457200" y="3429000"/>
+          <p:cNvPr id="36" name="Shape 10">
+            <a:extLst>
+              <a:ext uri="{FF2B5EF4-FFF2-40B4-BE49-F238E27FC236}">
+                <a16:creationId xmlns:a16="http://schemas.microsoft.com/office/drawing/2014/main" id="{2CB28BC6-9E8A-0F59-1479-17769BF83BAF}"/>
+              </a:ext>
+            </a:extLst>
+          </p:cNvPr>
+          <p:cNvSpPr/>
+          <p:nvPr/>
+        </p:nvSpPr>
+        <p:spPr>
+          <a:xfrm>
+            <a:off x="457200" y="4024280"/>
             <a:ext cx="4114800" cy="777240"/>
           </a:xfrm>
           <a:prstGeom prst="rect">
@@ -6056,13 +4300,19 @@
       </p:sp>
       <p:sp>
         <p:nvSpPr>
-          <p:cNvPr id="13" name="Shape 11"/>
-          <p:cNvSpPr/>
-          <p:nvPr/>
-        </p:nvSpPr>
-        <p:spPr>
-          <a:xfrm>
-            <a:off x="457200" y="3429000"/>
+          <p:cNvPr id="37" name="Shape 11">
+            <a:extLst>
+              <a:ext uri="{FF2B5EF4-FFF2-40B4-BE49-F238E27FC236}">
+                <a16:creationId xmlns:a16="http://schemas.microsoft.com/office/drawing/2014/main" id="{F3007C12-9704-B794-31D6-DF25663416B2}"/>
+              </a:ext>
+            </a:extLst>
+          </p:cNvPr>
+          <p:cNvSpPr/>
+          <p:nvPr/>
+        </p:nvSpPr>
+        <p:spPr>
+          <a:xfrm>
+            <a:off x="457200" y="4024280"/>
             <a:ext cx="502920" cy="777240"/>
           </a:xfrm>
           <a:prstGeom prst="rect">
@@ -6088,13 +4338,19 @@
       </p:sp>
       <p:sp>
         <p:nvSpPr>
-          <p:cNvPr id="14" name="Text 12"/>
-          <p:cNvSpPr/>
-          <p:nvPr/>
-        </p:nvSpPr>
-        <p:spPr>
-          <a:xfrm>
-            <a:off x="457200" y="3429000"/>
+          <p:cNvPr id="38" name="Text 12">
+            <a:extLst>
+              <a:ext uri="{FF2B5EF4-FFF2-40B4-BE49-F238E27FC236}">
+                <a16:creationId xmlns:a16="http://schemas.microsoft.com/office/drawing/2014/main" id="{2A1BB4F4-47EB-E796-8295-5C56642DCE40}"/>
+              </a:ext>
+            </a:extLst>
+          </p:cNvPr>
+          <p:cNvSpPr/>
+          <p:nvPr/>
+        </p:nvSpPr>
+        <p:spPr>
+          <a:xfrm>
+            <a:off x="457200" y="4024280"/>
             <a:ext cx="502920" cy="777240"/>
           </a:xfrm>
           <a:prstGeom prst="rect">
@@ -6116,7 +4372,7 @@
                   <a:srgbClr val="0D1B2A"/>
                 </a:solidFill>
               </a:rPr>
-              <a:t>03</a:t>
+              <a:t>04</a:t>
             </a:r>
             <a:endParaRPr lang="en-US" sz="1300" dirty="0"/>
           </a:p>
@@ -6124,13 +4380,19 @@
       </p:sp>
       <p:sp>
         <p:nvSpPr>
-          <p:cNvPr id="15" name="Text 13"/>
-          <p:cNvSpPr/>
-          <p:nvPr/>
-        </p:nvSpPr>
-        <p:spPr>
-          <a:xfrm>
-            <a:off x="1051560" y="3429000"/>
+          <p:cNvPr id="39" name="Text 13">
+            <a:extLst>
+              <a:ext uri="{FF2B5EF4-FFF2-40B4-BE49-F238E27FC236}">
+                <a16:creationId xmlns:a16="http://schemas.microsoft.com/office/drawing/2014/main" id="{C6B84352-9ABE-52A3-3B96-EB4C19A35E89}"/>
+              </a:ext>
+            </a:extLst>
+          </p:cNvPr>
+          <p:cNvSpPr/>
+          <p:nvPr/>
+        </p:nvSpPr>
+        <p:spPr>
+          <a:xfrm>
+            <a:off x="1051560" y="4024280"/>
             <a:ext cx="3429000" cy="777240"/>
           </a:xfrm>
           <a:prstGeom prst="rect">
@@ -6176,13 +4438,19 @@
       </p:sp>
       <p:sp>
         <p:nvSpPr>
-          <p:cNvPr id="16" name="Shape 14"/>
-          <p:cNvSpPr/>
-          <p:nvPr/>
-        </p:nvSpPr>
-        <p:spPr>
-          <a:xfrm>
-            <a:off x="4846320" y="1143000"/>
+          <p:cNvPr id="40" name="Shape 14">
+            <a:extLst>
+              <a:ext uri="{FF2B5EF4-FFF2-40B4-BE49-F238E27FC236}">
+                <a16:creationId xmlns:a16="http://schemas.microsoft.com/office/drawing/2014/main" id="{030C2BC0-71D5-1539-A32E-F0AEC19978AC}"/>
+              </a:ext>
+            </a:extLst>
+          </p:cNvPr>
+          <p:cNvSpPr/>
+          <p:nvPr/>
+        </p:nvSpPr>
+        <p:spPr>
+          <a:xfrm>
+            <a:off x="4827909" y="1109556"/>
             <a:ext cx="4114800" cy="777240"/>
           </a:xfrm>
           <a:prstGeom prst="rect">
@@ -6209,19 +4477,25 @@
           <a:bodyPr/>
           <a:lstStyle/>
           <a:p>
-            <a:endParaRPr lang="pt-PT"/>
-          </a:p>
-        </p:txBody>
-      </p:sp>
-      <p:sp>
-        <p:nvSpPr>
-          <p:cNvPr id="17" name="Shape 15"/>
-          <p:cNvSpPr/>
-          <p:nvPr/>
-        </p:nvSpPr>
-        <p:spPr>
-          <a:xfrm>
-            <a:off x="4846320" y="1143000"/>
+            <a:endParaRPr lang="pt-PT" dirty="0"/>
+          </a:p>
+        </p:txBody>
+      </p:sp>
+      <p:sp>
+        <p:nvSpPr>
+          <p:cNvPr id="41" name="Shape 15">
+            <a:extLst>
+              <a:ext uri="{FF2B5EF4-FFF2-40B4-BE49-F238E27FC236}">
+                <a16:creationId xmlns:a16="http://schemas.microsoft.com/office/drawing/2014/main" id="{CCD9776D-8B90-A92B-63F3-E30FF9EC035E}"/>
+              </a:ext>
+            </a:extLst>
+          </p:cNvPr>
+          <p:cNvSpPr/>
+          <p:nvPr/>
+        </p:nvSpPr>
+        <p:spPr>
+          <a:xfrm>
+            <a:off x="4827909" y="1109556"/>
             <a:ext cx="502920" cy="777240"/>
           </a:xfrm>
           <a:prstGeom prst="rect">
@@ -6247,13 +4521,19 @@
       </p:sp>
       <p:sp>
         <p:nvSpPr>
-          <p:cNvPr id="18" name="Text 16"/>
-          <p:cNvSpPr/>
-          <p:nvPr/>
-        </p:nvSpPr>
-        <p:spPr>
-          <a:xfrm>
-            <a:off x="4846320" y="1143000"/>
+          <p:cNvPr id="42" name="Text 16">
+            <a:extLst>
+              <a:ext uri="{FF2B5EF4-FFF2-40B4-BE49-F238E27FC236}">
+                <a16:creationId xmlns:a16="http://schemas.microsoft.com/office/drawing/2014/main" id="{378EA426-A85C-A8CB-3B47-124D8A322329}"/>
+              </a:ext>
+            </a:extLst>
+          </p:cNvPr>
+          <p:cNvSpPr/>
+          <p:nvPr/>
+        </p:nvSpPr>
+        <p:spPr>
+          <a:xfrm>
+            <a:off x="4827909" y="1109556"/>
             <a:ext cx="502920" cy="777240"/>
           </a:xfrm>
           <a:prstGeom prst="rect">
@@ -6275,7 +4555,7 @@
                   <a:srgbClr val="0D1B2A"/>
                 </a:solidFill>
               </a:rPr>
-              <a:t>04</a:t>
+              <a:t>05</a:t>
             </a:r>
             <a:endParaRPr lang="en-US" sz="1300" dirty="0"/>
           </a:p>
@@ -6283,13 +4563,19 @@
       </p:sp>
       <p:sp>
         <p:nvSpPr>
-          <p:cNvPr id="19" name="Text 17"/>
-          <p:cNvSpPr/>
-          <p:nvPr/>
-        </p:nvSpPr>
-        <p:spPr>
-          <a:xfrm>
-            <a:off x="5440680" y="1143000"/>
+          <p:cNvPr id="43" name="Text 17">
+            <a:extLst>
+              <a:ext uri="{FF2B5EF4-FFF2-40B4-BE49-F238E27FC236}">
+                <a16:creationId xmlns:a16="http://schemas.microsoft.com/office/drawing/2014/main" id="{6F93D3CD-DF04-7E54-5428-5DE3B62FA62D}"/>
+              </a:ext>
+            </a:extLst>
+          </p:cNvPr>
+          <p:cNvSpPr/>
+          <p:nvPr/>
+        </p:nvSpPr>
+        <p:spPr>
+          <a:xfrm>
+            <a:off x="5422269" y="1109556"/>
             <a:ext cx="3429000" cy="777240"/>
           </a:xfrm>
           <a:prstGeom prst="rect">
@@ -6335,13 +4621,19 @@
       </p:sp>
       <p:sp>
         <p:nvSpPr>
-          <p:cNvPr id="20" name="Shape 18"/>
-          <p:cNvSpPr/>
-          <p:nvPr/>
-        </p:nvSpPr>
-        <p:spPr>
-          <a:xfrm>
-            <a:off x="4846320" y="2286000"/>
+          <p:cNvPr id="44" name="Shape 18">
+            <a:extLst>
+              <a:ext uri="{FF2B5EF4-FFF2-40B4-BE49-F238E27FC236}">
+                <a16:creationId xmlns:a16="http://schemas.microsoft.com/office/drawing/2014/main" id="{1829AEF9-412E-A245-B7AA-34BCCBEA3E32}"/>
+              </a:ext>
+            </a:extLst>
+          </p:cNvPr>
+          <p:cNvSpPr/>
+          <p:nvPr/>
+        </p:nvSpPr>
+        <p:spPr>
+          <a:xfrm>
+            <a:off x="4827909" y="2057404"/>
             <a:ext cx="4114800" cy="777240"/>
           </a:xfrm>
           <a:prstGeom prst="rect">
@@ -6374,13 +4666,19 @@
       </p:sp>
       <p:sp>
         <p:nvSpPr>
-          <p:cNvPr id="21" name="Shape 19"/>
-          <p:cNvSpPr/>
-          <p:nvPr/>
-        </p:nvSpPr>
-        <p:spPr>
-          <a:xfrm>
-            <a:off x="4846320" y="2286000"/>
+          <p:cNvPr id="45" name="Shape 19">
+            <a:extLst>
+              <a:ext uri="{FF2B5EF4-FFF2-40B4-BE49-F238E27FC236}">
+                <a16:creationId xmlns:a16="http://schemas.microsoft.com/office/drawing/2014/main" id="{A2705A9D-7F68-CBFB-E052-4269CBDC6C88}"/>
+              </a:ext>
+            </a:extLst>
+          </p:cNvPr>
+          <p:cNvSpPr/>
+          <p:nvPr/>
+        </p:nvSpPr>
+        <p:spPr>
+          <a:xfrm>
+            <a:off x="4827909" y="2057404"/>
             <a:ext cx="502920" cy="777240"/>
           </a:xfrm>
           <a:prstGeom prst="rect">
@@ -6406,13 +4704,19 @@
       </p:sp>
       <p:sp>
         <p:nvSpPr>
-          <p:cNvPr id="22" name="Text 20"/>
-          <p:cNvSpPr/>
-          <p:nvPr/>
-        </p:nvSpPr>
-        <p:spPr>
-          <a:xfrm>
-            <a:off x="4846320" y="2286000"/>
+          <p:cNvPr id="46" name="Text 20">
+            <a:extLst>
+              <a:ext uri="{FF2B5EF4-FFF2-40B4-BE49-F238E27FC236}">
+                <a16:creationId xmlns:a16="http://schemas.microsoft.com/office/drawing/2014/main" id="{6021C24C-5F04-D720-7408-4F2C1562C531}"/>
+              </a:ext>
+            </a:extLst>
+          </p:cNvPr>
+          <p:cNvSpPr/>
+          <p:nvPr/>
+        </p:nvSpPr>
+        <p:spPr>
+          <a:xfrm>
+            <a:off x="4827909" y="2057404"/>
             <a:ext cx="502920" cy="777240"/>
           </a:xfrm>
           <a:prstGeom prst="rect">
@@ -6434,7 +4738,7 @@
                   <a:srgbClr val="0D1B2A"/>
                 </a:solidFill>
               </a:rPr>
-              <a:t>05</a:t>
+              <a:t>06</a:t>
             </a:r>
             <a:endParaRPr lang="en-US" sz="1300" dirty="0"/>
           </a:p>
@@ -6442,13 +4746,19 @@
       </p:sp>
       <p:sp>
         <p:nvSpPr>
-          <p:cNvPr id="23" name="Text 21"/>
-          <p:cNvSpPr/>
-          <p:nvPr/>
-        </p:nvSpPr>
-        <p:spPr>
-          <a:xfrm>
-            <a:off x="5440680" y="2286000"/>
+          <p:cNvPr id="47" name="Text 21">
+            <a:extLst>
+              <a:ext uri="{FF2B5EF4-FFF2-40B4-BE49-F238E27FC236}">
+                <a16:creationId xmlns:a16="http://schemas.microsoft.com/office/drawing/2014/main" id="{F24361E4-E911-1ED1-E316-129B57614FF8}"/>
+              </a:ext>
+            </a:extLst>
+          </p:cNvPr>
+          <p:cNvSpPr/>
+          <p:nvPr/>
+        </p:nvSpPr>
+        <p:spPr>
+          <a:xfrm>
+            <a:off x="5422269" y="2057404"/>
             <a:ext cx="3429000" cy="777240"/>
           </a:xfrm>
           <a:prstGeom prst="rect">
@@ -6470,7 +4780,7 @@
                   <a:srgbClr val="FFFFFF"/>
                 </a:solidFill>
               </a:rPr>
-              <a:t>Arquitetura</a:t>
+              <a:t>Arquitectura</a:t>
             </a:r>
             <a:r>
               <a:rPr lang="en-US" sz="1300" dirty="0">
@@ -6486,13 +4796,19 @@
       </p:sp>
       <p:sp>
         <p:nvSpPr>
-          <p:cNvPr id="24" name="Shape 22"/>
-          <p:cNvSpPr/>
-          <p:nvPr/>
-        </p:nvSpPr>
-        <p:spPr>
-          <a:xfrm>
-            <a:off x="4846320" y="3429000"/>
+          <p:cNvPr id="48" name="Shape 22">
+            <a:extLst>
+              <a:ext uri="{FF2B5EF4-FFF2-40B4-BE49-F238E27FC236}">
+                <a16:creationId xmlns:a16="http://schemas.microsoft.com/office/drawing/2014/main" id="{8D28D6F0-EFDC-E664-A186-D1A5173E1B76}"/>
+              </a:ext>
+            </a:extLst>
+          </p:cNvPr>
+          <p:cNvSpPr/>
+          <p:nvPr/>
+        </p:nvSpPr>
+        <p:spPr>
+          <a:xfrm>
+            <a:off x="4827909" y="4024280"/>
             <a:ext cx="4114800" cy="777240"/>
           </a:xfrm>
           <a:prstGeom prst="rect">
@@ -6519,19 +4835,25 @@
           <a:bodyPr/>
           <a:lstStyle/>
           <a:p>
-            <a:endParaRPr lang="pt-PT" dirty="0"/>
-          </a:p>
-        </p:txBody>
-      </p:sp>
-      <p:sp>
-        <p:nvSpPr>
-          <p:cNvPr id="25" name="Shape 23"/>
-          <p:cNvSpPr/>
-          <p:nvPr/>
-        </p:nvSpPr>
-        <p:spPr>
-          <a:xfrm>
-            <a:off x="4846320" y="3429000"/>
+            <a:endParaRPr lang="pt-PT"/>
+          </a:p>
+        </p:txBody>
+      </p:sp>
+      <p:sp>
+        <p:nvSpPr>
+          <p:cNvPr id="49" name="Shape 23">
+            <a:extLst>
+              <a:ext uri="{FF2B5EF4-FFF2-40B4-BE49-F238E27FC236}">
+                <a16:creationId xmlns:a16="http://schemas.microsoft.com/office/drawing/2014/main" id="{7B635ADC-FEE0-B500-7AE4-FD0E08514288}"/>
+              </a:ext>
+            </a:extLst>
+          </p:cNvPr>
+          <p:cNvSpPr/>
+          <p:nvPr/>
+        </p:nvSpPr>
+        <p:spPr>
+          <a:xfrm>
+            <a:off x="4827909" y="4024280"/>
             <a:ext cx="502920" cy="777240"/>
           </a:xfrm>
           <a:prstGeom prst="rect">
@@ -6557,13 +4879,19 @@
       </p:sp>
       <p:sp>
         <p:nvSpPr>
-          <p:cNvPr id="26" name="Text 24"/>
-          <p:cNvSpPr/>
-          <p:nvPr/>
-        </p:nvSpPr>
-        <p:spPr>
-          <a:xfrm>
-            <a:off x="4846320" y="3429000"/>
+          <p:cNvPr id="50" name="Text 24">
+            <a:extLst>
+              <a:ext uri="{FF2B5EF4-FFF2-40B4-BE49-F238E27FC236}">
+                <a16:creationId xmlns:a16="http://schemas.microsoft.com/office/drawing/2014/main" id="{CCA247E0-6616-55EC-45BF-88AD57C14D38}"/>
+              </a:ext>
+            </a:extLst>
+          </p:cNvPr>
+          <p:cNvSpPr/>
+          <p:nvPr/>
+        </p:nvSpPr>
+        <p:spPr>
+          <a:xfrm>
+            <a:off x="4827909" y="4024280"/>
             <a:ext cx="502920" cy="777240"/>
           </a:xfrm>
           <a:prstGeom prst="rect">
@@ -6585,7 +4913,7 @@
                   <a:srgbClr val="0D1B2A"/>
                 </a:solidFill>
               </a:rPr>
-              <a:t>06</a:t>
+              <a:t>08</a:t>
             </a:r>
             <a:endParaRPr lang="en-US" sz="1300" dirty="0"/>
           </a:p>
@@ -6593,13 +4921,19 @@
       </p:sp>
       <p:sp>
         <p:nvSpPr>
-          <p:cNvPr id="27" name="Text 25"/>
-          <p:cNvSpPr/>
-          <p:nvPr/>
-        </p:nvSpPr>
-        <p:spPr>
-          <a:xfrm>
-            <a:off x="5440680" y="3429000"/>
+          <p:cNvPr id="51" name="Text 25">
+            <a:extLst>
+              <a:ext uri="{FF2B5EF4-FFF2-40B4-BE49-F238E27FC236}">
+                <a16:creationId xmlns:a16="http://schemas.microsoft.com/office/drawing/2014/main" id="{6FE51697-02E0-5D0B-80EF-91352481EAF8}"/>
+              </a:ext>
+            </a:extLst>
+          </p:cNvPr>
+          <p:cNvSpPr/>
+          <p:nvPr/>
+        </p:nvSpPr>
+        <p:spPr>
+          <a:xfrm>
+            <a:off x="5422269" y="4024280"/>
             <a:ext cx="3429000" cy="777240"/>
           </a:xfrm>
           <a:prstGeom prst="rect">
@@ -6622,6 +4956,388 @@
                 </a:solidFill>
               </a:rPr>
               <a:t>Conclusión</a:t>
+            </a:r>
+            <a:endParaRPr lang="en-US" sz="1300" dirty="0"/>
+          </a:p>
+        </p:txBody>
+      </p:sp>
+      <p:sp>
+        <p:nvSpPr>
+          <p:cNvPr id="52" name="Shape 2">
+            <a:extLst>
+              <a:ext uri="{FF2B5EF4-FFF2-40B4-BE49-F238E27FC236}">
+                <a16:creationId xmlns:a16="http://schemas.microsoft.com/office/drawing/2014/main" id="{44CD7DD7-E699-E88F-AA89-C0652D75B1F1}"/>
+              </a:ext>
+            </a:extLst>
+          </p:cNvPr>
+          <p:cNvSpPr/>
+          <p:nvPr/>
+        </p:nvSpPr>
+        <p:spPr>
+          <a:xfrm>
+            <a:off x="457200" y="1109556"/>
+            <a:ext cx="4114800" cy="777240"/>
+          </a:xfrm>
+          <a:prstGeom prst="rect">
+            <a:avLst/>
+          </a:prstGeom>
+          <a:solidFill>
+            <a:srgbClr val="112236"/>
+          </a:solidFill>
+          <a:ln w="12700">
+            <a:solidFill>
+              <a:srgbClr val="1B6CA8"/>
+            </a:solidFill>
+            <a:prstDash val="solid"/>
+          </a:ln>
+          <a:effectLst>
+            <a:outerShdw blurRad="101600" dist="38100" dir="8100000" algn="bl" rotWithShape="0">
+              <a:srgbClr val="000000">
+                <a:alpha val="18000"/>
+              </a:srgbClr>
+            </a:outerShdw>
+          </a:effectLst>
+        </p:spPr>
+        <p:txBody>
+          <a:bodyPr/>
+          <a:lstStyle/>
+          <a:p>
+            <a:endParaRPr lang="pt-PT"/>
+          </a:p>
+        </p:txBody>
+      </p:sp>
+      <p:sp>
+        <p:nvSpPr>
+          <p:cNvPr id="53" name="Shape 3">
+            <a:extLst>
+              <a:ext uri="{FF2B5EF4-FFF2-40B4-BE49-F238E27FC236}">
+                <a16:creationId xmlns:a16="http://schemas.microsoft.com/office/drawing/2014/main" id="{6988D20E-F6EF-979E-2E14-F3E9C1F964F4}"/>
+              </a:ext>
+            </a:extLst>
+          </p:cNvPr>
+          <p:cNvSpPr/>
+          <p:nvPr/>
+        </p:nvSpPr>
+        <p:spPr>
+          <a:xfrm>
+            <a:off x="457200" y="1109556"/>
+            <a:ext cx="502920" cy="777240"/>
+          </a:xfrm>
+          <a:prstGeom prst="rect">
+            <a:avLst/>
+          </a:prstGeom>
+          <a:solidFill>
+            <a:srgbClr val="00D4AA"/>
+          </a:solidFill>
+          <a:ln w="12700">
+            <a:solidFill>
+              <a:srgbClr val="00D4AA"/>
+            </a:solidFill>
+            <a:prstDash val="solid"/>
+          </a:ln>
+        </p:spPr>
+        <p:txBody>
+          <a:bodyPr/>
+          <a:lstStyle/>
+          <a:p>
+            <a:endParaRPr lang="pt-PT"/>
+          </a:p>
+        </p:txBody>
+      </p:sp>
+      <p:sp>
+        <p:nvSpPr>
+          <p:cNvPr id="54" name="Text 4">
+            <a:extLst>
+              <a:ext uri="{FF2B5EF4-FFF2-40B4-BE49-F238E27FC236}">
+                <a16:creationId xmlns:a16="http://schemas.microsoft.com/office/drawing/2014/main" id="{5EB00533-9653-8E07-F14F-22C36C1DDA61}"/>
+              </a:ext>
+            </a:extLst>
+          </p:cNvPr>
+          <p:cNvSpPr/>
+          <p:nvPr/>
+        </p:nvSpPr>
+        <p:spPr>
+          <a:xfrm>
+            <a:off x="457200" y="1109556"/>
+            <a:ext cx="502920" cy="777240"/>
+          </a:xfrm>
+          <a:prstGeom prst="rect">
+            <a:avLst/>
+          </a:prstGeom>
+          <a:noFill/>
+          <a:ln/>
+        </p:spPr>
+        <p:txBody>
+          <a:bodyPr wrap="square" lIns="0" tIns="0" rIns="0" bIns="0" rtlCol="0" anchor="ctr"/>
+          <a:lstStyle/>
+          <a:p>
+            <a:pPr marL="0" indent="0" algn="ctr">
+              <a:buNone/>
+            </a:pPr>
+            <a:r>
+              <a:rPr lang="en-US" sz="1300" b="1" dirty="0">
+                <a:solidFill>
+                  <a:srgbClr val="0D1B2A"/>
+                </a:solidFill>
+              </a:rPr>
+              <a:t>01</a:t>
+            </a:r>
+            <a:endParaRPr lang="en-US" sz="1300" dirty="0"/>
+          </a:p>
+        </p:txBody>
+      </p:sp>
+      <p:sp>
+        <p:nvSpPr>
+          <p:cNvPr id="55" name="Text 5">
+            <a:extLst>
+              <a:ext uri="{FF2B5EF4-FFF2-40B4-BE49-F238E27FC236}">
+                <a16:creationId xmlns:a16="http://schemas.microsoft.com/office/drawing/2014/main" id="{58263B8A-E003-8650-0B46-989205DEFA6E}"/>
+              </a:ext>
+            </a:extLst>
+          </p:cNvPr>
+          <p:cNvSpPr/>
+          <p:nvPr/>
+        </p:nvSpPr>
+        <p:spPr>
+          <a:xfrm>
+            <a:off x="1051560" y="1109556"/>
+            <a:ext cx="3429000" cy="777240"/>
+          </a:xfrm>
+          <a:prstGeom prst="rect">
+            <a:avLst/>
+          </a:prstGeom>
+          <a:noFill/>
+          <a:ln/>
+        </p:spPr>
+        <p:txBody>
+          <a:bodyPr wrap="square" lIns="0" tIns="0" rIns="0" bIns="0" rtlCol="0" anchor="ctr"/>
+          <a:lstStyle/>
+          <a:p>
+            <a:pPr marL="0" indent="0">
+              <a:buNone/>
+            </a:pPr>
+            <a:r>
+              <a:rPr lang="en-US" sz="1400" dirty="0" err="1">
+                <a:solidFill>
+                  <a:srgbClr val="FFFFFF"/>
+                </a:solidFill>
+              </a:rPr>
+              <a:t>Problema</a:t>
+            </a:r>
+            <a:r>
+              <a:rPr lang="en-US" sz="1400" dirty="0">
+                <a:solidFill>
+                  <a:srgbClr val="FFFFFF"/>
+                </a:solidFill>
+              </a:rPr>
+              <a:t> real </a:t>
+            </a:r>
+            <a:r>
+              <a:rPr lang="en-US" sz="1400" dirty="0" err="1">
+                <a:solidFill>
+                  <a:srgbClr val="FFFFFF"/>
+                </a:solidFill>
+              </a:rPr>
+              <a:t>en</a:t>
+            </a:r>
+            <a:r>
+              <a:rPr lang="en-US" sz="1400" dirty="0">
+                <a:solidFill>
+                  <a:srgbClr val="FFFFFF"/>
+                </a:solidFill>
+              </a:rPr>
+              <a:t> </a:t>
+            </a:r>
+            <a:r>
+              <a:rPr lang="en-US" sz="1400" dirty="0" err="1">
+                <a:solidFill>
+                  <a:srgbClr val="FFFFFF"/>
+                </a:solidFill>
+              </a:rPr>
+              <a:t>microservicios</a:t>
+            </a:r>
+            <a:endParaRPr lang="en-US" sz="1300" dirty="0"/>
+          </a:p>
+        </p:txBody>
+      </p:sp>
+      <p:sp>
+        <p:nvSpPr>
+          <p:cNvPr id="56" name="Shape 22">
+            <a:extLst>
+              <a:ext uri="{FF2B5EF4-FFF2-40B4-BE49-F238E27FC236}">
+                <a16:creationId xmlns:a16="http://schemas.microsoft.com/office/drawing/2014/main" id="{79CB49B1-E6D3-9179-EFE8-681D65007FAC}"/>
+              </a:ext>
+            </a:extLst>
+          </p:cNvPr>
+          <p:cNvSpPr/>
+          <p:nvPr/>
+        </p:nvSpPr>
+        <p:spPr>
+          <a:xfrm>
+            <a:off x="4827909" y="3040842"/>
+            <a:ext cx="4114800" cy="777240"/>
+          </a:xfrm>
+          <a:prstGeom prst="rect">
+            <a:avLst/>
+          </a:prstGeom>
+          <a:solidFill>
+            <a:srgbClr val="112236"/>
+          </a:solidFill>
+          <a:ln w="12700">
+            <a:solidFill>
+              <a:srgbClr val="1B6CA8"/>
+            </a:solidFill>
+            <a:prstDash val="solid"/>
+          </a:ln>
+          <a:effectLst>
+            <a:outerShdw blurRad="101600" dist="38100" dir="8100000" algn="bl" rotWithShape="0">
+              <a:srgbClr val="000000">
+                <a:alpha val="18000"/>
+              </a:srgbClr>
+            </a:outerShdw>
+          </a:effectLst>
+        </p:spPr>
+        <p:txBody>
+          <a:bodyPr/>
+          <a:lstStyle/>
+          <a:p>
+            <a:endParaRPr lang="pt-PT"/>
+          </a:p>
+        </p:txBody>
+      </p:sp>
+      <p:sp>
+        <p:nvSpPr>
+          <p:cNvPr id="57" name="Shape 23">
+            <a:extLst>
+              <a:ext uri="{FF2B5EF4-FFF2-40B4-BE49-F238E27FC236}">
+                <a16:creationId xmlns:a16="http://schemas.microsoft.com/office/drawing/2014/main" id="{18A42155-1F12-8E2F-D7E3-65FFE5086CC6}"/>
+              </a:ext>
+            </a:extLst>
+          </p:cNvPr>
+          <p:cNvSpPr/>
+          <p:nvPr/>
+        </p:nvSpPr>
+        <p:spPr>
+          <a:xfrm>
+            <a:off x="4827909" y="3040842"/>
+            <a:ext cx="502920" cy="777240"/>
+          </a:xfrm>
+          <a:prstGeom prst="rect">
+            <a:avLst/>
+          </a:prstGeom>
+          <a:solidFill>
+            <a:srgbClr val="00D4AA"/>
+          </a:solidFill>
+          <a:ln w="12700">
+            <a:solidFill>
+              <a:srgbClr val="00D4AA"/>
+            </a:solidFill>
+            <a:prstDash val="solid"/>
+          </a:ln>
+        </p:spPr>
+        <p:txBody>
+          <a:bodyPr/>
+          <a:lstStyle/>
+          <a:p>
+            <a:endParaRPr lang="pt-PT"/>
+          </a:p>
+        </p:txBody>
+      </p:sp>
+      <p:sp>
+        <p:nvSpPr>
+          <p:cNvPr id="58" name="Text 24">
+            <a:extLst>
+              <a:ext uri="{FF2B5EF4-FFF2-40B4-BE49-F238E27FC236}">
+                <a16:creationId xmlns:a16="http://schemas.microsoft.com/office/drawing/2014/main" id="{DCB8041F-C709-2450-3172-D924EE1FC9B7}"/>
+              </a:ext>
+            </a:extLst>
+          </p:cNvPr>
+          <p:cNvSpPr/>
+          <p:nvPr/>
+        </p:nvSpPr>
+        <p:spPr>
+          <a:xfrm>
+            <a:off x="4827909" y="3040842"/>
+            <a:ext cx="502920" cy="777240"/>
+          </a:xfrm>
+          <a:prstGeom prst="rect">
+            <a:avLst/>
+          </a:prstGeom>
+          <a:noFill/>
+          <a:ln/>
+        </p:spPr>
+        <p:txBody>
+          <a:bodyPr wrap="square" lIns="0" tIns="0" rIns="0" bIns="0" rtlCol="0" anchor="ctr"/>
+          <a:lstStyle/>
+          <a:p>
+            <a:pPr marL="0" indent="0" algn="ctr">
+              <a:buNone/>
+            </a:pPr>
+            <a:r>
+              <a:rPr lang="en-US" sz="1300" b="1" dirty="0">
+                <a:solidFill>
+                  <a:srgbClr val="0D1B2A"/>
+                </a:solidFill>
+              </a:rPr>
+              <a:t>07</a:t>
+            </a:r>
+            <a:endParaRPr lang="en-US" sz="1300" dirty="0"/>
+          </a:p>
+        </p:txBody>
+      </p:sp>
+      <p:sp>
+        <p:nvSpPr>
+          <p:cNvPr id="59" name="Text 25">
+            <a:extLst>
+              <a:ext uri="{FF2B5EF4-FFF2-40B4-BE49-F238E27FC236}">
+                <a16:creationId xmlns:a16="http://schemas.microsoft.com/office/drawing/2014/main" id="{405F20EA-B11E-B0AB-F09B-65C5973322E6}"/>
+              </a:ext>
+            </a:extLst>
+          </p:cNvPr>
+          <p:cNvSpPr/>
+          <p:nvPr/>
+        </p:nvSpPr>
+        <p:spPr>
+          <a:xfrm>
+            <a:off x="5422269" y="3040842"/>
+            <a:ext cx="3429000" cy="777240"/>
+          </a:xfrm>
+          <a:prstGeom prst="rect">
+            <a:avLst/>
+          </a:prstGeom>
+          <a:noFill/>
+          <a:ln/>
+        </p:spPr>
+        <p:txBody>
+          <a:bodyPr wrap="square" lIns="0" tIns="0" rIns="0" bIns="0" rtlCol="0" anchor="ctr"/>
+          <a:lstStyle/>
+          <a:p>
+            <a:pPr marL="0" indent="0">
+              <a:buNone/>
+            </a:pPr>
+            <a:r>
+              <a:rPr lang="en-US" sz="1300" dirty="0" err="1">
+                <a:solidFill>
+                  <a:srgbClr val="FFFFFF"/>
+                </a:solidFill>
+              </a:rPr>
+              <a:t>Flujo</a:t>
+            </a:r>
+            <a:r>
+              <a:rPr lang="en-US" sz="1300" dirty="0">
+                <a:solidFill>
+                  <a:srgbClr val="FFFFFF"/>
+                </a:solidFill>
+              </a:rPr>
+              <a:t> de </a:t>
+            </a:r>
+            <a:r>
+              <a:rPr lang="en-US" sz="1300" dirty="0" err="1">
+                <a:solidFill>
+                  <a:srgbClr val="FFFFFF"/>
+                </a:solidFill>
+              </a:rPr>
+              <a:t>Ejecución</a:t>
             </a:r>
             <a:endParaRPr lang="en-US" sz="1300" dirty="0"/>
           </a:p>
@@ -6636,6 +5352,411 @@
 </file>
 
 <file path=ppt/slides/slide3.xml><?xml version="1.0" encoding="utf-8"?>
+<p:sld xmlns:a="http://schemas.openxmlformats.org/drawingml/2006/main" xmlns:r="http://schemas.openxmlformats.org/officeDocument/2006/relationships" xmlns:p="http://schemas.openxmlformats.org/presentationml/2006/main">
+  <p:cSld>
+    <p:spTree>
+      <p:nvGrpSpPr>
+        <p:cNvPr id="1" name=""/>
+        <p:cNvGrpSpPr/>
+        <p:nvPr/>
+      </p:nvGrpSpPr>
+      <p:grpSpPr>
+        <a:xfrm>
+          <a:off x="0" y="0"/>
+          <a:ext cx="0" cy="0"/>
+          <a:chOff x="0" y="0"/>
+          <a:chExt cx="0" cy="0"/>
+        </a:xfrm>
+      </p:grpSpPr>
+      <p:sp>
+        <p:nvSpPr>
+          <p:cNvPr id="26" name="Shape 3">
+            <a:extLst>
+              <a:ext uri="{FF2B5EF4-FFF2-40B4-BE49-F238E27FC236}">
+                <a16:creationId xmlns:a16="http://schemas.microsoft.com/office/drawing/2014/main" id="{55CD4805-F19C-31F2-A9D5-965B2ACEE397}"/>
+              </a:ext>
+            </a:extLst>
+          </p:cNvPr>
+          <p:cNvSpPr/>
+          <p:nvPr/>
+        </p:nvSpPr>
+        <p:spPr>
+          <a:xfrm>
+            <a:off x="296342" y="1029778"/>
+            <a:ext cx="3818458" cy="457200"/>
+          </a:xfrm>
+          <a:prstGeom prst="rect">
+            <a:avLst/>
+          </a:prstGeom>
+          <a:solidFill>
+            <a:srgbClr val="00D4AA"/>
+          </a:solidFill>
+          <a:ln w="12700">
+            <a:solidFill>
+              <a:srgbClr val="00D4AA"/>
+            </a:solidFill>
+            <a:prstDash val="solid"/>
+          </a:ln>
+        </p:spPr>
+        <p:txBody>
+          <a:bodyPr/>
+          <a:lstStyle/>
+          <a:p>
+            <a:endParaRPr lang="pt-PT" dirty="0"/>
+          </a:p>
+        </p:txBody>
+      </p:sp>
+      <p:sp>
+        <p:nvSpPr>
+          <p:cNvPr id="2" name="Shape 0"/>
+          <p:cNvSpPr/>
+          <p:nvPr/>
+        </p:nvSpPr>
+        <p:spPr>
+          <a:xfrm>
+            <a:off x="0" y="0"/>
+            <a:ext cx="9144000" cy="822960"/>
+          </a:xfrm>
+          <a:prstGeom prst="rect">
+            <a:avLst/>
+          </a:prstGeom>
+          <a:solidFill>
+            <a:srgbClr val="1B6CA8"/>
+          </a:solidFill>
+          <a:ln w="12700">
+            <a:solidFill>
+              <a:srgbClr val="1B6CA8"/>
+            </a:solidFill>
+            <a:prstDash val="solid"/>
+          </a:ln>
+        </p:spPr>
+        <p:txBody>
+          <a:bodyPr/>
+          <a:lstStyle/>
+          <a:p>
+            <a:endParaRPr lang="pt-PT"/>
+          </a:p>
+        </p:txBody>
+      </p:sp>
+      <p:sp>
+        <p:nvSpPr>
+          <p:cNvPr id="3" name="Text 1"/>
+          <p:cNvSpPr/>
+          <p:nvPr/>
+        </p:nvSpPr>
+        <p:spPr>
+          <a:xfrm>
+            <a:off x="457200" y="0"/>
+            <a:ext cx="8229600" cy="822960"/>
+          </a:xfrm>
+          <a:prstGeom prst="rect">
+            <a:avLst/>
+          </a:prstGeom>
+          <a:noFill/>
+          <a:ln/>
+        </p:spPr>
+        <p:txBody>
+          <a:bodyPr wrap="square" lIns="0" tIns="0" rIns="0" bIns="0" rtlCol="0" anchor="ctr"/>
+          <a:lstStyle/>
+          <a:p>
+            <a:pPr marL="0" indent="0">
+              <a:buNone/>
+            </a:pPr>
+            <a:r>
+              <a:rPr lang="en-US" sz="2400" b="1" dirty="0">
+                <a:solidFill>
+                  <a:srgbClr val="FFFFFF"/>
+                </a:solidFill>
+              </a:rPr>
+              <a:t>01  / </a:t>
+            </a:r>
+            <a:r>
+              <a:rPr lang="en-US" sz="2400" b="1" dirty="0" err="1">
+                <a:solidFill>
+                  <a:srgbClr val="FFFFFF"/>
+                </a:solidFill>
+              </a:rPr>
+              <a:t>Problema</a:t>
+            </a:r>
+            <a:r>
+              <a:rPr lang="en-US" sz="2400" b="1" dirty="0">
+                <a:solidFill>
+                  <a:srgbClr val="FFFFFF"/>
+                </a:solidFill>
+              </a:rPr>
+              <a:t> real </a:t>
+            </a:r>
+            <a:r>
+              <a:rPr lang="en-US" sz="2400" b="1" dirty="0" err="1">
+                <a:solidFill>
+                  <a:srgbClr val="FFFFFF"/>
+                </a:solidFill>
+              </a:rPr>
+              <a:t>en</a:t>
+            </a:r>
+            <a:r>
+              <a:rPr lang="en-US" sz="2400" b="1" dirty="0">
+                <a:solidFill>
+                  <a:srgbClr val="FFFFFF"/>
+                </a:solidFill>
+              </a:rPr>
+              <a:t> </a:t>
+            </a:r>
+            <a:r>
+              <a:rPr lang="en-US" sz="2400" b="1" dirty="0" err="1">
+                <a:solidFill>
+                  <a:srgbClr val="FFFFFF"/>
+                </a:solidFill>
+              </a:rPr>
+              <a:t>microservicios</a:t>
+            </a:r>
+            <a:endParaRPr lang="en-US" sz="2400" dirty="0"/>
+          </a:p>
+        </p:txBody>
+      </p:sp>
+      <p:sp>
+        <p:nvSpPr>
+          <p:cNvPr id="4" name="Shape 2"/>
+          <p:cNvSpPr/>
+          <p:nvPr/>
+        </p:nvSpPr>
+        <p:spPr>
+          <a:xfrm>
+            <a:off x="296342" y="1488239"/>
+            <a:ext cx="3818458" cy="1132223"/>
+          </a:xfrm>
+          <a:prstGeom prst="rect">
+            <a:avLst/>
+          </a:prstGeom>
+          <a:solidFill>
+            <a:srgbClr val="112236"/>
+          </a:solidFill>
+          <a:ln w="25400">
+            <a:solidFill>
+              <a:srgbClr val="00D4AA"/>
+            </a:solidFill>
+            <a:prstDash val="solid"/>
+          </a:ln>
+          <a:effectLst>
+            <a:outerShdw blurRad="101600" dist="38100" dir="8100000" algn="bl" rotWithShape="0">
+              <a:srgbClr val="000000">
+                <a:alpha val="18000"/>
+              </a:srgbClr>
+            </a:outerShdw>
+          </a:effectLst>
+        </p:spPr>
+        <p:txBody>
+          <a:bodyPr/>
+          <a:lstStyle/>
+          <a:p>
+            <a:endParaRPr lang="pt-PT"/>
+          </a:p>
+        </p:txBody>
+      </p:sp>
+      <p:sp>
+        <p:nvSpPr>
+          <p:cNvPr id="25" name="Text 3">
+            <a:extLst>
+              <a:ext uri="{FF2B5EF4-FFF2-40B4-BE49-F238E27FC236}">
+                <a16:creationId xmlns:a16="http://schemas.microsoft.com/office/drawing/2014/main" id="{3C112B80-1565-C23F-AECD-9BD6AE8FE229}"/>
+              </a:ext>
+            </a:extLst>
+          </p:cNvPr>
+          <p:cNvSpPr/>
+          <p:nvPr/>
+        </p:nvSpPr>
+        <p:spPr>
+          <a:xfrm>
+            <a:off x="457200" y="1595604"/>
+            <a:ext cx="3254644" cy="834613"/>
+          </a:xfrm>
+          <a:prstGeom prst="rect">
+            <a:avLst/>
+          </a:prstGeom>
+          <a:noFill/>
+          <a:ln/>
+        </p:spPr>
+        <p:txBody>
+          <a:bodyPr wrap="square" rtlCol="0" anchor="ctr"/>
+          <a:lstStyle/>
+          <a:p>
+            <a:r>
+              <a:rPr lang="en-US" sz="1400" i="1" dirty="0" err="1">
+                <a:solidFill>
+                  <a:srgbClr val="FFFFFF"/>
+                </a:solidFill>
+              </a:rPr>
+              <a:t>Procesamiento</a:t>
+            </a:r>
+            <a:r>
+              <a:rPr lang="en-US" sz="1400" i="1" dirty="0">
+                <a:solidFill>
+                  <a:srgbClr val="FFFFFF"/>
+                </a:solidFill>
+              </a:rPr>
+              <a:t> de </a:t>
+            </a:r>
+            <a:r>
+              <a:rPr lang="en-US" sz="1400" i="1" dirty="0" err="1">
+                <a:solidFill>
+                  <a:srgbClr val="FFFFFF"/>
+                </a:solidFill>
+              </a:rPr>
+              <a:t>pedidos</a:t>
+            </a:r>
+            <a:endParaRPr lang="en-US" sz="1400" i="1" dirty="0">
+              <a:solidFill>
+                <a:srgbClr val="FFFFFF"/>
+              </a:solidFill>
+            </a:endParaRPr>
+          </a:p>
+          <a:p>
+            <a:pPr marL="285750" indent="-285750">
+              <a:buFont typeface="Wingdings" pitchFamily="2" charset="2"/>
+              <a:buChar char="Ø"/>
+            </a:pPr>
+            <a:r>
+              <a:rPr lang="en-US" sz="1400" i="1" dirty="0" err="1">
+                <a:solidFill>
+                  <a:srgbClr val="FFFFFF"/>
+                </a:solidFill>
+              </a:rPr>
+              <a:t>Reservar</a:t>
+            </a:r>
+            <a:r>
+              <a:rPr lang="en-US" sz="1400" i="1" dirty="0">
+                <a:solidFill>
+                  <a:srgbClr val="FFFFFF"/>
+                </a:solidFill>
+              </a:rPr>
+              <a:t> Stock</a:t>
+            </a:r>
+          </a:p>
+          <a:p>
+            <a:pPr marL="285750" indent="-285750">
+              <a:buFont typeface="Wingdings" pitchFamily="2" charset="2"/>
+              <a:buChar char="Ø"/>
+            </a:pPr>
+            <a:r>
+              <a:rPr lang="en-US" sz="1400" i="1" dirty="0">
+                <a:solidFill>
+                  <a:srgbClr val="FFFFFF"/>
+                </a:solidFill>
+              </a:rPr>
+              <a:t>Pago</a:t>
+            </a:r>
+          </a:p>
+          <a:p>
+            <a:pPr marL="285750" indent="-285750">
+              <a:buFont typeface="Wingdings" pitchFamily="2" charset="2"/>
+              <a:buChar char="Ø"/>
+            </a:pPr>
+            <a:r>
+              <a:rPr lang="en-US" sz="1400" i="1" dirty="0" err="1">
+                <a:solidFill>
+                  <a:srgbClr val="FFFFFF"/>
+                </a:solidFill>
+              </a:rPr>
+              <a:t>Enviar</a:t>
+            </a:r>
+            <a:r>
+              <a:rPr lang="en-US" sz="1400" i="1" dirty="0">
+                <a:solidFill>
+                  <a:srgbClr val="FFFFFF"/>
+                </a:solidFill>
+              </a:rPr>
+              <a:t> Email</a:t>
+            </a:r>
+          </a:p>
+        </p:txBody>
+      </p:sp>
+      <p:sp>
+        <p:nvSpPr>
+          <p:cNvPr id="28" name="CaixaDeTexto 27">
+            <a:extLst>
+              <a:ext uri="{FF2B5EF4-FFF2-40B4-BE49-F238E27FC236}">
+                <a16:creationId xmlns:a16="http://schemas.microsoft.com/office/drawing/2014/main" id="{BC8F8221-E248-C7C3-45F7-02D102595CD8}"/>
+              </a:ext>
+            </a:extLst>
+          </p:cNvPr>
+          <p:cNvSpPr txBox="1"/>
+          <p:nvPr/>
+        </p:nvSpPr>
+        <p:spPr>
+          <a:xfrm>
+            <a:off x="463857" y="1089101"/>
+            <a:ext cx="3410719" cy="307777"/>
+          </a:xfrm>
+          <a:prstGeom prst="rect">
+            <a:avLst/>
+          </a:prstGeom>
+          <a:noFill/>
+        </p:spPr>
+        <p:txBody>
+          <a:bodyPr wrap="square">
+            <a:spAutoFit/>
+          </a:bodyPr>
+          <a:lstStyle/>
+          <a:p>
+            <a:r>
+              <a:rPr lang="en-US" sz="1400" b="1" dirty="0">
+                <a:solidFill>
+                  <a:srgbClr val="0D1B2A"/>
+                </a:solidFill>
+              </a:rPr>
+              <a:t>Caso de </a:t>
+            </a:r>
+            <a:r>
+              <a:rPr lang="en-US" sz="1400" b="1" dirty="0" err="1">
+                <a:solidFill>
+                  <a:srgbClr val="0D1B2A"/>
+                </a:solidFill>
+              </a:rPr>
+              <a:t>Uso</a:t>
+            </a:r>
+            <a:endParaRPr lang="pt-PT" sz="1400" dirty="0"/>
+          </a:p>
+        </p:txBody>
+      </p:sp>
+      <p:pic>
+        <p:nvPicPr>
+          <p:cNvPr id="30" name="Imagem 29">
+            <a:extLst>
+              <a:ext uri="{FF2B5EF4-FFF2-40B4-BE49-F238E27FC236}">
+                <a16:creationId xmlns:a16="http://schemas.microsoft.com/office/drawing/2014/main" id="{DB2BB3BE-4FA4-AD70-F6B3-8482D5B837BB}"/>
+              </a:ext>
+            </a:extLst>
+          </p:cNvPr>
+          <p:cNvPicPr>
+            <a:picLocks noChangeAspect="1"/>
+          </p:cNvPicPr>
+          <p:nvPr/>
+        </p:nvPicPr>
+        <p:blipFill>
+          <a:blip r:embed="rId3"/>
+          <a:stretch>
+            <a:fillRect/>
+          </a:stretch>
+        </p:blipFill>
+        <p:spPr>
+          <a:xfrm>
+            <a:off x="4480159" y="1029778"/>
+            <a:ext cx="4347835" cy="3757014"/>
+          </a:xfrm>
+          <a:prstGeom prst="rect">
+            <a:avLst/>
+          </a:prstGeom>
+        </p:spPr>
+      </p:pic>
+    </p:spTree>
+  </p:cSld>
+  <p:clrMapOvr>
+    <a:masterClrMapping/>
+  </p:clrMapOvr>
+</p:sld>
+</file>
+
+<file path=ppt/slides/slide4.xml><?xml version="1.0" encoding="utf-8"?>
 <p:sld xmlns:a="http://schemas.openxmlformats.org/drawingml/2006/main" xmlns:r="http://schemas.openxmlformats.org/officeDocument/2006/relationships" xmlns:p="http://schemas.openxmlformats.org/presentationml/2006/main">
   <p:cSld name="Slide 3">
     <p:bg>
@@ -6779,7 +5900,7 @@
         <p:spPr>
           <a:xfrm>
             <a:off x="365760" y="960120"/>
-            <a:ext cx="8412480" cy="1371600"/>
+            <a:ext cx="8412480" cy="868680"/>
           </a:xfrm>
           <a:prstGeom prst="rect">
             <a:avLst/>
@@ -6817,8 +5938,8 @@
         </p:nvSpPr>
         <p:spPr>
           <a:xfrm>
-            <a:off x="548640" y="1005840"/>
-            <a:ext cx="8046720" cy="1280160"/>
+            <a:off x="548640" y="1024251"/>
+            <a:ext cx="8046720" cy="644990"/>
           </a:xfrm>
           <a:prstGeom prst="rect">
             <a:avLst/>
@@ -7221,7 +6342,7 @@
         </p:nvSpPr>
         <p:spPr>
           <a:xfrm>
-            <a:off x="365760" y="2606040"/>
+            <a:off x="365760" y="1992348"/>
             <a:ext cx="2651760" cy="2148840"/>
           </a:xfrm>
           <a:prstGeom prst="rect">
@@ -7260,7 +6381,7 @@
         </p:nvSpPr>
         <p:spPr>
           <a:xfrm>
-            <a:off x="365760" y="2697480"/>
+            <a:off x="365760" y="2083788"/>
             <a:ext cx="2651760" cy="502920"/>
           </a:xfrm>
           <a:prstGeom prst="rect">
@@ -7296,7 +6417,7 @@
         </p:nvSpPr>
         <p:spPr>
           <a:xfrm>
-            <a:off x="365760" y="3200400"/>
+            <a:off x="365760" y="2586708"/>
             <a:ext cx="2651760" cy="411480"/>
           </a:xfrm>
           <a:prstGeom prst="rect">
@@ -7332,7 +6453,7 @@
         </p:nvSpPr>
         <p:spPr>
           <a:xfrm>
-            <a:off x="457200" y="3611880"/>
+            <a:off x="457200" y="2998188"/>
             <a:ext cx="2468880" cy="777240"/>
           </a:xfrm>
           <a:prstGeom prst="rect">
@@ -7456,7 +6577,7 @@
         </p:nvSpPr>
         <p:spPr>
           <a:xfrm>
-            <a:off x="3200400" y="2606040"/>
+            <a:off x="3200400" y="1992348"/>
             <a:ext cx="2651760" cy="2148840"/>
           </a:xfrm>
           <a:prstGeom prst="rect">
@@ -7495,7 +6616,7 @@
         </p:nvSpPr>
         <p:spPr>
           <a:xfrm>
-            <a:off x="3200400" y="2697480"/>
+            <a:off x="3200400" y="2083788"/>
             <a:ext cx="2651760" cy="502920"/>
           </a:xfrm>
           <a:prstGeom prst="rect">
@@ -7531,7 +6652,7 @@
         </p:nvSpPr>
         <p:spPr>
           <a:xfrm>
-            <a:off x="3200400" y="3200400"/>
+            <a:off x="3200400" y="2586708"/>
             <a:ext cx="2651760" cy="411480"/>
           </a:xfrm>
           <a:prstGeom prst="rect">
@@ -7567,7 +6688,7 @@
         </p:nvSpPr>
         <p:spPr>
           <a:xfrm>
-            <a:off x="3291840" y="3611880"/>
+            <a:off x="3291840" y="2998188"/>
             <a:ext cx="2468880" cy="777240"/>
           </a:xfrm>
           <a:prstGeom prst="rect">
@@ -7691,7 +6812,7 @@
         </p:nvSpPr>
         <p:spPr>
           <a:xfrm>
-            <a:off x="6035040" y="2606040"/>
+            <a:off x="6035040" y="1992348"/>
             <a:ext cx="2651760" cy="2148840"/>
           </a:xfrm>
           <a:prstGeom prst="rect">
@@ -7730,7 +6851,7 @@
         </p:nvSpPr>
         <p:spPr>
           <a:xfrm>
-            <a:off x="6035040" y="2697480"/>
+            <a:off x="6035040" y="2083788"/>
             <a:ext cx="2651760" cy="502920"/>
           </a:xfrm>
           <a:prstGeom prst="rect">
@@ -7766,7 +6887,7 @@
         </p:nvSpPr>
         <p:spPr>
           <a:xfrm>
-            <a:off x="6035040" y="3200400"/>
+            <a:off x="6035040" y="2586708"/>
             <a:ext cx="2651760" cy="411480"/>
           </a:xfrm>
           <a:prstGeom prst="rect">
@@ -7802,7 +6923,7 @@
         </p:nvSpPr>
         <p:spPr>
           <a:xfrm>
-            <a:off x="6126480" y="3611880"/>
+            <a:off x="6126480" y="2998188"/>
             <a:ext cx="2468880" cy="777240"/>
           </a:xfrm>
           <a:prstGeom prst="rect">
@@ -7931,6 +7052,324 @@
               <a:t>.</a:t>
             </a:r>
             <a:endParaRPr lang="en-US" sz="1100" dirty="0"/>
+          </a:p>
+        </p:txBody>
+      </p:sp>
+      <p:sp>
+        <p:nvSpPr>
+          <p:cNvPr id="18" name="Shape 30">
+            <a:extLst>
+              <a:ext uri="{FF2B5EF4-FFF2-40B4-BE49-F238E27FC236}">
+                <a16:creationId xmlns:a16="http://schemas.microsoft.com/office/drawing/2014/main" id="{55B29707-CB69-26E4-4E80-C74193C5C92C}"/>
+              </a:ext>
+            </a:extLst>
+          </p:cNvPr>
+          <p:cNvSpPr/>
+          <p:nvPr/>
+        </p:nvSpPr>
+        <p:spPr>
+          <a:xfrm>
+            <a:off x="274320" y="4434840"/>
+            <a:ext cx="8595360" cy="457200"/>
+          </a:xfrm>
+          <a:prstGeom prst="rect">
+            <a:avLst/>
+          </a:prstGeom>
+          <a:solidFill>
+            <a:srgbClr val="1B6CA8"/>
+          </a:solidFill>
+          <a:ln w="12700">
+            <a:solidFill>
+              <a:srgbClr val="1B6CA8"/>
+            </a:solidFill>
+            <a:prstDash val="solid"/>
+          </a:ln>
+        </p:spPr>
+        <p:txBody>
+          <a:bodyPr/>
+          <a:lstStyle/>
+          <a:p>
+            <a:endParaRPr lang="pt-PT"/>
+          </a:p>
+        </p:txBody>
+      </p:sp>
+      <p:sp>
+        <p:nvSpPr>
+          <p:cNvPr id="19" name="Text 6">
+            <a:extLst>
+              <a:ext uri="{FF2B5EF4-FFF2-40B4-BE49-F238E27FC236}">
+                <a16:creationId xmlns:a16="http://schemas.microsoft.com/office/drawing/2014/main" id="{BDC48AF0-C0E4-6BDB-34D3-C220A5536D45}"/>
+              </a:ext>
+            </a:extLst>
+          </p:cNvPr>
+          <p:cNvSpPr/>
+          <p:nvPr/>
+        </p:nvSpPr>
+        <p:spPr>
+          <a:xfrm>
+            <a:off x="365760" y="4434841"/>
+            <a:ext cx="8503920" cy="411480"/>
+          </a:xfrm>
+          <a:prstGeom prst="rect">
+            <a:avLst/>
+          </a:prstGeom>
+          <a:noFill/>
+          <a:ln/>
+        </p:spPr>
+        <p:txBody>
+          <a:bodyPr wrap="square" rtlCol="0" anchor="ctr"/>
+          <a:lstStyle/>
+          <a:p>
+            <a:pPr marL="0" indent="0">
+              <a:buNone/>
+            </a:pPr>
+            <a:r>
+              <a:rPr lang="en-US" sz="1100" dirty="0" err="1">
+                <a:solidFill>
+                  <a:schemeClr val="bg1"/>
+                </a:solidFill>
+                <a:latin typeface="Calibri" pitchFamily="34" charset="0"/>
+                <a:ea typeface="Calibri" pitchFamily="34" charset="-122"/>
+                <a:cs typeface="Calibri" pitchFamily="34" charset="-120"/>
+              </a:rPr>
+              <a:t>Cómo</a:t>
+            </a:r>
+            <a:r>
+              <a:rPr lang="en-US" sz="1100" dirty="0">
+                <a:solidFill>
+                  <a:schemeClr val="bg1"/>
+                </a:solidFill>
+                <a:latin typeface="Calibri" pitchFamily="34" charset="0"/>
+                <a:ea typeface="Calibri" pitchFamily="34" charset="-122"/>
+                <a:cs typeface="Calibri" pitchFamily="34" charset="-120"/>
+              </a:rPr>
+              <a:t> </a:t>
+            </a:r>
+            <a:r>
+              <a:rPr lang="en-US" sz="1100" dirty="0" err="1">
+                <a:solidFill>
+                  <a:schemeClr val="bg1"/>
+                </a:solidFill>
+                <a:latin typeface="Calibri" pitchFamily="34" charset="0"/>
+                <a:ea typeface="Calibri" pitchFamily="34" charset="-122"/>
+                <a:cs typeface="Calibri" pitchFamily="34" charset="-120"/>
+              </a:rPr>
+              <a:t>crear</a:t>
+            </a:r>
+            <a:r>
+              <a:rPr lang="en-US" sz="1100" dirty="0">
+                <a:solidFill>
+                  <a:schemeClr val="bg1"/>
+                </a:solidFill>
+                <a:latin typeface="Calibri" pitchFamily="34" charset="0"/>
+                <a:ea typeface="Calibri" pitchFamily="34" charset="-122"/>
+                <a:cs typeface="Calibri" pitchFamily="34" charset="-120"/>
+              </a:rPr>
+              <a:t> </a:t>
+            </a:r>
+            <a:r>
+              <a:rPr lang="en-US" sz="1100" dirty="0" err="1">
+                <a:solidFill>
+                  <a:schemeClr val="bg1"/>
+                </a:solidFill>
+                <a:latin typeface="Calibri" pitchFamily="34" charset="0"/>
+                <a:ea typeface="Calibri" pitchFamily="34" charset="-122"/>
+                <a:cs typeface="Calibri" pitchFamily="34" charset="-120"/>
+              </a:rPr>
+              <a:t>procesos</a:t>
+            </a:r>
+            <a:r>
+              <a:rPr lang="en-US" sz="1100" dirty="0">
+                <a:solidFill>
+                  <a:schemeClr val="bg1"/>
+                </a:solidFill>
+                <a:latin typeface="Calibri" pitchFamily="34" charset="0"/>
+                <a:ea typeface="Calibri" pitchFamily="34" charset="-122"/>
+                <a:cs typeface="Calibri" pitchFamily="34" charset="-120"/>
+              </a:rPr>
+              <a:t> </a:t>
+            </a:r>
+            <a:r>
+              <a:rPr lang="en-US" sz="1100" dirty="0" err="1">
+                <a:solidFill>
+                  <a:schemeClr val="bg1"/>
+                </a:solidFill>
+                <a:latin typeface="Calibri" pitchFamily="34" charset="0"/>
+                <a:ea typeface="Calibri" pitchFamily="34" charset="-122"/>
+                <a:cs typeface="Calibri" pitchFamily="34" charset="-120"/>
+              </a:rPr>
+              <a:t>resilientes</a:t>
+            </a:r>
+            <a:r>
+              <a:rPr lang="en-US" sz="1100" dirty="0">
+                <a:solidFill>
+                  <a:schemeClr val="bg1"/>
+                </a:solidFill>
+                <a:latin typeface="Calibri" pitchFamily="34" charset="0"/>
+                <a:ea typeface="Calibri" pitchFamily="34" charset="-122"/>
+                <a:cs typeface="Calibri" pitchFamily="34" charset="-120"/>
+              </a:rPr>
+              <a:t> sin </a:t>
+            </a:r>
+            <a:r>
+              <a:rPr lang="en-US" sz="1100" dirty="0" err="1">
+                <a:solidFill>
+                  <a:schemeClr val="bg1"/>
+                </a:solidFill>
+                <a:latin typeface="Calibri" pitchFamily="34" charset="0"/>
+                <a:ea typeface="Calibri" pitchFamily="34" charset="-122"/>
+                <a:cs typeface="Calibri" pitchFamily="34" charset="-120"/>
+              </a:rPr>
+              <a:t>escribir</a:t>
+            </a:r>
+            <a:r>
+              <a:rPr lang="en-US" sz="1100" dirty="0">
+                <a:solidFill>
+                  <a:schemeClr val="bg1"/>
+                </a:solidFill>
+                <a:latin typeface="Calibri" pitchFamily="34" charset="0"/>
+                <a:ea typeface="Calibri" pitchFamily="34" charset="-122"/>
+                <a:cs typeface="Calibri" pitchFamily="34" charset="-120"/>
+              </a:rPr>
+              <a:t> </a:t>
+            </a:r>
+            <a:r>
+              <a:rPr lang="en-US" sz="1100" dirty="0" err="1">
+                <a:solidFill>
+                  <a:schemeClr val="bg1"/>
+                </a:solidFill>
+                <a:latin typeface="Calibri" pitchFamily="34" charset="0"/>
+                <a:ea typeface="Calibri" pitchFamily="34" charset="-122"/>
+                <a:cs typeface="Calibri" pitchFamily="34" charset="-120"/>
+              </a:rPr>
+              <a:t>manualmente</a:t>
+            </a:r>
+            <a:r>
+              <a:rPr lang="en-US" sz="1100" dirty="0">
+                <a:solidFill>
+                  <a:schemeClr val="bg1"/>
+                </a:solidFill>
+                <a:latin typeface="Calibri" pitchFamily="34" charset="0"/>
+                <a:ea typeface="Calibri" pitchFamily="34" charset="-122"/>
+                <a:cs typeface="Calibri" pitchFamily="34" charset="-120"/>
+              </a:rPr>
+              <a:t> la </a:t>
+            </a:r>
+            <a:r>
+              <a:rPr lang="en-US" sz="1100" dirty="0" err="1">
+                <a:solidFill>
+                  <a:schemeClr val="bg1"/>
+                </a:solidFill>
+                <a:latin typeface="Calibri" pitchFamily="34" charset="0"/>
+                <a:ea typeface="Calibri" pitchFamily="34" charset="-122"/>
+                <a:cs typeface="Calibri" pitchFamily="34" charset="-120"/>
+              </a:rPr>
+              <a:t>lógica</a:t>
+            </a:r>
+            <a:r>
+              <a:rPr lang="en-US" sz="1100" dirty="0">
+                <a:solidFill>
+                  <a:schemeClr val="bg1"/>
+                </a:solidFill>
+                <a:latin typeface="Calibri" pitchFamily="34" charset="0"/>
+                <a:ea typeface="Calibri" pitchFamily="34" charset="-122"/>
+                <a:cs typeface="Calibri" pitchFamily="34" charset="-120"/>
+              </a:rPr>
+              <a:t> de </a:t>
+            </a:r>
+            <a:r>
+              <a:rPr lang="en-US" sz="1100" dirty="0" err="1">
+                <a:solidFill>
+                  <a:schemeClr val="bg1"/>
+                </a:solidFill>
+                <a:latin typeface="Calibri" pitchFamily="34" charset="0"/>
+                <a:ea typeface="Calibri" pitchFamily="34" charset="-122"/>
+                <a:cs typeface="Calibri" pitchFamily="34" charset="-120"/>
+              </a:rPr>
+              <a:t>reintento</a:t>
+            </a:r>
+            <a:r>
+              <a:rPr lang="en-US" sz="1100" dirty="0">
+                <a:solidFill>
+                  <a:schemeClr val="bg1"/>
+                </a:solidFill>
+                <a:latin typeface="Calibri" pitchFamily="34" charset="0"/>
+                <a:ea typeface="Calibri" pitchFamily="34" charset="-122"/>
+                <a:cs typeface="Calibri" pitchFamily="34" charset="-120"/>
+              </a:rPr>
+              <a:t>, </a:t>
+            </a:r>
+            <a:r>
+              <a:rPr lang="en-US" sz="1100" dirty="0" err="1">
+                <a:solidFill>
+                  <a:schemeClr val="bg1"/>
+                </a:solidFill>
+                <a:latin typeface="Calibri" pitchFamily="34" charset="0"/>
+                <a:ea typeface="Calibri" pitchFamily="34" charset="-122"/>
+                <a:cs typeface="Calibri" pitchFamily="34" charset="-120"/>
+              </a:rPr>
+              <a:t>recuperación</a:t>
+            </a:r>
+            <a:r>
+              <a:rPr lang="en-US" sz="1100" dirty="0">
+                <a:solidFill>
+                  <a:schemeClr val="bg1"/>
+                </a:solidFill>
+                <a:latin typeface="Calibri" pitchFamily="34" charset="0"/>
+                <a:ea typeface="Calibri" pitchFamily="34" charset="-122"/>
+                <a:cs typeface="Calibri" pitchFamily="34" charset="-120"/>
+              </a:rPr>
+              <a:t> y </a:t>
+            </a:r>
+            <a:r>
+              <a:rPr lang="en-US" sz="1100" dirty="0" err="1">
+                <a:solidFill>
+                  <a:schemeClr val="bg1"/>
+                </a:solidFill>
+                <a:latin typeface="Calibri" pitchFamily="34" charset="0"/>
+                <a:ea typeface="Calibri" pitchFamily="34" charset="-122"/>
+                <a:cs typeface="Calibri" pitchFamily="34" charset="-120"/>
+              </a:rPr>
+              <a:t>gestión</a:t>
+            </a:r>
+            <a:r>
+              <a:rPr lang="en-US" sz="1100" dirty="0">
+                <a:solidFill>
+                  <a:schemeClr val="bg1"/>
+                </a:solidFill>
+                <a:latin typeface="Calibri" pitchFamily="34" charset="0"/>
+                <a:ea typeface="Calibri" pitchFamily="34" charset="-122"/>
+                <a:cs typeface="Calibri" pitchFamily="34" charset="-120"/>
+              </a:rPr>
+              <a:t> de </a:t>
+            </a:r>
+            <a:r>
+              <a:rPr lang="en-US" sz="1100" dirty="0" err="1">
+                <a:solidFill>
+                  <a:schemeClr val="bg1"/>
+                </a:solidFill>
+                <a:latin typeface="Calibri" pitchFamily="34" charset="0"/>
+                <a:ea typeface="Calibri" pitchFamily="34" charset="-122"/>
+                <a:cs typeface="Calibri" pitchFamily="34" charset="-120"/>
+              </a:rPr>
+              <a:t>estado</a:t>
+            </a:r>
+            <a:r>
+              <a:rPr lang="en-US" sz="1100" dirty="0">
+                <a:solidFill>
+                  <a:schemeClr val="bg1"/>
+                </a:solidFill>
+                <a:latin typeface="Calibri" pitchFamily="34" charset="0"/>
+                <a:ea typeface="Calibri" pitchFamily="34" charset="-122"/>
+                <a:cs typeface="Calibri" pitchFamily="34" charset="-120"/>
+              </a:rPr>
+              <a:t>.</a:t>
+            </a:r>
+            <a:endParaRPr lang="en-US" sz="1100" dirty="0">
+              <a:solidFill>
+                <a:schemeClr val="bg1"/>
+              </a:solidFill>
+            </a:endParaRPr>
           </a:p>
         </p:txBody>
       </p:sp>
@@ -7942,7 +7381,7 @@
 </p:sld>
 </file>
 
-<file path=ppt/slides/slide4.xml><?xml version="1.0" encoding="utf-8"?>
+<file path=ppt/slides/slide5.xml><?xml version="1.0" encoding="utf-8"?>
 <p:sld xmlns:a="http://schemas.openxmlformats.org/drawingml/2006/main" xmlns:r="http://schemas.openxmlformats.org/officeDocument/2006/relationships" xmlns:p="http://schemas.openxmlformats.org/presentationml/2006/main">
   <p:cSld name="Slide 4">
     <p:bg>
@@ -9375,7 +8814,7 @@
 </p:sld>
 </file>
 
-<file path=ppt/slides/slide5.xml><?xml version="1.0" encoding="utf-8"?>
+<file path=ppt/slides/slide6.xml><?xml version="1.0" encoding="utf-8"?>
 <p:sld xmlns:a="http://schemas.openxmlformats.org/drawingml/2006/main" xmlns:r="http://schemas.openxmlformats.org/officeDocument/2006/relationships" xmlns:p="http://schemas.openxmlformats.org/presentationml/2006/main">
   <p:cSld name="Slide 5">
     <p:bg>
@@ -9512,7 +8951,7 @@
                   <a:srgbClr val="FFFFFF"/>
                 </a:solidFill>
               </a:rPr>
-              <a:t>desventajas</a:t>
+              <a:t>Desventajas</a:t>
             </a:r>
             <a:endParaRPr lang="en-US" sz="2400" dirty="0"/>
           </a:p>
@@ -10400,7 +9839,7 @@
 </p:sld>
 </file>
 
-<file path=ppt/slides/slide6.xml><?xml version="1.0" encoding="utf-8"?>
+<file path=ppt/slides/slide7.xml><?xml version="1.0" encoding="utf-8"?>
 <p:sld xmlns:a="http://schemas.openxmlformats.org/drawingml/2006/main" xmlns:r="http://schemas.openxmlformats.org/officeDocument/2006/relationships" xmlns:p="http://schemas.openxmlformats.org/presentationml/2006/main">
   <p:cSld name="Slide 6">
     <p:bg>
@@ -10513,7 +9952,7 @@
                   <a:srgbClr val="FFFFFF"/>
                 </a:solidFill>
               </a:rPr>
-              <a:t>04  / </a:t>
+              <a:t>05  / </a:t>
             </a:r>
             <a:r>
               <a:rPr lang="en-US" sz="2400" b="1" dirty="0" err="1">
@@ -12770,2653 +12209,7 @@
 </p:sld>
 </file>
 
-<file path=ppt/slides/slide7.xml><?xml version="1.0" encoding="utf-8"?>
-<p:sld xmlns:a="http://schemas.openxmlformats.org/drawingml/2006/main" xmlns:r="http://schemas.openxmlformats.org/officeDocument/2006/relationships" xmlns:p="http://schemas.openxmlformats.org/presentationml/2006/main">
-  <p:cSld name="Slide 7">
-    <p:bg>
-      <p:bgPr>
-        <a:gradFill>
-          <a:gsLst>
-            <a:gs pos="0">
-              <a:schemeClr val="accent3">
-                <a:lumMod val="5000"/>
-                <a:lumOff val="95000"/>
-              </a:schemeClr>
-            </a:gs>
-            <a:gs pos="74000">
-              <a:schemeClr val="accent3">
-                <a:lumMod val="45000"/>
-                <a:lumOff val="55000"/>
-              </a:schemeClr>
-            </a:gs>
-            <a:gs pos="83000">
-              <a:schemeClr val="accent3">
-                <a:lumMod val="45000"/>
-                <a:lumOff val="55000"/>
-              </a:schemeClr>
-            </a:gs>
-            <a:gs pos="100000">
-              <a:schemeClr val="accent3">
-                <a:lumMod val="30000"/>
-                <a:lumOff val="70000"/>
-              </a:schemeClr>
-            </a:gs>
-          </a:gsLst>
-          <a:lin ang="5400000" scaled="1"/>
-        </a:gradFill>
-        <a:effectLst/>
-      </p:bgPr>
-    </p:bg>
-    <p:spTree>
-      <p:nvGrpSpPr>
-        <p:cNvPr id="1" name=""/>
-        <p:cNvGrpSpPr/>
-        <p:nvPr/>
-      </p:nvGrpSpPr>
-      <p:grpSpPr>
-        <a:xfrm>
-          <a:off x="0" y="0"/>
-          <a:ext cx="0" cy="0"/>
-          <a:chOff x="0" y="0"/>
-          <a:chExt cx="0" cy="0"/>
-        </a:xfrm>
-      </p:grpSpPr>
-      <p:sp>
-        <p:nvSpPr>
-          <p:cNvPr id="2" name="Shape 0"/>
-          <p:cNvSpPr/>
-          <p:nvPr/>
-        </p:nvSpPr>
-        <p:spPr>
-          <a:xfrm>
-            <a:off x="0" y="0"/>
-            <a:ext cx="9144000" cy="822960"/>
-          </a:xfrm>
-          <a:prstGeom prst="rect">
-            <a:avLst/>
-          </a:prstGeom>
-          <a:solidFill>
-            <a:srgbClr val="1B6CA8"/>
-          </a:solidFill>
-          <a:ln w="12700">
-            <a:solidFill>
-              <a:srgbClr val="1B6CA8"/>
-            </a:solidFill>
-            <a:prstDash val="solid"/>
-          </a:ln>
-        </p:spPr>
-        <p:txBody>
-          <a:bodyPr/>
-          <a:lstStyle/>
-          <a:p>
-            <a:endParaRPr lang="pt-PT"/>
-          </a:p>
-        </p:txBody>
-      </p:sp>
-      <p:sp>
-        <p:nvSpPr>
-          <p:cNvPr id="3" name="Text 1"/>
-          <p:cNvSpPr/>
-          <p:nvPr/>
-        </p:nvSpPr>
-        <p:spPr>
-          <a:xfrm>
-            <a:off x="457200" y="0"/>
-            <a:ext cx="8229600" cy="822960"/>
-          </a:xfrm>
-          <a:prstGeom prst="rect">
-            <a:avLst/>
-          </a:prstGeom>
-          <a:noFill/>
-          <a:ln/>
-        </p:spPr>
-        <p:txBody>
-          <a:bodyPr wrap="square" lIns="0" tIns="0" rIns="0" bIns="0" rtlCol="0" anchor="ctr"/>
-          <a:lstStyle/>
-          <a:p>
-            <a:pPr marL="0" indent="0">
-              <a:buNone/>
-            </a:pPr>
-            <a:r>
-              <a:rPr lang="en-US" sz="2400" b="1" dirty="0">
-                <a:solidFill>
-                  <a:srgbClr val="FFFFFF"/>
-                </a:solidFill>
-              </a:rPr>
-              <a:t>04  /  Workflow vs Activity</a:t>
-            </a:r>
-            <a:endParaRPr lang="en-US" sz="2400" dirty="0"/>
-          </a:p>
-        </p:txBody>
-      </p:sp>
-      <p:sp>
-        <p:nvSpPr>
-          <p:cNvPr id="4" name="Shape 2"/>
-          <p:cNvSpPr/>
-          <p:nvPr/>
-        </p:nvSpPr>
-        <p:spPr>
-          <a:xfrm>
-            <a:off x="274320" y="914400"/>
-            <a:ext cx="4023360" cy="3840480"/>
-          </a:xfrm>
-          <a:prstGeom prst="rect">
-            <a:avLst/>
-          </a:prstGeom>
-          <a:solidFill>
-            <a:srgbClr val="112236"/>
-          </a:solidFill>
-          <a:ln w="12700">
-            <a:solidFill>
-              <a:srgbClr val="00D4AA"/>
-            </a:solidFill>
-            <a:prstDash val="solid"/>
-          </a:ln>
-          <a:effectLst>
-            <a:outerShdw blurRad="101600" dist="38100" dir="8100000" algn="bl" rotWithShape="0">
-              <a:srgbClr val="000000">
-                <a:alpha val="18000"/>
-              </a:srgbClr>
-            </a:outerShdw>
-          </a:effectLst>
-        </p:spPr>
-        <p:txBody>
-          <a:bodyPr/>
-          <a:lstStyle/>
-          <a:p>
-            <a:endParaRPr lang="pt-PT" dirty="0"/>
-          </a:p>
-        </p:txBody>
-      </p:sp>
-      <p:sp>
-        <p:nvSpPr>
-          <p:cNvPr id="5" name="Shape 3"/>
-          <p:cNvSpPr/>
-          <p:nvPr/>
-        </p:nvSpPr>
-        <p:spPr>
-          <a:xfrm>
-            <a:off x="274320" y="914400"/>
-            <a:ext cx="4023360" cy="457200"/>
-          </a:xfrm>
-          <a:prstGeom prst="rect">
-            <a:avLst/>
-          </a:prstGeom>
-          <a:solidFill>
-            <a:srgbClr val="00D4AA"/>
-          </a:solidFill>
-          <a:ln w="12700">
-            <a:solidFill>
-              <a:srgbClr val="00D4AA"/>
-            </a:solidFill>
-            <a:prstDash val="solid"/>
-          </a:ln>
-        </p:spPr>
-        <p:txBody>
-          <a:bodyPr/>
-          <a:lstStyle/>
-          <a:p>
-            <a:endParaRPr lang="pt-PT"/>
-          </a:p>
-        </p:txBody>
-      </p:sp>
-      <p:sp>
-        <p:nvSpPr>
-          <p:cNvPr id="6" name="Text 4"/>
-          <p:cNvSpPr/>
-          <p:nvPr/>
-        </p:nvSpPr>
-        <p:spPr>
-          <a:xfrm>
-            <a:off x="274320" y="914400"/>
-            <a:ext cx="4023360" cy="457200"/>
-          </a:xfrm>
-          <a:prstGeom prst="rect">
-            <a:avLst/>
-          </a:prstGeom>
-          <a:noFill/>
-          <a:ln/>
-        </p:spPr>
-        <p:txBody>
-          <a:bodyPr wrap="square" lIns="0" tIns="0" rIns="0" bIns="0" rtlCol="0" anchor="ctr"/>
-          <a:lstStyle/>
-          <a:p>
-            <a:pPr marL="0" indent="0" algn="ctr">
-              <a:buNone/>
-            </a:pPr>
-            <a:r>
-              <a:rPr lang="en-US" sz="1500" b="1" dirty="0">
-                <a:solidFill>
-                  <a:srgbClr val="0D1B2A"/>
-                </a:solidFill>
-              </a:rPr>
-              <a:t>🔁  Workflow</a:t>
-            </a:r>
-            <a:endParaRPr lang="en-US" sz="1500" dirty="0"/>
-          </a:p>
-        </p:txBody>
-      </p:sp>
-      <p:sp>
-        <p:nvSpPr>
-          <p:cNvPr id="7" name="Text 5"/>
-          <p:cNvSpPr/>
-          <p:nvPr/>
-        </p:nvSpPr>
-        <p:spPr>
-          <a:xfrm>
-            <a:off x="457200" y="1481328"/>
-            <a:ext cx="3566160" cy="475488"/>
-          </a:xfrm>
-          <a:prstGeom prst="rect">
-            <a:avLst/>
-          </a:prstGeom>
-          <a:noFill/>
-          <a:ln/>
-        </p:spPr>
-        <p:txBody>
-          <a:bodyPr wrap="square" rtlCol="0" anchor="ctr"/>
-          <a:lstStyle/>
-          <a:p>
-            <a:pPr marL="0" indent="0">
-              <a:buNone/>
-            </a:pPr>
-            <a:r>
-              <a:rPr lang="en-US" sz="1100" dirty="0">
-                <a:solidFill>
-                  <a:srgbClr val="FFFFFF"/>
-                </a:solidFill>
-              </a:rPr>
-              <a:t>• </a:t>
-            </a:r>
-            <a:r>
-              <a:rPr lang="en-US" sz="1100" dirty="0" err="1">
-                <a:solidFill>
-                  <a:srgbClr val="FFFFFF"/>
-                </a:solidFill>
-              </a:rPr>
-              <a:t>Representa</a:t>
-            </a:r>
-            <a:r>
-              <a:rPr lang="en-US" sz="1100" dirty="0">
-                <a:solidFill>
-                  <a:srgbClr val="FFFFFF"/>
-                </a:solidFill>
-              </a:rPr>
-              <a:t> la </a:t>
-            </a:r>
-            <a:r>
-              <a:rPr lang="en-US" sz="1100" dirty="0" err="1">
-                <a:solidFill>
-                  <a:srgbClr val="FFFFFF"/>
-                </a:solidFill>
-              </a:rPr>
-              <a:t>lógica</a:t>
-            </a:r>
-            <a:r>
-              <a:rPr lang="en-US" sz="1100" dirty="0">
-                <a:solidFill>
-                  <a:srgbClr val="FFFFFF"/>
-                </a:solidFill>
-              </a:rPr>
-              <a:t> central del </a:t>
-            </a:r>
-            <a:r>
-              <a:rPr lang="en-US" sz="1100" dirty="0" err="1">
-                <a:solidFill>
-                  <a:srgbClr val="FFFFFF"/>
-                </a:solidFill>
-              </a:rPr>
-              <a:t>proceso</a:t>
-            </a:r>
-            <a:r>
-              <a:rPr lang="en-US" sz="1100" dirty="0">
-                <a:solidFill>
-                  <a:srgbClr val="FFFFFF"/>
-                </a:solidFill>
-              </a:rPr>
-              <a:t>.</a:t>
-            </a:r>
-            <a:endParaRPr lang="en-US" sz="1100" dirty="0"/>
-          </a:p>
-        </p:txBody>
-      </p:sp>
-      <p:sp>
-        <p:nvSpPr>
-          <p:cNvPr id="8" name="Text 6"/>
-          <p:cNvSpPr/>
-          <p:nvPr/>
-        </p:nvSpPr>
-        <p:spPr>
-          <a:xfrm>
-            <a:off x="457200" y="2011680"/>
-            <a:ext cx="3566160" cy="475488"/>
-          </a:xfrm>
-          <a:prstGeom prst="rect">
-            <a:avLst/>
-          </a:prstGeom>
-          <a:noFill/>
-          <a:ln/>
-        </p:spPr>
-        <p:txBody>
-          <a:bodyPr wrap="square" rtlCol="0" anchor="ctr"/>
-          <a:lstStyle/>
-          <a:p>
-            <a:pPr marL="0" indent="0">
-              <a:buNone/>
-            </a:pPr>
-            <a:r>
-              <a:rPr lang="en-US" sz="1100" dirty="0">
-                <a:solidFill>
-                  <a:srgbClr val="FFFFFF"/>
-                </a:solidFill>
-              </a:rPr>
-              <a:t>• </a:t>
-            </a:r>
-            <a:r>
-              <a:rPr lang="en-US" sz="1100" dirty="0" err="1">
-                <a:solidFill>
-                  <a:srgbClr val="FFFFFF"/>
-                </a:solidFill>
-              </a:rPr>
-              <a:t>Ejecución</a:t>
-            </a:r>
-            <a:r>
-              <a:rPr lang="en-US" sz="1100" dirty="0">
-                <a:solidFill>
-                  <a:srgbClr val="FFFFFF"/>
-                </a:solidFill>
-              </a:rPr>
-              <a:t> </a:t>
-            </a:r>
-            <a:r>
-              <a:rPr lang="en-US" sz="1100" dirty="0" err="1">
-                <a:solidFill>
-                  <a:srgbClr val="FFFFFF"/>
-                </a:solidFill>
-              </a:rPr>
-              <a:t>determinista</a:t>
-            </a:r>
-            <a:r>
-              <a:rPr lang="en-US" sz="1100" dirty="0">
-                <a:solidFill>
-                  <a:srgbClr val="FFFFFF"/>
-                </a:solidFill>
-              </a:rPr>
-              <a:t> (</a:t>
-            </a:r>
-            <a:r>
-              <a:rPr lang="en-US" sz="1100" dirty="0" err="1">
-                <a:solidFill>
-                  <a:srgbClr val="FFFFFF"/>
-                </a:solidFill>
-              </a:rPr>
-              <a:t>mismo</a:t>
-            </a:r>
-            <a:r>
-              <a:rPr lang="en-US" sz="1100" dirty="0">
-                <a:solidFill>
-                  <a:srgbClr val="FFFFFF"/>
-                </a:solidFill>
-              </a:rPr>
-              <a:t> </a:t>
-            </a:r>
-            <a:r>
-              <a:rPr lang="en-US" sz="1100" dirty="0" err="1">
-                <a:solidFill>
-                  <a:srgbClr val="FFFFFF"/>
-                </a:solidFill>
-              </a:rPr>
-              <a:t>resultado</a:t>
-            </a:r>
-            <a:r>
-              <a:rPr lang="en-US" sz="1100" dirty="0">
-                <a:solidFill>
-                  <a:srgbClr val="FFFFFF"/>
-                </a:solidFill>
-              </a:rPr>
-              <a:t> para la </a:t>
-            </a:r>
-            <a:r>
-              <a:rPr lang="en-US" sz="1100" dirty="0" err="1">
-                <a:solidFill>
-                  <a:srgbClr val="FFFFFF"/>
-                </a:solidFill>
-              </a:rPr>
-              <a:t>misma</a:t>
-            </a:r>
-            <a:r>
-              <a:rPr lang="en-US" sz="1100" dirty="0">
-                <a:solidFill>
-                  <a:srgbClr val="FFFFFF"/>
-                </a:solidFill>
-              </a:rPr>
-              <a:t> entrada)</a:t>
-            </a:r>
-            <a:endParaRPr lang="en-US" sz="1100" dirty="0"/>
-          </a:p>
-        </p:txBody>
-      </p:sp>
-      <p:sp>
-        <p:nvSpPr>
-          <p:cNvPr id="9" name="Text 7"/>
-          <p:cNvSpPr/>
-          <p:nvPr/>
-        </p:nvSpPr>
-        <p:spPr>
-          <a:xfrm>
-            <a:off x="457200" y="2542032"/>
-            <a:ext cx="3566160" cy="475488"/>
-          </a:xfrm>
-          <a:prstGeom prst="rect">
-            <a:avLst/>
-          </a:prstGeom>
-          <a:noFill/>
-          <a:ln/>
-        </p:spPr>
-        <p:txBody>
-          <a:bodyPr wrap="square" rtlCol="0" anchor="ctr"/>
-          <a:lstStyle/>
-          <a:p>
-            <a:pPr marL="0" indent="0">
-              <a:buNone/>
-            </a:pPr>
-            <a:r>
-              <a:rPr lang="en-US" sz="1100" dirty="0">
-                <a:solidFill>
-                  <a:srgbClr val="FFFFFF"/>
-                </a:solidFill>
-              </a:rPr>
-              <a:t>• </a:t>
-            </a:r>
-            <a:r>
-              <a:rPr lang="en-US" sz="1100" dirty="0" err="1">
-                <a:solidFill>
-                  <a:srgbClr val="FFFFFF"/>
-                </a:solidFill>
-              </a:rPr>
-              <a:t>Duradero</a:t>
-            </a:r>
-            <a:r>
-              <a:rPr lang="en-US" sz="1100" dirty="0">
-                <a:solidFill>
-                  <a:srgbClr val="FFFFFF"/>
-                </a:solidFill>
-              </a:rPr>
-              <a:t> y </a:t>
-            </a:r>
-            <a:r>
-              <a:rPr lang="en-US" sz="1100" dirty="0" err="1">
-                <a:solidFill>
-                  <a:srgbClr val="FFFFFF"/>
-                </a:solidFill>
-              </a:rPr>
-              <a:t>resistente</a:t>
-            </a:r>
-            <a:r>
-              <a:rPr lang="en-US" sz="1100" dirty="0">
-                <a:solidFill>
-                  <a:srgbClr val="FFFFFF"/>
-                </a:solidFill>
-              </a:rPr>
-              <a:t> a </a:t>
-            </a:r>
-            <a:r>
-              <a:rPr lang="en-US" sz="1100" dirty="0" err="1">
-                <a:solidFill>
-                  <a:srgbClr val="FFFFFF"/>
-                </a:solidFill>
-              </a:rPr>
-              <a:t>los</a:t>
-            </a:r>
-            <a:r>
-              <a:rPr lang="en-US" sz="1100" dirty="0">
-                <a:solidFill>
-                  <a:srgbClr val="FFFFFF"/>
-                </a:solidFill>
-              </a:rPr>
-              <a:t> </a:t>
-            </a:r>
-            <a:r>
-              <a:rPr lang="en-US" sz="1100" dirty="0" err="1">
-                <a:solidFill>
-                  <a:srgbClr val="FFFFFF"/>
-                </a:solidFill>
-              </a:rPr>
-              <a:t>fallos</a:t>
-            </a:r>
-            <a:r>
-              <a:rPr lang="en-US" sz="1100" dirty="0">
-                <a:solidFill>
-                  <a:srgbClr val="FFFFFF"/>
-                </a:solidFill>
-              </a:rPr>
-              <a:t>.</a:t>
-            </a:r>
-            <a:endParaRPr lang="en-US" sz="1100" dirty="0"/>
-          </a:p>
-        </p:txBody>
-      </p:sp>
-      <p:sp>
-        <p:nvSpPr>
-          <p:cNvPr id="10" name="Text 8"/>
-          <p:cNvSpPr/>
-          <p:nvPr/>
-        </p:nvSpPr>
-        <p:spPr>
-          <a:xfrm>
-            <a:off x="457200" y="3072384"/>
-            <a:ext cx="3566160" cy="475488"/>
-          </a:xfrm>
-          <a:prstGeom prst="rect">
-            <a:avLst/>
-          </a:prstGeom>
-          <a:noFill/>
-          <a:ln/>
-        </p:spPr>
-        <p:txBody>
-          <a:bodyPr wrap="square" rtlCol="0" anchor="ctr"/>
-          <a:lstStyle/>
-          <a:p>
-            <a:pPr marL="0" indent="0">
-              <a:buNone/>
-            </a:pPr>
-            <a:r>
-              <a:rPr lang="en-US" sz="1100" dirty="0">
-                <a:solidFill>
-                  <a:srgbClr val="FFFFFF"/>
-                </a:solidFill>
-              </a:rPr>
-              <a:t>• NO accede </a:t>
-            </a:r>
-            <a:r>
-              <a:rPr lang="en-US" sz="1100" dirty="0" err="1">
-                <a:solidFill>
-                  <a:srgbClr val="FFFFFF"/>
-                </a:solidFill>
-              </a:rPr>
-              <a:t>directamente</a:t>
-            </a:r>
-            <a:r>
-              <a:rPr lang="en-US" sz="1100" dirty="0">
-                <a:solidFill>
-                  <a:srgbClr val="FFFFFF"/>
-                </a:solidFill>
-              </a:rPr>
-              <a:t> a </a:t>
-            </a:r>
-            <a:r>
-              <a:rPr lang="en-US" sz="1100" dirty="0" err="1">
-                <a:solidFill>
-                  <a:srgbClr val="FFFFFF"/>
-                </a:solidFill>
-              </a:rPr>
-              <a:t>sistemas</a:t>
-            </a:r>
-            <a:r>
-              <a:rPr lang="en-US" sz="1100" dirty="0">
-                <a:solidFill>
-                  <a:srgbClr val="FFFFFF"/>
-                </a:solidFill>
-              </a:rPr>
-              <a:t> </a:t>
-            </a:r>
-            <a:r>
-              <a:rPr lang="en-US" sz="1100" dirty="0" err="1">
-                <a:solidFill>
-                  <a:srgbClr val="FFFFFF"/>
-                </a:solidFill>
-              </a:rPr>
-              <a:t>externos</a:t>
-            </a:r>
-            <a:r>
-              <a:rPr lang="en-US" sz="1100" dirty="0">
-                <a:solidFill>
-                  <a:srgbClr val="FFFFFF"/>
-                </a:solidFill>
-              </a:rPr>
-              <a:t>.</a:t>
-            </a:r>
-            <a:endParaRPr lang="en-US" sz="1100" dirty="0"/>
-          </a:p>
-        </p:txBody>
-      </p:sp>
-      <p:sp>
-        <p:nvSpPr>
-          <p:cNvPr id="11" name="Text 9"/>
-          <p:cNvSpPr/>
-          <p:nvPr/>
-        </p:nvSpPr>
-        <p:spPr>
-          <a:xfrm>
-            <a:off x="457200" y="3602736"/>
-            <a:ext cx="3566160" cy="475488"/>
-          </a:xfrm>
-          <a:prstGeom prst="rect">
-            <a:avLst/>
-          </a:prstGeom>
-          <a:noFill/>
-          <a:ln/>
-        </p:spPr>
-        <p:txBody>
-          <a:bodyPr wrap="square" rtlCol="0" anchor="ctr"/>
-          <a:lstStyle/>
-          <a:p>
-            <a:pPr marL="0" indent="0">
-              <a:buNone/>
-            </a:pPr>
-            <a:r>
-              <a:rPr lang="en-US" sz="1100" dirty="0">
-                <a:solidFill>
-                  <a:srgbClr val="FFFFFF"/>
-                </a:solidFill>
-              </a:rPr>
-              <a:t>• </a:t>
-            </a:r>
-            <a:r>
-              <a:rPr lang="en-US" sz="1100" dirty="0" err="1">
-                <a:solidFill>
-                  <a:srgbClr val="FFFFFF"/>
-                </a:solidFill>
-              </a:rPr>
-              <a:t>Coordina</a:t>
-            </a:r>
-            <a:r>
-              <a:rPr lang="en-US" sz="1100" dirty="0">
-                <a:solidFill>
-                  <a:srgbClr val="FFFFFF"/>
-                </a:solidFill>
-              </a:rPr>
-              <a:t> las </a:t>
-            </a:r>
-            <a:r>
-              <a:rPr lang="en-US" sz="1100" dirty="0" err="1">
-                <a:solidFill>
-                  <a:srgbClr val="FFFFFF"/>
-                </a:solidFill>
-              </a:rPr>
-              <a:t>actividades</a:t>
-            </a:r>
-            <a:r>
-              <a:rPr lang="en-US" sz="1100" dirty="0">
-                <a:solidFill>
-                  <a:srgbClr val="FFFFFF"/>
-                </a:solidFill>
-              </a:rPr>
-              <a:t> de </a:t>
-            </a:r>
-            <a:r>
-              <a:rPr lang="en-US" sz="1100" dirty="0" err="1">
-                <a:solidFill>
-                  <a:srgbClr val="FFFFFF"/>
-                </a:solidFill>
-              </a:rPr>
-              <a:t>trabajo</a:t>
-            </a:r>
-            <a:r>
-              <a:rPr lang="en-US" sz="1100" dirty="0">
-                <a:solidFill>
-                  <a:srgbClr val="FFFFFF"/>
-                </a:solidFill>
-              </a:rPr>
-              <a:t> de campo.</a:t>
-            </a:r>
-            <a:endParaRPr lang="en-US" sz="1100" dirty="0"/>
-          </a:p>
-        </p:txBody>
-      </p:sp>
-      <p:sp>
-        <p:nvSpPr>
-          <p:cNvPr id="12" name="Shape 10"/>
-          <p:cNvSpPr/>
-          <p:nvPr/>
-        </p:nvSpPr>
-        <p:spPr>
-          <a:xfrm>
-            <a:off x="4846320" y="914400"/>
-            <a:ext cx="4023360" cy="3840480"/>
-          </a:xfrm>
-          <a:prstGeom prst="rect">
-            <a:avLst/>
-          </a:prstGeom>
-          <a:solidFill>
-            <a:srgbClr val="112236"/>
-          </a:solidFill>
-          <a:ln w="12700">
-            <a:solidFill>
-              <a:srgbClr val="2D9CDB"/>
-            </a:solidFill>
-            <a:prstDash val="solid"/>
-          </a:ln>
-          <a:effectLst>
-            <a:outerShdw blurRad="101600" dist="38100" dir="8100000" algn="bl" rotWithShape="0">
-              <a:srgbClr val="000000">
-                <a:alpha val="18000"/>
-              </a:srgbClr>
-            </a:outerShdw>
-          </a:effectLst>
-        </p:spPr>
-        <p:txBody>
-          <a:bodyPr/>
-          <a:lstStyle/>
-          <a:p>
-            <a:endParaRPr lang="pt-PT"/>
-          </a:p>
-        </p:txBody>
-      </p:sp>
-      <p:sp>
-        <p:nvSpPr>
-          <p:cNvPr id="13" name="Shape 11"/>
-          <p:cNvSpPr/>
-          <p:nvPr/>
-        </p:nvSpPr>
-        <p:spPr>
-          <a:xfrm>
-            <a:off x="4846320" y="914400"/>
-            <a:ext cx="4023360" cy="457200"/>
-          </a:xfrm>
-          <a:prstGeom prst="rect">
-            <a:avLst/>
-          </a:prstGeom>
-          <a:solidFill>
-            <a:srgbClr val="2D9CDB"/>
-          </a:solidFill>
-          <a:ln w="12700">
-            <a:solidFill>
-              <a:srgbClr val="2D9CDB"/>
-            </a:solidFill>
-            <a:prstDash val="solid"/>
-          </a:ln>
-        </p:spPr>
-        <p:txBody>
-          <a:bodyPr/>
-          <a:lstStyle/>
-          <a:p>
-            <a:endParaRPr lang="pt-PT"/>
-          </a:p>
-        </p:txBody>
-      </p:sp>
-      <p:sp>
-        <p:nvSpPr>
-          <p:cNvPr id="14" name="Text 12"/>
-          <p:cNvSpPr/>
-          <p:nvPr/>
-        </p:nvSpPr>
-        <p:spPr>
-          <a:xfrm>
-            <a:off x="4846320" y="914400"/>
-            <a:ext cx="4023360" cy="457200"/>
-          </a:xfrm>
-          <a:prstGeom prst="rect">
-            <a:avLst/>
-          </a:prstGeom>
-          <a:noFill/>
-          <a:ln/>
-        </p:spPr>
-        <p:txBody>
-          <a:bodyPr wrap="square" lIns="0" tIns="0" rIns="0" bIns="0" rtlCol="0" anchor="ctr"/>
-          <a:lstStyle/>
-          <a:p>
-            <a:pPr marL="0" indent="0" algn="ctr">
-              <a:buNone/>
-            </a:pPr>
-            <a:r>
-              <a:rPr lang="en-US" sz="1500" b="1" dirty="0">
-                <a:solidFill>
-                  <a:srgbClr val="FFFFFF"/>
-                </a:solidFill>
-              </a:rPr>
-              <a:t>⚙️  Activity</a:t>
-            </a:r>
-            <a:endParaRPr lang="en-US" sz="1500" dirty="0"/>
-          </a:p>
-        </p:txBody>
-      </p:sp>
-      <p:sp>
-        <p:nvSpPr>
-          <p:cNvPr id="15" name="Text 13"/>
-          <p:cNvSpPr/>
-          <p:nvPr/>
-        </p:nvSpPr>
-        <p:spPr>
-          <a:xfrm>
-            <a:off x="5029200" y="1481328"/>
-            <a:ext cx="3566160" cy="475488"/>
-          </a:xfrm>
-          <a:prstGeom prst="rect">
-            <a:avLst/>
-          </a:prstGeom>
-          <a:noFill/>
-          <a:ln/>
-        </p:spPr>
-        <p:txBody>
-          <a:bodyPr wrap="square" rtlCol="0" anchor="ctr"/>
-          <a:lstStyle/>
-          <a:p>
-            <a:pPr marL="0" indent="0">
-              <a:buNone/>
-            </a:pPr>
-            <a:r>
-              <a:rPr lang="en-US" sz="1100" dirty="0">
-                <a:solidFill>
-                  <a:srgbClr val="FFFFFF"/>
-                </a:solidFill>
-              </a:rPr>
-              <a:t>• </a:t>
-            </a:r>
-            <a:r>
-              <a:rPr lang="en-US" sz="1100" dirty="0" err="1">
-                <a:solidFill>
-                  <a:srgbClr val="FFFFFF"/>
-                </a:solidFill>
-              </a:rPr>
-              <a:t>Realiza</a:t>
-            </a:r>
-            <a:r>
-              <a:rPr lang="en-US" sz="1100" dirty="0">
-                <a:solidFill>
-                  <a:srgbClr val="FFFFFF"/>
-                </a:solidFill>
-              </a:rPr>
-              <a:t> </a:t>
-            </a:r>
-            <a:r>
-              <a:rPr lang="en-US" sz="1100" dirty="0" err="1">
-                <a:solidFill>
-                  <a:srgbClr val="FFFFFF"/>
-                </a:solidFill>
-              </a:rPr>
-              <a:t>una</a:t>
-            </a:r>
-            <a:r>
-              <a:rPr lang="en-US" sz="1100" dirty="0">
-                <a:solidFill>
-                  <a:srgbClr val="FFFFFF"/>
-                </a:solidFill>
-              </a:rPr>
-              <a:t> </a:t>
-            </a:r>
-            <a:r>
-              <a:rPr lang="en-US" sz="1100" dirty="0" err="1">
-                <a:solidFill>
-                  <a:srgbClr val="FFFFFF"/>
-                </a:solidFill>
-              </a:rPr>
-              <a:t>única</a:t>
-            </a:r>
-            <a:r>
-              <a:rPr lang="en-US" sz="1100" dirty="0">
-                <a:solidFill>
-                  <a:srgbClr val="FFFFFF"/>
-                </a:solidFill>
-              </a:rPr>
-              <a:t> </a:t>
-            </a:r>
-            <a:r>
-              <a:rPr lang="en-US" sz="1100" dirty="0" err="1">
-                <a:solidFill>
-                  <a:srgbClr val="FFFFFF"/>
-                </a:solidFill>
-              </a:rPr>
-              <a:t>acción</a:t>
-            </a:r>
-            <a:r>
-              <a:rPr lang="en-US" sz="1100" dirty="0">
-                <a:solidFill>
-                  <a:srgbClr val="FFFFFF"/>
-                </a:solidFill>
-              </a:rPr>
-              <a:t> externa.</a:t>
-            </a:r>
-            <a:endParaRPr lang="en-US" sz="1100" dirty="0"/>
-          </a:p>
-        </p:txBody>
-      </p:sp>
-      <p:sp>
-        <p:nvSpPr>
-          <p:cNvPr id="16" name="Text 14"/>
-          <p:cNvSpPr/>
-          <p:nvPr/>
-        </p:nvSpPr>
-        <p:spPr>
-          <a:xfrm>
-            <a:off x="5029200" y="2011680"/>
-            <a:ext cx="3566160" cy="475488"/>
-          </a:xfrm>
-          <a:prstGeom prst="rect">
-            <a:avLst/>
-          </a:prstGeom>
-          <a:noFill/>
-          <a:ln/>
-        </p:spPr>
-        <p:txBody>
-          <a:bodyPr wrap="square" rtlCol="0" anchor="ctr"/>
-          <a:lstStyle/>
-          <a:p>
-            <a:pPr marL="0" indent="0">
-              <a:buNone/>
-            </a:pPr>
-            <a:r>
-              <a:rPr lang="en-US" sz="1100" dirty="0">
-                <a:solidFill>
-                  <a:srgbClr val="FFFFFF"/>
-                </a:solidFill>
-              </a:rPr>
-              <a:t>• No </a:t>
-            </a:r>
-            <a:r>
-              <a:rPr lang="en-US" sz="1100" dirty="0" err="1">
-                <a:solidFill>
-                  <a:srgbClr val="FFFFFF"/>
-                </a:solidFill>
-              </a:rPr>
-              <a:t>tiene</a:t>
-            </a:r>
-            <a:r>
-              <a:rPr lang="en-US" sz="1100" dirty="0">
-                <a:solidFill>
-                  <a:srgbClr val="FFFFFF"/>
-                </a:solidFill>
-              </a:rPr>
-              <a:t> </a:t>
-            </a:r>
-            <a:r>
-              <a:rPr lang="en-US" sz="1100" dirty="0" err="1">
-                <a:solidFill>
-                  <a:srgbClr val="FFFFFF"/>
-                </a:solidFill>
-              </a:rPr>
-              <a:t>por</a:t>
-            </a:r>
-            <a:r>
-              <a:rPr lang="en-US" sz="1100" dirty="0">
-                <a:solidFill>
-                  <a:srgbClr val="FFFFFF"/>
-                </a:solidFill>
-              </a:rPr>
-              <a:t> </a:t>
-            </a:r>
-            <a:r>
-              <a:rPr lang="en-US" sz="1100" dirty="0" err="1">
-                <a:solidFill>
-                  <a:srgbClr val="FFFFFF"/>
-                </a:solidFill>
-              </a:rPr>
-              <a:t>qué</a:t>
-            </a:r>
-            <a:r>
-              <a:rPr lang="en-US" sz="1100" dirty="0">
-                <a:solidFill>
-                  <a:srgbClr val="FFFFFF"/>
-                </a:solidFill>
-              </a:rPr>
-              <a:t> ser </a:t>
-            </a:r>
-            <a:r>
-              <a:rPr lang="en-US" sz="1100" dirty="0" err="1">
-                <a:solidFill>
-                  <a:srgbClr val="FFFFFF"/>
-                </a:solidFill>
-              </a:rPr>
-              <a:t>determinista</a:t>
-            </a:r>
-            <a:r>
-              <a:rPr lang="en-US" sz="1100" dirty="0">
-                <a:solidFill>
-                  <a:srgbClr val="FFFFFF"/>
-                </a:solidFill>
-              </a:rPr>
-              <a:t>.</a:t>
-            </a:r>
-            <a:endParaRPr lang="en-US" sz="1100" dirty="0"/>
-          </a:p>
-        </p:txBody>
-      </p:sp>
-      <p:sp>
-        <p:nvSpPr>
-          <p:cNvPr id="17" name="Text 15"/>
-          <p:cNvSpPr/>
-          <p:nvPr/>
-        </p:nvSpPr>
-        <p:spPr>
-          <a:xfrm>
-            <a:off x="5029200" y="2542032"/>
-            <a:ext cx="3566160" cy="475488"/>
-          </a:xfrm>
-          <a:prstGeom prst="rect">
-            <a:avLst/>
-          </a:prstGeom>
-          <a:noFill/>
-          <a:ln/>
-        </p:spPr>
-        <p:txBody>
-          <a:bodyPr wrap="square" rtlCol="0" anchor="ctr"/>
-          <a:lstStyle/>
-          <a:p>
-            <a:pPr marL="0" indent="0">
-              <a:buNone/>
-            </a:pPr>
-            <a:r>
-              <a:rPr lang="en-US" sz="1100" dirty="0">
-                <a:solidFill>
-                  <a:srgbClr val="FFFFFF"/>
-                </a:solidFill>
-              </a:rPr>
-              <a:t>• </a:t>
-            </a:r>
-            <a:r>
-              <a:rPr lang="en-US" sz="1100" dirty="0" err="1">
-                <a:solidFill>
-                  <a:srgbClr val="FFFFFF"/>
-                </a:solidFill>
-              </a:rPr>
-              <a:t>Debe</a:t>
-            </a:r>
-            <a:r>
-              <a:rPr lang="en-US" sz="1100" dirty="0">
-                <a:solidFill>
-                  <a:srgbClr val="FFFFFF"/>
-                </a:solidFill>
-              </a:rPr>
-              <a:t> ser </a:t>
-            </a:r>
-            <a:r>
-              <a:rPr lang="en-US" sz="1100" dirty="0" err="1">
-                <a:solidFill>
-                  <a:srgbClr val="FFFFFF"/>
-                </a:solidFill>
-              </a:rPr>
-              <a:t>idempotente</a:t>
-            </a:r>
-            <a:r>
-              <a:rPr lang="en-US" sz="1100" dirty="0">
-                <a:solidFill>
-                  <a:srgbClr val="FFFFFF"/>
-                </a:solidFill>
-              </a:rPr>
-              <a:t> </a:t>
-            </a:r>
-            <a:r>
-              <a:rPr lang="en-US" sz="1100" dirty="0" err="1">
-                <a:solidFill>
-                  <a:srgbClr val="FFFFFF"/>
-                </a:solidFill>
-              </a:rPr>
-              <a:t>siempre</a:t>
-            </a:r>
-            <a:r>
-              <a:rPr lang="en-US" sz="1100" dirty="0">
-                <a:solidFill>
-                  <a:srgbClr val="FFFFFF"/>
-                </a:solidFill>
-              </a:rPr>
-              <a:t> que sea </a:t>
-            </a:r>
-            <a:r>
-              <a:rPr lang="en-US" sz="1100" dirty="0" err="1">
-                <a:solidFill>
-                  <a:srgbClr val="FFFFFF"/>
-                </a:solidFill>
-              </a:rPr>
-              <a:t>posible</a:t>
-            </a:r>
-            <a:r>
-              <a:rPr lang="en-US" sz="1100" dirty="0">
-                <a:solidFill>
-                  <a:srgbClr val="FFFFFF"/>
-                </a:solidFill>
-              </a:rPr>
-              <a:t>.</a:t>
-            </a:r>
-            <a:endParaRPr lang="en-US" sz="1100" dirty="0"/>
-          </a:p>
-        </p:txBody>
-      </p:sp>
-      <p:sp>
-        <p:nvSpPr>
-          <p:cNvPr id="18" name="Text 16"/>
-          <p:cNvSpPr/>
-          <p:nvPr/>
-        </p:nvSpPr>
-        <p:spPr>
-          <a:xfrm>
-            <a:off x="5029200" y="3072384"/>
-            <a:ext cx="3566160" cy="475488"/>
-          </a:xfrm>
-          <a:prstGeom prst="rect">
-            <a:avLst/>
-          </a:prstGeom>
-          <a:noFill/>
-          <a:ln/>
-        </p:spPr>
-        <p:txBody>
-          <a:bodyPr wrap="square" rtlCol="0" anchor="ctr"/>
-          <a:lstStyle/>
-          <a:p>
-            <a:pPr marL="0" indent="0">
-              <a:buNone/>
-            </a:pPr>
-            <a:r>
-              <a:rPr lang="en-US" sz="1100" dirty="0">
-                <a:solidFill>
-                  <a:srgbClr val="FFFFFF"/>
-                </a:solidFill>
-              </a:rPr>
-              <a:t>• </a:t>
-            </a:r>
-            <a:r>
-              <a:rPr lang="en-US" sz="1100" dirty="0" err="1">
-                <a:solidFill>
-                  <a:srgbClr val="FFFFFF"/>
-                </a:solidFill>
-              </a:rPr>
-              <a:t>Permite</a:t>
-            </a:r>
-            <a:r>
-              <a:rPr lang="en-US" sz="1100" dirty="0">
-                <a:solidFill>
-                  <a:srgbClr val="FFFFFF"/>
-                </a:solidFill>
-              </a:rPr>
-              <a:t> heartbeat para </a:t>
-            </a:r>
-            <a:r>
-              <a:rPr lang="en-US" sz="1100" dirty="0" err="1">
-                <a:solidFill>
-                  <a:srgbClr val="FFFFFF"/>
-                </a:solidFill>
-              </a:rPr>
-              <a:t>tareas</a:t>
-            </a:r>
-            <a:r>
-              <a:rPr lang="en-US" sz="1100" dirty="0">
-                <a:solidFill>
-                  <a:srgbClr val="FFFFFF"/>
-                </a:solidFill>
-              </a:rPr>
-              <a:t> </a:t>
-            </a:r>
-            <a:r>
-              <a:rPr lang="en-US" sz="1100" dirty="0" err="1">
-                <a:solidFill>
-                  <a:srgbClr val="FFFFFF"/>
-                </a:solidFill>
-              </a:rPr>
-              <a:t>prolongadas</a:t>
-            </a:r>
-            <a:endParaRPr lang="en-US" sz="1100" dirty="0"/>
-          </a:p>
-        </p:txBody>
-      </p:sp>
-      <p:sp>
-        <p:nvSpPr>
-          <p:cNvPr id="19" name="Text 17"/>
-          <p:cNvSpPr/>
-          <p:nvPr/>
-        </p:nvSpPr>
-        <p:spPr>
-          <a:xfrm>
-            <a:off x="5029200" y="3602736"/>
-            <a:ext cx="3566160" cy="475488"/>
-          </a:xfrm>
-          <a:prstGeom prst="rect">
-            <a:avLst/>
-          </a:prstGeom>
-          <a:noFill/>
-          <a:ln/>
-        </p:spPr>
-        <p:txBody>
-          <a:bodyPr wrap="square" rtlCol="0" anchor="ctr"/>
-          <a:lstStyle/>
-          <a:p>
-            <a:pPr marL="0" indent="0">
-              <a:buNone/>
-            </a:pPr>
-            <a:r>
-              <a:rPr lang="en-US" sz="1100" dirty="0">
-                <a:solidFill>
-                  <a:srgbClr val="FFFFFF"/>
-                </a:solidFill>
-              </a:rPr>
-              <a:t>• </a:t>
-            </a:r>
-            <a:r>
-              <a:rPr lang="en-US" sz="1100" dirty="0" err="1">
-                <a:solidFill>
-                  <a:srgbClr val="FFFFFF"/>
-                </a:solidFill>
-              </a:rPr>
-              <a:t>Acceso</a:t>
-            </a:r>
-            <a:r>
-              <a:rPr lang="en-US" sz="1100" dirty="0">
-                <a:solidFill>
-                  <a:srgbClr val="FFFFFF"/>
-                </a:solidFill>
-              </a:rPr>
-              <a:t> HTTP, DB, email, etc.</a:t>
-            </a:r>
-            <a:endParaRPr lang="en-US" sz="1100" dirty="0"/>
-          </a:p>
-        </p:txBody>
-      </p:sp>
-      <p:sp>
-        <p:nvSpPr>
-          <p:cNvPr id="20" name="Shape 18"/>
-          <p:cNvSpPr/>
-          <p:nvPr/>
-        </p:nvSpPr>
-        <p:spPr>
-          <a:xfrm>
-            <a:off x="4315968" y="2834640"/>
-            <a:ext cx="512064" cy="0"/>
-          </a:xfrm>
-          <a:prstGeom prst="line">
-            <a:avLst/>
-          </a:prstGeom>
-          <a:noFill/>
-          <a:ln w="25400">
-            <a:solidFill>
-              <a:srgbClr val="00D4AA"/>
-            </a:solidFill>
-            <a:prstDash val="solid"/>
-          </a:ln>
-        </p:spPr>
-        <p:txBody>
-          <a:bodyPr/>
-          <a:lstStyle/>
-          <a:p>
-            <a:endParaRPr lang="pt-PT"/>
-          </a:p>
-        </p:txBody>
-      </p:sp>
-      <p:sp>
-        <p:nvSpPr>
-          <p:cNvPr id="21" name="Text 19"/>
-          <p:cNvSpPr/>
-          <p:nvPr/>
-        </p:nvSpPr>
-        <p:spPr>
-          <a:xfrm>
-            <a:off x="4315968" y="2651760"/>
-            <a:ext cx="512064" cy="365760"/>
-          </a:xfrm>
-          <a:prstGeom prst="rect">
-            <a:avLst/>
-          </a:prstGeom>
-          <a:noFill/>
-          <a:ln/>
-        </p:spPr>
-        <p:txBody>
-          <a:bodyPr wrap="square" rtlCol="0" anchor="ctr"/>
-          <a:lstStyle/>
-          <a:p>
-            <a:pPr marL="0" indent="0" algn="ctr">
-              <a:buNone/>
-            </a:pPr>
-            <a:r>
-              <a:rPr lang="en-US" sz="1600" dirty="0">
-                <a:solidFill>
-                  <a:srgbClr val="00D4AA"/>
-                </a:solidFill>
-              </a:rPr>
-              <a:t>→</a:t>
-            </a:r>
-            <a:endParaRPr lang="en-US" sz="1600" dirty="0"/>
-          </a:p>
-        </p:txBody>
-      </p:sp>
-    </p:spTree>
-  </p:cSld>
-  <p:clrMapOvr>
-    <a:masterClrMapping/>
-  </p:clrMapOvr>
-</p:sld>
-</file>
-
 <file path=ppt/slides/slide8.xml><?xml version="1.0" encoding="utf-8"?>
-<p:sld xmlns:a="http://schemas.openxmlformats.org/drawingml/2006/main" xmlns:r="http://schemas.openxmlformats.org/officeDocument/2006/relationships" xmlns:p="http://schemas.openxmlformats.org/presentationml/2006/main">
-  <p:cSld name="Slide 8">
-    <p:bg>
-      <p:bgPr>
-        <a:gradFill>
-          <a:gsLst>
-            <a:gs pos="0">
-              <a:schemeClr val="accent3">
-                <a:lumMod val="5000"/>
-                <a:lumOff val="95000"/>
-              </a:schemeClr>
-            </a:gs>
-            <a:gs pos="74000">
-              <a:schemeClr val="accent3">
-                <a:lumMod val="45000"/>
-                <a:lumOff val="55000"/>
-              </a:schemeClr>
-            </a:gs>
-            <a:gs pos="83000">
-              <a:schemeClr val="accent3">
-                <a:lumMod val="45000"/>
-                <a:lumOff val="55000"/>
-              </a:schemeClr>
-            </a:gs>
-            <a:gs pos="100000">
-              <a:schemeClr val="accent3">
-                <a:lumMod val="30000"/>
-                <a:lumOff val="70000"/>
-              </a:schemeClr>
-            </a:gs>
-          </a:gsLst>
-          <a:lin ang="5400000" scaled="1"/>
-        </a:gradFill>
-        <a:effectLst/>
-      </p:bgPr>
-    </p:bg>
-    <p:spTree>
-      <p:nvGrpSpPr>
-        <p:cNvPr id="1" name=""/>
-        <p:cNvGrpSpPr/>
-        <p:nvPr/>
-      </p:nvGrpSpPr>
-      <p:grpSpPr>
-        <a:xfrm>
-          <a:off x="0" y="0"/>
-          <a:ext cx="0" cy="0"/>
-          <a:chOff x="0" y="0"/>
-          <a:chExt cx="0" cy="0"/>
-        </a:xfrm>
-      </p:grpSpPr>
-      <p:sp>
-        <p:nvSpPr>
-          <p:cNvPr id="2" name="Shape 0"/>
-          <p:cNvSpPr/>
-          <p:nvPr/>
-        </p:nvSpPr>
-        <p:spPr>
-          <a:xfrm>
-            <a:off x="0" y="0"/>
-            <a:ext cx="9144000" cy="822960"/>
-          </a:xfrm>
-          <a:prstGeom prst="rect">
-            <a:avLst/>
-          </a:prstGeom>
-          <a:solidFill>
-            <a:srgbClr val="1B6CA8"/>
-          </a:solidFill>
-          <a:ln w="12700">
-            <a:solidFill>
-              <a:srgbClr val="1B6CA8"/>
-            </a:solidFill>
-            <a:prstDash val="solid"/>
-          </a:ln>
-        </p:spPr>
-        <p:txBody>
-          <a:bodyPr/>
-          <a:lstStyle/>
-          <a:p>
-            <a:endParaRPr lang="pt-PT"/>
-          </a:p>
-        </p:txBody>
-      </p:sp>
-      <p:sp>
-        <p:nvSpPr>
-          <p:cNvPr id="3" name="Text 1"/>
-          <p:cNvSpPr/>
-          <p:nvPr/>
-        </p:nvSpPr>
-        <p:spPr>
-          <a:xfrm>
-            <a:off x="457200" y="0"/>
-            <a:ext cx="8229600" cy="822960"/>
-          </a:xfrm>
-          <a:prstGeom prst="rect">
-            <a:avLst/>
-          </a:prstGeom>
-          <a:noFill/>
-          <a:ln/>
-        </p:spPr>
-        <p:txBody>
-          <a:bodyPr wrap="square" lIns="0" tIns="0" rIns="0" bIns="0" rtlCol="0" anchor="ctr"/>
-          <a:lstStyle/>
-          <a:p>
-            <a:pPr marL="0" indent="0">
-              <a:buNone/>
-            </a:pPr>
-            <a:r>
-              <a:rPr lang="en-US" sz="2400" b="1" dirty="0">
-                <a:solidFill>
-                  <a:srgbClr val="FFFFFF"/>
-                </a:solidFill>
-              </a:rPr>
-              <a:t>04  /  Signals vs Queries</a:t>
-            </a:r>
-            <a:endParaRPr lang="en-US" sz="2400" dirty="0"/>
-          </a:p>
-        </p:txBody>
-      </p:sp>
-      <p:sp>
-        <p:nvSpPr>
-          <p:cNvPr id="4" name="Shape 2"/>
-          <p:cNvSpPr/>
-          <p:nvPr/>
-        </p:nvSpPr>
-        <p:spPr>
-          <a:xfrm>
-            <a:off x="457200" y="1005840"/>
-            <a:ext cx="2286000" cy="502920"/>
-          </a:xfrm>
-          <a:prstGeom prst="rect">
-            <a:avLst/>
-          </a:prstGeom>
-          <a:solidFill>
-            <a:srgbClr val="0D1B2A"/>
-          </a:solidFill>
-          <a:ln w="12700">
-            <a:solidFill>
-              <a:srgbClr val="1B6CA8"/>
-            </a:solidFill>
-            <a:prstDash val="solid"/>
-          </a:ln>
-        </p:spPr>
-        <p:txBody>
-          <a:bodyPr/>
-          <a:lstStyle/>
-          <a:p>
-            <a:endParaRPr lang="pt-PT"/>
-          </a:p>
-        </p:txBody>
-      </p:sp>
-      <p:sp>
-        <p:nvSpPr>
-          <p:cNvPr id="5" name="Text 3"/>
-          <p:cNvSpPr/>
-          <p:nvPr/>
-        </p:nvSpPr>
-        <p:spPr>
-          <a:xfrm>
-            <a:off x="457200" y="1005840"/>
-            <a:ext cx="2286000" cy="502920"/>
-          </a:xfrm>
-          <a:prstGeom prst="rect">
-            <a:avLst/>
-          </a:prstGeom>
-          <a:noFill/>
-          <a:ln/>
-        </p:spPr>
-        <p:txBody>
-          <a:bodyPr wrap="square" lIns="0" tIns="0" rIns="0" bIns="0" rtlCol="0" anchor="ctr"/>
-          <a:lstStyle/>
-          <a:p>
-            <a:pPr marL="0" indent="0" algn="ctr">
-              <a:buNone/>
-            </a:pPr>
-            <a:endParaRPr lang="en-US" sz="1300" dirty="0"/>
-          </a:p>
-        </p:txBody>
-      </p:sp>
-      <p:sp>
-        <p:nvSpPr>
-          <p:cNvPr id="6" name="Shape 4"/>
-          <p:cNvSpPr/>
-          <p:nvPr/>
-        </p:nvSpPr>
-        <p:spPr>
-          <a:xfrm>
-            <a:off x="2743200" y="1005840"/>
-            <a:ext cx="2743200" cy="502920"/>
-          </a:xfrm>
-          <a:prstGeom prst="rect">
-            <a:avLst/>
-          </a:prstGeom>
-          <a:solidFill>
-            <a:srgbClr val="1B6CA8"/>
-          </a:solidFill>
-          <a:ln w="12700">
-            <a:solidFill>
-              <a:srgbClr val="1B6CA8"/>
-            </a:solidFill>
-            <a:prstDash val="solid"/>
-          </a:ln>
-        </p:spPr>
-        <p:txBody>
-          <a:bodyPr/>
-          <a:lstStyle/>
-          <a:p>
-            <a:endParaRPr lang="pt-PT"/>
-          </a:p>
-        </p:txBody>
-      </p:sp>
-      <p:sp>
-        <p:nvSpPr>
-          <p:cNvPr id="7" name="Text 5"/>
-          <p:cNvSpPr/>
-          <p:nvPr/>
-        </p:nvSpPr>
-        <p:spPr>
-          <a:xfrm>
-            <a:off x="2743200" y="1005840"/>
-            <a:ext cx="2743200" cy="502920"/>
-          </a:xfrm>
-          <a:prstGeom prst="rect">
-            <a:avLst/>
-          </a:prstGeom>
-          <a:noFill/>
-          <a:ln/>
-        </p:spPr>
-        <p:txBody>
-          <a:bodyPr wrap="square" lIns="0" tIns="0" rIns="0" bIns="0" rtlCol="0" anchor="ctr"/>
-          <a:lstStyle/>
-          <a:p>
-            <a:pPr marL="0" indent="0" algn="ctr">
-              <a:buNone/>
-            </a:pPr>
-            <a:r>
-              <a:rPr lang="en-US" sz="1300" b="1" dirty="0">
-                <a:solidFill>
-                  <a:srgbClr val="FFFFFF"/>
-                </a:solidFill>
-              </a:rPr>
-              <a:t>📡  Signal</a:t>
-            </a:r>
-            <a:endParaRPr lang="en-US" sz="1300" dirty="0"/>
-          </a:p>
-        </p:txBody>
-      </p:sp>
-      <p:sp>
-        <p:nvSpPr>
-          <p:cNvPr id="8" name="Shape 6"/>
-          <p:cNvSpPr/>
-          <p:nvPr/>
-        </p:nvSpPr>
-        <p:spPr>
-          <a:xfrm>
-            <a:off x="5486400" y="1005840"/>
-            <a:ext cx="2743200" cy="502920"/>
-          </a:xfrm>
-          <a:prstGeom prst="rect">
-            <a:avLst/>
-          </a:prstGeom>
-          <a:solidFill>
-            <a:srgbClr val="2D9CDB"/>
-          </a:solidFill>
-          <a:ln w="12700">
-            <a:solidFill>
-              <a:srgbClr val="1B6CA8"/>
-            </a:solidFill>
-            <a:prstDash val="solid"/>
-          </a:ln>
-        </p:spPr>
-        <p:txBody>
-          <a:bodyPr/>
-          <a:lstStyle/>
-          <a:p>
-            <a:endParaRPr lang="pt-PT"/>
-          </a:p>
-        </p:txBody>
-      </p:sp>
-      <p:sp>
-        <p:nvSpPr>
-          <p:cNvPr id="9" name="Text 7"/>
-          <p:cNvSpPr/>
-          <p:nvPr/>
-        </p:nvSpPr>
-        <p:spPr>
-          <a:xfrm>
-            <a:off x="5486400" y="1005840"/>
-            <a:ext cx="2743200" cy="502920"/>
-          </a:xfrm>
-          <a:prstGeom prst="rect">
-            <a:avLst/>
-          </a:prstGeom>
-          <a:noFill/>
-          <a:ln/>
-        </p:spPr>
-        <p:txBody>
-          <a:bodyPr wrap="square" lIns="0" tIns="0" rIns="0" bIns="0" rtlCol="0" anchor="ctr"/>
-          <a:lstStyle/>
-          <a:p>
-            <a:pPr marL="0" indent="0" algn="ctr">
-              <a:buNone/>
-            </a:pPr>
-            <a:r>
-              <a:rPr lang="en-US" sz="1300" b="1" dirty="0">
-                <a:solidFill>
-                  <a:srgbClr val="FFFFFF"/>
-                </a:solidFill>
-              </a:rPr>
-              <a:t>🔍  Query</a:t>
-            </a:r>
-            <a:endParaRPr lang="en-US" sz="1300" dirty="0"/>
-          </a:p>
-        </p:txBody>
-      </p:sp>
-      <p:sp>
-        <p:nvSpPr>
-          <p:cNvPr id="10" name="Shape 8"/>
-          <p:cNvSpPr/>
-          <p:nvPr/>
-        </p:nvSpPr>
-        <p:spPr>
-          <a:xfrm>
-            <a:off x="457200" y="1508760"/>
-            <a:ext cx="2286000" cy="749808"/>
-          </a:xfrm>
-          <a:prstGeom prst="rect">
-            <a:avLst/>
-          </a:prstGeom>
-          <a:solidFill>
-            <a:srgbClr val="112236"/>
-          </a:solidFill>
-          <a:ln w="12700">
-            <a:solidFill>
-              <a:srgbClr val="1B6CA8"/>
-            </a:solidFill>
-            <a:prstDash val="solid"/>
-          </a:ln>
-        </p:spPr>
-        <p:txBody>
-          <a:bodyPr/>
-          <a:lstStyle/>
-          <a:p>
-            <a:endParaRPr lang="pt-PT"/>
-          </a:p>
-        </p:txBody>
-      </p:sp>
-      <p:sp>
-        <p:nvSpPr>
-          <p:cNvPr id="11" name="Text 9"/>
-          <p:cNvSpPr/>
-          <p:nvPr/>
-        </p:nvSpPr>
-        <p:spPr>
-          <a:xfrm>
-            <a:off x="548640" y="1508760"/>
-            <a:ext cx="2103120" cy="749808"/>
-          </a:xfrm>
-          <a:prstGeom prst="rect">
-            <a:avLst/>
-          </a:prstGeom>
-          <a:noFill/>
-          <a:ln/>
-        </p:spPr>
-        <p:txBody>
-          <a:bodyPr wrap="square" rtlCol="0" anchor="ctr"/>
-          <a:lstStyle/>
-          <a:p>
-            <a:pPr marL="0" indent="0">
-              <a:buNone/>
-            </a:pPr>
-            <a:r>
-              <a:rPr lang="en-US" sz="1200" dirty="0">
-                <a:solidFill>
-                  <a:srgbClr val="FFFFFF"/>
-                </a:solidFill>
-              </a:rPr>
-              <a:t>Tipo</a:t>
-            </a:r>
-            <a:endParaRPr lang="en-US" sz="1200" dirty="0"/>
-          </a:p>
-        </p:txBody>
-      </p:sp>
-      <p:sp>
-        <p:nvSpPr>
-          <p:cNvPr id="12" name="Shape 10"/>
-          <p:cNvSpPr/>
-          <p:nvPr/>
-        </p:nvSpPr>
-        <p:spPr>
-          <a:xfrm>
-            <a:off x="2743200" y="1508760"/>
-            <a:ext cx="2743200" cy="749808"/>
-          </a:xfrm>
-          <a:prstGeom prst="rect">
-            <a:avLst/>
-          </a:prstGeom>
-          <a:solidFill>
-            <a:srgbClr val="112236"/>
-          </a:solidFill>
-          <a:ln w="12700">
-            <a:solidFill>
-              <a:srgbClr val="1B6CA8"/>
-            </a:solidFill>
-            <a:prstDash val="solid"/>
-          </a:ln>
-        </p:spPr>
-        <p:txBody>
-          <a:bodyPr/>
-          <a:lstStyle/>
-          <a:p>
-            <a:endParaRPr lang="pt-PT"/>
-          </a:p>
-        </p:txBody>
-      </p:sp>
-      <p:sp>
-        <p:nvSpPr>
-          <p:cNvPr id="13" name="Text 11"/>
-          <p:cNvSpPr/>
-          <p:nvPr/>
-        </p:nvSpPr>
-        <p:spPr>
-          <a:xfrm>
-            <a:off x="2834640" y="1508760"/>
-            <a:ext cx="2560320" cy="749808"/>
-          </a:xfrm>
-          <a:prstGeom prst="rect">
-            <a:avLst/>
-          </a:prstGeom>
-          <a:noFill/>
-          <a:ln/>
-        </p:spPr>
-        <p:txBody>
-          <a:bodyPr wrap="square" rtlCol="0" anchor="ctr"/>
-          <a:lstStyle/>
-          <a:p>
-            <a:pPr marL="0" indent="0">
-              <a:buNone/>
-            </a:pPr>
-            <a:r>
-              <a:rPr lang="en-US" sz="1200" dirty="0">
-                <a:solidFill>
-                  <a:srgbClr val="FFFFFF"/>
-                </a:solidFill>
-              </a:rPr>
-              <a:t>Assíncrono</a:t>
-            </a:r>
-            <a:endParaRPr lang="en-US" sz="1200" dirty="0"/>
-          </a:p>
-        </p:txBody>
-      </p:sp>
-      <p:sp>
-        <p:nvSpPr>
-          <p:cNvPr id="14" name="Shape 12"/>
-          <p:cNvSpPr/>
-          <p:nvPr/>
-        </p:nvSpPr>
-        <p:spPr>
-          <a:xfrm>
-            <a:off x="5486400" y="1508760"/>
-            <a:ext cx="2743200" cy="749808"/>
-          </a:xfrm>
-          <a:prstGeom prst="rect">
-            <a:avLst/>
-          </a:prstGeom>
-          <a:solidFill>
-            <a:srgbClr val="112236"/>
-          </a:solidFill>
-          <a:ln w="12700">
-            <a:solidFill>
-              <a:srgbClr val="1B6CA8"/>
-            </a:solidFill>
-            <a:prstDash val="solid"/>
-          </a:ln>
-        </p:spPr>
-        <p:txBody>
-          <a:bodyPr/>
-          <a:lstStyle/>
-          <a:p>
-            <a:endParaRPr lang="pt-PT"/>
-          </a:p>
-        </p:txBody>
-      </p:sp>
-      <p:sp>
-        <p:nvSpPr>
-          <p:cNvPr id="15" name="Text 13"/>
-          <p:cNvSpPr/>
-          <p:nvPr/>
-        </p:nvSpPr>
-        <p:spPr>
-          <a:xfrm>
-            <a:off x="5577840" y="1508760"/>
-            <a:ext cx="2560320" cy="749808"/>
-          </a:xfrm>
-          <a:prstGeom prst="rect">
-            <a:avLst/>
-          </a:prstGeom>
-          <a:noFill/>
-          <a:ln/>
-        </p:spPr>
-        <p:txBody>
-          <a:bodyPr wrap="square" rtlCol="0" anchor="ctr"/>
-          <a:lstStyle/>
-          <a:p>
-            <a:pPr marL="0" indent="0">
-              <a:buNone/>
-            </a:pPr>
-            <a:r>
-              <a:rPr lang="en-US" sz="1200" dirty="0">
-                <a:solidFill>
-                  <a:srgbClr val="FFFFFF"/>
-                </a:solidFill>
-              </a:rPr>
-              <a:t>Síncrono</a:t>
-            </a:r>
-            <a:endParaRPr lang="en-US" sz="1200" dirty="0"/>
-          </a:p>
-        </p:txBody>
-      </p:sp>
-      <p:sp>
-        <p:nvSpPr>
-          <p:cNvPr id="16" name="Shape 14"/>
-          <p:cNvSpPr/>
-          <p:nvPr/>
-        </p:nvSpPr>
-        <p:spPr>
-          <a:xfrm>
-            <a:off x="457200" y="2258568"/>
-            <a:ext cx="2286000" cy="749808"/>
-          </a:xfrm>
-          <a:prstGeom prst="rect">
-            <a:avLst/>
-          </a:prstGeom>
-          <a:solidFill>
-            <a:srgbClr val="0D1B2A"/>
-          </a:solidFill>
-          <a:ln w="12700">
-            <a:solidFill>
-              <a:srgbClr val="1B6CA8"/>
-            </a:solidFill>
-            <a:prstDash val="solid"/>
-          </a:ln>
-        </p:spPr>
-        <p:txBody>
-          <a:bodyPr/>
-          <a:lstStyle/>
-          <a:p>
-            <a:endParaRPr lang="pt-PT"/>
-          </a:p>
-        </p:txBody>
-      </p:sp>
-      <p:sp>
-        <p:nvSpPr>
-          <p:cNvPr id="17" name="Text 15"/>
-          <p:cNvSpPr/>
-          <p:nvPr/>
-        </p:nvSpPr>
-        <p:spPr>
-          <a:xfrm>
-            <a:off x="548640" y="2258568"/>
-            <a:ext cx="2103120" cy="749808"/>
-          </a:xfrm>
-          <a:prstGeom prst="rect">
-            <a:avLst/>
-          </a:prstGeom>
-          <a:noFill/>
-          <a:ln/>
-        </p:spPr>
-        <p:txBody>
-          <a:bodyPr wrap="square" rtlCol="0" anchor="ctr"/>
-          <a:lstStyle/>
-          <a:p>
-            <a:pPr marL="0" indent="0">
-              <a:buNone/>
-            </a:pPr>
-            <a:r>
-              <a:rPr lang="en-US" sz="1200" dirty="0">
-                <a:solidFill>
-                  <a:srgbClr val="FFFFFF"/>
-                </a:solidFill>
-              </a:rPr>
-              <a:t>Cambia </a:t>
-            </a:r>
-            <a:r>
-              <a:rPr lang="en-US" sz="1200" dirty="0" err="1">
-                <a:solidFill>
-                  <a:srgbClr val="FFFFFF"/>
-                </a:solidFill>
-              </a:rPr>
-              <a:t>el</a:t>
-            </a:r>
-            <a:r>
-              <a:rPr lang="en-US" sz="1200" dirty="0">
-                <a:solidFill>
-                  <a:srgbClr val="FFFFFF"/>
-                </a:solidFill>
-              </a:rPr>
-              <a:t> </a:t>
-            </a:r>
-            <a:r>
-              <a:rPr lang="en-US" sz="1200" dirty="0" err="1">
-                <a:solidFill>
-                  <a:srgbClr val="FFFFFF"/>
-                </a:solidFill>
-              </a:rPr>
-              <a:t>estado</a:t>
-            </a:r>
-            <a:r>
-              <a:rPr lang="en-US" sz="1200" dirty="0">
-                <a:solidFill>
-                  <a:srgbClr val="FFFFFF"/>
-                </a:solidFill>
-              </a:rPr>
-              <a:t>?</a:t>
-            </a:r>
-            <a:endParaRPr lang="en-US" sz="1200" dirty="0"/>
-          </a:p>
-        </p:txBody>
-      </p:sp>
-      <p:sp>
-        <p:nvSpPr>
-          <p:cNvPr id="18" name="Shape 16"/>
-          <p:cNvSpPr/>
-          <p:nvPr/>
-        </p:nvSpPr>
-        <p:spPr>
-          <a:xfrm>
-            <a:off x="2743200" y="2258568"/>
-            <a:ext cx="2743200" cy="749808"/>
-          </a:xfrm>
-          <a:prstGeom prst="rect">
-            <a:avLst/>
-          </a:prstGeom>
-          <a:solidFill>
-            <a:srgbClr val="0D1B2A"/>
-          </a:solidFill>
-          <a:ln w="12700">
-            <a:solidFill>
-              <a:srgbClr val="1B6CA8"/>
-            </a:solidFill>
-            <a:prstDash val="solid"/>
-          </a:ln>
-        </p:spPr>
-        <p:txBody>
-          <a:bodyPr/>
-          <a:lstStyle/>
-          <a:p>
-            <a:endParaRPr lang="pt-PT"/>
-          </a:p>
-        </p:txBody>
-      </p:sp>
-      <p:sp>
-        <p:nvSpPr>
-          <p:cNvPr id="19" name="Text 17"/>
-          <p:cNvSpPr/>
-          <p:nvPr/>
-        </p:nvSpPr>
-        <p:spPr>
-          <a:xfrm>
-            <a:off x="2834640" y="2258568"/>
-            <a:ext cx="2560320" cy="749808"/>
-          </a:xfrm>
-          <a:prstGeom prst="rect">
-            <a:avLst/>
-          </a:prstGeom>
-          <a:noFill/>
-          <a:ln/>
-        </p:spPr>
-        <p:txBody>
-          <a:bodyPr wrap="square" rtlCol="0" anchor="ctr"/>
-          <a:lstStyle/>
-          <a:p>
-            <a:pPr marL="0" indent="0">
-              <a:buNone/>
-            </a:pPr>
-            <a:r>
-              <a:rPr lang="en-US" sz="1200" dirty="0">
-                <a:solidFill>
-                  <a:srgbClr val="FFFFFF"/>
-                </a:solidFill>
-              </a:rPr>
-              <a:t>✅  Si</a:t>
-            </a:r>
-            <a:endParaRPr lang="en-US" sz="1200" dirty="0"/>
-          </a:p>
-        </p:txBody>
-      </p:sp>
-      <p:sp>
-        <p:nvSpPr>
-          <p:cNvPr id="20" name="Shape 18"/>
-          <p:cNvSpPr/>
-          <p:nvPr/>
-        </p:nvSpPr>
-        <p:spPr>
-          <a:xfrm>
-            <a:off x="5486400" y="2258568"/>
-            <a:ext cx="2743200" cy="749808"/>
-          </a:xfrm>
-          <a:prstGeom prst="rect">
-            <a:avLst/>
-          </a:prstGeom>
-          <a:solidFill>
-            <a:srgbClr val="0D1B2A"/>
-          </a:solidFill>
-          <a:ln w="12700">
-            <a:solidFill>
-              <a:srgbClr val="1B6CA8"/>
-            </a:solidFill>
-            <a:prstDash val="solid"/>
-          </a:ln>
-        </p:spPr>
-        <p:txBody>
-          <a:bodyPr/>
-          <a:lstStyle/>
-          <a:p>
-            <a:endParaRPr lang="pt-PT" dirty="0"/>
-          </a:p>
-        </p:txBody>
-      </p:sp>
-      <p:sp>
-        <p:nvSpPr>
-          <p:cNvPr id="21" name="Text 19"/>
-          <p:cNvSpPr/>
-          <p:nvPr/>
-        </p:nvSpPr>
-        <p:spPr>
-          <a:xfrm>
-            <a:off x="5577840" y="2258568"/>
-            <a:ext cx="2560320" cy="749808"/>
-          </a:xfrm>
-          <a:prstGeom prst="rect">
-            <a:avLst/>
-          </a:prstGeom>
-          <a:noFill/>
-          <a:ln/>
-        </p:spPr>
-        <p:txBody>
-          <a:bodyPr wrap="square" rtlCol="0" anchor="ctr"/>
-          <a:lstStyle/>
-          <a:p>
-            <a:pPr marL="0" indent="0">
-              <a:buNone/>
-            </a:pPr>
-            <a:r>
-              <a:rPr lang="en-US" sz="1200" dirty="0">
-                <a:solidFill>
-                  <a:srgbClr val="FFFFFF"/>
-                </a:solidFill>
-              </a:rPr>
-              <a:t>❌  No</a:t>
-            </a:r>
-            <a:endParaRPr lang="en-US" sz="1200" dirty="0"/>
-          </a:p>
-        </p:txBody>
-      </p:sp>
-      <p:sp>
-        <p:nvSpPr>
-          <p:cNvPr id="22" name="Shape 20"/>
-          <p:cNvSpPr/>
-          <p:nvPr/>
-        </p:nvSpPr>
-        <p:spPr>
-          <a:xfrm>
-            <a:off x="457200" y="3008376"/>
-            <a:ext cx="2286000" cy="749808"/>
-          </a:xfrm>
-          <a:prstGeom prst="rect">
-            <a:avLst/>
-          </a:prstGeom>
-          <a:solidFill>
-            <a:srgbClr val="112236"/>
-          </a:solidFill>
-          <a:ln w="12700">
-            <a:solidFill>
-              <a:srgbClr val="1B6CA8"/>
-            </a:solidFill>
-            <a:prstDash val="solid"/>
-          </a:ln>
-        </p:spPr>
-        <p:txBody>
-          <a:bodyPr/>
-          <a:lstStyle/>
-          <a:p>
-            <a:endParaRPr lang="pt-PT"/>
-          </a:p>
-        </p:txBody>
-      </p:sp>
-      <p:sp>
-        <p:nvSpPr>
-          <p:cNvPr id="23" name="Text 21"/>
-          <p:cNvSpPr/>
-          <p:nvPr/>
-        </p:nvSpPr>
-        <p:spPr>
-          <a:xfrm>
-            <a:off x="548640" y="3008376"/>
-            <a:ext cx="2103120" cy="749808"/>
-          </a:xfrm>
-          <a:prstGeom prst="rect">
-            <a:avLst/>
-          </a:prstGeom>
-          <a:noFill/>
-          <a:ln/>
-        </p:spPr>
-        <p:txBody>
-          <a:bodyPr wrap="square" rtlCol="0" anchor="ctr"/>
-          <a:lstStyle/>
-          <a:p>
-            <a:pPr marL="0" indent="0">
-              <a:buNone/>
-            </a:pPr>
-            <a:r>
-              <a:rPr lang="en-US" sz="1200" dirty="0" err="1">
-                <a:solidFill>
-                  <a:srgbClr val="FFFFFF"/>
-                </a:solidFill>
-              </a:rPr>
-              <a:t>Aporta</a:t>
-            </a:r>
-            <a:r>
-              <a:rPr lang="en-US" sz="1200" dirty="0">
-                <a:solidFill>
-                  <a:srgbClr val="FFFFFF"/>
-                </a:solidFill>
-              </a:rPr>
-              <a:t> valor?</a:t>
-            </a:r>
-            <a:endParaRPr lang="en-US" sz="1200" dirty="0"/>
-          </a:p>
-        </p:txBody>
-      </p:sp>
-      <p:sp>
-        <p:nvSpPr>
-          <p:cNvPr id="24" name="Shape 22"/>
-          <p:cNvSpPr/>
-          <p:nvPr/>
-        </p:nvSpPr>
-        <p:spPr>
-          <a:xfrm>
-            <a:off x="2743200" y="3008376"/>
-            <a:ext cx="2743200" cy="749808"/>
-          </a:xfrm>
-          <a:prstGeom prst="rect">
-            <a:avLst/>
-          </a:prstGeom>
-          <a:solidFill>
-            <a:srgbClr val="112236"/>
-          </a:solidFill>
-          <a:ln w="12700">
-            <a:solidFill>
-              <a:srgbClr val="1B6CA8"/>
-            </a:solidFill>
-            <a:prstDash val="solid"/>
-          </a:ln>
-        </p:spPr>
-        <p:txBody>
-          <a:bodyPr/>
-          <a:lstStyle/>
-          <a:p>
-            <a:endParaRPr lang="pt-PT"/>
-          </a:p>
-        </p:txBody>
-      </p:sp>
-      <p:sp>
-        <p:nvSpPr>
-          <p:cNvPr id="25" name="Text 23"/>
-          <p:cNvSpPr/>
-          <p:nvPr/>
-        </p:nvSpPr>
-        <p:spPr>
-          <a:xfrm>
-            <a:off x="2834640" y="3008376"/>
-            <a:ext cx="2560320" cy="749808"/>
-          </a:xfrm>
-          <a:prstGeom prst="rect">
-            <a:avLst/>
-          </a:prstGeom>
-          <a:noFill/>
-          <a:ln/>
-        </p:spPr>
-        <p:txBody>
-          <a:bodyPr wrap="square" rtlCol="0" anchor="ctr"/>
-          <a:lstStyle/>
-          <a:p>
-            <a:pPr marL="0" indent="0">
-              <a:buNone/>
-            </a:pPr>
-            <a:r>
-              <a:rPr lang="en-US" sz="1200" dirty="0">
-                <a:solidFill>
-                  <a:srgbClr val="FFFFFF"/>
-                </a:solidFill>
-              </a:rPr>
-              <a:t>❌  No</a:t>
-            </a:r>
-            <a:endParaRPr lang="en-US" sz="1200" dirty="0"/>
-          </a:p>
-        </p:txBody>
-      </p:sp>
-      <p:sp>
-        <p:nvSpPr>
-          <p:cNvPr id="26" name="Shape 24"/>
-          <p:cNvSpPr/>
-          <p:nvPr/>
-        </p:nvSpPr>
-        <p:spPr>
-          <a:xfrm>
-            <a:off x="5486400" y="3008376"/>
-            <a:ext cx="2743200" cy="749808"/>
-          </a:xfrm>
-          <a:prstGeom prst="rect">
-            <a:avLst/>
-          </a:prstGeom>
-          <a:solidFill>
-            <a:srgbClr val="112236"/>
-          </a:solidFill>
-          <a:ln w="12700">
-            <a:solidFill>
-              <a:srgbClr val="1B6CA8"/>
-            </a:solidFill>
-            <a:prstDash val="solid"/>
-          </a:ln>
-        </p:spPr>
-        <p:txBody>
-          <a:bodyPr/>
-          <a:lstStyle/>
-          <a:p>
-            <a:endParaRPr lang="pt-PT"/>
-          </a:p>
-        </p:txBody>
-      </p:sp>
-      <p:sp>
-        <p:nvSpPr>
-          <p:cNvPr id="27" name="Text 25"/>
-          <p:cNvSpPr/>
-          <p:nvPr/>
-        </p:nvSpPr>
-        <p:spPr>
-          <a:xfrm>
-            <a:off x="5577840" y="3008376"/>
-            <a:ext cx="2560320" cy="749808"/>
-          </a:xfrm>
-          <a:prstGeom prst="rect">
-            <a:avLst/>
-          </a:prstGeom>
-          <a:noFill/>
-          <a:ln/>
-        </p:spPr>
-        <p:txBody>
-          <a:bodyPr wrap="square" rtlCol="0" anchor="ctr"/>
-          <a:lstStyle/>
-          <a:p>
-            <a:pPr marL="0" indent="0">
-              <a:buNone/>
-            </a:pPr>
-            <a:r>
-              <a:rPr lang="en-US" sz="1200" dirty="0">
-                <a:solidFill>
-                  <a:srgbClr val="FFFFFF"/>
-                </a:solidFill>
-              </a:rPr>
-              <a:t>✅  Si</a:t>
-            </a:r>
-            <a:endParaRPr lang="en-US" sz="1200" dirty="0"/>
-          </a:p>
-        </p:txBody>
-      </p:sp>
-      <p:sp>
-        <p:nvSpPr>
-          <p:cNvPr id="28" name="Shape 26"/>
-          <p:cNvSpPr/>
-          <p:nvPr/>
-        </p:nvSpPr>
-        <p:spPr>
-          <a:xfrm>
-            <a:off x="457200" y="3758184"/>
-            <a:ext cx="2286000" cy="749808"/>
-          </a:xfrm>
-          <a:prstGeom prst="rect">
-            <a:avLst/>
-          </a:prstGeom>
-          <a:solidFill>
-            <a:srgbClr val="0D1B2A"/>
-          </a:solidFill>
-          <a:ln w="12700">
-            <a:solidFill>
-              <a:srgbClr val="1B6CA8"/>
-            </a:solidFill>
-            <a:prstDash val="solid"/>
-          </a:ln>
-        </p:spPr>
-        <p:txBody>
-          <a:bodyPr/>
-          <a:lstStyle/>
-          <a:p>
-            <a:endParaRPr lang="pt-PT"/>
-          </a:p>
-        </p:txBody>
-      </p:sp>
-      <p:sp>
-        <p:nvSpPr>
-          <p:cNvPr id="29" name="Text 27"/>
-          <p:cNvSpPr/>
-          <p:nvPr/>
-        </p:nvSpPr>
-        <p:spPr>
-          <a:xfrm>
-            <a:off x="548640" y="3758184"/>
-            <a:ext cx="2103120" cy="749808"/>
-          </a:xfrm>
-          <a:prstGeom prst="rect">
-            <a:avLst/>
-          </a:prstGeom>
-          <a:noFill/>
-          <a:ln/>
-        </p:spPr>
-        <p:txBody>
-          <a:bodyPr wrap="square" rtlCol="0" anchor="ctr"/>
-          <a:lstStyle/>
-          <a:p>
-            <a:pPr marL="0" indent="0">
-              <a:buNone/>
-            </a:pPr>
-            <a:r>
-              <a:rPr lang="en-US" sz="1200" dirty="0">
-                <a:solidFill>
-                  <a:srgbClr val="FFFFFF"/>
-                </a:solidFill>
-              </a:rPr>
-              <a:t>Caso de uso</a:t>
-            </a:r>
-            <a:endParaRPr lang="en-US" sz="1200" dirty="0"/>
-          </a:p>
-        </p:txBody>
-      </p:sp>
-      <p:sp>
-        <p:nvSpPr>
-          <p:cNvPr id="30" name="Shape 28"/>
-          <p:cNvSpPr/>
-          <p:nvPr/>
-        </p:nvSpPr>
-        <p:spPr>
-          <a:xfrm>
-            <a:off x="2743200" y="3758184"/>
-            <a:ext cx="2743200" cy="749808"/>
-          </a:xfrm>
-          <a:prstGeom prst="rect">
-            <a:avLst/>
-          </a:prstGeom>
-          <a:solidFill>
-            <a:srgbClr val="0D1B2A"/>
-          </a:solidFill>
-          <a:ln w="12700">
-            <a:solidFill>
-              <a:srgbClr val="1B6CA8"/>
-            </a:solidFill>
-            <a:prstDash val="solid"/>
-          </a:ln>
-        </p:spPr>
-        <p:txBody>
-          <a:bodyPr/>
-          <a:lstStyle/>
-          <a:p>
-            <a:endParaRPr lang="pt-PT"/>
-          </a:p>
-        </p:txBody>
-      </p:sp>
-      <p:sp>
-        <p:nvSpPr>
-          <p:cNvPr id="31" name="Text 29"/>
-          <p:cNvSpPr/>
-          <p:nvPr/>
-        </p:nvSpPr>
-        <p:spPr>
-          <a:xfrm>
-            <a:off x="2834640" y="3758184"/>
-            <a:ext cx="2560320" cy="749808"/>
-          </a:xfrm>
-          <a:prstGeom prst="rect">
-            <a:avLst/>
-          </a:prstGeom>
-          <a:noFill/>
-          <a:ln/>
-        </p:spPr>
-        <p:txBody>
-          <a:bodyPr wrap="square" rtlCol="0" anchor="ctr"/>
-          <a:lstStyle/>
-          <a:p>
-            <a:pPr marL="0" indent="0">
-              <a:buNone/>
-            </a:pPr>
-            <a:r>
-              <a:rPr lang="en-US" sz="1200" dirty="0" err="1">
-                <a:solidFill>
-                  <a:srgbClr val="FFFFFF"/>
-                </a:solidFill>
-              </a:rPr>
-              <a:t>Cancelar</a:t>
-            </a:r>
-            <a:r>
-              <a:rPr lang="en-US" sz="1200" dirty="0">
-                <a:solidFill>
-                  <a:srgbClr val="FFFFFF"/>
-                </a:solidFill>
-              </a:rPr>
-              <a:t> </a:t>
-            </a:r>
-            <a:r>
-              <a:rPr lang="en-US" sz="1200" dirty="0" err="1">
-                <a:solidFill>
-                  <a:srgbClr val="FFFFFF"/>
-                </a:solidFill>
-              </a:rPr>
-              <a:t>pedido</a:t>
-            </a:r>
-            <a:r>
-              <a:rPr lang="en-US" sz="1200" dirty="0">
-                <a:solidFill>
-                  <a:srgbClr val="FFFFFF"/>
-                </a:solidFill>
-              </a:rPr>
-              <a:t>, </a:t>
-            </a:r>
-            <a:r>
-              <a:rPr lang="en-US" sz="1200" dirty="0" err="1">
-                <a:solidFill>
-                  <a:srgbClr val="FFFFFF"/>
-                </a:solidFill>
-              </a:rPr>
-              <a:t>aprobar</a:t>
-            </a:r>
-            <a:r>
-              <a:rPr lang="en-US" sz="1200" dirty="0">
-                <a:solidFill>
-                  <a:srgbClr val="FFFFFF"/>
-                </a:solidFill>
-              </a:rPr>
-              <a:t> </a:t>
-            </a:r>
-            <a:r>
-              <a:rPr lang="en-US" sz="1200" dirty="0" err="1">
-                <a:solidFill>
-                  <a:srgbClr val="FFFFFF"/>
-                </a:solidFill>
-              </a:rPr>
-              <a:t>proceso</a:t>
-            </a:r>
-            <a:endParaRPr lang="en-US" sz="1200" dirty="0"/>
-          </a:p>
-        </p:txBody>
-      </p:sp>
-      <p:sp>
-        <p:nvSpPr>
-          <p:cNvPr id="32" name="Shape 30"/>
-          <p:cNvSpPr/>
-          <p:nvPr/>
-        </p:nvSpPr>
-        <p:spPr>
-          <a:xfrm>
-            <a:off x="5486400" y="3758184"/>
-            <a:ext cx="2743200" cy="749808"/>
-          </a:xfrm>
-          <a:prstGeom prst="rect">
-            <a:avLst/>
-          </a:prstGeom>
-          <a:solidFill>
-            <a:srgbClr val="0D1B2A"/>
-          </a:solidFill>
-          <a:ln w="12700">
-            <a:solidFill>
-              <a:srgbClr val="1B6CA8"/>
-            </a:solidFill>
-            <a:prstDash val="solid"/>
-          </a:ln>
-        </p:spPr>
-        <p:txBody>
-          <a:bodyPr/>
-          <a:lstStyle/>
-          <a:p>
-            <a:endParaRPr lang="pt-PT"/>
-          </a:p>
-        </p:txBody>
-      </p:sp>
-      <p:sp>
-        <p:nvSpPr>
-          <p:cNvPr id="33" name="Text 31"/>
-          <p:cNvSpPr/>
-          <p:nvPr/>
-        </p:nvSpPr>
-        <p:spPr>
-          <a:xfrm>
-            <a:off x="5577840" y="3758184"/>
-            <a:ext cx="2560320" cy="749808"/>
-          </a:xfrm>
-          <a:prstGeom prst="rect">
-            <a:avLst/>
-          </a:prstGeom>
-          <a:noFill/>
-          <a:ln/>
-        </p:spPr>
-        <p:txBody>
-          <a:bodyPr wrap="square" rtlCol="0" anchor="ctr"/>
-          <a:lstStyle/>
-          <a:p>
-            <a:pPr marL="0" indent="0">
-              <a:buNone/>
-            </a:pPr>
-            <a:r>
-              <a:rPr lang="en-US" sz="1200" dirty="0" err="1">
-                <a:solidFill>
-                  <a:srgbClr val="FFFFFF"/>
-                </a:solidFill>
-              </a:rPr>
-              <a:t>Consultar</a:t>
-            </a:r>
-            <a:r>
-              <a:rPr lang="en-US" sz="1200" dirty="0">
-                <a:solidFill>
-                  <a:srgbClr val="FFFFFF"/>
-                </a:solidFill>
-              </a:rPr>
-              <a:t> </a:t>
-            </a:r>
-            <a:r>
-              <a:rPr lang="en-US" sz="1200" dirty="0" err="1">
-                <a:solidFill>
-                  <a:srgbClr val="FFFFFF"/>
-                </a:solidFill>
-              </a:rPr>
-              <a:t>estado</a:t>
-            </a:r>
-            <a:r>
-              <a:rPr lang="en-US" sz="1200" dirty="0">
-                <a:solidFill>
-                  <a:srgbClr val="FFFFFF"/>
-                </a:solidFill>
-              </a:rPr>
-              <a:t>, </a:t>
-            </a:r>
-            <a:r>
-              <a:rPr lang="en-US" sz="1200" dirty="0" err="1">
-                <a:solidFill>
-                  <a:srgbClr val="FFFFFF"/>
-                </a:solidFill>
-              </a:rPr>
-              <a:t>ver</a:t>
-            </a:r>
-            <a:r>
-              <a:rPr lang="en-US" sz="1200" dirty="0">
-                <a:solidFill>
-                  <a:srgbClr val="FFFFFF"/>
-                </a:solidFill>
-              </a:rPr>
-              <a:t> </a:t>
-            </a:r>
-            <a:r>
-              <a:rPr lang="en-US" sz="1200" dirty="0" err="1">
-                <a:solidFill>
-                  <a:srgbClr val="FFFFFF"/>
-                </a:solidFill>
-              </a:rPr>
-              <a:t>progreso</a:t>
-            </a:r>
-            <a:endParaRPr lang="en-US" sz="1200" dirty="0"/>
-          </a:p>
-        </p:txBody>
-      </p:sp>
-      <p:sp>
-        <p:nvSpPr>
-          <p:cNvPr id="34" name="Shape 32"/>
-          <p:cNvSpPr/>
-          <p:nvPr/>
-        </p:nvSpPr>
-        <p:spPr>
-          <a:xfrm>
-            <a:off x="457200" y="4617720"/>
-            <a:ext cx="8229600" cy="347472"/>
-          </a:xfrm>
-          <a:prstGeom prst="rect">
-            <a:avLst/>
-          </a:prstGeom>
-          <a:solidFill>
-            <a:srgbClr val="1B6CA8"/>
-          </a:solidFill>
-          <a:ln w="12700">
-            <a:solidFill>
-              <a:srgbClr val="1B6CA8"/>
-            </a:solidFill>
-            <a:prstDash val="solid"/>
-          </a:ln>
-        </p:spPr>
-        <p:txBody>
-          <a:bodyPr/>
-          <a:lstStyle/>
-          <a:p>
-            <a:endParaRPr lang="pt-PT"/>
-          </a:p>
-        </p:txBody>
-      </p:sp>
-      <p:sp>
-        <p:nvSpPr>
-          <p:cNvPr id="35" name="Text 33"/>
-          <p:cNvSpPr/>
-          <p:nvPr/>
-        </p:nvSpPr>
-        <p:spPr>
-          <a:xfrm>
-            <a:off x="548640" y="4617720"/>
-            <a:ext cx="8046720" cy="347472"/>
-          </a:xfrm>
-          <a:prstGeom prst="rect">
-            <a:avLst/>
-          </a:prstGeom>
-          <a:noFill/>
-          <a:ln/>
-        </p:spPr>
-        <p:txBody>
-          <a:bodyPr wrap="square" rtlCol="0" anchor="ctr"/>
-          <a:lstStyle/>
-          <a:p>
-            <a:pPr marL="0" indent="0">
-              <a:buNone/>
-            </a:pPr>
-            <a:r>
-              <a:rPr lang="en-US" sz="1100" i="1" dirty="0">
-                <a:solidFill>
-                  <a:srgbClr val="FFFFFF"/>
-                </a:solidFill>
-              </a:rPr>
-              <a:t>💡  Usa Signal para agir sobre um workflow em execução, e Query para observar o seu estado.</a:t>
-            </a:r>
-            <a:endParaRPr lang="en-US" sz="1100" dirty="0"/>
-          </a:p>
-        </p:txBody>
-      </p:sp>
-    </p:spTree>
-  </p:cSld>
-  <p:clrMapOvr>
-    <a:masterClrMapping/>
-  </p:clrMapOvr>
-</p:sld>
-</file>
-
-<file path=ppt/slides/slide9.xml><?xml version="1.0" encoding="utf-8"?>
 <p:sld xmlns:a="http://schemas.openxmlformats.org/drawingml/2006/main" xmlns:r="http://schemas.openxmlformats.org/officeDocument/2006/relationships" xmlns:p="http://schemas.openxmlformats.org/presentationml/2006/main">
   <p:cSld name="Slide 9">
     <p:bg>
@@ -15529,7 +12322,7 @@
                   <a:srgbClr val="FFFFFF"/>
                 </a:solidFill>
               </a:rPr>
-              <a:t>05  / </a:t>
+              <a:t>06  / </a:t>
             </a:r>
             <a:r>
               <a:rPr lang="en-US" sz="2400" b="1" dirty="0" err="1">
@@ -15553,14 +12346,20 @@
       </p:sp>
       <p:sp>
         <p:nvSpPr>
-          <p:cNvPr id="4" name="Shape 2"/>
-          <p:cNvSpPr/>
-          <p:nvPr/>
-        </p:nvSpPr>
-        <p:spPr>
-          <a:xfrm>
-            <a:off x="255909" y="1005840"/>
-            <a:ext cx="2834640" cy="1463040"/>
+          <p:cNvPr id="28" name="Shape 2">
+            <a:extLst>
+              <a:ext uri="{FF2B5EF4-FFF2-40B4-BE49-F238E27FC236}">
+                <a16:creationId xmlns:a16="http://schemas.microsoft.com/office/drawing/2014/main" id="{19343134-B4A6-55F6-194B-B3E7B92439FB}"/>
+              </a:ext>
+            </a:extLst>
+          </p:cNvPr>
+          <p:cNvSpPr/>
+          <p:nvPr/>
+        </p:nvSpPr>
+        <p:spPr>
+          <a:xfrm>
+            <a:off x="513481" y="1005840"/>
+            <a:ext cx="2520000" cy="1440000"/>
           </a:xfrm>
           <a:prstGeom prst="rect">
             <a:avLst/>
@@ -15592,14 +12391,20 @@
       </p:sp>
       <p:sp>
         <p:nvSpPr>
-          <p:cNvPr id="5" name="Shape 3"/>
-          <p:cNvSpPr/>
-          <p:nvPr/>
-        </p:nvSpPr>
-        <p:spPr>
-          <a:xfrm>
-            <a:off x="255909" y="1005840"/>
-            <a:ext cx="2834640" cy="411480"/>
+          <p:cNvPr id="29" name="Shape 3">
+            <a:extLst>
+              <a:ext uri="{FF2B5EF4-FFF2-40B4-BE49-F238E27FC236}">
+                <a16:creationId xmlns:a16="http://schemas.microsoft.com/office/drawing/2014/main" id="{9108FFB9-C11E-521D-6BB0-41C842CF3EC9}"/>
+              </a:ext>
+            </a:extLst>
+          </p:cNvPr>
+          <p:cNvSpPr/>
+          <p:nvPr/>
+        </p:nvSpPr>
+        <p:spPr>
+          <a:xfrm>
+            <a:off x="513481" y="1005840"/>
+            <a:ext cx="2520000" cy="411480"/>
           </a:xfrm>
           <a:prstGeom prst="rect">
             <a:avLst/>
@@ -15624,14 +12429,20 @@
       </p:sp>
       <p:sp>
         <p:nvSpPr>
-          <p:cNvPr id="6" name="Text 4"/>
-          <p:cNvSpPr/>
-          <p:nvPr/>
-        </p:nvSpPr>
-        <p:spPr>
-          <a:xfrm>
-            <a:off x="255909" y="1005840"/>
-            <a:ext cx="2834640" cy="411480"/>
+          <p:cNvPr id="30" name="Text 4">
+            <a:extLst>
+              <a:ext uri="{FF2B5EF4-FFF2-40B4-BE49-F238E27FC236}">
+                <a16:creationId xmlns:a16="http://schemas.microsoft.com/office/drawing/2014/main" id="{1B23EEE6-1C03-A9D6-512F-D0A104757B0A}"/>
+              </a:ext>
+            </a:extLst>
+          </p:cNvPr>
+          <p:cNvSpPr/>
+          <p:nvPr/>
+        </p:nvSpPr>
+        <p:spPr>
+          <a:xfrm>
+            <a:off x="513480" y="1005840"/>
+            <a:ext cx="2468881" cy="411480"/>
           </a:xfrm>
           <a:prstGeom prst="rect">
             <a:avLst/>
@@ -15660,14 +12471,20 @@
       </p:sp>
       <p:sp>
         <p:nvSpPr>
-          <p:cNvPr id="7" name="Text 5"/>
-          <p:cNvSpPr/>
-          <p:nvPr/>
-        </p:nvSpPr>
-        <p:spPr>
-          <a:xfrm>
-            <a:off x="347349" y="1463040"/>
-            <a:ext cx="2651760" cy="914400"/>
+          <p:cNvPr id="31" name="Text 5">
+            <a:extLst>
+              <a:ext uri="{FF2B5EF4-FFF2-40B4-BE49-F238E27FC236}">
+                <a16:creationId xmlns:a16="http://schemas.microsoft.com/office/drawing/2014/main" id="{5A6AFD64-1D12-8FDB-882D-BC7F3F3CFF1A}"/>
+              </a:ext>
+            </a:extLst>
+          </p:cNvPr>
+          <p:cNvSpPr/>
+          <p:nvPr/>
+        </p:nvSpPr>
+        <p:spPr>
+          <a:xfrm>
+            <a:off x="604921" y="1463040"/>
+            <a:ext cx="2309597" cy="914400"/>
           </a:xfrm>
           <a:prstGeom prst="rect">
             <a:avLst/>
@@ -15752,14 +12569,20 @@
       </p:sp>
       <p:sp>
         <p:nvSpPr>
-          <p:cNvPr id="8" name="Shape 6"/>
-          <p:cNvSpPr/>
-          <p:nvPr/>
-        </p:nvSpPr>
-        <p:spPr>
-          <a:xfrm>
-            <a:off x="3273429" y="1005840"/>
-            <a:ext cx="2834640" cy="1463040"/>
+          <p:cNvPr id="32" name="Shape 6">
+            <a:extLst>
+              <a:ext uri="{FF2B5EF4-FFF2-40B4-BE49-F238E27FC236}">
+                <a16:creationId xmlns:a16="http://schemas.microsoft.com/office/drawing/2014/main" id="{033A41B7-7866-68C7-C034-CB27653E2E01}"/>
+              </a:ext>
+            </a:extLst>
+          </p:cNvPr>
+          <p:cNvSpPr/>
+          <p:nvPr/>
+        </p:nvSpPr>
+        <p:spPr>
+          <a:xfrm>
+            <a:off x="3234806" y="1005840"/>
+            <a:ext cx="2520000" cy="1440000"/>
           </a:xfrm>
           <a:prstGeom prst="rect">
             <a:avLst/>
@@ -15791,14 +12614,20 @@
       </p:sp>
       <p:sp>
         <p:nvSpPr>
-          <p:cNvPr id="9" name="Shape 7"/>
-          <p:cNvSpPr/>
-          <p:nvPr/>
-        </p:nvSpPr>
-        <p:spPr>
-          <a:xfrm>
-            <a:off x="3273429" y="1005840"/>
-            <a:ext cx="2834640" cy="411480"/>
+          <p:cNvPr id="33" name="Shape 7">
+            <a:extLst>
+              <a:ext uri="{FF2B5EF4-FFF2-40B4-BE49-F238E27FC236}">
+                <a16:creationId xmlns:a16="http://schemas.microsoft.com/office/drawing/2014/main" id="{F6B13CD8-3A3E-3841-D97A-6995024083E2}"/>
+              </a:ext>
+            </a:extLst>
+          </p:cNvPr>
+          <p:cNvSpPr/>
+          <p:nvPr/>
+        </p:nvSpPr>
+        <p:spPr>
+          <a:xfrm>
+            <a:off x="3234806" y="1005840"/>
+            <a:ext cx="2520000" cy="411480"/>
           </a:xfrm>
           <a:prstGeom prst="rect">
             <a:avLst/>
@@ -15823,14 +12652,20 @@
       </p:sp>
       <p:sp>
         <p:nvSpPr>
-          <p:cNvPr id="10" name="Text 8"/>
-          <p:cNvSpPr/>
-          <p:nvPr/>
-        </p:nvSpPr>
-        <p:spPr>
-          <a:xfrm>
-            <a:off x="3273429" y="1005840"/>
-            <a:ext cx="2834640" cy="411480"/>
+          <p:cNvPr id="34" name="Text 8">
+            <a:extLst>
+              <a:ext uri="{FF2B5EF4-FFF2-40B4-BE49-F238E27FC236}">
+                <a16:creationId xmlns:a16="http://schemas.microsoft.com/office/drawing/2014/main" id="{4DC0F11D-8D41-48B6-3F44-98C39AD5526D}"/>
+              </a:ext>
+            </a:extLst>
+          </p:cNvPr>
+          <p:cNvSpPr/>
+          <p:nvPr/>
+        </p:nvSpPr>
+        <p:spPr>
+          <a:xfrm>
+            <a:off x="3234805" y="1005840"/>
+            <a:ext cx="2451221" cy="411480"/>
           </a:xfrm>
           <a:prstGeom prst="rect">
             <a:avLst/>
@@ -15859,14 +12694,20 @@
       </p:sp>
       <p:sp>
         <p:nvSpPr>
-          <p:cNvPr id="11" name="Text 9"/>
-          <p:cNvSpPr/>
-          <p:nvPr/>
-        </p:nvSpPr>
-        <p:spPr>
-          <a:xfrm>
-            <a:off x="3364869" y="1463040"/>
-            <a:ext cx="2651760" cy="914400"/>
+          <p:cNvPr id="35" name="Text 9">
+            <a:extLst>
+              <a:ext uri="{FF2B5EF4-FFF2-40B4-BE49-F238E27FC236}">
+                <a16:creationId xmlns:a16="http://schemas.microsoft.com/office/drawing/2014/main" id="{DDA3515C-FE5C-CF9B-C117-4B551A39293F}"/>
+              </a:ext>
+            </a:extLst>
+          </p:cNvPr>
+          <p:cNvSpPr/>
+          <p:nvPr/>
+        </p:nvSpPr>
+        <p:spPr>
+          <a:xfrm>
+            <a:off x="3326246" y="1463040"/>
+            <a:ext cx="2359780" cy="914400"/>
           </a:xfrm>
           <a:prstGeom prst="rect">
             <a:avLst/>
@@ -15951,14 +12792,20 @@
       </p:sp>
       <p:sp>
         <p:nvSpPr>
-          <p:cNvPr id="12" name="Shape 10"/>
-          <p:cNvSpPr/>
-          <p:nvPr/>
-        </p:nvSpPr>
-        <p:spPr>
-          <a:xfrm>
-            <a:off x="255909" y="2834640"/>
-            <a:ext cx="2834640" cy="1463040"/>
+          <p:cNvPr id="36" name="Shape 10">
+            <a:extLst>
+              <a:ext uri="{FF2B5EF4-FFF2-40B4-BE49-F238E27FC236}">
+                <a16:creationId xmlns:a16="http://schemas.microsoft.com/office/drawing/2014/main" id="{417E4831-F382-94B7-540C-DDAFD178A2BA}"/>
+              </a:ext>
+            </a:extLst>
+          </p:cNvPr>
+          <p:cNvSpPr/>
+          <p:nvPr/>
+        </p:nvSpPr>
+        <p:spPr>
+          <a:xfrm>
+            <a:off x="5938302" y="1007097"/>
+            <a:ext cx="2520000" cy="1440000"/>
           </a:xfrm>
           <a:prstGeom prst="rect">
             <a:avLst/>
@@ -15990,14 +12837,20 @@
       </p:sp>
       <p:sp>
         <p:nvSpPr>
-          <p:cNvPr id="13" name="Shape 11"/>
-          <p:cNvSpPr/>
-          <p:nvPr/>
-        </p:nvSpPr>
-        <p:spPr>
-          <a:xfrm>
-            <a:off x="255909" y="2834640"/>
-            <a:ext cx="2834640" cy="411480"/>
+          <p:cNvPr id="37" name="Shape 11">
+            <a:extLst>
+              <a:ext uri="{FF2B5EF4-FFF2-40B4-BE49-F238E27FC236}">
+                <a16:creationId xmlns:a16="http://schemas.microsoft.com/office/drawing/2014/main" id="{68EF1BD2-E6E0-957D-F2B5-06769CD0F68D}"/>
+              </a:ext>
+            </a:extLst>
+          </p:cNvPr>
+          <p:cNvSpPr/>
+          <p:nvPr/>
+        </p:nvSpPr>
+        <p:spPr>
+          <a:xfrm>
+            <a:off x="5938302" y="1007097"/>
+            <a:ext cx="2520000" cy="411480"/>
           </a:xfrm>
           <a:prstGeom prst="rect">
             <a:avLst/>
@@ -16022,14 +12875,20 @@
       </p:sp>
       <p:sp>
         <p:nvSpPr>
-          <p:cNvPr id="14" name="Text 12"/>
-          <p:cNvSpPr/>
-          <p:nvPr/>
-        </p:nvSpPr>
-        <p:spPr>
-          <a:xfrm>
-            <a:off x="255909" y="2834640"/>
-            <a:ext cx="2834640" cy="411480"/>
+          <p:cNvPr id="38" name="Text 12">
+            <a:extLst>
+              <a:ext uri="{FF2B5EF4-FFF2-40B4-BE49-F238E27FC236}">
+                <a16:creationId xmlns:a16="http://schemas.microsoft.com/office/drawing/2014/main" id="{42ADB97C-137F-44F5-1C9A-42DEE5B6BC2B}"/>
+              </a:ext>
+            </a:extLst>
+          </p:cNvPr>
+          <p:cNvSpPr/>
+          <p:nvPr/>
+        </p:nvSpPr>
+        <p:spPr>
+          <a:xfrm>
+            <a:off x="5952474" y="1007097"/>
+            <a:ext cx="2505827" cy="411480"/>
           </a:xfrm>
           <a:prstGeom prst="rect">
             <a:avLst/>
@@ -16058,14 +12917,20 @@
       </p:sp>
       <p:sp>
         <p:nvSpPr>
-          <p:cNvPr id="15" name="Text 13"/>
-          <p:cNvSpPr/>
-          <p:nvPr/>
-        </p:nvSpPr>
-        <p:spPr>
-          <a:xfrm>
-            <a:off x="347349" y="3291840"/>
-            <a:ext cx="2651760" cy="914400"/>
+          <p:cNvPr id="39" name="Text 13">
+            <a:extLst>
+              <a:ext uri="{FF2B5EF4-FFF2-40B4-BE49-F238E27FC236}">
+                <a16:creationId xmlns:a16="http://schemas.microsoft.com/office/drawing/2014/main" id="{A1A83C7A-4FB4-35A2-F36C-857A1A9C661C}"/>
+              </a:ext>
+            </a:extLst>
+          </p:cNvPr>
+          <p:cNvSpPr/>
+          <p:nvPr/>
+        </p:nvSpPr>
+        <p:spPr>
+          <a:xfrm>
+            <a:off x="6029742" y="1464297"/>
+            <a:ext cx="2380172" cy="914400"/>
           </a:xfrm>
           <a:prstGeom prst="rect">
             <a:avLst/>
@@ -16158,14 +13023,20 @@
       </p:sp>
       <p:sp>
         <p:nvSpPr>
-          <p:cNvPr id="16" name="Shape 14"/>
-          <p:cNvSpPr/>
-          <p:nvPr/>
-        </p:nvSpPr>
-        <p:spPr>
-          <a:xfrm>
-            <a:off x="3273429" y="2834640"/>
-            <a:ext cx="2834640" cy="1463040"/>
+          <p:cNvPr id="40" name="Shape 14">
+            <a:extLst>
+              <a:ext uri="{FF2B5EF4-FFF2-40B4-BE49-F238E27FC236}">
+                <a16:creationId xmlns:a16="http://schemas.microsoft.com/office/drawing/2014/main" id="{3CBD51CE-9B01-DF36-A701-CA08A6A096B3}"/>
+              </a:ext>
+            </a:extLst>
+          </p:cNvPr>
+          <p:cNvSpPr/>
+          <p:nvPr/>
+        </p:nvSpPr>
+        <p:spPr>
+          <a:xfrm>
+            <a:off x="5938298" y="2747917"/>
+            <a:ext cx="2520000" cy="1440000"/>
           </a:xfrm>
           <a:prstGeom prst="rect">
             <a:avLst/>
@@ -16197,14 +13068,20 @@
       </p:sp>
       <p:sp>
         <p:nvSpPr>
-          <p:cNvPr id="17" name="Shape 15"/>
-          <p:cNvSpPr/>
-          <p:nvPr/>
-        </p:nvSpPr>
-        <p:spPr>
-          <a:xfrm>
-            <a:off x="3273429" y="2834640"/>
-            <a:ext cx="2834640" cy="411480"/>
+          <p:cNvPr id="41" name="Shape 15">
+            <a:extLst>
+              <a:ext uri="{FF2B5EF4-FFF2-40B4-BE49-F238E27FC236}">
+                <a16:creationId xmlns:a16="http://schemas.microsoft.com/office/drawing/2014/main" id="{0DB29310-EE0E-FC1E-D001-3320E6C147FB}"/>
+              </a:ext>
+            </a:extLst>
+          </p:cNvPr>
+          <p:cNvSpPr/>
+          <p:nvPr/>
+        </p:nvSpPr>
+        <p:spPr>
+          <a:xfrm>
+            <a:off x="5938298" y="2747917"/>
+            <a:ext cx="2520000" cy="411480"/>
           </a:xfrm>
           <a:prstGeom prst="rect">
             <a:avLst/>
@@ -16229,14 +13106,20 @@
       </p:sp>
       <p:sp>
         <p:nvSpPr>
-          <p:cNvPr id="18" name="Text 16"/>
-          <p:cNvSpPr/>
-          <p:nvPr/>
-        </p:nvSpPr>
-        <p:spPr>
-          <a:xfrm>
-            <a:off x="3273429" y="2834640"/>
-            <a:ext cx="2834640" cy="411480"/>
+          <p:cNvPr id="42" name="Text 16">
+            <a:extLst>
+              <a:ext uri="{FF2B5EF4-FFF2-40B4-BE49-F238E27FC236}">
+                <a16:creationId xmlns:a16="http://schemas.microsoft.com/office/drawing/2014/main" id="{CEE3EE06-EE3C-3923-E3C1-C6E82391E20F}"/>
+              </a:ext>
+            </a:extLst>
+          </p:cNvPr>
+          <p:cNvSpPr/>
+          <p:nvPr/>
+        </p:nvSpPr>
+        <p:spPr>
+          <a:xfrm>
+            <a:off x="5938298" y="2747917"/>
+            <a:ext cx="2520000" cy="411480"/>
           </a:xfrm>
           <a:prstGeom prst="rect">
             <a:avLst/>
@@ -16265,14 +13148,20 @@
       </p:sp>
       <p:sp>
         <p:nvSpPr>
-          <p:cNvPr id="19" name="Text 17"/>
-          <p:cNvSpPr/>
-          <p:nvPr/>
-        </p:nvSpPr>
-        <p:spPr>
-          <a:xfrm>
-            <a:off x="3364869" y="3291840"/>
-            <a:ext cx="2651760" cy="914400"/>
+          <p:cNvPr id="43" name="Text 17">
+            <a:extLst>
+              <a:ext uri="{FF2B5EF4-FFF2-40B4-BE49-F238E27FC236}">
+                <a16:creationId xmlns:a16="http://schemas.microsoft.com/office/drawing/2014/main" id="{1E1CB1CE-DD1C-153A-7F80-EA8F0C1CA94F}"/>
+              </a:ext>
+            </a:extLst>
+          </p:cNvPr>
+          <p:cNvSpPr/>
+          <p:nvPr/>
+        </p:nvSpPr>
+        <p:spPr>
+          <a:xfrm>
+            <a:off x="6029738" y="3205117"/>
+            <a:ext cx="2380176" cy="914400"/>
           </a:xfrm>
           <a:prstGeom prst="rect">
             <a:avLst/>
@@ -16309,14 +13198,20 @@
       </p:sp>
       <p:sp>
         <p:nvSpPr>
-          <p:cNvPr id="20" name="Shape 18"/>
-          <p:cNvSpPr/>
-          <p:nvPr/>
-        </p:nvSpPr>
-        <p:spPr>
-          <a:xfrm>
-            <a:off x="6253512" y="1920240"/>
-            <a:ext cx="2834640" cy="1463040"/>
+          <p:cNvPr id="44" name="Shape 18">
+            <a:extLst>
+              <a:ext uri="{FF2B5EF4-FFF2-40B4-BE49-F238E27FC236}">
+                <a16:creationId xmlns:a16="http://schemas.microsoft.com/office/drawing/2014/main" id="{1CC6A62A-5EB4-DB98-CA2A-03515C6E91C6}"/>
+              </a:ext>
+            </a:extLst>
+          </p:cNvPr>
+          <p:cNvSpPr/>
+          <p:nvPr/>
+        </p:nvSpPr>
+        <p:spPr>
+          <a:xfrm>
+            <a:off x="3234805" y="3550738"/>
+            <a:ext cx="2520000" cy="1440000"/>
           </a:xfrm>
           <a:prstGeom prst="rect">
             <a:avLst/>
@@ -16348,14 +13243,20 @@
       </p:sp>
       <p:sp>
         <p:nvSpPr>
-          <p:cNvPr id="21" name="Shape 19"/>
-          <p:cNvSpPr/>
-          <p:nvPr/>
-        </p:nvSpPr>
-        <p:spPr>
-          <a:xfrm>
-            <a:off x="6253512" y="1920240"/>
-            <a:ext cx="2834640" cy="411480"/>
+          <p:cNvPr id="45" name="Shape 19">
+            <a:extLst>
+              <a:ext uri="{FF2B5EF4-FFF2-40B4-BE49-F238E27FC236}">
+                <a16:creationId xmlns:a16="http://schemas.microsoft.com/office/drawing/2014/main" id="{878DD617-F93E-5BD3-21C5-EE2D9FB5EC22}"/>
+              </a:ext>
+            </a:extLst>
+          </p:cNvPr>
+          <p:cNvSpPr/>
+          <p:nvPr/>
+        </p:nvSpPr>
+        <p:spPr>
+          <a:xfrm>
+            <a:off x="3234805" y="3550738"/>
+            <a:ext cx="2520000" cy="411480"/>
           </a:xfrm>
           <a:prstGeom prst="rect">
             <a:avLst/>
@@ -16380,14 +13281,20 @@
       </p:sp>
       <p:sp>
         <p:nvSpPr>
-          <p:cNvPr id="22" name="Text 20"/>
-          <p:cNvSpPr/>
-          <p:nvPr/>
-        </p:nvSpPr>
-        <p:spPr>
-          <a:xfrm>
-            <a:off x="6253512" y="1920240"/>
-            <a:ext cx="2834640" cy="411480"/>
+          <p:cNvPr id="46" name="Text 20">
+            <a:extLst>
+              <a:ext uri="{FF2B5EF4-FFF2-40B4-BE49-F238E27FC236}">
+                <a16:creationId xmlns:a16="http://schemas.microsoft.com/office/drawing/2014/main" id="{8F71ECED-4D25-0549-A443-65A0A30A6C3E}"/>
+              </a:ext>
+            </a:extLst>
+          </p:cNvPr>
+          <p:cNvSpPr/>
+          <p:nvPr/>
+        </p:nvSpPr>
+        <p:spPr>
+          <a:xfrm>
+            <a:off x="3234805" y="3550738"/>
+            <a:ext cx="2520000" cy="411480"/>
           </a:xfrm>
           <a:prstGeom prst="rect">
             <a:avLst/>
@@ -16416,14 +13323,20 @@
       </p:sp>
       <p:sp>
         <p:nvSpPr>
-          <p:cNvPr id="23" name="Text 21"/>
-          <p:cNvSpPr/>
-          <p:nvPr/>
-        </p:nvSpPr>
-        <p:spPr>
-          <a:xfrm>
-            <a:off x="6344952" y="2377440"/>
-            <a:ext cx="2651760" cy="914400"/>
+          <p:cNvPr id="47" name="Text 21">
+            <a:extLst>
+              <a:ext uri="{FF2B5EF4-FFF2-40B4-BE49-F238E27FC236}">
+                <a16:creationId xmlns:a16="http://schemas.microsoft.com/office/drawing/2014/main" id="{499236D7-0C66-9445-337F-7BD9A5142ADA}"/>
+              </a:ext>
+            </a:extLst>
+          </p:cNvPr>
+          <p:cNvSpPr/>
+          <p:nvPr/>
+        </p:nvSpPr>
+        <p:spPr>
+          <a:xfrm>
+            <a:off x="3326245" y="4007938"/>
+            <a:ext cx="2344329" cy="914400"/>
           </a:xfrm>
           <a:prstGeom prst="rect">
             <a:avLst/>
@@ -16506,24 +13419,269 @@
           </a:p>
         </p:txBody>
       </p:sp>
-      <p:sp>
-        <p:nvSpPr>
-          <p:cNvPr id="24" name="Shape 22"/>
-          <p:cNvSpPr/>
-          <p:nvPr/>
-        </p:nvSpPr>
-        <p:spPr>
-          <a:xfrm>
-            <a:off x="3090549" y="1737360"/>
-            <a:ext cx="201168" cy="0"/>
-          </a:xfrm>
-          <a:prstGeom prst="line">
-            <a:avLst/>
-          </a:prstGeom>
-          <a:noFill/>
+      <p:cxnSp>
+        <p:nvCxnSpPr>
+          <p:cNvPr id="48" name="Conexão Reta Unidirecional 47">
+            <a:extLst>
+              <a:ext uri="{FF2B5EF4-FFF2-40B4-BE49-F238E27FC236}">
+                <a16:creationId xmlns:a16="http://schemas.microsoft.com/office/drawing/2014/main" id="{DB9BB559-FF8B-B0BD-2A2E-43DA67C4294B}"/>
+              </a:ext>
+            </a:extLst>
+          </p:cNvPr>
+          <p:cNvCxnSpPr>
+            <a:cxnSpLocks/>
+            <a:stCxn id="32" idx="2"/>
+            <a:endCxn id="45" idx="0"/>
+          </p:cNvCxnSpPr>
+          <p:nvPr/>
+        </p:nvCxnSpPr>
+        <p:spPr>
+          <a:xfrm flipH="1">
+            <a:off x="4494805" y="2445840"/>
+            <a:ext cx="1" cy="1104898"/>
+          </a:xfrm>
+          <a:prstGeom prst="straightConnector1">
+            <a:avLst/>
+          </a:prstGeom>
           <a:ln w="19050">
             <a:solidFill>
-              <a:srgbClr val="FFFFFF"/>
+              <a:schemeClr val="tx1"/>
+            </a:solidFill>
+            <a:tailEnd type="triangle"/>
+          </a:ln>
+        </p:spPr>
+        <p:style>
+          <a:lnRef idx="1">
+            <a:schemeClr val="accent1"/>
+          </a:lnRef>
+          <a:fillRef idx="0">
+            <a:schemeClr val="accent1"/>
+          </a:fillRef>
+          <a:effectRef idx="0">
+            <a:schemeClr val="accent1"/>
+          </a:effectRef>
+          <a:fontRef idx="minor">
+            <a:schemeClr val="tx1"/>
+          </a:fontRef>
+        </p:style>
+      </p:cxnSp>
+      <p:cxnSp>
+        <p:nvCxnSpPr>
+          <p:cNvPr id="49" name="Conexão Reta Unidirecional 48">
+            <a:extLst>
+              <a:ext uri="{FF2B5EF4-FFF2-40B4-BE49-F238E27FC236}">
+                <a16:creationId xmlns:a16="http://schemas.microsoft.com/office/drawing/2014/main" id="{EB9BCE63-3505-4B66-4963-76A0DE25C581}"/>
+              </a:ext>
+            </a:extLst>
+          </p:cNvPr>
+          <p:cNvCxnSpPr>
+            <a:cxnSpLocks/>
+            <a:stCxn id="28" idx="3"/>
+            <a:endCxn id="32" idx="1"/>
+          </p:cNvCxnSpPr>
+          <p:nvPr/>
+        </p:nvCxnSpPr>
+        <p:spPr>
+          <a:xfrm>
+            <a:off x="3033481" y="1725840"/>
+            <a:ext cx="201325" cy="0"/>
+          </a:xfrm>
+          <a:prstGeom prst="straightConnector1">
+            <a:avLst/>
+          </a:prstGeom>
+          <a:ln w="19050">
+            <a:solidFill>
+              <a:schemeClr val="tx1"/>
+            </a:solidFill>
+            <a:tailEnd type="triangle"/>
+          </a:ln>
+        </p:spPr>
+        <p:style>
+          <a:lnRef idx="1">
+            <a:schemeClr val="accent1"/>
+          </a:lnRef>
+          <a:fillRef idx="0">
+            <a:schemeClr val="accent1"/>
+          </a:fillRef>
+          <a:effectRef idx="0">
+            <a:schemeClr val="accent1"/>
+          </a:effectRef>
+          <a:fontRef idx="minor">
+            <a:schemeClr val="tx1"/>
+          </a:fontRef>
+        </p:style>
+      </p:cxnSp>
+      <p:cxnSp>
+        <p:nvCxnSpPr>
+          <p:cNvPr id="50" name="Conexão Reta Unidirecional 49">
+            <a:extLst>
+              <a:ext uri="{FF2B5EF4-FFF2-40B4-BE49-F238E27FC236}">
+                <a16:creationId xmlns:a16="http://schemas.microsoft.com/office/drawing/2014/main" id="{1BEE7A42-70BB-D7FD-722E-EE0A9D1E35F2}"/>
+              </a:ext>
+            </a:extLst>
+          </p:cNvPr>
+          <p:cNvCxnSpPr>
+            <a:cxnSpLocks/>
+            <a:stCxn id="32" idx="3"/>
+            <a:endCxn id="36" idx="1"/>
+          </p:cNvCxnSpPr>
+          <p:nvPr/>
+        </p:nvCxnSpPr>
+        <p:spPr>
+          <a:xfrm>
+            <a:off x="5754806" y="1725840"/>
+            <a:ext cx="183496" cy="1257"/>
+          </a:xfrm>
+          <a:prstGeom prst="straightConnector1">
+            <a:avLst/>
+          </a:prstGeom>
+          <a:ln w="19050">
+            <a:solidFill>
+              <a:schemeClr val="tx1"/>
+            </a:solidFill>
+            <a:tailEnd type="triangle"/>
+          </a:ln>
+        </p:spPr>
+        <p:style>
+          <a:lnRef idx="1">
+            <a:schemeClr val="accent1"/>
+          </a:lnRef>
+          <a:fillRef idx="0">
+            <a:schemeClr val="accent1"/>
+          </a:fillRef>
+          <a:effectRef idx="0">
+            <a:schemeClr val="accent1"/>
+          </a:effectRef>
+          <a:fontRef idx="minor">
+            <a:schemeClr val="tx1"/>
+          </a:fontRef>
+        </p:style>
+      </p:cxnSp>
+      <p:cxnSp>
+        <p:nvCxnSpPr>
+          <p:cNvPr id="51" name="Conexão Reta Unidirecional 50">
+            <a:extLst>
+              <a:ext uri="{FF2B5EF4-FFF2-40B4-BE49-F238E27FC236}">
+                <a16:creationId xmlns:a16="http://schemas.microsoft.com/office/drawing/2014/main" id="{CFC75E01-465A-FCAA-4C72-2FC1A4078516}"/>
+              </a:ext>
+            </a:extLst>
+          </p:cNvPr>
+          <p:cNvCxnSpPr>
+            <a:cxnSpLocks/>
+            <a:stCxn id="36" idx="2"/>
+            <a:endCxn id="41" idx="0"/>
+          </p:cNvCxnSpPr>
+          <p:nvPr/>
+        </p:nvCxnSpPr>
+        <p:spPr>
+          <a:xfrm flipH="1">
+            <a:off x="7198298" y="2447097"/>
+            <a:ext cx="4" cy="300820"/>
+          </a:xfrm>
+          <a:prstGeom prst="straightConnector1">
+            <a:avLst/>
+          </a:prstGeom>
+          <a:ln w="19050">
+            <a:solidFill>
+              <a:schemeClr val="tx1"/>
+            </a:solidFill>
+            <a:tailEnd type="triangle"/>
+          </a:ln>
+        </p:spPr>
+        <p:style>
+          <a:lnRef idx="1">
+            <a:schemeClr val="accent1"/>
+          </a:lnRef>
+          <a:fillRef idx="0">
+            <a:schemeClr val="accent1"/>
+          </a:fillRef>
+          <a:effectRef idx="0">
+            <a:schemeClr val="accent1"/>
+          </a:effectRef>
+          <a:fontRef idx="minor">
+            <a:schemeClr val="tx1"/>
+          </a:fontRef>
+        </p:style>
+      </p:cxnSp>
+    </p:spTree>
+  </p:cSld>
+  <p:clrMapOvr>
+    <a:masterClrMapping/>
+  </p:clrMapOvr>
+</p:sld>
+</file>
+
+<file path=ppt/slides/slide9.xml><?xml version="1.0" encoding="utf-8"?>
+<p:sld xmlns:a="http://schemas.openxmlformats.org/drawingml/2006/main" xmlns:r="http://schemas.openxmlformats.org/officeDocument/2006/relationships" xmlns:p="http://schemas.openxmlformats.org/presentationml/2006/main">
+  <p:cSld name="Slide 10">
+    <p:bg>
+      <p:bgPr>
+        <a:gradFill>
+          <a:gsLst>
+            <a:gs pos="0">
+              <a:schemeClr val="accent3">
+                <a:lumMod val="5000"/>
+                <a:lumOff val="95000"/>
+              </a:schemeClr>
+            </a:gs>
+            <a:gs pos="74000">
+              <a:schemeClr val="accent3">
+                <a:lumMod val="45000"/>
+                <a:lumOff val="55000"/>
+              </a:schemeClr>
+            </a:gs>
+            <a:gs pos="83000">
+              <a:schemeClr val="accent3">
+                <a:lumMod val="45000"/>
+                <a:lumOff val="55000"/>
+              </a:schemeClr>
+            </a:gs>
+            <a:gs pos="100000">
+              <a:schemeClr val="accent3">
+                <a:lumMod val="30000"/>
+                <a:lumOff val="70000"/>
+              </a:schemeClr>
+            </a:gs>
+          </a:gsLst>
+          <a:lin ang="5400000" scaled="1"/>
+        </a:gradFill>
+        <a:effectLst/>
+      </p:bgPr>
+    </p:bg>
+    <p:spTree>
+      <p:nvGrpSpPr>
+        <p:cNvPr id="1" name=""/>
+        <p:cNvGrpSpPr/>
+        <p:nvPr/>
+      </p:nvGrpSpPr>
+      <p:grpSpPr>
+        <a:xfrm>
+          <a:off x="0" y="0"/>
+          <a:ext cx="0" cy="0"/>
+          <a:chOff x="0" y="0"/>
+          <a:chExt cx="0" cy="0"/>
+        </a:xfrm>
+      </p:grpSpPr>
+      <p:sp>
+        <p:nvSpPr>
+          <p:cNvPr id="2" name="Shape 0"/>
+          <p:cNvSpPr/>
+          <p:nvPr/>
+        </p:nvSpPr>
+        <p:spPr>
+          <a:xfrm>
+            <a:off x="0" y="0"/>
+            <a:ext cx="9144000" cy="822960"/>
+          </a:xfrm>
+          <a:prstGeom prst="rect">
+            <a:avLst/>
+          </a:prstGeom>
+          <a:solidFill>
+            <a:srgbClr val="1B6CA8"/>
+          </a:solidFill>
+          <a:ln w="12700">
+            <a:solidFill>
+              <a:srgbClr val="1B6CA8"/>
             </a:solidFill>
             <a:prstDash val="solid"/>
           </a:ln>
@@ -16538,14 +13696,14 @@
       </p:sp>
       <p:sp>
         <p:nvSpPr>
-          <p:cNvPr id="25" name="Text 23"/>
-          <p:cNvSpPr/>
-          <p:nvPr/>
-        </p:nvSpPr>
-        <p:spPr>
-          <a:xfrm>
-            <a:off x="2999109" y="1572768"/>
-            <a:ext cx="365760" cy="320040"/>
+          <p:cNvPr id="3" name="Text 1"/>
+          <p:cNvSpPr/>
+          <p:nvPr/>
+        </p:nvSpPr>
+        <p:spPr>
+          <a:xfrm>
+            <a:off x="457200" y="0"/>
+            <a:ext cx="8229600" cy="822960"/>
           </a:xfrm>
           <a:prstGeom prst="rect">
             <a:avLst/>
@@ -16554,45 +13712,269 @@
           <a:ln/>
         </p:spPr>
         <p:txBody>
-          <a:bodyPr wrap="square" rtlCol="0" anchor="ctr"/>
+          <a:bodyPr wrap="square" lIns="0" tIns="0" rIns="0" bIns="0" rtlCol="0" anchor="ctr"/>
+          <a:lstStyle/>
+          <a:p>
+            <a:pPr marL="0" indent="0">
+              <a:buNone/>
+            </a:pPr>
+            <a:r>
+              <a:rPr lang="en-US" sz="2400" b="1" dirty="0">
+                <a:solidFill>
+                  <a:srgbClr val="FFFFFF"/>
+                </a:solidFill>
+              </a:rPr>
+              <a:t>07  /  Fluxo de Execução</a:t>
+            </a:r>
+            <a:endParaRPr lang="en-US" sz="2400" dirty="0"/>
+          </a:p>
+        </p:txBody>
+      </p:sp>
+      <p:sp>
+        <p:nvSpPr>
+          <p:cNvPr id="4" name="Shape 2"/>
+          <p:cNvSpPr/>
+          <p:nvPr/>
+        </p:nvSpPr>
+        <p:spPr>
+          <a:xfrm>
+            <a:off x="274320" y="1005840"/>
+            <a:ext cx="2743200" cy="1325880"/>
+          </a:xfrm>
+          <a:prstGeom prst="rect">
+            <a:avLst/>
+          </a:prstGeom>
+          <a:solidFill>
+            <a:srgbClr val="112236"/>
+          </a:solidFill>
+          <a:ln w="19050">
+            <a:solidFill>
+              <a:srgbClr val="2D9CDB"/>
+            </a:solidFill>
+            <a:prstDash val="solid"/>
+          </a:ln>
+          <a:effectLst>
+            <a:outerShdw blurRad="101600" dist="38100" dir="8100000" algn="bl" rotWithShape="0">
+              <a:srgbClr val="000000">
+                <a:alpha val="18000"/>
+              </a:srgbClr>
+            </a:outerShdw>
+          </a:effectLst>
+        </p:spPr>
+        <p:txBody>
+          <a:bodyPr/>
+          <a:lstStyle/>
+          <a:p>
+            <a:endParaRPr lang="pt-PT"/>
+          </a:p>
+        </p:txBody>
+      </p:sp>
+      <p:sp>
+        <p:nvSpPr>
+          <p:cNvPr id="5" name="Shape 3"/>
+          <p:cNvSpPr/>
+          <p:nvPr/>
+        </p:nvSpPr>
+        <p:spPr>
+          <a:xfrm>
+            <a:off x="365760" y="1097280"/>
+            <a:ext cx="502920" cy="502920"/>
+          </a:xfrm>
+          <a:prstGeom prst="ellipse">
+            <a:avLst/>
+          </a:prstGeom>
+          <a:solidFill>
+            <a:srgbClr val="2D9CDB"/>
+          </a:solidFill>
+          <a:ln w="12700">
+            <a:solidFill>
+              <a:srgbClr val="2D9CDB"/>
+            </a:solidFill>
+            <a:prstDash val="solid"/>
+          </a:ln>
+        </p:spPr>
+        <p:txBody>
+          <a:bodyPr/>
+          <a:lstStyle/>
+          <a:p>
+            <a:endParaRPr lang="pt-PT"/>
+          </a:p>
+        </p:txBody>
+      </p:sp>
+      <p:sp>
+        <p:nvSpPr>
+          <p:cNvPr id="6" name="Text 4"/>
+          <p:cNvSpPr/>
+          <p:nvPr/>
+        </p:nvSpPr>
+        <p:spPr>
+          <a:xfrm>
+            <a:off x="365760" y="1097280"/>
+            <a:ext cx="502920" cy="502920"/>
+          </a:xfrm>
+          <a:prstGeom prst="rect">
+            <a:avLst/>
+          </a:prstGeom>
+          <a:noFill/>
+          <a:ln/>
+        </p:spPr>
+        <p:txBody>
+          <a:bodyPr wrap="square" lIns="0" tIns="0" rIns="0" bIns="0" rtlCol="0" anchor="ctr"/>
           <a:lstStyle/>
           <a:p>
             <a:pPr marL="0" indent="0" algn="ctr">
               <a:buNone/>
             </a:pPr>
             <a:r>
-              <a:rPr lang="en-US" sz="1400" dirty="0">
-                <a:solidFill>
-                  <a:srgbClr val="FFFFFF"/>
-                </a:solidFill>
-              </a:rPr>
-              <a:t>→</a:t>
-            </a:r>
-            <a:endParaRPr lang="en-US" sz="1400" dirty="0"/>
-          </a:p>
-        </p:txBody>
-      </p:sp>
-      <p:sp>
-        <p:nvSpPr>
-          <p:cNvPr id="26" name="Shape 24"/>
-          <p:cNvSpPr/>
-          <p:nvPr/>
-        </p:nvSpPr>
-        <p:spPr>
-          <a:xfrm>
-            <a:off x="3090549" y="3566160"/>
-            <a:ext cx="201168" cy="0"/>
-          </a:xfrm>
-          <a:prstGeom prst="line">
+              <a:rPr lang="en-US" sz="1600" b="1" dirty="0">
+                <a:solidFill>
+                  <a:srgbClr val="0D1B2A"/>
+                </a:solidFill>
+              </a:rPr>
+              <a:t>1</a:t>
+            </a:r>
+            <a:endParaRPr lang="en-US" sz="1600" dirty="0"/>
+          </a:p>
+        </p:txBody>
+      </p:sp>
+      <p:sp>
+        <p:nvSpPr>
+          <p:cNvPr id="7" name="Text 5"/>
+          <p:cNvSpPr/>
+          <p:nvPr/>
+        </p:nvSpPr>
+        <p:spPr>
+          <a:xfrm>
+            <a:off x="960120" y="1078992"/>
+            <a:ext cx="1965960" cy="1097280"/>
+          </a:xfrm>
+          <a:prstGeom prst="rect">
             <a:avLst/>
           </a:prstGeom>
           <a:noFill/>
+          <a:ln/>
+        </p:spPr>
+        <p:txBody>
+          <a:bodyPr wrap="square" rtlCol="0" anchor="ctr"/>
+          <a:lstStyle/>
+          <a:p>
+            <a:pPr marL="0" indent="0">
+              <a:buNone/>
+            </a:pPr>
+            <a:r>
+              <a:rPr lang="en-US" sz="1200" dirty="0" err="1">
+                <a:solidFill>
+                  <a:srgbClr val="FFFFFF"/>
+                </a:solidFill>
+              </a:rPr>
+              <a:t>Cliente</a:t>
+            </a:r>
+            <a:r>
+              <a:rPr lang="en-US" sz="1200" dirty="0">
+                <a:solidFill>
+                  <a:srgbClr val="FFFFFF"/>
+                </a:solidFill>
+              </a:rPr>
+              <a:t> </a:t>
+            </a:r>
+            <a:r>
+              <a:rPr lang="en-US" sz="1200" dirty="0" err="1">
+                <a:solidFill>
+                  <a:srgbClr val="FFFFFF"/>
+                </a:solidFill>
+              </a:rPr>
+              <a:t>inicia</a:t>
+            </a:r>
+            <a:r>
+              <a:rPr lang="en-US" sz="1200" dirty="0">
+                <a:solidFill>
+                  <a:srgbClr val="FFFFFF"/>
+                </a:solidFill>
+              </a:rPr>
+              <a:t> </a:t>
+            </a:r>
+            <a:r>
+              <a:rPr lang="en-US" sz="1200" dirty="0" err="1">
+                <a:solidFill>
+                  <a:srgbClr val="FFFFFF"/>
+                </a:solidFill>
+              </a:rPr>
+              <a:t>el</a:t>
+            </a:r>
+            <a:r>
+              <a:rPr lang="en-US" sz="1200" dirty="0">
+                <a:solidFill>
+                  <a:srgbClr val="FFFFFF"/>
+                </a:solidFill>
+              </a:rPr>
+              <a:t> </a:t>
+            </a:r>
+            <a:r>
+              <a:rPr lang="en-US" sz="1200" dirty="0" err="1">
+                <a:solidFill>
+                  <a:srgbClr val="FFFFFF"/>
+                </a:solidFill>
+              </a:rPr>
+              <a:t>flujo</a:t>
+            </a:r>
+            <a:r>
+              <a:rPr lang="en-US" sz="1200" dirty="0">
+                <a:solidFill>
+                  <a:srgbClr val="FFFFFF"/>
+                </a:solidFill>
+              </a:rPr>
+              <a:t> de </a:t>
+            </a:r>
+            <a:r>
+              <a:rPr lang="en-US" sz="1200" dirty="0" err="1">
+                <a:solidFill>
+                  <a:srgbClr val="FFFFFF"/>
+                </a:solidFill>
+              </a:rPr>
+              <a:t>trabajo</a:t>
+            </a:r>
+            <a:r>
+              <a:rPr lang="en-US" sz="1200" dirty="0">
+                <a:solidFill>
+                  <a:srgbClr val="FFFFFF"/>
+                </a:solidFill>
+              </a:rPr>
+              <a:t>.</a:t>
+            </a:r>
+            <a:endParaRPr lang="en-US" sz="1200" dirty="0"/>
+          </a:p>
+        </p:txBody>
+      </p:sp>
+      <p:sp>
+        <p:nvSpPr>
+          <p:cNvPr id="9" name="Shape 7"/>
+          <p:cNvSpPr/>
+          <p:nvPr/>
+        </p:nvSpPr>
+        <p:spPr>
+          <a:xfrm>
+            <a:off x="3200400" y="1005840"/>
+            <a:ext cx="2743200" cy="1325880"/>
+          </a:xfrm>
+          <a:prstGeom prst="rect">
+            <a:avLst/>
+          </a:prstGeom>
+          <a:solidFill>
+            <a:srgbClr val="112236"/>
+          </a:solidFill>
           <a:ln w="19050">
             <a:solidFill>
-              <a:srgbClr val="FFFFFF"/>
+              <a:srgbClr val="1B6CA8"/>
             </a:solidFill>
             <a:prstDash val="solid"/>
           </a:ln>
+          <a:effectLst>
+            <a:outerShdw blurRad="101600" dist="38100" dir="8100000" algn="bl" rotWithShape="0">
+              <a:srgbClr val="000000">
+                <a:alpha val="18000"/>
+              </a:srgbClr>
+            </a:outerShdw>
+          </a:effectLst>
         </p:spPr>
         <p:txBody>
           <a:bodyPr/>
@@ -16604,14 +13986,46 @@
       </p:sp>
       <p:sp>
         <p:nvSpPr>
-          <p:cNvPr id="27" name="Text 25"/>
-          <p:cNvSpPr/>
-          <p:nvPr/>
-        </p:nvSpPr>
-        <p:spPr>
-          <a:xfrm>
-            <a:off x="2999109" y="3401568"/>
-            <a:ext cx="365760" cy="320040"/>
+          <p:cNvPr id="10" name="Shape 8"/>
+          <p:cNvSpPr/>
+          <p:nvPr/>
+        </p:nvSpPr>
+        <p:spPr>
+          <a:xfrm>
+            <a:off x="3291840" y="1097280"/>
+            <a:ext cx="502920" cy="502920"/>
+          </a:xfrm>
+          <a:prstGeom prst="ellipse">
+            <a:avLst/>
+          </a:prstGeom>
+          <a:solidFill>
+            <a:srgbClr val="1B6CA8"/>
+          </a:solidFill>
+          <a:ln w="12700">
+            <a:solidFill>
+              <a:srgbClr val="1B6CA8"/>
+            </a:solidFill>
+            <a:prstDash val="solid"/>
+          </a:ln>
+        </p:spPr>
+        <p:txBody>
+          <a:bodyPr/>
+          <a:lstStyle/>
+          <a:p>
+            <a:endParaRPr lang="pt-PT"/>
+          </a:p>
+        </p:txBody>
+      </p:sp>
+      <p:sp>
+        <p:nvSpPr>
+          <p:cNvPr id="11" name="Text 9"/>
+          <p:cNvSpPr/>
+          <p:nvPr/>
+        </p:nvSpPr>
+        <p:spPr>
+          <a:xfrm>
+            <a:off x="3291840" y="1097280"/>
+            <a:ext cx="502920" cy="502920"/>
           </a:xfrm>
           <a:prstGeom prst="rect">
             <a:avLst/>
@@ -16620,24 +14034,1308 @@
           <a:ln/>
         </p:spPr>
         <p:txBody>
-          <a:bodyPr wrap="square" rtlCol="0" anchor="ctr"/>
+          <a:bodyPr wrap="square" lIns="0" tIns="0" rIns="0" bIns="0" rtlCol="0" anchor="ctr"/>
           <a:lstStyle/>
           <a:p>
             <a:pPr marL="0" indent="0" algn="ctr">
               <a:buNone/>
             </a:pPr>
             <a:r>
-              <a:rPr lang="en-US" sz="1400" dirty="0">
-                <a:solidFill>
-                  <a:srgbClr val="FFFFFF"/>
-                </a:solidFill>
-              </a:rPr>
-              <a:t>→</a:t>
-            </a:r>
-            <a:endParaRPr lang="en-US" sz="1400" dirty="0"/>
-          </a:p>
-        </p:txBody>
-      </p:sp>
+              <a:rPr lang="en-US" sz="1600" b="1" dirty="0">
+                <a:solidFill>
+                  <a:srgbClr val="0D1B2A"/>
+                </a:solidFill>
+              </a:rPr>
+              <a:t>2</a:t>
+            </a:r>
+            <a:endParaRPr lang="en-US" sz="1600" dirty="0"/>
+          </a:p>
+        </p:txBody>
+      </p:sp>
+      <p:sp>
+        <p:nvSpPr>
+          <p:cNvPr id="12" name="Text 10"/>
+          <p:cNvSpPr/>
+          <p:nvPr/>
+        </p:nvSpPr>
+        <p:spPr>
+          <a:xfrm>
+            <a:off x="3886200" y="1078992"/>
+            <a:ext cx="1965960" cy="1097280"/>
+          </a:xfrm>
+          <a:prstGeom prst="rect">
+            <a:avLst/>
+          </a:prstGeom>
+          <a:noFill/>
+          <a:ln/>
+        </p:spPr>
+        <p:txBody>
+          <a:bodyPr wrap="square" rtlCol="0" anchor="ctr"/>
+          <a:lstStyle/>
+          <a:p>
+            <a:pPr marL="0" indent="0">
+              <a:buNone/>
+            </a:pPr>
+            <a:r>
+              <a:rPr lang="en-US" sz="1200" dirty="0">
+                <a:solidFill>
+                  <a:srgbClr val="FFFFFF"/>
+                </a:solidFill>
+              </a:rPr>
+              <a:t>Temporal Service </a:t>
+            </a:r>
+            <a:r>
+              <a:rPr lang="en-US" sz="1200" dirty="0" err="1">
+                <a:solidFill>
+                  <a:srgbClr val="FFFFFF"/>
+                </a:solidFill>
+              </a:rPr>
+              <a:t>registra</a:t>
+            </a:r>
+            <a:r>
+              <a:rPr lang="en-US" sz="1200" dirty="0">
+                <a:solidFill>
+                  <a:srgbClr val="FFFFFF"/>
+                </a:solidFill>
+              </a:rPr>
+              <a:t> </a:t>
+            </a:r>
+            <a:r>
+              <a:rPr lang="en-US" sz="1200" dirty="0" err="1">
+                <a:solidFill>
+                  <a:srgbClr val="FFFFFF"/>
+                </a:solidFill>
+              </a:rPr>
+              <a:t>el</a:t>
+            </a:r>
+            <a:r>
+              <a:rPr lang="en-US" sz="1200" dirty="0">
+                <a:solidFill>
+                  <a:srgbClr val="FFFFFF"/>
+                </a:solidFill>
+              </a:rPr>
+              <a:t> </a:t>
+            </a:r>
+            <a:r>
+              <a:rPr lang="en-US" sz="1200" dirty="0" err="1">
+                <a:solidFill>
+                  <a:srgbClr val="FFFFFF"/>
+                </a:solidFill>
+              </a:rPr>
+              <a:t>evento</a:t>
+            </a:r>
+            <a:r>
+              <a:rPr lang="en-US" sz="1200" dirty="0">
+                <a:solidFill>
+                  <a:srgbClr val="FFFFFF"/>
+                </a:solidFill>
+              </a:rPr>
+              <a:t>.</a:t>
+            </a:r>
+            <a:endParaRPr lang="en-US" sz="1200" dirty="0"/>
+          </a:p>
+        </p:txBody>
+      </p:sp>
+      <p:sp>
+        <p:nvSpPr>
+          <p:cNvPr id="14" name="Shape 12"/>
+          <p:cNvSpPr/>
+          <p:nvPr/>
+        </p:nvSpPr>
+        <p:spPr>
+          <a:xfrm>
+            <a:off x="6126480" y="1005840"/>
+            <a:ext cx="2743200" cy="1325880"/>
+          </a:xfrm>
+          <a:prstGeom prst="rect">
+            <a:avLst/>
+          </a:prstGeom>
+          <a:solidFill>
+            <a:srgbClr val="112236"/>
+          </a:solidFill>
+          <a:ln w="19050">
+            <a:solidFill>
+              <a:srgbClr val="9B59B6"/>
+            </a:solidFill>
+            <a:prstDash val="solid"/>
+          </a:ln>
+          <a:effectLst>
+            <a:outerShdw blurRad="101600" dist="38100" dir="8100000" algn="bl" rotWithShape="0">
+              <a:srgbClr val="000000">
+                <a:alpha val="18000"/>
+              </a:srgbClr>
+            </a:outerShdw>
+          </a:effectLst>
+        </p:spPr>
+        <p:txBody>
+          <a:bodyPr/>
+          <a:lstStyle/>
+          <a:p>
+            <a:endParaRPr lang="pt-PT"/>
+          </a:p>
+        </p:txBody>
+      </p:sp>
+      <p:sp>
+        <p:nvSpPr>
+          <p:cNvPr id="15" name="Shape 13"/>
+          <p:cNvSpPr/>
+          <p:nvPr/>
+        </p:nvSpPr>
+        <p:spPr>
+          <a:xfrm>
+            <a:off x="6217920" y="1097280"/>
+            <a:ext cx="502920" cy="502920"/>
+          </a:xfrm>
+          <a:prstGeom prst="ellipse">
+            <a:avLst/>
+          </a:prstGeom>
+          <a:solidFill>
+            <a:srgbClr val="9B59B6"/>
+          </a:solidFill>
+          <a:ln w="12700">
+            <a:solidFill>
+              <a:srgbClr val="9B59B6"/>
+            </a:solidFill>
+            <a:prstDash val="solid"/>
+          </a:ln>
+        </p:spPr>
+        <p:txBody>
+          <a:bodyPr/>
+          <a:lstStyle/>
+          <a:p>
+            <a:endParaRPr lang="pt-PT"/>
+          </a:p>
+        </p:txBody>
+      </p:sp>
+      <p:sp>
+        <p:nvSpPr>
+          <p:cNvPr id="16" name="Text 14"/>
+          <p:cNvSpPr/>
+          <p:nvPr/>
+        </p:nvSpPr>
+        <p:spPr>
+          <a:xfrm>
+            <a:off x="6217920" y="1097280"/>
+            <a:ext cx="502920" cy="502920"/>
+          </a:xfrm>
+          <a:prstGeom prst="rect">
+            <a:avLst/>
+          </a:prstGeom>
+          <a:noFill/>
+          <a:ln/>
+        </p:spPr>
+        <p:txBody>
+          <a:bodyPr wrap="square" lIns="0" tIns="0" rIns="0" bIns="0" rtlCol="0" anchor="ctr"/>
+          <a:lstStyle/>
+          <a:p>
+            <a:pPr marL="0" indent="0" algn="ctr">
+              <a:buNone/>
+            </a:pPr>
+            <a:r>
+              <a:rPr lang="en-US" sz="1600" b="1" dirty="0">
+                <a:solidFill>
+                  <a:srgbClr val="0D1B2A"/>
+                </a:solidFill>
+              </a:rPr>
+              <a:t>3</a:t>
+            </a:r>
+            <a:endParaRPr lang="en-US" sz="1600" dirty="0"/>
+          </a:p>
+        </p:txBody>
+      </p:sp>
+      <p:sp>
+        <p:nvSpPr>
+          <p:cNvPr id="17" name="Text 15"/>
+          <p:cNvSpPr/>
+          <p:nvPr/>
+        </p:nvSpPr>
+        <p:spPr>
+          <a:xfrm>
+            <a:off x="6812280" y="1078992"/>
+            <a:ext cx="1965960" cy="1097280"/>
+          </a:xfrm>
+          <a:prstGeom prst="rect">
+            <a:avLst/>
+          </a:prstGeom>
+          <a:noFill/>
+          <a:ln/>
+        </p:spPr>
+        <p:txBody>
+          <a:bodyPr wrap="square" rtlCol="0" anchor="ctr"/>
+          <a:lstStyle/>
+          <a:p>
+            <a:pPr marL="0" indent="0">
+              <a:buNone/>
+            </a:pPr>
+            <a:r>
+              <a:rPr lang="en-US" sz="1200" dirty="0">
+                <a:solidFill>
+                  <a:srgbClr val="FFFFFF"/>
+                </a:solidFill>
+              </a:rPr>
+              <a:t>Las </a:t>
+            </a:r>
+            <a:r>
+              <a:rPr lang="en-US" sz="1200" dirty="0" err="1">
+                <a:solidFill>
+                  <a:srgbClr val="FFFFFF"/>
+                </a:solidFill>
+              </a:rPr>
+              <a:t>tareas</a:t>
+            </a:r>
+            <a:r>
+              <a:rPr lang="en-US" sz="1200" dirty="0">
+                <a:solidFill>
+                  <a:srgbClr val="FFFFFF"/>
+                </a:solidFill>
+              </a:rPr>
+              <a:t> se </a:t>
+            </a:r>
+            <a:r>
+              <a:rPr lang="en-US" sz="1200" dirty="0" err="1">
+                <a:solidFill>
+                  <a:srgbClr val="FFFFFF"/>
+                </a:solidFill>
+              </a:rPr>
+              <a:t>programan</a:t>
+            </a:r>
+            <a:r>
+              <a:rPr lang="en-US" sz="1200" dirty="0">
+                <a:solidFill>
+                  <a:srgbClr val="FFFFFF"/>
+                </a:solidFill>
+              </a:rPr>
+              <a:t> </a:t>
+            </a:r>
+            <a:r>
+              <a:rPr lang="en-US" sz="1200" dirty="0" err="1">
+                <a:solidFill>
+                  <a:srgbClr val="FFFFFF"/>
+                </a:solidFill>
+              </a:rPr>
+              <a:t>en</a:t>
+            </a:r>
+            <a:r>
+              <a:rPr lang="en-US" sz="1200" dirty="0">
+                <a:solidFill>
+                  <a:srgbClr val="FFFFFF"/>
+                </a:solidFill>
+              </a:rPr>
+              <a:t> Task Queue.</a:t>
+            </a:r>
+            <a:endParaRPr lang="en-US" sz="1200" dirty="0"/>
+          </a:p>
+        </p:txBody>
+      </p:sp>
+      <p:sp>
+        <p:nvSpPr>
+          <p:cNvPr id="18" name="Shape 16"/>
+          <p:cNvSpPr/>
+          <p:nvPr/>
+        </p:nvSpPr>
+        <p:spPr>
+          <a:xfrm>
+            <a:off x="274320" y="2651760"/>
+            <a:ext cx="2743200" cy="1325880"/>
+          </a:xfrm>
+          <a:prstGeom prst="rect">
+            <a:avLst/>
+          </a:prstGeom>
+          <a:solidFill>
+            <a:srgbClr val="112236"/>
+          </a:solidFill>
+          <a:ln w="19050">
+            <a:solidFill>
+              <a:srgbClr val="E67E22"/>
+            </a:solidFill>
+            <a:prstDash val="solid"/>
+          </a:ln>
+          <a:effectLst>
+            <a:outerShdw blurRad="101600" dist="38100" dir="8100000" algn="bl" rotWithShape="0">
+              <a:srgbClr val="000000">
+                <a:alpha val="18000"/>
+              </a:srgbClr>
+            </a:outerShdw>
+          </a:effectLst>
+        </p:spPr>
+        <p:txBody>
+          <a:bodyPr/>
+          <a:lstStyle/>
+          <a:p>
+            <a:endParaRPr lang="pt-PT"/>
+          </a:p>
+        </p:txBody>
+      </p:sp>
+      <p:sp>
+        <p:nvSpPr>
+          <p:cNvPr id="19" name="Shape 17"/>
+          <p:cNvSpPr/>
+          <p:nvPr/>
+        </p:nvSpPr>
+        <p:spPr>
+          <a:xfrm>
+            <a:off x="365760" y="2743200"/>
+            <a:ext cx="502920" cy="502920"/>
+          </a:xfrm>
+          <a:prstGeom prst="ellipse">
+            <a:avLst/>
+          </a:prstGeom>
+          <a:solidFill>
+            <a:srgbClr val="E67E22"/>
+          </a:solidFill>
+          <a:ln w="12700">
+            <a:solidFill>
+              <a:srgbClr val="E67E22"/>
+            </a:solidFill>
+            <a:prstDash val="solid"/>
+          </a:ln>
+        </p:spPr>
+        <p:txBody>
+          <a:bodyPr/>
+          <a:lstStyle/>
+          <a:p>
+            <a:endParaRPr lang="pt-PT"/>
+          </a:p>
+        </p:txBody>
+      </p:sp>
+      <p:sp>
+        <p:nvSpPr>
+          <p:cNvPr id="20" name="Text 18"/>
+          <p:cNvSpPr/>
+          <p:nvPr/>
+        </p:nvSpPr>
+        <p:spPr>
+          <a:xfrm>
+            <a:off x="365760" y="2743200"/>
+            <a:ext cx="502920" cy="502920"/>
+          </a:xfrm>
+          <a:prstGeom prst="rect">
+            <a:avLst/>
+          </a:prstGeom>
+          <a:noFill/>
+          <a:ln/>
+        </p:spPr>
+        <p:txBody>
+          <a:bodyPr wrap="square" lIns="0" tIns="0" rIns="0" bIns="0" rtlCol="0" anchor="ctr"/>
+          <a:lstStyle/>
+          <a:p>
+            <a:pPr marL="0" indent="0" algn="ctr">
+              <a:buNone/>
+            </a:pPr>
+            <a:r>
+              <a:rPr lang="en-US" sz="1600" b="1" dirty="0">
+                <a:solidFill>
+                  <a:srgbClr val="0D1B2A"/>
+                </a:solidFill>
+              </a:rPr>
+              <a:t>4</a:t>
+            </a:r>
+            <a:endParaRPr lang="en-US" sz="1600" dirty="0"/>
+          </a:p>
+        </p:txBody>
+      </p:sp>
+      <p:sp>
+        <p:nvSpPr>
+          <p:cNvPr id="21" name="Text 19"/>
+          <p:cNvSpPr/>
+          <p:nvPr/>
+        </p:nvSpPr>
+        <p:spPr>
+          <a:xfrm>
+            <a:off x="960120" y="2724912"/>
+            <a:ext cx="1965960" cy="1097280"/>
+          </a:xfrm>
+          <a:prstGeom prst="rect">
+            <a:avLst/>
+          </a:prstGeom>
+          <a:noFill/>
+          <a:ln/>
+        </p:spPr>
+        <p:txBody>
+          <a:bodyPr wrap="square" rtlCol="0" anchor="ctr"/>
+          <a:lstStyle/>
+          <a:p>
+            <a:pPr marL="0" indent="0">
+              <a:buNone/>
+            </a:pPr>
+            <a:r>
+              <a:rPr lang="en-US" sz="1200" dirty="0">
+                <a:solidFill>
+                  <a:srgbClr val="FFFFFF"/>
+                </a:solidFill>
+              </a:rPr>
+              <a:t>Worker consume y </a:t>
+            </a:r>
+            <a:r>
+              <a:rPr lang="en-US" sz="1200" dirty="0" err="1">
+                <a:solidFill>
+                  <a:srgbClr val="FFFFFF"/>
+                </a:solidFill>
+              </a:rPr>
+              <a:t>ejecuta</a:t>
+            </a:r>
+            <a:r>
+              <a:rPr lang="en-US" sz="1200" dirty="0">
+                <a:solidFill>
+                  <a:srgbClr val="FFFFFF"/>
+                </a:solidFill>
+              </a:rPr>
+              <a:t> la </a:t>
+            </a:r>
+            <a:r>
+              <a:rPr lang="en-US" sz="1200" dirty="0" err="1">
+                <a:solidFill>
+                  <a:srgbClr val="FFFFFF"/>
+                </a:solidFill>
+              </a:rPr>
+              <a:t>tarea</a:t>
+            </a:r>
+            <a:r>
+              <a:rPr lang="en-US" sz="1200" dirty="0">
+                <a:solidFill>
+                  <a:srgbClr val="FFFFFF"/>
+                </a:solidFill>
+              </a:rPr>
+              <a:t>.</a:t>
+            </a:r>
+            <a:endParaRPr lang="en-US" sz="1200" dirty="0"/>
+          </a:p>
+        </p:txBody>
+      </p:sp>
+      <p:sp>
+        <p:nvSpPr>
+          <p:cNvPr id="23" name="Shape 21"/>
+          <p:cNvSpPr/>
+          <p:nvPr/>
+        </p:nvSpPr>
+        <p:spPr>
+          <a:xfrm>
+            <a:off x="3200400" y="2651760"/>
+            <a:ext cx="2743200" cy="1325880"/>
+          </a:xfrm>
+          <a:prstGeom prst="rect">
+            <a:avLst/>
+          </a:prstGeom>
+          <a:solidFill>
+            <a:srgbClr val="112236"/>
+          </a:solidFill>
+          <a:ln w="19050">
+            <a:solidFill>
+              <a:srgbClr val="27AE60"/>
+            </a:solidFill>
+            <a:prstDash val="solid"/>
+          </a:ln>
+          <a:effectLst>
+            <a:outerShdw blurRad="101600" dist="38100" dir="8100000" algn="bl" rotWithShape="0">
+              <a:srgbClr val="000000">
+                <a:alpha val="18000"/>
+              </a:srgbClr>
+            </a:outerShdw>
+          </a:effectLst>
+        </p:spPr>
+        <p:txBody>
+          <a:bodyPr/>
+          <a:lstStyle/>
+          <a:p>
+            <a:endParaRPr lang="pt-PT"/>
+          </a:p>
+        </p:txBody>
+      </p:sp>
+      <p:sp>
+        <p:nvSpPr>
+          <p:cNvPr id="24" name="Shape 22"/>
+          <p:cNvSpPr/>
+          <p:nvPr/>
+        </p:nvSpPr>
+        <p:spPr>
+          <a:xfrm>
+            <a:off x="3291840" y="2743200"/>
+            <a:ext cx="502920" cy="502920"/>
+          </a:xfrm>
+          <a:prstGeom prst="ellipse">
+            <a:avLst/>
+          </a:prstGeom>
+          <a:solidFill>
+            <a:srgbClr val="27AE60"/>
+          </a:solidFill>
+          <a:ln w="12700">
+            <a:solidFill>
+              <a:srgbClr val="27AE60"/>
+            </a:solidFill>
+            <a:prstDash val="solid"/>
+          </a:ln>
+        </p:spPr>
+        <p:txBody>
+          <a:bodyPr/>
+          <a:lstStyle/>
+          <a:p>
+            <a:endParaRPr lang="pt-PT"/>
+          </a:p>
+        </p:txBody>
+      </p:sp>
+      <p:sp>
+        <p:nvSpPr>
+          <p:cNvPr id="25" name="Text 23"/>
+          <p:cNvSpPr/>
+          <p:nvPr/>
+        </p:nvSpPr>
+        <p:spPr>
+          <a:xfrm>
+            <a:off x="3291840" y="2743200"/>
+            <a:ext cx="502920" cy="502920"/>
+          </a:xfrm>
+          <a:prstGeom prst="rect">
+            <a:avLst/>
+          </a:prstGeom>
+          <a:noFill/>
+          <a:ln/>
+        </p:spPr>
+        <p:txBody>
+          <a:bodyPr wrap="square" lIns="0" tIns="0" rIns="0" bIns="0" rtlCol="0" anchor="ctr"/>
+          <a:lstStyle/>
+          <a:p>
+            <a:pPr marL="0" indent="0" algn="ctr">
+              <a:buNone/>
+            </a:pPr>
+            <a:r>
+              <a:rPr lang="en-US" sz="1600" b="1" dirty="0">
+                <a:solidFill>
+                  <a:srgbClr val="0D1B2A"/>
+                </a:solidFill>
+              </a:rPr>
+              <a:t>5</a:t>
+            </a:r>
+            <a:endParaRPr lang="en-US" sz="1600" dirty="0"/>
+          </a:p>
+        </p:txBody>
+      </p:sp>
+      <p:sp>
+        <p:nvSpPr>
+          <p:cNvPr id="26" name="Text 24"/>
+          <p:cNvSpPr/>
+          <p:nvPr/>
+        </p:nvSpPr>
+        <p:spPr>
+          <a:xfrm>
+            <a:off x="3886200" y="2724912"/>
+            <a:ext cx="1965960" cy="1097280"/>
+          </a:xfrm>
+          <a:prstGeom prst="rect">
+            <a:avLst/>
+          </a:prstGeom>
+          <a:noFill/>
+          <a:ln/>
+        </p:spPr>
+        <p:txBody>
+          <a:bodyPr wrap="square" rtlCol="0" anchor="ctr"/>
+          <a:lstStyle/>
+          <a:p>
+            <a:pPr marL="0" indent="0">
+              <a:buNone/>
+            </a:pPr>
+            <a:r>
+              <a:rPr lang="en-US" sz="1200" dirty="0">
+                <a:solidFill>
+                  <a:srgbClr val="FFFFFF"/>
+                </a:solidFill>
+              </a:rPr>
+              <a:t>Activity </a:t>
+            </a:r>
+            <a:r>
+              <a:rPr lang="en-US" sz="1200" dirty="0" err="1">
+                <a:solidFill>
+                  <a:srgbClr val="FFFFFF"/>
+                </a:solidFill>
+              </a:rPr>
+              <a:t>realiza</a:t>
+            </a:r>
+            <a:r>
+              <a:rPr lang="en-US" sz="1200" dirty="0">
+                <a:solidFill>
+                  <a:srgbClr val="FFFFFF"/>
+                </a:solidFill>
+              </a:rPr>
+              <a:t> la </a:t>
+            </a:r>
+            <a:r>
+              <a:rPr lang="en-US" sz="1200" dirty="0" err="1">
+                <a:solidFill>
+                  <a:srgbClr val="FFFFFF"/>
+                </a:solidFill>
+              </a:rPr>
+              <a:t>operación</a:t>
+            </a:r>
+            <a:r>
+              <a:rPr lang="en-US" sz="1200" dirty="0">
+                <a:solidFill>
+                  <a:srgbClr val="FFFFFF"/>
+                </a:solidFill>
+              </a:rPr>
+              <a:t> externa.</a:t>
+            </a:r>
+            <a:endParaRPr lang="en-US" sz="1200" dirty="0"/>
+          </a:p>
+        </p:txBody>
+      </p:sp>
+      <p:sp>
+        <p:nvSpPr>
+          <p:cNvPr id="28" name="Shape 26"/>
+          <p:cNvSpPr/>
+          <p:nvPr/>
+        </p:nvSpPr>
+        <p:spPr>
+          <a:xfrm>
+            <a:off x="6126480" y="2651760"/>
+            <a:ext cx="2743200" cy="1325880"/>
+          </a:xfrm>
+          <a:prstGeom prst="rect">
+            <a:avLst/>
+          </a:prstGeom>
+          <a:solidFill>
+            <a:srgbClr val="112236"/>
+          </a:solidFill>
+          <a:ln w="19050">
+            <a:solidFill>
+              <a:srgbClr val="00D4AA"/>
+            </a:solidFill>
+            <a:prstDash val="solid"/>
+          </a:ln>
+          <a:effectLst>
+            <a:outerShdw blurRad="101600" dist="38100" dir="8100000" algn="bl" rotWithShape="0">
+              <a:srgbClr val="000000">
+                <a:alpha val="18000"/>
+              </a:srgbClr>
+            </a:outerShdw>
+          </a:effectLst>
+        </p:spPr>
+        <p:txBody>
+          <a:bodyPr/>
+          <a:lstStyle/>
+          <a:p>
+            <a:endParaRPr lang="pt-PT"/>
+          </a:p>
+        </p:txBody>
+      </p:sp>
+      <p:sp>
+        <p:nvSpPr>
+          <p:cNvPr id="29" name="Shape 27"/>
+          <p:cNvSpPr/>
+          <p:nvPr/>
+        </p:nvSpPr>
+        <p:spPr>
+          <a:xfrm>
+            <a:off x="6217920" y="2743200"/>
+            <a:ext cx="502920" cy="502920"/>
+          </a:xfrm>
+          <a:prstGeom prst="ellipse">
+            <a:avLst/>
+          </a:prstGeom>
+          <a:solidFill>
+            <a:srgbClr val="00D4AA"/>
+          </a:solidFill>
+          <a:ln w="12700">
+            <a:solidFill>
+              <a:srgbClr val="00D4AA"/>
+            </a:solidFill>
+            <a:prstDash val="solid"/>
+          </a:ln>
+        </p:spPr>
+        <p:txBody>
+          <a:bodyPr/>
+          <a:lstStyle/>
+          <a:p>
+            <a:endParaRPr lang="pt-PT"/>
+          </a:p>
+        </p:txBody>
+      </p:sp>
+      <p:sp>
+        <p:nvSpPr>
+          <p:cNvPr id="30" name="Text 28"/>
+          <p:cNvSpPr/>
+          <p:nvPr/>
+        </p:nvSpPr>
+        <p:spPr>
+          <a:xfrm>
+            <a:off x="6217920" y="2743200"/>
+            <a:ext cx="502920" cy="502920"/>
+          </a:xfrm>
+          <a:prstGeom prst="rect">
+            <a:avLst/>
+          </a:prstGeom>
+          <a:noFill/>
+          <a:ln/>
+        </p:spPr>
+        <p:txBody>
+          <a:bodyPr wrap="square" lIns="0" tIns="0" rIns="0" bIns="0" rtlCol="0" anchor="ctr"/>
+          <a:lstStyle/>
+          <a:p>
+            <a:pPr marL="0" indent="0" algn="ctr">
+              <a:buNone/>
+            </a:pPr>
+            <a:r>
+              <a:rPr lang="en-US" sz="1600" b="1" dirty="0">
+                <a:solidFill>
+                  <a:srgbClr val="0D1B2A"/>
+                </a:solidFill>
+              </a:rPr>
+              <a:t>6</a:t>
+            </a:r>
+            <a:endParaRPr lang="en-US" sz="1600" dirty="0"/>
+          </a:p>
+        </p:txBody>
+      </p:sp>
+      <p:sp>
+        <p:nvSpPr>
+          <p:cNvPr id="31" name="Text 29"/>
+          <p:cNvSpPr/>
+          <p:nvPr/>
+        </p:nvSpPr>
+        <p:spPr>
+          <a:xfrm>
+            <a:off x="6812280" y="2724912"/>
+            <a:ext cx="1965960" cy="1097280"/>
+          </a:xfrm>
+          <a:prstGeom prst="rect">
+            <a:avLst/>
+          </a:prstGeom>
+          <a:noFill/>
+          <a:ln/>
+        </p:spPr>
+        <p:txBody>
+          <a:bodyPr wrap="square" rtlCol="0" anchor="ctr"/>
+          <a:lstStyle/>
+          <a:p>
+            <a:pPr marL="0" indent="0">
+              <a:buNone/>
+            </a:pPr>
+            <a:r>
+              <a:rPr lang="en-US" sz="1200" dirty="0">
+                <a:solidFill>
+                  <a:srgbClr val="FFFFFF"/>
+                </a:solidFill>
+              </a:rPr>
+              <a:t>Se </a:t>
+            </a:r>
+            <a:r>
+              <a:rPr lang="en-US" sz="1200" dirty="0" err="1">
+                <a:solidFill>
+                  <a:srgbClr val="FFFFFF"/>
+                </a:solidFill>
+              </a:rPr>
+              <a:t>devuelve</a:t>
+            </a:r>
+            <a:r>
+              <a:rPr lang="en-US" sz="1200" dirty="0">
+                <a:solidFill>
+                  <a:srgbClr val="FFFFFF"/>
+                </a:solidFill>
+              </a:rPr>
+              <a:t> </a:t>
+            </a:r>
+            <a:r>
+              <a:rPr lang="en-US" sz="1200" dirty="0" err="1">
+                <a:solidFill>
+                  <a:srgbClr val="FFFFFF"/>
+                </a:solidFill>
+              </a:rPr>
+              <a:t>el</a:t>
+            </a:r>
+            <a:r>
+              <a:rPr lang="en-US" sz="1200" dirty="0">
+                <a:solidFill>
+                  <a:srgbClr val="FFFFFF"/>
+                </a:solidFill>
+              </a:rPr>
+              <a:t> </a:t>
+            </a:r>
+            <a:r>
+              <a:rPr lang="en-US" sz="1200" dirty="0" err="1">
+                <a:solidFill>
+                  <a:srgbClr val="FFFFFF"/>
+                </a:solidFill>
+              </a:rPr>
+              <a:t>resultado</a:t>
+            </a:r>
+            <a:r>
+              <a:rPr lang="en-US" sz="1200" dirty="0">
+                <a:solidFill>
+                  <a:srgbClr val="FFFFFF"/>
+                </a:solidFill>
+              </a:rPr>
+              <a:t> y se </a:t>
+            </a:r>
+            <a:r>
+              <a:rPr lang="en-US" sz="1200" dirty="0" err="1">
+                <a:solidFill>
+                  <a:srgbClr val="FFFFFF"/>
+                </a:solidFill>
+              </a:rPr>
+              <a:t>actualiza</a:t>
+            </a:r>
+            <a:r>
+              <a:rPr lang="en-US" sz="1200" dirty="0">
+                <a:solidFill>
+                  <a:srgbClr val="FFFFFF"/>
+                </a:solidFill>
+              </a:rPr>
+              <a:t> </a:t>
+            </a:r>
+            <a:r>
+              <a:rPr lang="en-US" sz="1200" dirty="0" err="1">
+                <a:solidFill>
+                  <a:srgbClr val="FFFFFF"/>
+                </a:solidFill>
+              </a:rPr>
+              <a:t>el</a:t>
+            </a:r>
+            <a:r>
+              <a:rPr lang="en-US" sz="1200" dirty="0">
+                <a:solidFill>
+                  <a:srgbClr val="FFFFFF"/>
+                </a:solidFill>
+              </a:rPr>
+              <a:t> </a:t>
+            </a:r>
+            <a:r>
+              <a:rPr lang="en-US" sz="1200" dirty="0" err="1">
+                <a:solidFill>
+                  <a:srgbClr val="FFFFFF"/>
+                </a:solidFill>
+              </a:rPr>
+              <a:t>historial</a:t>
+            </a:r>
+            <a:r>
+              <a:rPr lang="en-US" sz="1200" dirty="0">
+                <a:solidFill>
+                  <a:srgbClr val="FFFFFF"/>
+                </a:solidFill>
+              </a:rPr>
+              <a:t>.</a:t>
+            </a:r>
+            <a:endParaRPr lang="en-US" sz="1200" dirty="0"/>
+          </a:p>
+        </p:txBody>
+      </p:sp>
+      <p:sp>
+        <p:nvSpPr>
+          <p:cNvPr id="32" name="Shape 30"/>
+          <p:cNvSpPr/>
+          <p:nvPr/>
+        </p:nvSpPr>
+        <p:spPr>
+          <a:xfrm>
+            <a:off x="274320" y="4434840"/>
+            <a:ext cx="8595360" cy="457200"/>
+          </a:xfrm>
+          <a:prstGeom prst="rect">
+            <a:avLst/>
+          </a:prstGeom>
+          <a:solidFill>
+            <a:srgbClr val="1B6CA8"/>
+          </a:solidFill>
+          <a:ln w="12700">
+            <a:solidFill>
+              <a:srgbClr val="1B6CA8"/>
+            </a:solidFill>
+            <a:prstDash val="solid"/>
+          </a:ln>
+        </p:spPr>
+        <p:txBody>
+          <a:bodyPr/>
+          <a:lstStyle/>
+          <a:p>
+            <a:endParaRPr lang="pt-PT"/>
+          </a:p>
+        </p:txBody>
+      </p:sp>
+      <p:sp>
+        <p:nvSpPr>
+          <p:cNvPr id="33" name="Text 31"/>
+          <p:cNvSpPr/>
+          <p:nvPr/>
+        </p:nvSpPr>
+        <p:spPr>
+          <a:xfrm>
+            <a:off x="457200" y="4434840"/>
+            <a:ext cx="8229600" cy="457200"/>
+          </a:xfrm>
+          <a:prstGeom prst="rect">
+            <a:avLst/>
+          </a:prstGeom>
+          <a:noFill/>
+          <a:ln/>
+        </p:spPr>
+        <p:txBody>
+          <a:bodyPr wrap="square" rtlCol="0" anchor="ctr"/>
+          <a:lstStyle/>
+          <a:p>
+            <a:pPr marL="0" indent="0">
+              <a:buNone/>
+            </a:pPr>
+            <a:r>
+              <a:rPr lang="en-US" sz="1100" i="1" dirty="0">
+                <a:solidFill>
+                  <a:srgbClr val="FFFFFF"/>
+                </a:solidFill>
+              </a:rPr>
+              <a:t>🔄  En </a:t>
+            </a:r>
+            <a:r>
+              <a:rPr lang="en-US" sz="1100" i="1" dirty="0" err="1">
+                <a:solidFill>
+                  <a:srgbClr val="FFFFFF"/>
+                </a:solidFill>
+              </a:rPr>
+              <a:t>caso</a:t>
+            </a:r>
+            <a:r>
+              <a:rPr lang="en-US" sz="1100" i="1" dirty="0">
+                <a:solidFill>
+                  <a:srgbClr val="FFFFFF"/>
+                </a:solidFill>
+              </a:rPr>
+              <a:t> de </a:t>
+            </a:r>
+            <a:r>
+              <a:rPr lang="en-US" sz="1100" i="1" dirty="0" err="1">
+                <a:solidFill>
+                  <a:srgbClr val="FFFFFF"/>
+                </a:solidFill>
+              </a:rPr>
+              <a:t>fallo</a:t>
+            </a:r>
+            <a:r>
+              <a:rPr lang="en-US" sz="1100" i="1" dirty="0">
+                <a:solidFill>
+                  <a:srgbClr val="FFFFFF"/>
+                </a:solidFill>
+              </a:rPr>
+              <a:t>: Temporal </a:t>
+            </a:r>
+            <a:r>
+              <a:rPr lang="en-US" sz="1100" i="1" dirty="0" err="1">
+                <a:solidFill>
+                  <a:srgbClr val="FFFFFF"/>
+                </a:solidFill>
+              </a:rPr>
+              <a:t>aplica</a:t>
+            </a:r>
+            <a:r>
+              <a:rPr lang="en-US" sz="1100" i="1" dirty="0">
+                <a:solidFill>
+                  <a:srgbClr val="FFFFFF"/>
+                </a:solidFill>
+              </a:rPr>
+              <a:t> las </a:t>
+            </a:r>
+            <a:r>
+              <a:rPr lang="en-US" sz="1100" i="1" dirty="0" err="1">
+                <a:solidFill>
+                  <a:srgbClr val="FFFFFF"/>
+                </a:solidFill>
+              </a:rPr>
+              <a:t>políticas</a:t>
+            </a:r>
+            <a:r>
+              <a:rPr lang="en-US" sz="1100" i="1" dirty="0">
+                <a:solidFill>
+                  <a:srgbClr val="FFFFFF"/>
+                </a:solidFill>
+              </a:rPr>
+              <a:t> de </a:t>
+            </a:r>
+            <a:r>
+              <a:rPr lang="en-US" sz="1100" i="1" dirty="0" err="1">
+                <a:solidFill>
+                  <a:srgbClr val="FFFFFF"/>
+                </a:solidFill>
+              </a:rPr>
+              <a:t>reintento</a:t>
+            </a:r>
+            <a:r>
+              <a:rPr lang="en-US" sz="1100" i="1" dirty="0">
+                <a:solidFill>
+                  <a:srgbClr val="FFFFFF"/>
+                </a:solidFill>
+              </a:rPr>
+              <a:t> y </a:t>
+            </a:r>
+            <a:r>
+              <a:rPr lang="en-US" sz="1100" i="1" dirty="0" err="1">
+                <a:solidFill>
+                  <a:srgbClr val="FFFFFF"/>
+                </a:solidFill>
+              </a:rPr>
+              <a:t>reanuda</a:t>
+            </a:r>
+            <a:r>
+              <a:rPr lang="en-US" sz="1100" i="1" dirty="0">
+                <a:solidFill>
+                  <a:srgbClr val="FFFFFF"/>
+                </a:solidFill>
+              </a:rPr>
+              <a:t> la </a:t>
+            </a:r>
+            <a:r>
+              <a:rPr lang="en-US" sz="1100" i="1" dirty="0" err="1">
+                <a:solidFill>
+                  <a:srgbClr val="FFFFFF"/>
+                </a:solidFill>
+              </a:rPr>
+              <a:t>ejecución</a:t>
+            </a:r>
+            <a:r>
+              <a:rPr lang="en-US" sz="1100" i="1" dirty="0">
+                <a:solidFill>
+                  <a:srgbClr val="FFFFFF"/>
+                </a:solidFill>
+              </a:rPr>
+              <a:t> </a:t>
+            </a:r>
+            <a:r>
+              <a:rPr lang="en-US" sz="1100" i="1" dirty="0" err="1">
+                <a:solidFill>
+                  <a:srgbClr val="FFFFFF"/>
+                </a:solidFill>
+              </a:rPr>
+              <a:t>en</a:t>
+            </a:r>
+            <a:r>
+              <a:rPr lang="en-US" sz="1100" i="1" dirty="0">
+                <a:solidFill>
+                  <a:srgbClr val="FFFFFF"/>
+                </a:solidFill>
+              </a:rPr>
+              <a:t> </a:t>
+            </a:r>
+            <a:r>
+              <a:rPr lang="en-US" sz="1100" i="1" dirty="0" err="1">
+                <a:solidFill>
+                  <a:srgbClr val="FFFFFF"/>
+                </a:solidFill>
+              </a:rPr>
+              <a:t>función</a:t>
+            </a:r>
+            <a:r>
+              <a:rPr lang="en-US" sz="1100" i="1" dirty="0">
+                <a:solidFill>
+                  <a:srgbClr val="FFFFFF"/>
+                </a:solidFill>
+              </a:rPr>
+              <a:t> del </a:t>
+            </a:r>
+            <a:r>
+              <a:rPr lang="en-US" sz="1100" i="1" dirty="0" err="1">
+                <a:solidFill>
+                  <a:srgbClr val="FFFFFF"/>
+                </a:solidFill>
+              </a:rPr>
+              <a:t>historial</a:t>
+            </a:r>
+            <a:r>
+              <a:rPr lang="en-US" sz="1100" i="1" dirty="0">
+                <a:solidFill>
+                  <a:srgbClr val="FFFFFF"/>
+                </a:solidFill>
+              </a:rPr>
+              <a:t> de </a:t>
+            </a:r>
+            <a:r>
+              <a:rPr lang="en-US" sz="1100" i="1" dirty="0" err="1">
+                <a:solidFill>
+                  <a:srgbClr val="FFFFFF"/>
+                </a:solidFill>
+              </a:rPr>
+              <a:t>eventos</a:t>
+            </a:r>
+            <a:r>
+              <a:rPr lang="en-US" sz="1100" i="1" dirty="0">
+                <a:solidFill>
+                  <a:srgbClr val="FFFFFF"/>
+                </a:solidFill>
+              </a:rPr>
+              <a:t>.</a:t>
+            </a:r>
+            <a:endParaRPr lang="en-US" sz="1100" dirty="0"/>
+          </a:p>
+        </p:txBody>
+      </p:sp>
+      <p:cxnSp>
+        <p:nvCxnSpPr>
+          <p:cNvPr id="34" name="Conexão Reta Unidirecional 33">
+            <a:extLst>
+              <a:ext uri="{FF2B5EF4-FFF2-40B4-BE49-F238E27FC236}">
+                <a16:creationId xmlns:a16="http://schemas.microsoft.com/office/drawing/2014/main" id="{06BC731E-5FA7-9DE4-0099-4DDF5EC35A24}"/>
+              </a:ext>
+            </a:extLst>
+          </p:cNvPr>
+          <p:cNvCxnSpPr>
+            <a:cxnSpLocks/>
+          </p:cNvCxnSpPr>
+          <p:nvPr/>
+        </p:nvCxnSpPr>
+        <p:spPr>
+          <a:xfrm>
+            <a:off x="3017520" y="1668780"/>
+            <a:ext cx="182880" cy="0"/>
+          </a:xfrm>
+          <a:prstGeom prst="straightConnector1">
+            <a:avLst/>
+          </a:prstGeom>
+          <a:ln w="19050">
+            <a:solidFill>
+              <a:schemeClr val="tx1"/>
+            </a:solidFill>
+            <a:tailEnd type="triangle"/>
+          </a:ln>
+        </p:spPr>
+        <p:style>
+          <a:lnRef idx="1">
+            <a:schemeClr val="accent1"/>
+          </a:lnRef>
+          <a:fillRef idx="0">
+            <a:schemeClr val="accent1"/>
+          </a:fillRef>
+          <a:effectRef idx="0">
+            <a:schemeClr val="accent1"/>
+          </a:effectRef>
+          <a:fontRef idx="minor">
+            <a:schemeClr val="tx1"/>
+          </a:fontRef>
+        </p:style>
+      </p:cxnSp>
+      <p:cxnSp>
+        <p:nvCxnSpPr>
+          <p:cNvPr id="35" name="Conexão Reta Unidirecional 34">
+            <a:extLst>
+              <a:ext uri="{FF2B5EF4-FFF2-40B4-BE49-F238E27FC236}">
+                <a16:creationId xmlns:a16="http://schemas.microsoft.com/office/drawing/2014/main" id="{5ADA2D49-254B-8274-AABC-40F9046D3AC7}"/>
+              </a:ext>
+            </a:extLst>
+          </p:cNvPr>
+          <p:cNvCxnSpPr>
+            <a:cxnSpLocks/>
+          </p:cNvCxnSpPr>
+          <p:nvPr/>
+        </p:nvCxnSpPr>
+        <p:spPr>
+          <a:xfrm>
+            <a:off x="5943600" y="1668780"/>
+            <a:ext cx="182880" cy="0"/>
+          </a:xfrm>
+          <a:prstGeom prst="straightConnector1">
+            <a:avLst/>
+          </a:prstGeom>
+          <a:ln w="19050">
+            <a:solidFill>
+              <a:schemeClr val="tx1"/>
+            </a:solidFill>
+            <a:tailEnd type="triangle"/>
+          </a:ln>
+        </p:spPr>
+        <p:style>
+          <a:lnRef idx="1">
+            <a:schemeClr val="accent1"/>
+          </a:lnRef>
+          <a:fillRef idx="0">
+            <a:schemeClr val="accent1"/>
+          </a:fillRef>
+          <a:effectRef idx="0">
+            <a:schemeClr val="accent1"/>
+          </a:effectRef>
+          <a:fontRef idx="minor">
+            <a:schemeClr val="tx1"/>
+          </a:fontRef>
+        </p:style>
+      </p:cxnSp>
+      <p:cxnSp>
+        <p:nvCxnSpPr>
+          <p:cNvPr id="36" name="Conexão Reta Unidirecional 35">
+            <a:extLst>
+              <a:ext uri="{FF2B5EF4-FFF2-40B4-BE49-F238E27FC236}">
+                <a16:creationId xmlns:a16="http://schemas.microsoft.com/office/drawing/2014/main" id="{B8D804C8-CA41-F327-9B64-FC25871AA272}"/>
+              </a:ext>
+            </a:extLst>
+          </p:cNvPr>
+          <p:cNvCxnSpPr>
+            <a:cxnSpLocks/>
+          </p:cNvCxnSpPr>
+          <p:nvPr/>
+        </p:nvCxnSpPr>
+        <p:spPr>
+          <a:xfrm>
+            <a:off x="3017520" y="3314700"/>
+            <a:ext cx="182880" cy="0"/>
+          </a:xfrm>
+          <a:prstGeom prst="straightConnector1">
+            <a:avLst/>
+          </a:prstGeom>
+          <a:ln w="19050">
+            <a:solidFill>
+              <a:schemeClr val="tx1"/>
+            </a:solidFill>
+            <a:tailEnd type="triangle"/>
+          </a:ln>
+        </p:spPr>
+        <p:style>
+          <a:lnRef idx="1">
+            <a:schemeClr val="accent1"/>
+          </a:lnRef>
+          <a:fillRef idx="0">
+            <a:schemeClr val="accent1"/>
+          </a:fillRef>
+          <a:effectRef idx="0">
+            <a:schemeClr val="accent1"/>
+          </a:effectRef>
+          <a:fontRef idx="minor">
+            <a:schemeClr val="tx1"/>
+          </a:fontRef>
+        </p:style>
+      </p:cxnSp>
+      <p:cxnSp>
+        <p:nvCxnSpPr>
+          <p:cNvPr id="37" name="Conexão Reta Unidirecional 36">
+            <a:extLst>
+              <a:ext uri="{FF2B5EF4-FFF2-40B4-BE49-F238E27FC236}">
+                <a16:creationId xmlns:a16="http://schemas.microsoft.com/office/drawing/2014/main" id="{073E7D96-C155-470F-114A-C83D50DC5996}"/>
+              </a:ext>
+            </a:extLst>
+          </p:cNvPr>
+          <p:cNvCxnSpPr>
+            <a:cxnSpLocks/>
+          </p:cNvCxnSpPr>
+          <p:nvPr/>
+        </p:nvCxnSpPr>
+        <p:spPr>
+          <a:xfrm flipV="1">
+            <a:off x="5943600" y="3310944"/>
+            <a:ext cx="182880" cy="3756"/>
+          </a:xfrm>
+          <a:prstGeom prst="straightConnector1">
+            <a:avLst/>
+          </a:prstGeom>
+          <a:ln w="19050">
+            <a:solidFill>
+              <a:schemeClr val="tx1"/>
+            </a:solidFill>
+            <a:tailEnd type="triangle"/>
+          </a:ln>
+        </p:spPr>
+        <p:style>
+          <a:lnRef idx="1">
+            <a:schemeClr val="accent1"/>
+          </a:lnRef>
+          <a:fillRef idx="0">
+            <a:schemeClr val="accent1"/>
+          </a:fillRef>
+          <a:effectRef idx="0">
+            <a:schemeClr val="accent1"/>
+          </a:effectRef>
+          <a:fontRef idx="minor">
+            <a:schemeClr val="tx1"/>
+          </a:fontRef>
+        </p:style>
+      </p:cxnSp>
     </p:spTree>
   </p:cSld>
   <p:clrMapOvr>

--- a/Temporal_IO_es.pptx
+++ b/Temporal_IO_es.pptx
@@ -1968,7 +1968,7 @@
                   <a:srgbClr val="8FA3B3"/>
                 </a:solidFill>
               </a:rPr>
-              <a:t> •  2025</a:t>
+              <a:t> •  2026</a:t>
             </a:r>
             <a:endParaRPr lang="en-US" sz="1100" dirty="0"/>
           </a:p>

--- a/Temporal_IO_es.pptx
+++ b/Temporal_IO_es.pptx
@@ -5,20 +5,21 @@
     <p:sldMasterId id="2147483648" r:id="rId1"/>
   </p:sldMasterIdLst>
   <p:notesMasterIdLst>
-    <p:notesMasterId r:id="rId13"/>
+    <p:notesMasterId r:id="rId14"/>
   </p:notesMasterIdLst>
   <p:sldIdLst>
     <p:sldId id="256" r:id="rId2"/>
     <p:sldId id="257" r:id="rId3"/>
     <p:sldId id="268" r:id="rId4"/>
-    <p:sldId id="258" r:id="rId5"/>
-    <p:sldId id="259" r:id="rId6"/>
-    <p:sldId id="260" r:id="rId7"/>
-    <p:sldId id="261" r:id="rId8"/>
-    <p:sldId id="264" r:id="rId9"/>
-    <p:sldId id="265" r:id="rId10"/>
-    <p:sldId id="266" r:id="rId11"/>
-    <p:sldId id="267" r:id="rId12"/>
+    <p:sldId id="269" r:id="rId5"/>
+    <p:sldId id="258" r:id="rId6"/>
+    <p:sldId id="259" r:id="rId7"/>
+    <p:sldId id="260" r:id="rId8"/>
+    <p:sldId id="261" r:id="rId9"/>
+    <p:sldId id="264" r:id="rId10"/>
+    <p:sldId id="265" r:id="rId11"/>
+    <p:sldId id="266" r:id="rId12"/>
+    <p:sldId id="267" r:id="rId13"/>
   </p:sldIdLst>
   <p:sldSz cx="9144000" cy="5143500" type="screen16x9"/>
   <p:notesSz cx="5143500" cy="9144000"/>
@@ -499,6 +500,90 @@
 </p:notes>
 </file>
 
+<file path=ppt/notesSlides/notesSlide12.xml><?xml version="1.0" encoding="utf-8"?>
+<p:notes xmlns:a="http://schemas.openxmlformats.org/drawingml/2006/main" xmlns:r="http://schemas.openxmlformats.org/officeDocument/2006/relationships" xmlns:p="http://schemas.openxmlformats.org/presentationml/2006/main">
+  <p:cSld>
+    <p:spTree>
+      <p:nvGrpSpPr>
+        <p:cNvPr id="1" name=""/>
+        <p:cNvGrpSpPr/>
+        <p:nvPr/>
+      </p:nvGrpSpPr>
+      <p:grpSpPr>
+        <a:xfrm>
+          <a:off x="0" y="0"/>
+          <a:ext cx="0" cy="0"/>
+          <a:chOff x="0" y="0"/>
+          <a:chExt cx="0" cy="0"/>
+        </a:xfrm>
+      </p:grpSpPr>
+      <p:sp>
+        <p:nvSpPr>
+          <p:cNvPr id="2" name="Slide Image Placeholder 1"/>
+          <p:cNvSpPr>
+            <a:spLocks noGrp="1" noRot="1" noChangeAspect="1"/>
+          </p:cNvSpPr>
+          <p:nvPr>
+            <p:ph type="sldImg"/>
+          </p:nvPr>
+        </p:nvSpPr>
+        <p:spPr/>
+      </p:sp>
+      <p:sp>
+        <p:nvSpPr>
+          <p:cNvPr id="3" name="Notes Placeholder 2"/>
+          <p:cNvSpPr>
+            <a:spLocks noGrp="1"/>
+          </p:cNvSpPr>
+          <p:nvPr>
+            <p:ph type="body" idx="1"/>
+          </p:nvPr>
+        </p:nvSpPr>
+        <p:spPr/>
+        <p:txBody>
+          <a:bodyPr/>
+          <a:lstStyle/>
+          <a:p>
+            <a:endParaRPr lang="en-US" dirty="0"/>
+          </a:p>
+        </p:txBody>
+      </p:sp>
+      <p:sp>
+        <p:nvSpPr>
+          <p:cNvPr id="4" name="Slide Number Placeholder 3"/>
+          <p:cNvSpPr>
+            <a:spLocks noGrp="1"/>
+          </p:cNvSpPr>
+          <p:nvPr>
+            <p:ph type="sldNum" sz="quarter" idx="10"/>
+          </p:nvPr>
+        </p:nvSpPr>
+        <p:spPr/>
+        <p:txBody>
+          <a:bodyPr/>
+          <a:lstStyle/>
+          <a:p>
+            <a:fld id="{F7021451-1387-4CA6-816F-3879F97B5CBC}" type="slidenum">
+              <a:rPr lang="en-US"/>
+              <a:t>12</a:t>
+            </a:fld>
+            <a:endParaRPr lang="en-US"/>
+          </a:p>
+        </p:txBody>
+      </p:sp>
+    </p:spTree>
+    <p:extLst>
+      <p:ext uri="{BB962C8B-B14F-4D97-AF65-F5344CB8AC3E}">
+        <p14:creationId xmlns:p14="http://schemas.microsoft.com/office/powerpoint/2010/main" val="1024086991"/>
+      </p:ext>
+    </p:extLst>
+  </p:cSld>
+  <p:clrMapOvr>
+    <a:masterClrMapping/>
+  </p:clrMapOvr>
+</p:notes>
+</file>
+
 <file path=ppt/notesSlides/notesSlide2.xml><?xml version="1.0" encoding="utf-8"?>
 <p:notes xmlns:a="http://schemas.openxmlformats.org/drawingml/2006/main" xmlns:r="http://schemas.openxmlformats.org/officeDocument/2006/relationships" xmlns:p="http://schemas.openxmlformats.org/presentationml/2006/main">
   <p:cSld>
@@ -672,7 +757,13 @@
   <p:cSld>
     <p:spTree>
       <p:nvGrpSpPr>
-        <p:cNvPr id="1" name=""/>
+        <p:cNvPr id="1" name="">
+          <a:extLst>
+            <a:ext uri="{FF2B5EF4-FFF2-40B4-BE49-F238E27FC236}">
+              <a16:creationId xmlns:a16="http://schemas.microsoft.com/office/drawing/2014/main" id="{CB4E9D78-97CB-7BC1-5731-9415C4FB6CA0}"/>
+            </a:ext>
+          </a:extLst>
+        </p:cNvPr>
         <p:cNvGrpSpPr/>
         <p:nvPr/>
       </p:nvGrpSpPr>
@@ -686,7 +777,13 @@
       </p:grpSpPr>
       <p:sp>
         <p:nvSpPr>
-          <p:cNvPr id="2" name="Slide Image Placeholder 1"/>
+          <p:cNvPr id="2" name="Slide Image Placeholder 1">
+            <a:extLst>
+              <a:ext uri="{FF2B5EF4-FFF2-40B4-BE49-F238E27FC236}">
+                <a16:creationId xmlns:a16="http://schemas.microsoft.com/office/drawing/2014/main" id="{702AFE0F-325D-51AB-6EB5-0C6DAD7B089F}"/>
+              </a:ext>
+            </a:extLst>
+          </p:cNvPr>
           <p:cNvSpPr>
             <a:spLocks noGrp="1" noRot="1" noChangeAspect="1"/>
           </p:cNvSpPr>
@@ -698,7 +795,13 @@
       </p:sp>
       <p:sp>
         <p:nvSpPr>
-          <p:cNvPr id="3" name="Notes Placeholder 2"/>
+          <p:cNvPr id="3" name="Notes Placeholder 2">
+            <a:extLst>
+              <a:ext uri="{FF2B5EF4-FFF2-40B4-BE49-F238E27FC236}">
+                <a16:creationId xmlns:a16="http://schemas.microsoft.com/office/drawing/2014/main" id="{7204B7FF-DD1E-2CEB-9686-78D443C455E5}"/>
+              </a:ext>
+            </a:extLst>
+          </p:cNvPr>
           <p:cNvSpPr>
             <a:spLocks noGrp="1"/>
           </p:cNvSpPr>
@@ -717,7 +820,13 @@
       </p:sp>
       <p:sp>
         <p:nvSpPr>
-          <p:cNvPr id="4" name="Slide Number Placeholder 3"/>
+          <p:cNvPr id="4" name="Slide Number Placeholder 3">
+            <a:extLst>
+              <a:ext uri="{FF2B5EF4-FFF2-40B4-BE49-F238E27FC236}">
+                <a16:creationId xmlns:a16="http://schemas.microsoft.com/office/drawing/2014/main" id="{2F5184A5-0661-7CB1-C542-2A79823F4A90}"/>
+              </a:ext>
+            </a:extLst>
+          </p:cNvPr>
           <p:cNvSpPr>
             <a:spLocks noGrp="1"/>
           </p:cNvSpPr>
@@ -741,7 +850,7 @@
     </p:spTree>
     <p:extLst>
       <p:ext uri="{BB962C8B-B14F-4D97-AF65-F5344CB8AC3E}">
-        <p14:creationId xmlns:p14="http://schemas.microsoft.com/office/powerpoint/2010/main" val="1024086991"/>
+        <p14:creationId xmlns:p14="http://schemas.microsoft.com/office/powerpoint/2010/main" val="2605223742"/>
       </p:ext>
     </p:extLst>
   </p:cSld>
@@ -1984,6 +2093,1739 @@
 
 <file path=ppt/slides/slide10.xml><?xml version="1.0" encoding="utf-8"?>
 <p:sld xmlns:a="http://schemas.openxmlformats.org/drawingml/2006/main" xmlns:r="http://schemas.openxmlformats.org/officeDocument/2006/relationships" xmlns:p="http://schemas.openxmlformats.org/presentationml/2006/main">
+  <p:cSld name="Slide 10">
+    <p:bg>
+      <p:bgPr>
+        <a:gradFill>
+          <a:gsLst>
+            <a:gs pos="0">
+              <a:schemeClr val="accent3">
+                <a:lumMod val="5000"/>
+                <a:lumOff val="95000"/>
+              </a:schemeClr>
+            </a:gs>
+            <a:gs pos="74000">
+              <a:schemeClr val="accent3">
+                <a:lumMod val="45000"/>
+                <a:lumOff val="55000"/>
+              </a:schemeClr>
+            </a:gs>
+            <a:gs pos="83000">
+              <a:schemeClr val="accent3">
+                <a:lumMod val="45000"/>
+                <a:lumOff val="55000"/>
+              </a:schemeClr>
+            </a:gs>
+            <a:gs pos="100000">
+              <a:schemeClr val="accent3">
+                <a:lumMod val="30000"/>
+                <a:lumOff val="70000"/>
+              </a:schemeClr>
+            </a:gs>
+          </a:gsLst>
+          <a:lin ang="5400000" scaled="1"/>
+        </a:gradFill>
+        <a:effectLst/>
+      </p:bgPr>
+    </p:bg>
+    <p:spTree>
+      <p:nvGrpSpPr>
+        <p:cNvPr id="1" name=""/>
+        <p:cNvGrpSpPr/>
+        <p:nvPr/>
+      </p:nvGrpSpPr>
+      <p:grpSpPr>
+        <a:xfrm>
+          <a:off x="0" y="0"/>
+          <a:ext cx="0" cy="0"/>
+          <a:chOff x="0" y="0"/>
+          <a:chExt cx="0" cy="0"/>
+        </a:xfrm>
+      </p:grpSpPr>
+      <p:sp>
+        <p:nvSpPr>
+          <p:cNvPr id="2" name="Shape 0"/>
+          <p:cNvSpPr/>
+          <p:nvPr/>
+        </p:nvSpPr>
+        <p:spPr>
+          <a:xfrm>
+            <a:off x="0" y="0"/>
+            <a:ext cx="9144000" cy="822960"/>
+          </a:xfrm>
+          <a:prstGeom prst="rect">
+            <a:avLst/>
+          </a:prstGeom>
+          <a:solidFill>
+            <a:srgbClr val="1B6CA8"/>
+          </a:solidFill>
+          <a:ln w="12700">
+            <a:solidFill>
+              <a:srgbClr val="1B6CA8"/>
+            </a:solidFill>
+            <a:prstDash val="solid"/>
+          </a:ln>
+        </p:spPr>
+        <p:txBody>
+          <a:bodyPr/>
+          <a:lstStyle/>
+          <a:p>
+            <a:endParaRPr lang="pt-PT"/>
+          </a:p>
+        </p:txBody>
+      </p:sp>
+      <p:sp>
+        <p:nvSpPr>
+          <p:cNvPr id="3" name="Text 1"/>
+          <p:cNvSpPr/>
+          <p:nvPr/>
+        </p:nvSpPr>
+        <p:spPr>
+          <a:xfrm>
+            <a:off x="457200" y="0"/>
+            <a:ext cx="8229600" cy="822960"/>
+          </a:xfrm>
+          <a:prstGeom prst="rect">
+            <a:avLst/>
+          </a:prstGeom>
+          <a:noFill/>
+          <a:ln/>
+        </p:spPr>
+        <p:txBody>
+          <a:bodyPr wrap="square" lIns="0" tIns="0" rIns="0" bIns="0" rtlCol="0" anchor="ctr"/>
+          <a:lstStyle/>
+          <a:p>
+            <a:pPr marL="0" indent="0">
+              <a:buNone/>
+            </a:pPr>
+            <a:r>
+              <a:rPr lang="en-US" sz="2400" b="1" dirty="0">
+                <a:solidFill>
+                  <a:srgbClr val="FFFFFF"/>
+                </a:solidFill>
+              </a:rPr>
+              <a:t>07  /  Fluxo de Execução</a:t>
+            </a:r>
+            <a:endParaRPr lang="en-US" sz="2400" dirty="0"/>
+          </a:p>
+        </p:txBody>
+      </p:sp>
+      <p:sp>
+        <p:nvSpPr>
+          <p:cNvPr id="4" name="Shape 2"/>
+          <p:cNvSpPr/>
+          <p:nvPr/>
+        </p:nvSpPr>
+        <p:spPr>
+          <a:xfrm>
+            <a:off x="274320" y="1005840"/>
+            <a:ext cx="2743200" cy="1325880"/>
+          </a:xfrm>
+          <a:prstGeom prst="rect">
+            <a:avLst/>
+          </a:prstGeom>
+          <a:solidFill>
+            <a:srgbClr val="112236"/>
+          </a:solidFill>
+          <a:ln w="19050">
+            <a:solidFill>
+              <a:srgbClr val="2D9CDB"/>
+            </a:solidFill>
+            <a:prstDash val="solid"/>
+          </a:ln>
+          <a:effectLst>
+            <a:outerShdw blurRad="101600" dist="38100" dir="8100000" algn="bl" rotWithShape="0">
+              <a:srgbClr val="000000">
+                <a:alpha val="18000"/>
+              </a:srgbClr>
+            </a:outerShdw>
+          </a:effectLst>
+        </p:spPr>
+        <p:txBody>
+          <a:bodyPr/>
+          <a:lstStyle/>
+          <a:p>
+            <a:endParaRPr lang="pt-PT"/>
+          </a:p>
+        </p:txBody>
+      </p:sp>
+      <p:sp>
+        <p:nvSpPr>
+          <p:cNvPr id="5" name="Shape 3"/>
+          <p:cNvSpPr/>
+          <p:nvPr/>
+        </p:nvSpPr>
+        <p:spPr>
+          <a:xfrm>
+            <a:off x="365760" y="1097280"/>
+            <a:ext cx="502920" cy="502920"/>
+          </a:xfrm>
+          <a:prstGeom prst="ellipse">
+            <a:avLst/>
+          </a:prstGeom>
+          <a:solidFill>
+            <a:srgbClr val="2D9CDB"/>
+          </a:solidFill>
+          <a:ln w="12700">
+            <a:solidFill>
+              <a:srgbClr val="2D9CDB"/>
+            </a:solidFill>
+            <a:prstDash val="solid"/>
+          </a:ln>
+        </p:spPr>
+        <p:txBody>
+          <a:bodyPr/>
+          <a:lstStyle/>
+          <a:p>
+            <a:endParaRPr lang="pt-PT"/>
+          </a:p>
+        </p:txBody>
+      </p:sp>
+      <p:sp>
+        <p:nvSpPr>
+          <p:cNvPr id="6" name="Text 4"/>
+          <p:cNvSpPr/>
+          <p:nvPr/>
+        </p:nvSpPr>
+        <p:spPr>
+          <a:xfrm>
+            <a:off x="365760" y="1097280"/>
+            <a:ext cx="502920" cy="502920"/>
+          </a:xfrm>
+          <a:prstGeom prst="rect">
+            <a:avLst/>
+          </a:prstGeom>
+          <a:noFill/>
+          <a:ln/>
+        </p:spPr>
+        <p:txBody>
+          <a:bodyPr wrap="square" lIns="0" tIns="0" rIns="0" bIns="0" rtlCol="0" anchor="ctr"/>
+          <a:lstStyle/>
+          <a:p>
+            <a:pPr marL="0" indent="0" algn="ctr">
+              <a:buNone/>
+            </a:pPr>
+            <a:r>
+              <a:rPr lang="en-US" sz="1600" b="1" dirty="0">
+                <a:solidFill>
+                  <a:srgbClr val="0D1B2A"/>
+                </a:solidFill>
+              </a:rPr>
+              <a:t>1</a:t>
+            </a:r>
+            <a:endParaRPr lang="en-US" sz="1600" dirty="0"/>
+          </a:p>
+        </p:txBody>
+      </p:sp>
+      <p:sp>
+        <p:nvSpPr>
+          <p:cNvPr id="7" name="Text 5"/>
+          <p:cNvSpPr/>
+          <p:nvPr/>
+        </p:nvSpPr>
+        <p:spPr>
+          <a:xfrm>
+            <a:off x="960120" y="1078992"/>
+            <a:ext cx="1965960" cy="1097280"/>
+          </a:xfrm>
+          <a:prstGeom prst="rect">
+            <a:avLst/>
+          </a:prstGeom>
+          <a:noFill/>
+          <a:ln/>
+        </p:spPr>
+        <p:txBody>
+          <a:bodyPr wrap="square" rtlCol="0" anchor="ctr"/>
+          <a:lstStyle/>
+          <a:p>
+            <a:pPr marL="0" indent="0">
+              <a:buNone/>
+            </a:pPr>
+            <a:r>
+              <a:rPr lang="en-US" sz="1200" dirty="0" err="1">
+                <a:solidFill>
+                  <a:srgbClr val="FFFFFF"/>
+                </a:solidFill>
+              </a:rPr>
+              <a:t>Cliente</a:t>
+            </a:r>
+            <a:r>
+              <a:rPr lang="en-US" sz="1200" dirty="0">
+                <a:solidFill>
+                  <a:srgbClr val="FFFFFF"/>
+                </a:solidFill>
+              </a:rPr>
+              <a:t> </a:t>
+            </a:r>
+            <a:r>
+              <a:rPr lang="en-US" sz="1200" dirty="0" err="1">
+                <a:solidFill>
+                  <a:srgbClr val="FFFFFF"/>
+                </a:solidFill>
+              </a:rPr>
+              <a:t>inicia</a:t>
+            </a:r>
+            <a:r>
+              <a:rPr lang="en-US" sz="1200" dirty="0">
+                <a:solidFill>
+                  <a:srgbClr val="FFFFFF"/>
+                </a:solidFill>
+              </a:rPr>
+              <a:t> </a:t>
+            </a:r>
+            <a:r>
+              <a:rPr lang="en-US" sz="1200" dirty="0" err="1">
+                <a:solidFill>
+                  <a:srgbClr val="FFFFFF"/>
+                </a:solidFill>
+              </a:rPr>
+              <a:t>el</a:t>
+            </a:r>
+            <a:r>
+              <a:rPr lang="en-US" sz="1200" dirty="0">
+                <a:solidFill>
+                  <a:srgbClr val="FFFFFF"/>
+                </a:solidFill>
+              </a:rPr>
+              <a:t> </a:t>
+            </a:r>
+            <a:r>
+              <a:rPr lang="en-US" sz="1200" dirty="0" err="1">
+                <a:solidFill>
+                  <a:srgbClr val="FFFFFF"/>
+                </a:solidFill>
+              </a:rPr>
+              <a:t>flujo</a:t>
+            </a:r>
+            <a:r>
+              <a:rPr lang="en-US" sz="1200" dirty="0">
+                <a:solidFill>
+                  <a:srgbClr val="FFFFFF"/>
+                </a:solidFill>
+              </a:rPr>
+              <a:t> de </a:t>
+            </a:r>
+            <a:r>
+              <a:rPr lang="en-US" sz="1200" dirty="0" err="1">
+                <a:solidFill>
+                  <a:srgbClr val="FFFFFF"/>
+                </a:solidFill>
+              </a:rPr>
+              <a:t>trabajo</a:t>
+            </a:r>
+            <a:r>
+              <a:rPr lang="en-US" sz="1200" dirty="0">
+                <a:solidFill>
+                  <a:srgbClr val="FFFFFF"/>
+                </a:solidFill>
+              </a:rPr>
+              <a:t>.</a:t>
+            </a:r>
+            <a:endParaRPr lang="en-US" sz="1200" dirty="0"/>
+          </a:p>
+        </p:txBody>
+      </p:sp>
+      <p:sp>
+        <p:nvSpPr>
+          <p:cNvPr id="9" name="Shape 7"/>
+          <p:cNvSpPr/>
+          <p:nvPr/>
+        </p:nvSpPr>
+        <p:spPr>
+          <a:xfrm>
+            <a:off x="3200400" y="1005840"/>
+            <a:ext cx="2743200" cy="1325880"/>
+          </a:xfrm>
+          <a:prstGeom prst="rect">
+            <a:avLst/>
+          </a:prstGeom>
+          <a:solidFill>
+            <a:srgbClr val="112236"/>
+          </a:solidFill>
+          <a:ln w="19050">
+            <a:solidFill>
+              <a:srgbClr val="1B6CA8"/>
+            </a:solidFill>
+            <a:prstDash val="solid"/>
+          </a:ln>
+          <a:effectLst>
+            <a:outerShdw blurRad="101600" dist="38100" dir="8100000" algn="bl" rotWithShape="0">
+              <a:srgbClr val="000000">
+                <a:alpha val="18000"/>
+              </a:srgbClr>
+            </a:outerShdw>
+          </a:effectLst>
+        </p:spPr>
+        <p:txBody>
+          <a:bodyPr/>
+          <a:lstStyle/>
+          <a:p>
+            <a:endParaRPr lang="pt-PT"/>
+          </a:p>
+        </p:txBody>
+      </p:sp>
+      <p:sp>
+        <p:nvSpPr>
+          <p:cNvPr id="10" name="Shape 8"/>
+          <p:cNvSpPr/>
+          <p:nvPr/>
+        </p:nvSpPr>
+        <p:spPr>
+          <a:xfrm>
+            <a:off x="3291840" y="1097280"/>
+            <a:ext cx="502920" cy="502920"/>
+          </a:xfrm>
+          <a:prstGeom prst="ellipse">
+            <a:avLst/>
+          </a:prstGeom>
+          <a:solidFill>
+            <a:srgbClr val="1B6CA8"/>
+          </a:solidFill>
+          <a:ln w="12700">
+            <a:solidFill>
+              <a:srgbClr val="1B6CA8"/>
+            </a:solidFill>
+            <a:prstDash val="solid"/>
+          </a:ln>
+        </p:spPr>
+        <p:txBody>
+          <a:bodyPr/>
+          <a:lstStyle/>
+          <a:p>
+            <a:endParaRPr lang="pt-PT"/>
+          </a:p>
+        </p:txBody>
+      </p:sp>
+      <p:sp>
+        <p:nvSpPr>
+          <p:cNvPr id="11" name="Text 9"/>
+          <p:cNvSpPr/>
+          <p:nvPr/>
+        </p:nvSpPr>
+        <p:spPr>
+          <a:xfrm>
+            <a:off x="3291840" y="1097280"/>
+            <a:ext cx="502920" cy="502920"/>
+          </a:xfrm>
+          <a:prstGeom prst="rect">
+            <a:avLst/>
+          </a:prstGeom>
+          <a:noFill/>
+          <a:ln/>
+        </p:spPr>
+        <p:txBody>
+          <a:bodyPr wrap="square" lIns="0" tIns="0" rIns="0" bIns="0" rtlCol="0" anchor="ctr"/>
+          <a:lstStyle/>
+          <a:p>
+            <a:pPr marL="0" indent="0" algn="ctr">
+              <a:buNone/>
+            </a:pPr>
+            <a:r>
+              <a:rPr lang="en-US" sz="1600" b="1" dirty="0">
+                <a:solidFill>
+                  <a:srgbClr val="0D1B2A"/>
+                </a:solidFill>
+              </a:rPr>
+              <a:t>2</a:t>
+            </a:r>
+            <a:endParaRPr lang="en-US" sz="1600" dirty="0"/>
+          </a:p>
+        </p:txBody>
+      </p:sp>
+      <p:sp>
+        <p:nvSpPr>
+          <p:cNvPr id="12" name="Text 10"/>
+          <p:cNvSpPr/>
+          <p:nvPr/>
+        </p:nvSpPr>
+        <p:spPr>
+          <a:xfrm>
+            <a:off x="3886200" y="1078992"/>
+            <a:ext cx="1965960" cy="1097280"/>
+          </a:xfrm>
+          <a:prstGeom prst="rect">
+            <a:avLst/>
+          </a:prstGeom>
+          <a:noFill/>
+          <a:ln/>
+        </p:spPr>
+        <p:txBody>
+          <a:bodyPr wrap="square" rtlCol="0" anchor="ctr"/>
+          <a:lstStyle/>
+          <a:p>
+            <a:pPr marL="0" indent="0">
+              <a:buNone/>
+            </a:pPr>
+            <a:r>
+              <a:rPr lang="en-US" sz="1200" dirty="0">
+                <a:solidFill>
+                  <a:srgbClr val="FFFFFF"/>
+                </a:solidFill>
+              </a:rPr>
+              <a:t>Temporal Service </a:t>
+            </a:r>
+            <a:r>
+              <a:rPr lang="en-US" sz="1200" dirty="0" err="1">
+                <a:solidFill>
+                  <a:srgbClr val="FFFFFF"/>
+                </a:solidFill>
+              </a:rPr>
+              <a:t>registra</a:t>
+            </a:r>
+            <a:r>
+              <a:rPr lang="en-US" sz="1200" dirty="0">
+                <a:solidFill>
+                  <a:srgbClr val="FFFFFF"/>
+                </a:solidFill>
+              </a:rPr>
+              <a:t> </a:t>
+            </a:r>
+            <a:r>
+              <a:rPr lang="en-US" sz="1200" dirty="0" err="1">
+                <a:solidFill>
+                  <a:srgbClr val="FFFFFF"/>
+                </a:solidFill>
+              </a:rPr>
+              <a:t>el</a:t>
+            </a:r>
+            <a:r>
+              <a:rPr lang="en-US" sz="1200" dirty="0">
+                <a:solidFill>
+                  <a:srgbClr val="FFFFFF"/>
+                </a:solidFill>
+              </a:rPr>
+              <a:t> </a:t>
+            </a:r>
+            <a:r>
+              <a:rPr lang="en-US" sz="1200" dirty="0" err="1">
+                <a:solidFill>
+                  <a:srgbClr val="FFFFFF"/>
+                </a:solidFill>
+              </a:rPr>
+              <a:t>evento</a:t>
+            </a:r>
+            <a:r>
+              <a:rPr lang="en-US" sz="1200" dirty="0">
+                <a:solidFill>
+                  <a:srgbClr val="FFFFFF"/>
+                </a:solidFill>
+              </a:rPr>
+              <a:t>.</a:t>
+            </a:r>
+            <a:endParaRPr lang="en-US" sz="1200" dirty="0"/>
+          </a:p>
+        </p:txBody>
+      </p:sp>
+      <p:sp>
+        <p:nvSpPr>
+          <p:cNvPr id="14" name="Shape 12"/>
+          <p:cNvSpPr/>
+          <p:nvPr/>
+        </p:nvSpPr>
+        <p:spPr>
+          <a:xfrm>
+            <a:off x="6126480" y="1005840"/>
+            <a:ext cx="2743200" cy="1325880"/>
+          </a:xfrm>
+          <a:prstGeom prst="rect">
+            <a:avLst/>
+          </a:prstGeom>
+          <a:solidFill>
+            <a:srgbClr val="112236"/>
+          </a:solidFill>
+          <a:ln w="19050">
+            <a:solidFill>
+              <a:srgbClr val="9B59B6"/>
+            </a:solidFill>
+            <a:prstDash val="solid"/>
+          </a:ln>
+          <a:effectLst>
+            <a:outerShdw blurRad="101600" dist="38100" dir="8100000" algn="bl" rotWithShape="0">
+              <a:srgbClr val="000000">
+                <a:alpha val="18000"/>
+              </a:srgbClr>
+            </a:outerShdw>
+          </a:effectLst>
+        </p:spPr>
+        <p:txBody>
+          <a:bodyPr/>
+          <a:lstStyle/>
+          <a:p>
+            <a:endParaRPr lang="pt-PT"/>
+          </a:p>
+        </p:txBody>
+      </p:sp>
+      <p:sp>
+        <p:nvSpPr>
+          <p:cNvPr id="15" name="Shape 13"/>
+          <p:cNvSpPr/>
+          <p:nvPr/>
+        </p:nvSpPr>
+        <p:spPr>
+          <a:xfrm>
+            <a:off x="6217920" y="1097280"/>
+            <a:ext cx="502920" cy="502920"/>
+          </a:xfrm>
+          <a:prstGeom prst="ellipse">
+            <a:avLst/>
+          </a:prstGeom>
+          <a:solidFill>
+            <a:srgbClr val="9B59B6"/>
+          </a:solidFill>
+          <a:ln w="12700">
+            <a:solidFill>
+              <a:srgbClr val="9B59B6"/>
+            </a:solidFill>
+            <a:prstDash val="solid"/>
+          </a:ln>
+        </p:spPr>
+        <p:txBody>
+          <a:bodyPr/>
+          <a:lstStyle/>
+          <a:p>
+            <a:endParaRPr lang="pt-PT"/>
+          </a:p>
+        </p:txBody>
+      </p:sp>
+      <p:sp>
+        <p:nvSpPr>
+          <p:cNvPr id="16" name="Text 14"/>
+          <p:cNvSpPr/>
+          <p:nvPr/>
+        </p:nvSpPr>
+        <p:spPr>
+          <a:xfrm>
+            <a:off x="6217920" y="1097280"/>
+            <a:ext cx="502920" cy="502920"/>
+          </a:xfrm>
+          <a:prstGeom prst="rect">
+            <a:avLst/>
+          </a:prstGeom>
+          <a:noFill/>
+          <a:ln/>
+        </p:spPr>
+        <p:txBody>
+          <a:bodyPr wrap="square" lIns="0" tIns="0" rIns="0" bIns="0" rtlCol="0" anchor="ctr"/>
+          <a:lstStyle/>
+          <a:p>
+            <a:pPr marL="0" indent="0" algn="ctr">
+              <a:buNone/>
+            </a:pPr>
+            <a:r>
+              <a:rPr lang="en-US" sz="1600" b="1" dirty="0">
+                <a:solidFill>
+                  <a:srgbClr val="0D1B2A"/>
+                </a:solidFill>
+              </a:rPr>
+              <a:t>3</a:t>
+            </a:r>
+            <a:endParaRPr lang="en-US" sz="1600" dirty="0"/>
+          </a:p>
+        </p:txBody>
+      </p:sp>
+      <p:sp>
+        <p:nvSpPr>
+          <p:cNvPr id="17" name="Text 15"/>
+          <p:cNvSpPr/>
+          <p:nvPr/>
+        </p:nvSpPr>
+        <p:spPr>
+          <a:xfrm>
+            <a:off x="6812280" y="1078992"/>
+            <a:ext cx="1965960" cy="1097280"/>
+          </a:xfrm>
+          <a:prstGeom prst="rect">
+            <a:avLst/>
+          </a:prstGeom>
+          <a:noFill/>
+          <a:ln/>
+        </p:spPr>
+        <p:txBody>
+          <a:bodyPr wrap="square" rtlCol="0" anchor="ctr"/>
+          <a:lstStyle/>
+          <a:p>
+            <a:pPr marL="0" indent="0">
+              <a:buNone/>
+            </a:pPr>
+            <a:r>
+              <a:rPr lang="en-US" sz="1200" dirty="0">
+                <a:solidFill>
+                  <a:srgbClr val="FFFFFF"/>
+                </a:solidFill>
+              </a:rPr>
+              <a:t>Las </a:t>
+            </a:r>
+            <a:r>
+              <a:rPr lang="en-US" sz="1200" dirty="0" err="1">
+                <a:solidFill>
+                  <a:srgbClr val="FFFFFF"/>
+                </a:solidFill>
+              </a:rPr>
+              <a:t>tareas</a:t>
+            </a:r>
+            <a:r>
+              <a:rPr lang="en-US" sz="1200" dirty="0">
+                <a:solidFill>
+                  <a:srgbClr val="FFFFFF"/>
+                </a:solidFill>
+              </a:rPr>
+              <a:t> se </a:t>
+            </a:r>
+            <a:r>
+              <a:rPr lang="en-US" sz="1200" dirty="0" err="1">
+                <a:solidFill>
+                  <a:srgbClr val="FFFFFF"/>
+                </a:solidFill>
+              </a:rPr>
+              <a:t>programan</a:t>
+            </a:r>
+            <a:r>
+              <a:rPr lang="en-US" sz="1200" dirty="0">
+                <a:solidFill>
+                  <a:srgbClr val="FFFFFF"/>
+                </a:solidFill>
+              </a:rPr>
+              <a:t> </a:t>
+            </a:r>
+            <a:r>
+              <a:rPr lang="en-US" sz="1200" dirty="0" err="1">
+                <a:solidFill>
+                  <a:srgbClr val="FFFFFF"/>
+                </a:solidFill>
+              </a:rPr>
+              <a:t>en</a:t>
+            </a:r>
+            <a:r>
+              <a:rPr lang="en-US" sz="1200" dirty="0">
+                <a:solidFill>
+                  <a:srgbClr val="FFFFFF"/>
+                </a:solidFill>
+              </a:rPr>
+              <a:t> Task Queue.</a:t>
+            </a:r>
+            <a:endParaRPr lang="en-US" sz="1200" dirty="0"/>
+          </a:p>
+        </p:txBody>
+      </p:sp>
+      <p:sp>
+        <p:nvSpPr>
+          <p:cNvPr id="18" name="Shape 16"/>
+          <p:cNvSpPr/>
+          <p:nvPr/>
+        </p:nvSpPr>
+        <p:spPr>
+          <a:xfrm>
+            <a:off x="274320" y="2651760"/>
+            <a:ext cx="2743200" cy="1325880"/>
+          </a:xfrm>
+          <a:prstGeom prst="rect">
+            <a:avLst/>
+          </a:prstGeom>
+          <a:solidFill>
+            <a:srgbClr val="112236"/>
+          </a:solidFill>
+          <a:ln w="19050">
+            <a:solidFill>
+              <a:srgbClr val="E67E22"/>
+            </a:solidFill>
+            <a:prstDash val="solid"/>
+          </a:ln>
+          <a:effectLst>
+            <a:outerShdw blurRad="101600" dist="38100" dir="8100000" algn="bl" rotWithShape="0">
+              <a:srgbClr val="000000">
+                <a:alpha val="18000"/>
+              </a:srgbClr>
+            </a:outerShdw>
+          </a:effectLst>
+        </p:spPr>
+        <p:txBody>
+          <a:bodyPr/>
+          <a:lstStyle/>
+          <a:p>
+            <a:endParaRPr lang="pt-PT"/>
+          </a:p>
+        </p:txBody>
+      </p:sp>
+      <p:sp>
+        <p:nvSpPr>
+          <p:cNvPr id="19" name="Shape 17"/>
+          <p:cNvSpPr/>
+          <p:nvPr/>
+        </p:nvSpPr>
+        <p:spPr>
+          <a:xfrm>
+            <a:off x="365760" y="2743200"/>
+            <a:ext cx="502920" cy="502920"/>
+          </a:xfrm>
+          <a:prstGeom prst="ellipse">
+            <a:avLst/>
+          </a:prstGeom>
+          <a:solidFill>
+            <a:srgbClr val="E67E22"/>
+          </a:solidFill>
+          <a:ln w="12700">
+            <a:solidFill>
+              <a:srgbClr val="E67E22"/>
+            </a:solidFill>
+            <a:prstDash val="solid"/>
+          </a:ln>
+        </p:spPr>
+        <p:txBody>
+          <a:bodyPr/>
+          <a:lstStyle/>
+          <a:p>
+            <a:endParaRPr lang="pt-PT"/>
+          </a:p>
+        </p:txBody>
+      </p:sp>
+      <p:sp>
+        <p:nvSpPr>
+          <p:cNvPr id="20" name="Text 18"/>
+          <p:cNvSpPr/>
+          <p:nvPr/>
+        </p:nvSpPr>
+        <p:spPr>
+          <a:xfrm>
+            <a:off x="365760" y="2743200"/>
+            <a:ext cx="502920" cy="502920"/>
+          </a:xfrm>
+          <a:prstGeom prst="rect">
+            <a:avLst/>
+          </a:prstGeom>
+          <a:noFill/>
+          <a:ln/>
+        </p:spPr>
+        <p:txBody>
+          <a:bodyPr wrap="square" lIns="0" tIns="0" rIns="0" bIns="0" rtlCol="0" anchor="ctr"/>
+          <a:lstStyle/>
+          <a:p>
+            <a:pPr marL="0" indent="0" algn="ctr">
+              <a:buNone/>
+            </a:pPr>
+            <a:r>
+              <a:rPr lang="en-US" sz="1600" b="1" dirty="0">
+                <a:solidFill>
+                  <a:srgbClr val="0D1B2A"/>
+                </a:solidFill>
+              </a:rPr>
+              <a:t>4</a:t>
+            </a:r>
+            <a:endParaRPr lang="en-US" sz="1600" dirty="0"/>
+          </a:p>
+        </p:txBody>
+      </p:sp>
+      <p:sp>
+        <p:nvSpPr>
+          <p:cNvPr id="21" name="Text 19"/>
+          <p:cNvSpPr/>
+          <p:nvPr/>
+        </p:nvSpPr>
+        <p:spPr>
+          <a:xfrm>
+            <a:off x="960120" y="2724912"/>
+            <a:ext cx="1965960" cy="1097280"/>
+          </a:xfrm>
+          <a:prstGeom prst="rect">
+            <a:avLst/>
+          </a:prstGeom>
+          <a:noFill/>
+          <a:ln/>
+        </p:spPr>
+        <p:txBody>
+          <a:bodyPr wrap="square" rtlCol="0" anchor="ctr"/>
+          <a:lstStyle/>
+          <a:p>
+            <a:pPr marL="0" indent="0">
+              <a:buNone/>
+            </a:pPr>
+            <a:r>
+              <a:rPr lang="en-US" sz="1200" dirty="0">
+                <a:solidFill>
+                  <a:srgbClr val="FFFFFF"/>
+                </a:solidFill>
+              </a:rPr>
+              <a:t>Worker consume y </a:t>
+            </a:r>
+            <a:r>
+              <a:rPr lang="en-US" sz="1200" dirty="0" err="1">
+                <a:solidFill>
+                  <a:srgbClr val="FFFFFF"/>
+                </a:solidFill>
+              </a:rPr>
+              <a:t>ejecuta</a:t>
+            </a:r>
+            <a:r>
+              <a:rPr lang="en-US" sz="1200" dirty="0">
+                <a:solidFill>
+                  <a:srgbClr val="FFFFFF"/>
+                </a:solidFill>
+              </a:rPr>
+              <a:t> la </a:t>
+            </a:r>
+            <a:r>
+              <a:rPr lang="en-US" sz="1200" dirty="0" err="1">
+                <a:solidFill>
+                  <a:srgbClr val="FFFFFF"/>
+                </a:solidFill>
+              </a:rPr>
+              <a:t>tarea</a:t>
+            </a:r>
+            <a:r>
+              <a:rPr lang="en-US" sz="1200" dirty="0">
+                <a:solidFill>
+                  <a:srgbClr val="FFFFFF"/>
+                </a:solidFill>
+              </a:rPr>
+              <a:t>.</a:t>
+            </a:r>
+            <a:endParaRPr lang="en-US" sz="1200" dirty="0"/>
+          </a:p>
+        </p:txBody>
+      </p:sp>
+      <p:sp>
+        <p:nvSpPr>
+          <p:cNvPr id="23" name="Shape 21"/>
+          <p:cNvSpPr/>
+          <p:nvPr/>
+        </p:nvSpPr>
+        <p:spPr>
+          <a:xfrm>
+            <a:off x="3200400" y="2651760"/>
+            <a:ext cx="2743200" cy="1325880"/>
+          </a:xfrm>
+          <a:prstGeom prst="rect">
+            <a:avLst/>
+          </a:prstGeom>
+          <a:solidFill>
+            <a:srgbClr val="112236"/>
+          </a:solidFill>
+          <a:ln w="19050">
+            <a:solidFill>
+              <a:srgbClr val="27AE60"/>
+            </a:solidFill>
+            <a:prstDash val="solid"/>
+          </a:ln>
+          <a:effectLst>
+            <a:outerShdw blurRad="101600" dist="38100" dir="8100000" algn="bl" rotWithShape="0">
+              <a:srgbClr val="000000">
+                <a:alpha val="18000"/>
+              </a:srgbClr>
+            </a:outerShdw>
+          </a:effectLst>
+        </p:spPr>
+        <p:txBody>
+          <a:bodyPr/>
+          <a:lstStyle/>
+          <a:p>
+            <a:endParaRPr lang="pt-PT"/>
+          </a:p>
+        </p:txBody>
+      </p:sp>
+      <p:sp>
+        <p:nvSpPr>
+          <p:cNvPr id="24" name="Shape 22"/>
+          <p:cNvSpPr/>
+          <p:nvPr/>
+        </p:nvSpPr>
+        <p:spPr>
+          <a:xfrm>
+            <a:off x="3291840" y="2743200"/>
+            <a:ext cx="502920" cy="502920"/>
+          </a:xfrm>
+          <a:prstGeom prst="ellipse">
+            <a:avLst/>
+          </a:prstGeom>
+          <a:solidFill>
+            <a:srgbClr val="27AE60"/>
+          </a:solidFill>
+          <a:ln w="12700">
+            <a:solidFill>
+              <a:srgbClr val="27AE60"/>
+            </a:solidFill>
+            <a:prstDash val="solid"/>
+          </a:ln>
+        </p:spPr>
+        <p:txBody>
+          <a:bodyPr/>
+          <a:lstStyle/>
+          <a:p>
+            <a:endParaRPr lang="pt-PT"/>
+          </a:p>
+        </p:txBody>
+      </p:sp>
+      <p:sp>
+        <p:nvSpPr>
+          <p:cNvPr id="25" name="Text 23"/>
+          <p:cNvSpPr/>
+          <p:nvPr/>
+        </p:nvSpPr>
+        <p:spPr>
+          <a:xfrm>
+            <a:off x="3291840" y="2743200"/>
+            <a:ext cx="502920" cy="502920"/>
+          </a:xfrm>
+          <a:prstGeom prst="rect">
+            <a:avLst/>
+          </a:prstGeom>
+          <a:noFill/>
+          <a:ln/>
+        </p:spPr>
+        <p:txBody>
+          <a:bodyPr wrap="square" lIns="0" tIns="0" rIns="0" bIns="0" rtlCol="0" anchor="ctr"/>
+          <a:lstStyle/>
+          <a:p>
+            <a:pPr marL="0" indent="0" algn="ctr">
+              <a:buNone/>
+            </a:pPr>
+            <a:r>
+              <a:rPr lang="en-US" sz="1600" b="1" dirty="0">
+                <a:solidFill>
+                  <a:srgbClr val="0D1B2A"/>
+                </a:solidFill>
+              </a:rPr>
+              <a:t>5</a:t>
+            </a:r>
+            <a:endParaRPr lang="en-US" sz="1600" dirty="0"/>
+          </a:p>
+        </p:txBody>
+      </p:sp>
+      <p:sp>
+        <p:nvSpPr>
+          <p:cNvPr id="26" name="Text 24"/>
+          <p:cNvSpPr/>
+          <p:nvPr/>
+        </p:nvSpPr>
+        <p:spPr>
+          <a:xfrm>
+            <a:off x="3886200" y="2724912"/>
+            <a:ext cx="1965960" cy="1097280"/>
+          </a:xfrm>
+          <a:prstGeom prst="rect">
+            <a:avLst/>
+          </a:prstGeom>
+          <a:noFill/>
+          <a:ln/>
+        </p:spPr>
+        <p:txBody>
+          <a:bodyPr wrap="square" rtlCol="0" anchor="ctr"/>
+          <a:lstStyle/>
+          <a:p>
+            <a:pPr marL="0" indent="0">
+              <a:buNone/>
+            </a:pPr>
+            <a:r>
+              <a:rPr lang="en-US" sz="1200" dirty="0">
+                <a:solidFill>
+                  <a:srgbClr val="FFFFFF"/>
+                </a:solidFill>
+              </a:rPr>
+              <a:t>Activity </a:t>
+            </a:r>
+            <a:r>
+              <a:rPr lang="en-US" sz="1200" dirty="0" err="1">
+                <a:solidFill>
+                  <a:srgbClr val="FFFFFF"/>
+                </a:solidFill>
+              </a:rPr>
+              <a:t>realiza</a:t>
+            </a:r>
+            <a:r>
+              <a:rPr lang="en-US" sz="1200" dirty="0">
+                <a:solidFill>
+                  <a:srgbClr val="FFFFFF"/>
+                </a:solidFill>
+              </a:rPr>
+              <a:t> la </a:t>
+            </a:r>
+            <a:r>
+              <a:rPr lang="en-US" sz="1200" dirty="0" err="1">
+                <a:solidFill>
+                  <a:srgbClr val="FFFFFF"/>
+                </a:solidFill>
+              </a:rPr>
+              <a:t>operación</a:t>
+            </a:r>
+            <a:r>
+              <a:rPr lang="en-US" sz="1200" dirty="0">
+                <a:solidFill>
+                  <a:srgbClr val="FFFFFF"/>
+                </a:solidFill>
+              </a:rPr>
+              <a:t> externa.</a:t>
+            </a:r>
+            <a:endParaRPr lang="en-US" sz="1200" dirty="0"/>
+          </a:p>
+        </p:txBody>
+      </p:sp>
+      <p:sp>
+        <p:nvSpPr>
+          <p:cNvPr id="28" name="Shape 26"/>
+          <p:cNvSpPr/>
+          <p:nvPr/>
+        </p:nvSpPr>
+        <p:spPr>
+          <a:xfrm>
+            <a:off x="6126480" y="2651760"/>
+            <a:ext cx="2743200" cy="1325880"/>
+          </a:xfrm>
+          <a:prstGeom prst="rect">
+            <a:avLst/>
+          </a:prstGeom>
+          <a:solidFill>
+            <a:srgbClr val="112236"/>
+          </a:solidFill>
+          <a:ln w="19050">
+            <a:solidFill>
+              <a:srgbClr val="00D4AA"/>
+            </a:solidFill>
+            <a:prstDash val="solid"/>
+          </a:ln>
+          <a:effectLst>
+            <a:outerShdw blurRad="101600" dist="38100" dir="8100000" algn="bl" rotWithShape="0">
+              <a:srgbClr val="000000">
+                <a:alpha val="18000"/>
+              </a:srgbClr>
+            </a:outerShdw>
+          </a:effectLst>
+        </p:spPr>
+        <p:txBody>
+          <a:bodyPr/>
+          <a:lstStyle/>
+          <a:p>
+            <a:endParaRPr lang="pt-PT"/>
+          </a:p>
+        </p:txBody>
+      </p:sp>
+      <p:sp>
+        <p:nvSpPr>
+          <p:cNvPr id="29" name="Shape 27"/>
+          <p:cNvSpPr/>
+          <p:nvPr/>
+        </p:nvSpPr>
+        <p:spPr>
+          <a:xfrm>
+            <a:off x="6217920" y="2743200"/>
+            <a:ext cx="502920" cy="502920"/>
+          </a:xfrm>
+          <a:prstGeom prst="ellipse">
+            <a:avLst/>
+          </a:prstGeom>
+          <a:solidFill>
+            <a:srgbClr val="00D4AA"/>
+          </a:solidFill>
+          <a:ln w="12700">
+            <a:solidFill>
+              <a:srgbClr val="00D4AA"/>
+            </a:solidFill>
+            <a:prstDash val="solid"/>
+          </a:ln>
+        </p:spPr>
+        <p:txBody>
+          <a:bodyPr/>
+          <a:lstStyle/>
+          <a:p>
+            <a:endParaRPr lang="pt-PT"/>
+          </a:p>
+        </p:txBody>
+      </p:sp>
+      <p:sp>
+        <p:nvSpPr>
+          <p:cNvPr id="30" name="Text 28"/>
+          <p:cNvSpPr/>
+          <p:nvPr/>
+        </p:nvSpPr>
+        <p:spPr>
+          <a:xfrm>
+            <a:off x="6217920" y="2743200"/>
+            <a:ext cx="502920" cy="502920"/>
+          </a:xfrm>
+          <a:prstGeom prst="rect">
+            <a:avLst/>
+          </a:prstGeom>
+          <a:noFill/>
+          <a:ln/>
+        </p:spPr>
+        <p:txBody>
+          <a:bodyPr wrap="square" lIns="0" tIns="0" rIns="0" bIns="0" rtlCol="0" anchor="ctr"/>
+          <a:lstStyle/>
+          <a:p>
+            <a:pPr marL="0" indent="0" algn="ctr">
+              <a:buNone/>
+            </a:pPr>
+            <a:r>
+              <a:rPr lang="en-US" sz="1600" b="1" dirty="0">
+                <a:solidFill>
+                  <a:srgbClr val="0D1B2A"/>
+                </a:solidFill>
+              </a:rPr>
+              <a:t>6</a:t>
+            </a:r>
+            <a:endParaRPr lang="en-US" sz="1600" dirty="0"/>
+          </a:p>
+        </p:txBody>
+      </p:sp>
+      <p:sp>
+        <p:nvSpPr>
+          <p:cNvPr id="31" name="Text 29"/>
+          <p:cNvSpPr/>
+          <p:nvPr/>
+        </p:nvSpPr>
+        <p:spPr>
+          <a:xfrm>
+            <a:off x="6812280" y="2724912"/>
+            <a:ext cx="1965960" cy="1097280"/>
+          </a:xfrm>
+          <a:prstGeom prst="rect">
+            <a:avLst/>
+          </a:prstGeom>
+          <a:noFill/>
+          <a:ln/>
+        </p:spPr>
+        <p:txBody>
+          <a:bodyPr wrap="square" rtlCol="0" anchor="ctr"/>
+          <a:lstStyle/>
+          <a:p>
+            <a:pPr marL="0" indent="0">
+              <a:buNone/>
+            </a:pPr>
+            <a:r>
+              <a:rPr lang="en-US" sz="1200" dirty="0">
+                <a:solidFill>
+                  <a:srgbClr val="FFFFFF"/>
+                </a:solidFill>
+              </a:rPr>
+              <a:t>Se </a:t>
+            </a:r>
+            <a:r>
+              <a:rPr lang="en-US" sz="1200" dirty="0" err="1">
+                <a:solidFill>
+                  <a:srgbClr val="FFFFFF"/>
+                </a:solidFill>
+              </a:rPr>
+              <a:t>devuelve</a:t>
+            </a:r>
+            <a:r>
+              <a:rPr lang="en-US" sz="1200" dirty="0">
+                <a:solidFill>
+                  <a:srgbClr val="FFFFFF"/>
+                </a:solidFill>
+              </a:rPr>
+              <a:t> </a:t>
+            </a:r>
+            <a:r>
+              <a:rPr lang="en-US" sz="1200" dirty="0" err="1">
+                <a:solidFill>
+                  <a:srgbClr val="FFFFFF"/>
+                </a:solidFill>
+              </a:rPr>
+              <a:t>el</a:t>
+            </a:r>
+            <a:r>
+              <a:rPr lang="en-US" sz="1200" dirty="0">
+                <a:solidFill>
+                  <a:srgbClr val="FFFFFF"/>
+                </a:solidFill>
+              </a:rPr>
+              <a:t> </a:t>
+            </a:r>
+            <a:r>
+              <a:rPr lang="en-US" sz="1200" dirty="0" err="1">
+                <a:solidFill>
+                  <a:srgbClr val="FFFFFF"/>
+                </a:solidFill>
+              </a:rPr>
+              <a:t>resultado</a:t>
+            </a:r>
+            <a:r>
+              <a:rPr lang="en-US" sz="1200" dirty="0">
+                <a:solidFill>
+                  <a:srgbClr val="FFFFFF"/>
+                </a:solidFill>
+              </a:rPr>
+              <a:t> y se </a:t>
+            </a:r>
+            <a:r>
+              <a:rPr lang="en-US" sz="1200" dirty="0" err="1">
+                <a:solidFill>
+                  <a:srgbClr val="FFFFFF"/>
+                </a:solidFill>
+              </a:rPr>
+              <a:t>actualiza</a:t>
+            </a:r>
+            <a:r>
+              <a:rPr lang="en-US" sz="1200" dirty="0">
+                <a:solidFill>
+                  <a:srgbClr val="FFFFFF"/>
+                </a:solidFill>
+              </a:rPr>
+              <a:t> </a:t>
+            </a:r>
+            <a:r>
+              <a:rPr lang="en-US" sz="1200" dirty="0" err="1">
+                <a:solidFill>
+                  <a:srgbClr val="FFFFFF"/>
+                </a:solidFill>
+              </a:rPr>
+              <a:t>el</a:t>
+            </a:r>
+            <a:r>
+              <a:rPr lang="en-US" sz="1200" dirty="0">
+                <a:solidFill>
+                  <a:srgbClr val="FFFFFF"/>
+                </a:solidFill>
+              </a:rPr>
+              <a:t> </a:t>
+            </a:r>
+            <a:r>
+              <a:rPr lang="en-US" sz="1200" dirty="0" err="1">
+                <a:solidFill>
+                  <a:srgbClr val="FFFFFF"/>
+                </a:solidFill>
+              </a:rPr>
+              <a:t>historial</a:t>
+            </a:r>
+            <a:r>
+              <a:rPr lang="en-US" sz="1200" dirty="0">
+                <a:solidFill>
+                  <a:srgbClr val="FFFFFF"/>
+                </a:solidFill>
+              </a:rPr>
+              <a:t>.</a:t>
+            </a:r>
+            <a:endParaRPr lang="en-US" sz="1200" dirty="0"/>
+          </a:p>
+        </p:txBody>
+      </p:sp>
+      <p:sp>
+        <p:nvSpPr>
+          <p:cNvPr id="32" name="Shape 30"/>
+          <p:cNvSpPr/>
+          <p:nvPr/>
+        </p:nvSpPr>
+        <p:spPr>
+          <a:xfrm>
+            <a:off x="274320" y="4434840"/>
+            <a:ext cx="8595360" cy="457200"/>
+          </a:xfrm>
+          <a:prstGeom prst="rect">
+            <a:avLst/>
+          </a:prstGeom>
+          <a:solidFill>
+            <a:srgbClr val="1B6CA8"/>
+          </a:solidFill>
+          <a:ln w="12700">
+            <a:solidFill>
+              <a:srgbClr val="1B6CA8"/>
+            </a:solidFill>
+            <a:prstDash val="solid"/>
+          </a:ln>
+        </p:spPr>
+        <p:txBody>
+          <a:bodyPr/>
+          <a:lstStyle/>
+          <a:p>
+            <a:endParaRPr lang="pt-PT"/>
+          </a:p>
+        </p:txBody>
+      </p:sp>
+      <p:sp>
+        <p:nvSpPr>
+          <p:cNvPr id="33" name="Text 31"/>
+          <p:cNvSpPr/>
+          <p:nvPr/>
+        </p:nvSpPr>
+        <p:spPr>
+          <a:xfrm>
+            <a:off x="457200" y="4434840"/>
+            <a:ext cx="8229600" cy="457200"/>
+          </a:xfrm>
+          <a:prstGeom prst="rect">
+            <a:avLst/>
+          </a:prstGeom>
+          <a:noFill/>
+          <a:ln/>
+        </p:spPr>
+        <p:txBody>
+          <a:bodyPr wrap="square" rtlCol="0" anchor="ctr"/>
+          <a:lstStyle/>
+          <a:p>
+            <a:pPr marL="0" indent="0">
+              <a:buNone/>
+            </a:pPr>
+            <a:r>
+              <a:rPr lang="en-US" sz="1100" i="1" dirty="0">
+                <a:solidFill>
+                  <a:srgbClr val="FFFFFF"/>
+                </a:solidFill>
+              </a:rPr>
+              <a:t>🔄  En </a:t>
+            </a:r>
+            <a:r>
+              <a:rPr lang="en-US" sz="1100" i="1" dirty="0" err="1">
+                <a:solidFill>
+                  <a:srgbClr val="FFFFFF"/>
+                </a:solidFill>
+              </a:rPr>
+              <a:t>caso</a:t>
+            </a:r>
+            <a:r>
+              <a:rPr lang="en-US" sz="1100" i="1" dirty="0">
+                <a:solidFill>
+                  <a:srgbClr val="FFFFFF"/>
+                </a:solidFill>
+              </a:rPr>
+              <a:t> de </a:t>
+            </a:r>
+            <a:r>
+              <a:rPr lang="en-US" sz="1100" i="1" dirty="0" err="1">
+                <a:solidFill>
+                  <a:srgbClr val="FFFFFF"/>
+                </a:solidFill>
+              </a:rPr>
+              <a:t>fallo</a:t>
+            </a:r>
+            <a:r>
+              <a:rPr lang="en-US" sz="1100" i="1" dirty="0">
+                <a:solidFill>
+                  <a:srgbClr val="FFFFFF"/>
+                </a:solidFill>
+              </a:rPr>
+              <a:t>: Temporal </a:t>
+            </a:r>
+            <a:r>
+              <a:rPr lang="en-US" sz="1100" i="1" dirty="0" err="1">
+                <a:solidFill>
+                  <a:srgbClr val="FFFFFF"/>
+                </a:solidFill>
+              </a:rPr>
+              <a:t>aplica</a:t>
+            </a:r>
+            <a:r>
+              <a:rPr lang="en-US" sz="1100" i="1" dirty="0">
+                <a:solidFill>
+                  <a:srgbClr val="FFFFFF"/>
+                </a:solidFill>
+              </a:rPr>
+              <a:t> las </a:t>
+            </a:r>
+            <a:r>
+              <a:rPr lang="en-US" sz="1100" i="1" dirty="0" err="1">
+                <a:solidFill>
+                  <a:srgbClr val="FFFFFF"/>
+                </a:solidFill>
+              </a:rPr>
+              <a:t>políticas</a:t>
+            </a:r>
+            <a:r>
+              <a:rPr lang="en-US" sz="1100" i="1" dirty="0">
+                <a:solidFill>
+                  <a:srgbClr val="FFFFFF"/>
+                </a:solidFill>
+              </a:rPr>
+              <a:t> de </a:t>
+            </a:r>
+            <a:r>
+              <a:rPr lang="en-US" sz="1100" i="1" dirty="0" err="1">
+                <a:solidFill>
+                  <a:srgbClr val="FFFFFF"/>
+                </a:solidFill>
+              </a:rPr>
+              <a:t>reintento</a:t>
+            </a:r>
+            <a:r>
+              <a:rPr lang="en-US" sz="1100" i="1" dirty="0">
+                <a:solidFill>
+                  <a:srgbClr val="FFFFFF"/>
+                </a:solidFill>
+              </a:rPr>
+              <a:t> y </a:t>
+            </a:r>
+            <a:r>
+              <a:rPr lang="en-US" sz="1100" i="1" dirty="0" err="1">
+                <a:solidFill>
+                  <a:srgbClr val="FFFFFF"/>
+                </a:solidFill>
+              </a:rPr>
+              <a:t>reanuda</a:t>
+            </a:r>
+            <a:r>
+              <a:rPr lang="en-US" sz="1100" i="1" dirty="0">
+                <a:solidFill>
+                  <a:srgbClr val="FFFFFF"/>
+                </a:solidFill>
+              </a:rPr>
+              <a:t> la </a:t>
+            </a:r>
+            <a:r>
+              <a:rPr lang="en-US" sz="1100" i="1" dirty="0" err="1">
+                <a:solidFill>
+                  <a:srgbClr val="FFFFFF"/>
+                </a:solidFill>
+              </a:rPr>
+              <a:t>ejecución</a:t>
+            </a:r>
+            <a:r>
+              <a:rPr lang="en-US" sz="1100" i="1" dirty="0">
+                <a:solidFill>
+                  <a:srgbClr val="FFFFFF"/>
+                </a:solidFill>
+              </a:rPr>
+              <a:t> </a:t>
+            </a:r>
+            <a:r>
+              <a:rPr lang="en-US" sz="1100" i="1" dirty="0" err="1">
+                <a:solidFill>
+                  <a:srgbClr val="FFFFFF"/>
+                </a:solidFill>
+              </a:rPr>
+              <a:t>en</a:t>
+            </a:r>
+            <a:r>
+              <a:rPr lang="en-US" sz="1100" i="1" dirty="0">
+                <a:solidFill>
+                  <a:srgbClr val="FFFFFF"/>
+                </a:solidFill>
+              </a:rPr>
+              <a:t> </a:t>
+            </a:r>
+            <a:r>
+              <a:rPr lang="en-US" sz="1100" i="1" dirty="0" err="1">
+                <a:solidFill>
+                  <a:srgbClr val="FFFFFF"/>
+                </a:solidFill>
+              </a:rPr>
+              <a:t>función</a:t>
+            </a:r>
+            <a:r>
+              <a:rPr lang="en-US" sz="1100" i="1" dirty="0">
+                <a:solidFill>
+                  <a:srgbClr val="FFFFFF"/>
+                </a:solidFill>
+              </a:rPr>
+              <a:t> del </a:t>
+            </a:r>
+            <a:r>
+              <a:rPr lang="en-US" sz="1100" i="1" dirty="0" err="1">
+                <a:solidFill>
+                  <a:srgbClr val="FFFFFF"/>
+                </a:solidFill>
+              </a:rPr>
+              <a:t>historial</a:t>
+            </a:r>
+            <a:r>
+              <a:rPr lang="en-US" sz="1100" i="1" dirty="0">
+                <a:solidFill>
+                  <a:srgbClr val="FFFFFF"/>
+                </a:solidFill>
+              </a:rPr>
+              <a:t> de </a:t>
+            </a:r>
+            <a:r>
+              <a:rPr lang="en-US" sz="1100" i="1" dirty="0" err="1">
+                <a:solidFill>
+                  <a:srgbClr val="FFFFFF"/>
+                </a:solidFill>
+              </a:rPr>
+              <a:t>eventos</a:t>
+            </a:r>
+            <a:r>
+              <a:rPr lang="en-US" sz="1100" i="1" dirty="0">
+                <a:solidFill>
+                  <a:srgbClr val="FFFFFF"/>
+                </a:solidFill>
+              </a:rPr>
+              <a:t>.</a:t>
+            </a:r>
+            <a:endParaRPr lang="en-US" sz="1100" dirty="0"/>
+          </a:p>
+        </p:txBody>
+      </p:sp>
+      <p:cxnSp>
+        <p:nvCxnSpPr>
+          <p:cNvPr id="34" name="Conexão Reta Unidirecional 33">
+            <a:extLst>
+              <a:ext uri="{FF2B5EF4-FFF2-40B4-BE49-F238E27FC236}">
+                <a16:creationId xmlns:a16="http://schemas.microsoft.com/office/drawing/2014/main" id="{06BC731E-5FA7-9DE4-0099-4DDF5EC35A24}"/>
+              </a:ext>
+            </a:extLst>
+          </p:cNvPr>
+          <p:cNvCxnSpPr>
+            <a:cxnSpLocks/>
+          </p:cNvCxnSpPr>
+          <p:nvPr/>
+        </p:nvCxnSpPr>
+        <p:spPr>
+          <a:xfrm>
+            <a:off x="3017520" y="1668780"/>
+            <a:ext cx="182880" cy="0"/>
+          </a:xfrm>
+          <a:prstGeom prst="straightConnector1">
+            <a:avLst/>
+          </a:prstGeom>
+          <a:ln w="19050">
+            <a:solidFill>
+              <a:schemeClr val="tx1"/>
+            </a:solidFill>
+            <a:tailEnd type="triangle"/>
+          </a:ln>
+        </p:spPr>
+        <p:style>
+          <a:lnRef idx="1">
+            <a:schemeClr val="accent1"/>
+          </a:lnRef>
+          <a:fillRef idx="0">
+            <a:schemeClr val="accent1"/>
+          </a:fillRef>
+          <a:effectRef idx="0">
+            <a:schemeClr val="accent1"/>
+          </a:effectRef>
+          <a:fontRef idx="minor">
+            <a:schemeClr val="tx1"/>
+          </a:fontRef>
+        </p:style>
+      </p:cxnSp>
+      <p:cxnSp>
+        <p:nvCxnSpPr>
+          <p:cNvPr id="35" name="Conexão Reta Unidirecional 34">
+            <a:extLst>
+              <a:ext uri="{FF2B5EF4-FFF2-40B4-BE49-F238E27FC236}">
+                <a16:creationId xmlns:a16="http://schemas.microsoft.com/office/drawing/2014/main" id="{5ADA2D49-254B-8274-AABC-40F9046D3AC7}"/>
+              </a:ext>
+            </a:extLst>
+          </p:cNvPr>
+          <p:cNvCxnSpPr>
+            <a:cxnSpLocks/>
+          </p:cNvCxnSpPr>
+          <p:nvPr/>
+        </p:nvCxnSpPr>
+        <p:spPr>
+          <a:xfrm>
+            <a:off x="5943600" y="1668780"/>
+            <a:ext cx="182880" cy="0"/>
+          </a:xfrm>
+          <a:prstGeom prst="straightConnector1">
+            <a:avLst/>
+          </a:prstGeom>
+          <a:ln w="19050">
+            <a:solidFill>
+              <a:schemeClr val="tx1"/>
+            </a:solidFill>
+            <a:tailEnd type="triangle"/>
+          </a:ln>
+        </p:spPr>
+        <p:style>
+          <a:lnRef idx="1">
+            <a:schemeClr val="accent1"/>
+          </a:lnRef>
+          <a:fillRef idx="0">
+            <a:schemeClr val="accent1"/>
+          </a:fillRef>
+          <a:effectRef idx="0">
+            <a:schemeClr val="accent1"/>
+          </a:effectRef>
+          <a:fontRef idx="minor">
+            <a:schemeClr val="tx1"/>
+          </a:fontRef>
+        </p:style>
+      </p:cxnSp>
+      <p:cxnSp>
+        <p:nvCxnSpPr>
+          <p:cNvPr id="36" name="Conexão Reta Unidirecional 35">
+            <a:extLst>
+              <a:ext uri="{FF2B5EF4-FFF2-40B4-BE49-F238E27FC236}">
+                <a16:creationId xmlns:a16="http://schemas.microsoft.com/office/drawing/2014/main" id="{B8D804C8-CA41-F327-9B64-FC25871AA272}"/>
+              </a:ext>
+            </a:extLst>
+          </p:cNvPr>
+          <p:cNvCxnSpPr>
+            <a:cxnSpLocks/>
+          </p:cNvCxnSpPr>
+          <p:nvPr/>
+        </p:nvCxnSpPr>
+        <p:spPr>
+          <a:xfrm>
+            <a:off x="3017520" y="3314700"/>
+            <a:ext cx="182880" cy="0"/>
+          </a:xfrm>
+          <a:prstGeom prst="straightConnector1">
+            <a:avLst/>
+          </a:prstGeom>
+          <a:ln w="19050">
+            <a:solidFill>
+              <a:schemeClr val="tx1"/>
+            </a:solidFill>
+            <a:tailEnd type="triangle"/>
+          </a:ln>
+        </p:spPr>
+        <p:style>
+          <a:lnRef idx="1">
+            <a:schemeClr val="accent1"/>
+          </a:lnRef>
+          <a:fillRef idx="0">
+            <a:schemeClr val="accent1"/>
+          </a:fillRef>
+          <a:effectRef idx="0">
+            <a:schemeClr val="accent1"/>
+          </a:effectRef>
+          <a:fontRef idx="minor">
+            <a:schemeClr val="tx1"/>
+          </a:fontRef>
+        </p:style>
+      </p:cxnSp>
+      <p:cxnSp>
+        <p:nvCxnSpPr>
+          <p:cNvPr id="37" name="Conexão Reta Unidirecional 36">
+            <a:extLst>
+              <a:ext uri="{FF2B5EF4-FFF2-40B4-BE49-F238E27FC236}">
+                <a16:creationId xmlns:a16="http://schemas.microsoft.com/office/drawing/2014/main" id="{073E7D96-C155-470F-114A-C83D50DC5996}"/>
+              </a:ext>
+            </a:extLst>
+          </p:cNvPr>
+          <p:cNvCxnSpPr>
+            <a:cxnSpLocks/>
+          </p:cNvCxnSpPr>
+          <p:nvPr/>
+        </p:nvCxnSpPr>
+        <p:spPr>
+          <a:xfrm flipV="1">
+            <a:off x="5943600" y="3310944"/>
+            <a:ext cx="182880" cy="3756"/>
+          </a:xfrm>
+          <a:prstGeom prst="straightConnector1">
+            <a:avLst/>
+          </a:prstGeom>
+          <a:ln w="19050">
+            <a:solidFill>
+              <a:schemeClr val="tx1"/>
+            </a:solidFill>
+            <a:tailEnd type="triangle"/>
+          </a:ln>
+        </p:spPr>
+        <p:style>
+          <a:lnRef idx="1">
+            <a:schemeClr val="accent1"/>
+          </a:lnRef>
+          <a:fillRef idx="0">
+            <a:schemeClr val="accent1"/>
+          </a:fillRef>
+          <a:effectRef idx="0">
+            <a:schemeClr val="accent1"/>
+          </a:effectRef>
+          <a:fontRef idx="minor">
+            <a:schemeClr val="tx1"/>
+          </a:fontRef>
+        </p:style>
+      </p:cxnSp>
+    </p:spTree>
+  </p:cSld>
+  <p:clrMapOvr>
+    <a:masterClrMapping/>
+  </p:clrMapOvr>
+</p:sld>
+</file>
+
+<file path=ppt/slides/slide11.xml><?xml version="1.0" encoding="utf-8"?>
+<p:sld xmlns:a="http://schemas.openxmlformats.org/drawingml/2006/main" xmlns:r="http://schemas.openxmlformats.org/officeDocument/2006/relationships" xmlns:p="http://schemas.openxmlformats.org/presentationml/2006/main">
   <p:cSld name="Slide 11">
     <p:bg>
       <p:bgPr>
@@ -3322,7 +5164,7 @@
 </p:sld>
 </file>
 
-<file path=ppt/slides/slide11.xml><?xml version="1.0" encoding="utf-8"?>
+<file path=ppt/slides/slide12.xml><?xml version="1.0" encoding="utf-8"?>
 <p:sld xmlns:a="http://schemas.openxmlformats.org/drawingml/2006/main" xmlns:r="http://schemas.openxmlformats.org/officeDocument/2006/relationships" xmlns:p="http://schemas.openxmlformats.org/presentationml/2006/main">
   <p:cSld name="Slide 12">
     <p:bg>
@@ -5748,6 +7590,314 @@
           </a:prstGeom>
         </p:spPr>
       </p:pic>
+      <p:sp>
+        <p:nvSpPr>
+          <p:cNvPr id="5" name="Shape 2">
+            <a:extLst>
+              <a:ext uri="{FF2B5EF4-FFF2-40B4-BE49-F238E27FC236}">
+                <a16:creationId xmlns:a16="http://schemas.microsoft.com/office/drawing/2014/main" id="{68224E63-CDBF-A5E1-3F3C-40114C1946D0}"/>
+              </a:ext>
+            </a:extLst>
+          </p:cNvPr>
+          <p:cNvSpPr/>
+          <p:nvPr/>
+        </p:nvSpPr>
+        <p:spPr>
+          <a:xfrm>
+            <a:off x="296342" y="2900166"/>
+            <a:ext cx="3818458" cy="1886625"/>
+          </a:xfrm>
+          <a:prstGeom prst="rect">
+            <a:avLst/>
+          </a:prstGeom>
+          <a:solidFill>
+            <a:srgbClr val="112236"/>
+          </a:solidFill>
+          <a:ln w="25400">
+            <a:solidFill>
+              <a:srgbClr val="00D4AA"/>
+            </a:solidFill>
+            <a:prstDash val="solid"/>
+          </a:ln>
+          <a:effectLst>
+            <a:outerShdw blurRad="101600" dist="38100" dir="8100000" algn="bl" rotWithShape="0">
+              <a:srgbClr val="000000">
+                <a:alpha val="18000"/>
+              </a:srgbClr>
+            </a:outerShdw>
+          </a:effectLst>
+        </p:spPr>
+        <p:txBody>
+          <a:bodyPr/>
+          <a:lstStyle/>
+          <a:p>
+            <a:endParaRPr lang="pt-PT"/>
+          </a:p>
+        </p:txBody>
+      </p:sp>
+      <p:sp>
+        <p:nvSpPr>
+          <p:cNvPr id="6" name="Text 3">
+            <a:extLst>
+              <a:ext uri="{FF2B5EF4-FFF2-40B4-BE49-F238E27FC236}">
+                <a16:creationId xmlns:a16="http://schemas.microsoft.com/office/drawing/2014/main" id="{F7057229-D972-4ECB-9672-87A5E5974479}"/>
+              </a:ext>
+            </a:extLst>
+          </p:cNvPr>
+          <p:cNvSpPr/>
+          <p:nvPr/>
+        </p:nvSpPr>
+        <p:spPr>
+          <a:xfrm>
+            <a:off x="457200" y="2986085"/>
+            <a:ext cx="3254644" cy="1696380"/>
+          </a:xfrm>
+          <a:prstGeom prst="rect">
+            <a:avLst/>
+          </a:prstGeom>
+          <a:noFill/>
+          <a:ln/>
+        </p:spPr>
+        <p:txBody>
+          <a:bodyPr wrap="square" rtlCol="0" anchor="ctr"/>
+          <a:lstStyle/>
+          <a:p>
+            <a:r>
+              <a:rPr lang="pt-PT" sz="1400" b="1" dirty="0">
+                <a:solidFill>
+                  <a:schemeClr val="bg1"/>
+                </a:solidFill>
+              </a:rPr>
+              <a:t>Problema sem Temporal</a:t>
+            </a:r>
+          </a:p>
+          <a:p>
+            <a:r>
+              <a:rPr lang="pt-PT" sz="1400" dirty="0">
+                <a:solidFill>
+                  <a:schemeClr val="bg1"/>
+                </a:solidFill>
+              </a:rPr>
+              <a:t>Si el pago </a:t>
+            </a:r>
+            <a:r>
+              <a:rPr lang="pt-PT" sz="1400" dirty="0" err="1">
+                <a:solidFill>
+                  <a:schemeClr val="bg1"/>
+                </a:solidFill>
+              </a:rPr>
+              <a:t>falla</a:t>
+            </a:r>
+            <a:r>
+              <a:rPr lang="pt-PT" sz="1400" dirty="0">
+                <a:solidFill>
+                  <a:schemeClr val="bg1"/>
+                </a:solidFill>
+              </a:rPr>
+              <a:t> </a:t>
+            </a:r>
+            <a:r>
+              <a:rPr lang="pt-PT" sz="1400" dirty="0" err="1">
+                <a:solidFill>
+                  <a:schemeClr val="bg1"/>
+                </a:solidFill>
+              </a:rPr>
+              <a:t>tras</a:t>
+            </a:r>
+            <a:r>
+              <a:rPr lang="pt-PT" sz="1400" dirty="0">
+                <a:solidFill>
+                  <a:schemeClr val="bg1"/>
+                </a:solidFill>
+              </a:rPr>
+              <a:t> la reserva de stock:</a:t>
+            </a:r>
+          </a:p>
+          <a:p>
+            <a:pPr>
+              <a:buFont typeface="Arial" panose="020B0604020202020204" pitchFamily="34" charset="0"/>
+              <a:buChar char="•"/>
+            </a:pPr>
+            <a:r>
+              <a:rPr lang="pt-PT" sz="1400" dirty="0">
+                <a:solidFill>
+                  <a:schemeClr val="bg1"/>
+                </a:solidFill>
+              </a:rPr>
+              <a:t> el sistema permanece </a:t>
+            </a:r>
+            <a:r>
+              <a:rPr lang="pt-PT" sz="1400" dirty="0" err="1">
+                <a:solidFill>
+                  <a:schemeClr val="bg1"/>
+                </a:solidFill>
+              </a:rPr>
+              <a:t>en</a:t>
+            </a:r>
+            <a:r>
+              <a:rPr lang="pt-PT" sz="1400" dirty="0">
+                <a:solidFill>
+                  <a:schemeClr val="bg1"/>
+                </a:solidFill>
+              </a:rPr>
+              <a:t> </a:t>
+            </a:r>
+            <a:r>
+              <a:rPr lang="pt-PT" sz="1400" dirty="0" err="1">
+                <a:solidFill>
+                  <a:schemeClr val="bg1"/>
+                </a:solidFill>
+              </a:rPr>
+              <a:t>un</a:t>
+            </a:r>
+            <a:r>
+              <a:rPr lang="pt-PT" sz="1400" dirty="0">
+                <a:solidFill>
+                  <a:schemeClr val="bg1"/>
+                </a:solidFill>
+              </a:rPr>
+              <a:t> estado intermedio </a:t>
+            </a:r>
+          </a:p>
+          <a:p>
+            <a:pPr>
+              <a:buFont typeface="Arial" panose="020B0604020202020204" pitchFamily="34" charset="0"/>
+              <a:buChar char="•"/>
+            </a:pPr>
+            <a:r>
+              <a:rPr lang="pt-PT" sz="1400" dirty="0">
+                <a:solidFill>
+                  <a:schemeClr val="bg1"/>
+                </a:solidFill>
+              </a:rPr>
+              <a:t> </a:t>
+            </a:r>
+            <a:r>
+              <a:rPr lang="pt-PT" sz="1400" dirty="0" err="1">
+                <a:solidFill>
+                  <a:schemeClr val="bg1"/>
+                </a:solidFill>
+              </a:rPr>
+              <a:t>debe</a:t>
+            </a:r>
+            <a:r>
+              <a:rPr lang="pt-PT" sz="1400" dirty="0">
+                <a:solidFill>
+                  <a:schemeClr val="bg1"/>
+                </a:solidFill>
+              </a:rPr>
+              <a:t> decidir entre </a:t>
+            </a:r>
+            <a:r>
+              <a:rPr lang="pt-PT" sz="1400" dirty="0" err="1">
+                <a:solidFill>
+                  <a:schemeClr val="bg1"/>
+                </a:solidFill>
+              </a:rPr>
+              <a:t>reintentar</a:t>
+            </a:r>
+            <a:r>
+              <a:rPr lang="pt-PT" sz="1400" dirty="0">
+                <a:solidFill>
+                  <a:schemeClr val="bg1"/>
+                </a:solidFill>
+              </a:rPr>
+              <a:t> o compensar</a:t>
+            </a:r>
+          </a:p>
+          <a:p>
+            <a:pPr>
+              <a:buFont typeface="Arial" panose="020B0604020202020204" pitchFamily="34" charset="0"/>
+              <a:buChar char="•"/>
+            </a:pPr>
+            <a:r>
+              <a:rPr lang="pt-PT" sz="1400" dirty="0">
+                <a:solidFill>
+                  <a:schemeClr val="bg1"/>
+                </a:solidFill>
+              </a:rPr>
+              <a:t> </a:t>
+            </a:r>
+            <a:r>
+              <a:rPr lang="pt-PT" sz="1400" dirty="0" err="1">
+                <a:solidFill>
+                  <a:schemeClr val="bg1"/>
+                </a:solidFill>
+              </a:rPr>
+              <a:t>es</a:t>
+            </a:r>
+            <a:r>
+              <a:rPr lang="pt-PT" sz="1400" dirty="0">
+                <a:solidFill>
+                  <a:schemeClr val="bg1"/>
+                </a:solidFill>
+              </a:rPr>
+              <a:t> </a:t>
+            </a:r>
+            <a:r>
+              <a:rPr lang="pt-PT" sz="1400" dirty="0" err="1">
+                <a:solidFill>
+                  <a:schemeClr val="bg1"/>
+                </a:solidFill>
+              </a:rPr>
+              <a:t>necesario</a:t>
+            </a:r>
+            <a:r>
+              <a:rPr lang="pt-PT" sz="1400" dirty="0">
+                <a:solidFill>
+                  <a:schemeClr val="bg1"/>
+                </a:solidFill>
+              </a:rPr>
+              <a:t> evitar duplicados y saber </a:t>
+            </a:r>
+            <a:r>
+              <a:rPr lang="pt-PT" sz="1400" dirty="0" err="1">
+                <a:solidFill>
+                  <a:schemeClr val="bg1"/>
+                </a:solidFill>
+              </a:rPr>
+              <a:t>dónde</a:t>
+            </a:r>
+            <a:r>
+              <a:rPr lang="pt-PT" sz="1400" dirty="0">
+                <a:solidFill>
+                  <a:schemeClr val="bg1"/>
+                </a:solidFill>
+              </a:rPr>
+              <a:t> </a:t>
+            </a:r>
+            <a:r>
+              <a:rPr lang="pt-PT" sz="1400" dirty="0" err="1">
+                <a:solidFill>
+                  <a:schemeClr val="bg1"/>
+                </a:solidFill>
+              </a:rPr>
+              <a:t>reanudar</a:t>
+            </a:r>
+            <a:r>
+              <a:rPr lang="pt-PT" sz="1400" dirty="0">
+                <a:solidFill>
+                  <a:schemeClr val="bg1"/>
+                </a:solidFill>
+              </a:rPr>
+              <a:t> la </a:t>
+            </a:r>
+            <a:r>
+              <a:rPr lang="pt-PT" sz="1400" dirty="0" err="1">
+                <a:solidFill>
+                  <a:schemeClr val="bg1"/>
+                </a:solidFill>
+              </a:rPr>
+              <a:t>operación</a:t>
+            </a:r>
+            <a:endParaRPr lang="pt-PT" sz="1400" dirty="0">
+              <a:solidFill>
+                <a:schemeClr val="bg1"/>
+              </a:solidFill>
+            </a:endParaRPr>
+          </a:p>
+        </p:txBody>
+      </p:sp>
     </p:spTree>
   </p:cSld>
   <p:clrMapOvr>
@@ -5757,6 +7907,659 @@
 </file>
 
 <file path=ppt/slides/slide4.xml><?xml version="1.0" encoding="utf-8"?>
+<p:sld xmlns:a="http://schemas.openxmlformats.org/drawingml/2006/main" xmlns:r="http://schemas.openxmlformats.org/officeDocument/2006/relationships" xmlns:p="http://schemas.openxmlformats.org/presentationml/2006/main">
+  <p:cSld>
+    <p:spTree>
+      <p:nvGrpSpPr>
+        <p:cNvPr id="1" name="">
+          <a:extLst>
+            <a:ext uri="{FF2B5EF4-FFF2-40B4-BE49-F238E27FC236}">
+              <a16:creationId xmlns:a16="http://schemas.microsoft.com/office/drawing/2014/main" id="{CC3F1EAA-D0AD-6646-40E2-1886C702A1E5}"/>
+            </a:ext>
+          </a:extLst>
+        </p:cNvPr>
+        <p:cNvGrpSpPr/>
+        <p:nvPr/>
+      </p:nvGrpSpPr>
+      <p:grpSpPr>
+        <a:xfrm>
+          <a:off x="0" y="0"/>
+          <a:ext cx="0" cy="0"/>
+          <a:chOff x="0" y="0"/>
+          <a:chExt cx="0" cy="0"/>
+        </a:xfrm>
+      </p:grpSpPr>
+      <p:sp>
+        <p:nvSpPr>
+          <p:cNvPr id="2" name="Shape 0">
+            <a:extLst>
+              <a:ext uri="{FF2B5EF4-FFF2-40B4-BE49-F238E27FC236}">
+                <a16:creationId xmlns:a16="http://schemas.microsoft.com/office/drawing/2014/main" id="{ED8C9ED9-A036-D733-7F14-4EF10CEE4D8C}"/>
+              </a:ext>
+            </a:extLst>
+          </p:cNvPr>
+          <p:cNvSpPr/>
+          <p:nvPr/>
+        </p:nvSpPr>
+        <p:spPr>
+          <a:xfrm>
+            <a:off x="0" y="0"/>
+            <a:ext cx="9144000" cy="822960"/>
+          </a:xfrm>
+          <a:prstGeom prst="rect">
+            <a:avLst/>
+          </a:prstGeom>
+          <a:solidFill>
+            <a:srgbClr val="1B6CA8"/>
+          </a:solidFill>
+          <a:ln w="12700">
+            <a:solidFill>
+              <a:srgbClr val="1B6CA8"/>
+            </a:solidFill>
+            <a:prstDash val="solid"/>
+          </a:ln>
+        </p:spPr>
+        <p:txBody>
+          <a:bodyPr/>
+          <a:lstStyle/>
+          <a:p>
+            <a:endParaRPr lang="pt-PT"/>
+          </a:p>
+        </p:txBody>
+      </p:sp>
+      <p:sp>
+        <p:nvSpPr>
+          <p:cNvPr id="3" name="Text 1">
+            <a:extLst>
+              <a:ext uri="{FF2B5EF4-FFF2-40B4-BE49-F238E27FC236}">
+                <a16:creationId xmlns:a16="http://schemas.microsoft.com/office/drawing/2014/main" id="{7F29BEB5-FF40-92AE-F496-5A611B310339}"/>
+              </a:ext>
+            </a:extLst>
+          </p:cNvPr>
+          <p:cNvSpPr/>
+          <p:nvPr/>
+        </p:nvSpPr>
+        <p:spPr>
+          <a:xfrm>
+            <a:off x="457200" y="0"/>
+            <a:ext cx="8229600" cy="822960"/>
+          </a:xfrm>
+          <a:prstGeom prst="rect">
+            <a:avLst/>
+          </a:prstGeom>
+          <a:noFill/>
+          <a:ln/>
+        </p:spPr>
+        <p:txBody>
+          <a:bodyPr wrap="square" lIns="0" tIns="0" rIns="0" bIns="0" rtlCol="0" anchor="ctr"/>
+          <a:lstStyle/>
+          <a:p>
+            <a:pPr marL="0" indent="0">
+              <a:buNone/>
+            </a:pPr>
+            <a:r>
+              <a:rPr lang="en-US" sz="2400" b="1" dirty="0">
+                <a:solidFill>
+                  <a:srgbClr val="FFFFFF"/>
+                </a:solidFill>
+              </a:rPr>
+              <a:t>01  / </a:t>
+            </a:r>
+            <a:r>
+              <a:rPr lang="en-US" sz="2400" b="1" dirty="0" err="1">
+                <a:solidFill>
+                  <a:srgbClr val="FFFFFF"/>
+                </a:solidFill>
+              </a:rPr>
+              <a:t>Problema</a:t>
+            </a:r>
+            <a:r>
+              <a:rPr lang="en-US" sz="2400" b="1" dirty="0">
+                <a:solidFill>
+                  <a:srgbClr val="FFFFFF"/>
+                </a:solidFill>
+              </a:rPr>
+              <a:t> real </a:t>
+            </a:r>
+            <a:r>
+              <a:rPr lang="en-US" sz="2400" b="1" dirty="0" err="1">
+                <a:solidFill>
+                  <a:srgbClr val="FFFFFF"/>
+                </a:solidFill>
+              </a:rPr>
+              <a:t>en</a:t>
+            </a:r>
+            <a:r>
+              <a:rPr lang="en-US" sz="2400" b="1" dirty="0">
+                <a:solidFill>
+                  <a:srgbClr val="FFFFFF"/>
+                </a:solidFill>
+              </a:rPr>
+              <a:t> </a:t>
+            </a:r>
+            <a:r>
+              <a:rPr lang="en-US" sz="2400" b="1" dirty="0" err="1">
+                <a:solidFill>
+                  <a:srgbClr val="FFFFFF"/>
+                </a:solidFill>
+              </a:rPr>
+              <a:t>microservicios</a:t>
+            </a:r>
+            <a:endParaRPr lang="en-US" sz="2400" dirty="0"/>
+          </a:p>
+        </p:txBody>
+      </p:sp>
+      <p:pic>
+        <p:nvPicPr>
+          <p:cNvPr id="17" name="Imagem 16">
+            <a:extLst>
+              <a:ext uri="{FF2B5EF4-FFF2-40B4-BE49-F238E27FC236}">
+                <a16:creationId xmlns:a16="http://schemas.microsoft.com/office/drawing/2014/main" id="{CA13B47F-8135-EB99-0CED-53077771A4FA}"/>
+              </a:ext>
+            </a:extLst>
+          </p:cNvPr>
+          <p:cNvPicPr>
+            <a:picLocks noChangeAspect="1"/>
+          </p:cNvPicPr>
+          <p:nvPr/>
+        </p:nvPicPr>
+        <p:blipFill>
+          <a:blip r:embed="rId3"/>
+          <a:stretch>
+            <a:fillRect/>
+          </a:stretch>
+        </p:blipFill>
+        <p:spPr>
+          <a:xfrm>
+            <a:off x="4572000" y="1029778"/>
+            <a:ext cx="4347835" cy="3491101"/>
+          </a:xfrm>
+          <a:prstGeom prst="rect">
+            <a:avLst/>
+          </a:prstGeom>
+        </p:spPr>
+      </p:pic>
+      <p:sp>
+        <p:nvSpPr>
+          <p:cNvPr id="4" name="Shape 3">
+            <a:extLst>
+              <a:ext uri="{FF2B5EF4-FFF2-40B4-BE49-F238E27FC236}">
+                <a16:creationId xmlns:a16="http://schemas.microsoft.com/office/drawing/2014/main" id="{8887D62C-15A8-6734-3362-F493B5DF38B7}"/>
+              </a:ext>
+            </a:extLst>
+          </p:cNvPr>
+          <p:cNvSpPr/>
+          <p:nvPr/>
+        </p:nvSpPr>
+        <p:spPr>
+          <a:xfrm>
+            <a:off x="296342" y="1029778"/>
+            <a:ext cx="3818458" cy="457200"/>
+          </a:xfrm>
+          <a:prstGeom prst="rect">
+            <a:avLst/>
+          </a:prstGeom>
+          <a:solidFill>
+            <a:srgbClr val="00D4AA"/>
+          </a:solidFill>
+          <a:ln w="12700">
+            <a:solidFill>
+              <a:srgbClr val="00D4AA"/>
+            </a:solidFill>
+            <a:prstDash val="solid"/>
+          </a:ln>
+        </p:spPr>
+        <p:txBody>
+          <a:bodyPr/>
+          <a:lstStyle/>
+          <a:p>
+            <a:endParaRPr lang="pt-PT" dirty="0"/>
+          </a:p>
+        </p:txBody>
+      </p:sp>
+      <p:sp>
+        <p:nvSpPr>
+          <p:cNvPr id="5" name="CaixaDeTexto 4">
+            <a:extLst>
+              <a:ext uri="{FF2B5EF4-FFF2-40B4-BE49-F238E27FC236}">
+                <a16:creationId xmlns:a16="http://schemas.microsoft.com/office/drawing/2014/main" id="{12B878AB-42D1-0FD3-F2F8-62288356B5A2}"/>
+              </a:ext>
+            </a:extLst>
+          </p:cNvPr>
+          <p:cNvSpPr txBox="1"/>
+          <p:nvPr/>
+        </p:nvSpPr>
+        <p:spPr>
+          <a:xfrm>
+            <a:off x="352212" y="1091240"/>
+            <a:ext cx="3705015" cy="307777"/>
+          </a:xfrm>
+          <a:prstGeom prst="rect">
+            <a:avLst/>
+          </a:prstGeom>
+          <a:noFill/>
+        </p:spPr>
+        <p:txBody>
+          <a:bodyPr wrap="square">
+            <a:spAutoFit/>
+          </a:bodyPr>
+          <a:lstStyle/>
+          <a:p>
+            <a:r>
+              <a:rPr lang="en-US" sz="1400" b="1" dirty="0">
+                <a:solidFill>
+                  <a:srgbClr val="0D1B2A"/>
+                </a:solidFill>
+              </a:rPr>
+              <a:t>Caso de </a:t>
+            </a:r>
+            <a:r>
+              <a:rPr lang="en-US" sz="1400" b="1" dirty="0" err="1">
+                <a:solidFill>
+                  <a:srgbClr val="0D1B2A"/>
+                </a:solidFill>
+              </a:rPr>
+              <a:t>Uso</a:t>
+            </a:r>
+            <a:r>
+              <a:rPr lang="pt-PT" sz="1400" dirty="0"/>
+              <a:t> </a:t>
+            </a:r>
+            <a:r>
+              <a:rPr lang="en-US" sz="1400" b="1" dirty="0">
+                <a:solidFill>
+                  <a:srgbClr val="0D1B2A"/>
+                </a:solidFill>
+              </a:rPr>
+              <a:t>– </a:t>
+            </a:r>
+            <a:r>
+              <a:rPr lang="en-US" sz="1400" b="1" dirty="0" err="1">
+                <a:solidFill>
+                  <a:srgbClr val="0D1B2A"/>
+                </a:solidFill>
+              </a:rPr>
+              <a:t>Procesamiento</a:t>
+            </a:r>
+            <a:r>
+              <a:rPr lang="en-US" sz="1400" b="1" dirty="0">
+                <a:solidFill>
+                  <a:srgbClr val="0D1B2A"/>
+                </a:solidFill>
+              </a:rPr>
+              <a:t> de </a:t>
+            </a:r>
+            <a:r>
+              <a:rPr lang="en-US" sz="1400" b="1" dirty="0" err="1">
+                <a:solidFill>
+                  <a:srgbClr val="0D1B2A"/>
+                </a:solidFill>
+              </a:rPr>
+              <a:t>pedidos</a:t>
+            </a:r>
+            <a:r>
+              <a:rPr lang="en-US" sz="1400" b="1" dirty="0">
+                <a:solidFill>
+                  <a:srgbClr val="0D1B2A"/>
+                </a:solidFill>
+              </a:rPr>
+              <a:t> / Saga</a:t>
+            </a:r>
+            <a:endParaRPr lang="pt-PT" sz="1400" dirty="0"/>
+          </a:p>
+        </p:txBody>
+      </p:sp>
+      <p:sp>
+        <p:nvSpPr>
+          <p:cNvPr id="6" name="Shape 2">
+            <a:extLst>
+              <a:ext uri="{FF2B5EF4-FFF2-40B4-BE49-F238E27FC236}">
+                <a16:creationId xmlns:a16="http://schemas.microsoft.com/office/drawing/2014/main" id="{2B4AD246-C258-A354-C339-66A7DF4E2433}"/>
+              </a:ext>
+            </a:extLst>
+          </p:cNvPr>
+          <p:cNvSpPr/>
+          <p:nvPr/>
+        </p:nvSpPr>
+        <p:spPr>
+          <a:xfrm>
+            <a:off x="296342" y="1488239"/>
+            <a:ext cx="3818458" cy="1868652"/>
+          </a:xfrm>
+          <a:prstGeom prst="rect">
+            <a:avLst/>
+          </a:prstGeom>
+          <a:solidFill>
+            <a:srgbClr val="112236"/>
+          </a:solidFill>
+          <a:ln w="25400">
+            <a:solidFill>
+              <a:srgbClr val="00D4AA"/>
+            </a:solidFill>
+            <a:prstDash val="solid"/>
+          </a:ln>
+          <a:effectLst>
+            <a:outerShdw blurRad="101600" dist="38100" dir="8100000" algn="bl" rotWithShape="0">
+              <a:srgbClr val="000000">
+                <a:alpha val="18000"/>
+              </a:srgbClr>
+            </a:outerShdw>
+          </a:effectLst>
+        </p:spPr>
+        <p:txBody>
+          <a:bodyPr/>
+          <a:lstStyle/>
+          <a:p>
+            <a:endParaRPr lang="pt-PT"/>
+          </a:p>
+        </p:txBody>
+      </p:sp>
+      <p:sp>
+        <p:nvSpPr>
+          <p:cNvPr id="7" name="Text 3">
+            <a:extLst>
+              <a:ext uri="{FF2B5EF4-FFF2-40B4-BE49-F238E27FC236}">
+                <a16:creationId xmlns:a16="http://schemas.microsoft.com/office/drawing/2014/main" id="{5737D986-4144-A67D-5611-18C3320C8B41}"/>
+              </a:ext>
+            </a:extLst>
+          </p:cNvPr>
+          <p:cNvSpPr/>
+          <p:nvPr/>
+        </p:nvSpPr>
+        <p:spPr>
+          <a:xfrm>
+            <a:off x="457200" y="1546302"/>
+            <a:ext cx="3254644" cy="1663304"/>
+          </a:xfrm>
+          <a:prstGeom prst="rect">
+            <a:avLst/>
+          </a:prstGeom>
+          <a:noFill/>
+          <a:ln/>
+        </p:spPr>
+        <p:txBody>
+          <a:bodyPr wrap="square" rtlCol="0" anchor="ctr"/>
+          <a:lstStyle/>
+          <a:p>
+            <a:r>
+              <a:rPr lang="pt-PT" sz="1400" b="1" dirty="0">
+                <a:solidFill>
+                  <a:schemeClr val="bg1"/>
+                </a:solidFill>
+              </a:rPr>
+              <a:t>Com Temporal</a:t>
+            </a:r>
+          </a:p>
+          <a:p>
+            <a:r>
+              <a:rPr lang="pt-PT" sz="1400" dirty="0">
+                <a:solidFill>
+                  <a:schemeClr val="bg1"/>
+                </a:solidFill>
+              </a:rPr>
+              <a:t>El  workflow se guarda </a:t>
+            </a:r>
+            <a:r>
+              <a:rPr lang="pt-PT" sz="1400" dirty="0" err="1">
+                <a:solidFill>
+                  <a:schemeClr val="bg1"/>
+                </a:solidFill>
+              </a:rPr>
+              <a:t>automáticamente</a:t>
+            </a:r>
+            <a:r>
+              <a:rPr lang="pt-PT" sz="1400" dirty="0">
+                <a:solidFill>
+                  <a:schemeClr val="bg1"/>
+                </a:solidFill>
+              </a:rPr>
+              <a:t> y </a:t>
+            </a:r>
+            <a:r>
+              <a:rPr lang="pt-PT" sz="1400" dirty="0" err="1">
+                <a:solidFill>
+                  <a:schemeClr val="bg1"/>
+                </a:solidFill>
+              </a:rPr>
+              <a:t>usted</a:t>
+            </a:r>
+            <a:r>
+              <a:rPr lang="pt-PT" sz="1400" dirty="0">
+                <a:solidFill>
+                  <a:schemeClr val="bg1"/>
+                </a:solidFill>
+              </a:rPr>
+              <a:t> </a:t>
+            </a:r>
+            <a:r>
+              <a:rPr lang="pt-PT" sz="1400" dirty="0" err="1">
+                <a:solidFill>
+                  <a:schemeClr val="bg1"/>
+                </a:solidFill>
+              </a:rPr>
+              <a:t>puede</a:t>
+            </a:r>
+            <a:r>
+              <a:rPr lang="pt-PT" sz="1400" dirty="0">
+                <a:solidFill>
+                  <a:schemeClr val="bg1"/>
+                </a:solidFill>
+              </a:rPr>
+              <a:t>:</a:t>
+            </a:r>
+          </a:p>
+          <a:p>
+            <a:pPr>
+              <a:buFont typeface="Arial" panose="020B0604020202020204" pitchFamily="34" charset="0"/>
+              <a:buChar char="•"/>
+            </a:pPr>
+            <a:r>
+              <a:rPr lang="pt-PT" sz="1400" dirty="0">
+                <a:solidFill>
+                  <a:schemeClr val="bg1"/>
+                </a:solidFill>
+              </a:rPr>
+              <a:t> intentar </a:t>
+            </a:r>
+            <a:r>
+              <a:rPr lang="pt-PT" sz="1400" dirty="0" err="1">
+                <a:solidFill>
+                  <a:schemeClr val="bg1"/>
+                </a:solidFill>
+              </a:rPr>
+              <a:t>fallas</a:t>
+            </a:r>
+            <a:r>
+              <a:rPr lang="pt-PT" sz="1400" dirty="0">
+                <a:solidFill>
+                  <a:schemeClr val="bg1"/>
+                </a:solidFill>
+              </a:rPr>
+              <a:t> </a:t>
+            </a:r>
+            <a:r>
+              <a:rPr lang="pt-PT" sz="1400" dirty="0" err="1">
+                <a:solidFill>
+                  <a:schemeClr val="bg1"/>
+                </a:solidFill>
+              </a:rPr>
+              <a:t>transitorias</a:t>
+            </a:r>
+            <a:endParaRPr lang="pt-PT" sz="1400" dirty="0">
+              <a:solidFill>
+                <a:schemeClr val="bg1"/>
+              </a:solidFill>
+            </a:endParaRPr>
+          </a:p>
+          <a:p>
+            <a:pPr>
+              <a:buFont typeface="Arial" panose="020B0604020202020204" pitchFamily="34" charset="0"/>
+              <a:buChar char="•"/>
+            </a:pPr>
+            <a:r>
+              <a:rPr lang="pt-PT" sz="1400" dirty="0">
+                <a:solidFill>
+                  <a:schemeClr val="bg1"/>
+                </a:solidFill>
+              </a:rPr>
+              <a:t> </a:t>
+            </a:r>
+            <a:r>
+              <a:rPr lang="pt-PT" sz="1400" dirty="0" err="1">
+                <a:solidFill>
+                  <a:schemeClr val="bg1"/>
+                </a:solidFill>
+              </a:rPr>
+              <a:t>fallar</a:t>
+            </a:r>
+            <a:r>
+              <a:rPr lang="pt-PT" sz="1400" dirty="0">
+                <a:solidFill>
+                  <a:schemeClr val="bg1"/>
+                </a:solidFill>
+              </a:rPr>
+              <a:t> de </a:t>
+            </a:r>
+            <a:r>
+              <a:rPr lang="pt-PT" sz="1400" dirty="0" err="1">
+                <a:solidFill>
+                  <a:schemeClr val="bg1"/>
+                </a:solidFill>
+              </a:rPr>
+              <a:t>manera</a:t>
+            </a:r>
+            <a:r>
+              <a:rPr lang="pt-PT" sz="1400" dirty="0">
+                <a:solidFill>
+                  <a:schemeClr val="bg1"/>
+                </a:solidFill>
+              </a:rPr>
+              <a:t> controlada </a:t>
+            </a:r>
+            <a:r>
+              <a:rPr lang="pt-PT" sz="1400" dirty="0" err="1">
+                <a:solidFill>
+                  <a:schemeClr val="bg1"/>
+                </a:solidFill>
+              </a:rPr>
+              <a:t>en</a:t>
+            </a:r>
+            <a:r>
+              <a:rPr lang="pt-PT" sz="1400" dirty="0">
+                <a:solidFill>
+                  <a:schemeClr val="bg1"/>
+                </a:solidFill>
+              </a:rPr>
+              <a:t> los errores </a:t>
+            </a:r>
+            <a:r>
+              <a:rPr lang="pt-PT" sz="1400" dirty="0" err="1">
+                <a:solidFill>
+                  <a:schemeClr val="bg1"/>
+                </a:solidFill>
+              </a:rPr>
+              <a:t>empresariales</a:t>
+            </a:r>
+            <a:endParaRPr lang="pt-PT" sz="1400" dirty="0">
+              <a:solidFill>
+                <a:schemeClr val="bg1"/>
+              </a:solidFill>
+            </a:endParaRPr>
+          </a:p>
+          <a:p>
+            <a:pPr>
+              <a:buFont typeface="Arial" panose="020B0604020202020204" pitchFamily="34" charset="0"/>
+              <a:buChar char="•"/>
+            </a:pPr>
+            <a:r>
+              <a:rPr lang="pt-PT" sz="1400" dirty="0">
+                <a:solidFill>
+                  <a:schemeClr val="bg1"/>
+                </a:solidFill>
+              </a:rPr>
+              <a:t> continuar desde el </a:t>
+            </a:r>
+            <a:r>
+              <a:rPr lang="pt-PT" sz="1400" dirty="0" err="1">
+                <a:solidFill>
+                  <a:schemeClr val="bg1"/>
+                </a:solidFill>
+              </a:rPr>
+              <a:t>punto</a:t>
+            </a:r>
+            <a:r>
+              <a:rPr lang="pt-PT" sz="1400" dirty="0">
+                <a:solidFill>
+                  <a:schemeClr val="bg1"/>
+                </a:solidFill>
+              </a:rPr>
+              <a:t> </a:t>
+            </a:r>
+            <a:r>
+              <a:rPr lang="pt-PT" sz="1400" dirty="0" err="1">
+                <a:solidFill>
+                  <a:schemeClr val="bg1"/>
+                </a:solidFill>
+              </a:rPr>
+              <a:t>correcto</a:t>
+            </a:r>
+            <a:r>
+              <a:rPr lang="pt-PT" sz="1400" dirty="0">
+                <a:solidFill>
+                  <a:schemeClr val="bg1"/>
+                </a:solidFill>
+              </a:rPr>
+              <a:t> </a:t>
+            </a:r>
+            <a:r>
+              <a:rPr lang="pt-PT" sz="1400" dirty="0" err="1">
+                <a:solidFill>
+                  <a:schemeClr val="bg1"/>
+                </a:solidFill>
+              </a:rPr>
+              <a:t>basándose</a:t>
+            </a:r>
+            <a:r>
+              <a:rPr lang="pt-PT" sz="1400" dirty="0">
+                <a:solidFill>
+                  <a:schemeClr val="bg1"/>
+                </a:solidFill>
+              </a:rPr>
+              <a:t> </a:t>
+            </a:r>
+            <a:r>
+              <a:rPr lang="pt-PT" sz="1400" dirty="0" err="1">
+                <a:solidFill>
+                  <a:schemeClr val="bg1"/>
+                </a:solidFill>
+              </a:rPr>
+              <a:t>en</a:t>
+            </a:r>
+            <a:r>
+              <a:rPr lang="pt-PT" sz="1400" dirty="0">
+                <a:solidFill>
+                  <a:schemeClr val="bg1"/>
+                </a:solidFill>
+              </a:rPr>
+              <a:t> la historia.</a:t>
+            </a:r>
+          </a:p>
+        </p:txBody>
+      </p:sp>
+    </p:spTree>
+    <p:extLst>
+      <p:ext uri="{BB962C8B-B14F-4D97-AF65-F5344CB8AC3E}">
+        <p14:creationId xmlns:p14="http://schemas.microsoft.com/office/powerpoint/2010/main" val="3225558161"/>
+      </p:ext>
+    </p:extLst>
+  </p:cSld>
+  <p:clrMapOvr>
+    <a:masterClrMapping/>
+  </p:clrMapOvr>
+</p:sld>
+</file>
+
+<file path=ppt/slides/slide5.xml><?xml version="1.0" encoding="utf-8"?>
 <p:sld xmlns:a="http://schemas.openxmlformats.org/drawingml/2006/main" xmlns:r="http://schemas.openxmlformats.org/officeDocument/2006/relationships" xmlns:p="http://schemas.openxmlformats.org/presentationml/2006/main">
   <p:cSld name="Slide 3">
     <p:bg>
@@ -7381,7 +10184,7 @@
 </p:sld>
 </file>
 
-<file path=ppt/slides/slide5.xml><?xml version="1.0" encoding="utf-8"?>
+<file path=ppt/slides/slide6.xml><?xml version="1.0" encoding="utf-8"?>
 <p:sld xmlns:a="http://schemas.openxmlformats.org/drawingml/2006/main" xmlns:r="http://schemas.openxmlformats.org/officeDocument/2006/relationships" xmlns:p="http://schemas.openxmlformats.org/presentationml/2006/main">
   <p:cSld name="Slide 4">
     <p:bg>
@@ -8814,7 +11617,7 @@
 </p:sld>
 </file>
 
-<file path=ppt/slides/slide6.xml><?xml version="1.0" encoding="utf-8"?>
+<file path=ppt/slides/slide7.xml><?xml version="1.0" encoding="utf-8"?>
 <p:sld xmlns:a="http://schemas.openxmlformats.org/drawingml/2006/main" xmlns:r="http://schemas.openxmlformats.org/officeDocument/2006/relationships" xmlns:p="http://schemas.openxmlformats.org/presentationml/2006/main">
   <p:cSld name="Slide 5">
     <p:bg>
@@ -9839,7 +12642,7 @@
 </p:sld>
 </file>
 
-<file path=ppt/slides/slide7.xml><?xml version="1.0" encoding="utf-8"?>
+<file path=ppt/slides/slide8.xml><?xml version="1.0" encoding="utf-8"?>
 <p:sld xmlns:a="http://schemas.openxmlformats.org/drawingml/2006/main" xmlns:r="http://schemas.openxmlformats.org/officeDocument/2006/relationships" xmlns:p="http://schemas.openxmlformats.org/presentationml/2006/main">
   <p:cSld name="Slide 6">
     <p:bg>
@@ -12209,7 +15012,7 @@
 </p:sld>
 </file>
 
-<file path=ppt/slides/slide8.xml><?xml version="1.0" encoding="utf-8"?>
+<file path=ppt/slides/slide9.xml><?xml version="1.0" encoding="utf-8"?>
 <p:sld xmlns:a="http://schemas.openxmlformats.org/drawingml/2006/main" xmlns:r="http://schemas.openxmlformats.org/officeDocument/2006/relationships" xmlns:p="http://schemas.openxmlformats.org/presentationml/2006/main">
   <p:cSld name="Slide 9">
     <p:bg>
@@ -13577,1739 +16380,6 @@
           <a:xfrm flipH="1">
             <a:off x="7198298" y="2447097"/>
             <a:ext cx="4" cy="300820"/>
-          </a:xfrm>
-          <a:prstGeom prst="straightConnector1">
-            <a:avLst/>
-          </a:prstGeom>
-          <a:ln w="19050">
-            <a:solidFill>
-              <a:schemeClr val="tx1"/>
-            </a:solidFill>
-            <a:tailEnd type="triangle"/>
-          </a:ln>
-        </p:spPr>
-        <p:style>
-          <a:lnRef idx="1">
-            <a:schemeClr val="accent1"/>
-          </a:lnRef>
-          <a:fillRef idx="0">
-            <a:schemeClr val="accent1"/>
-          </a:fillRef>
-          <a:effectRef idx="0">
-            <a:schemeClr val="accent1"/>
-          </a:effectRef>
-          <a:fontRef idx="minor">
-            <a:schemeClr val="tx1"/>
-          </a:fontRef>
-        </p:style>
-      </p:cxnSp>
-    </p:spTree>
-  </p:cSld>
-  <p:clrMapOvr>
-    <a:masterClrMapping/>
-  </p:clrMapOvr>
-</p:sld>
-</file>
-
-<file path=ppt/slides/slide9.xml><?xml version="1.0" encoding="utf-8"?>
-<p:sld xmlns:a="http://schemas.openxmlformats.org/drawingml/2006/main" xmlns:r="http://schemas.openxmlformats.org/officeDocument/2006/relationships" xmlns:p="http://schemas.openxmlformats.org/presentationml/2006/main">
-  <p:cSld name="Slide 10">
-    <p:bg>
-      <p:bgPr>
-        <a:gradFill>
-          <a:gsLst>
-            <a:gs pos="0">
-              <a:schemeClr val="accent3">
-                <a:lumMod val="5000"/>
-                <a:lumOff val="95000"/>
-              </a:schemeClr>
-            </a:gs>
-            <a:gs pos="74000">
-              <a:schemeClr val="accent3">
-                <a:lumMod val="45000"/>
-                <a:lumOff val="55000"/>
-              </a:schemeClr>
-            </a:gs>
-            <a:gs pos="83000">
-              <a:schemeClr val="accent3">
-                <a:lumMod val="45000"/>
-                <a:lumOff val="55000"/>
-              </a:schemeClr>
-            </a:gs>
-            <a:gs pos="100000">
-              <a:schemeClr val="accent3">
-                <a:lumMod val="30000"/>
-                <a:lumOff val="70000"/>
-              </a:schemeClr>
-            </a:gs>
-          </a:gsLst>
-          <a:lin ang="5400000" scaled="1"/>
-        </a:gradFill>
-        <a:effectLst/>
-      </p:bgPr>
-    </p:bg>
-    <p:spTree>
-      <p:nvGrpSpPr>
-        <p:cNvPr id="1" name=""/>
-        <p:cNvGrpSpPr/>
-        <p:nvPr/>
-      </p:nvGrpSpPr>
-      <p:grpSpPr>
-        <a:xfrm>
-          <a:off x="0" y="0"/>
-          <a:ext cx="0" cy="0"/>
-          <a:chOff x="0" y="0"/>
-          <a:chExt cx="0" cy="0"/>
-        </a:xfrm>
-      </p:grpSpPr>
-      <p:sp>
-        <p:nvSpPr>
-          <p:cNvPr id="2" name="Shape 0"/>
-          <p:cNvSpPr/>
-          <p:nvPr/>
-        </p:nvSpPr>
-        <p:spPr>
-          <a:xfrm>
-            <a:off x="0" y="0"/>
-            <a:ext cx="9144000" cy="822960"/>
-          </a:xfrm>
-          <a:prstGeom prst="rect">
-            <a:avLst/>
-          </a:prstGeom>
-          <a:solidFill>
-            <a:srgbClr val="1B6CA8"/>
-          </a:solidFill>
-          <a:ln w="12700">
-            <a:solidFill>
-              <a:srgbClr val="1B6CA8"/>
-            </a:solidFill>
-            <a:prstDash val="solid"/>
-          </a:ln>
-        </p:spPr>
-        <p:txBody>
-          <a:bodyPr/>
-          <a:lstStyle/>
-          <a:p>
-            <a:endParaRPr lang="pt-PT"/>
-          </a:p>
-        </p:txBody>
-      </p:sp>
-      <p:sp>
-        <p:nvSpPr>
-          <p:cNvPr id="3" name="Text 1"/>
-          <p:cNvSpPr/>
-          <p:nvPr/>
-        </p:nvSpPr>
-        <p:spPr>
-          <a:xfrm>
-            <a:off x="457200" y="0"/>
-            <a:ext cx="8229600" cy="822960"/>
-          </a:xfrm>
-          <a:prstGeom prst="rect">
-            <a:avLst/>
-          </a:prstGeom>
-          <a:noFill/>
-          <a:ln/>
-        </p:spPr>
-        <p:txBody>
-          <a:bodyPr wrap="square" lIns="0" tIns="0" rIns="0" bIns="0" rtlCol="0" anchor="ctr"/>
-          <a:lstStyle/>
-          <a:p>
-            <a:pPr marL="0" indent="0">
-              <a:buNone/>
-            </a:pPr>
-            <a:r>
-              <a:rPr lang="en-US" sz="2400" b="1" dirty="0">
-                <a:solidFill>
-                  <a:srgbClr val="FFFFFF"/>
-                </a:solidFill>
-              </a:rPr>
-              <a:t>07  /  Fluxo de Execução</a:t>
-            </a:r>
-            <a:endParaRPr lang="en-US" sz="2400" dirty="0"/>
-          </a:p>
-        </p:txBody>
-      </p:sp>
-      <p:sp>
-        <p:nvSpPr>
-          <p:cNvPr id="4" name="Shape 2"/>
-          <p:cNvSpPr/>
-          <p:nvPr/>
-        </p:nvSpPr>
-        <p:spPr>
-          <a:xfrm>
-            <a:off x="274320" y="1005840"/>
-            <a:ext cx="2743200" cy="1325880"/>
-          </a:xfrm>
-          <a:prstGeom prst="rect">
-            <a:avLst/>
-          </a:prstGeom>
-          <a:solidFill>
-            <a:srgbClr val="112236"/>
-          </a:solidFill>
-          <a:ln w="19050">
-            <a:solidFill>
-              <a:srgbClr val="2D9CDB"/>
-            </a:solidFill>
-            <a:prstDash val="solid"/>
-          </a:ln>
-          <a:effectLst>
-            <a:outerShdw blurRad="101600" dist="38100" dir="8100000" algn="bl" rotWithShape="0">
-              <a:srgbClr val="000000">
-                <a:alpha val="18000"/>
-              </a:srgbClr>
-            </a:outerShdw>
-          </a:effectLst>
-        </p:spPr>
-        <p:txBody>
-          <a:bodyPr/>
-          <a:lstStyle/>
-          <a:p>
-            <a:endParaRPr lang="pt-PT"/>
-          </a:p>
-        </p:txBody>
-      </p:sp>
-      <p:sp>
-        <p:nvSpPr>
-          <p:cNvPr id="5" name="Shape 3"/>
-          <p:cNvSpPr/>
-          <p:nvPr/>
-        </p:nvSpPr>
-        <p:spPr>
-          <a:xfrm>
-            <a:off x="365760" y="1097280"/>
-            <a:ext cx="502920" cy="502920"/>
-          </a:xfrm>
-          <a:prstGeom prst="ellipse">
-            <a:avLst/>
-          </a:prstGeom>
-          <a:solidFill>
-            <a:srgbClr val="2D9CDB"/>
-          </a:solidFill>
-          <a:ln w="12700">
-            <a:solidFill>
-              <a:srgbClr val="2D9CDB"/>
-            </a:solidFill>
-            <a:prstDash val="solid"/>
-          </a:ln>
-        </p:spPr>
-        <p:txBody>
-          <a:bodyPr/>
-          <a:lstStyle/>
-          <a:p>
-            <a:endParaRPr lang="pt-PT"/>
-          </a:p>
-        </p:txBody>
-      </p:sp>
-      <p:sp>
-        <p:nvSpPr>
-          <p:cNvPr id="6" name="Text 4"/>
-          <p:cNvSpPr/>
-          <p:nvPr/>
-        </p:nvSpPr>
-        <p:spPr>
-          <a:xfrm>
-            <a:off x="365760" y="1097280"/>
-            <a:ext cx="502920" cy="502920"/>
-          </a:xfrm>
-          <a:prstGeom prst="rect">
-            <a:avLst/>
-          </a:prstGeom>
-          <a:noFill/>
-          <a:ln/>
-        </p:spPr>
-        <p:txBody>
-          <a:bodyPr wrap="square" lIns="0" tIns="0" rIns="0" bIns="0" rtlCol="0" anchor="ctr"/>
-          <a:lstStyle/>
-          <a:p>
-            <a:pPr marL="0" indent="0" algn="ctr">
-              <a:buNone/>
-            </a:pPr>
-            <a:r>
-              <a:rPr lang="en-US" sz="1600" b="1" dirty="0">
-                <a:solidFill>
-                  <a:srgbClr val="0D1B2A"/>
-                </a:solidFill>
-              </a:rPr>
-              <a:t>1</a:t>
-            </a:r>
-            <a:endParaRPr lang="en-US" sz="1600" dirty="0"/>
-          </a:p>
-        </p:txBody>
-      </p:sp>
-      <p:sp>
-        <p:nvSpPr>
-          <p:cNvPr id="7" name="Text 5"/>
-          <p:cNvSpPr/>
-          <p:nvPr/>
-        </p:nvSpPr>
-        <p:spPr>
-          <a:xfrm>
-            <a:off x="960120" y="1078992"/>
-            <a:ext cx="1965960" cy="1097280"/>
-          </a:xfrm>
-          <a:prstGeom prst="rect">
-            <a:avLst/>
-          </a:prstGeom>
-          <a:noFill/>
-          <a:ln/>
-        </p:spPr>
-        <p:txBody>
-          <a:bodyPr wrap="square" rtlCol="0" anchor="ctr"/>
-          <a:lstStyle/>
-          <a:p>
-            <a:pPr marL="0" indent="0">
-              <a:buNone/>
-            </a:pPr>
-            <a:r>
-              <a:rPr lang="en-US" sz="1200" dirty="0" err="1">
-                <a:solidFill>
-                  <a:srgbClr val="FFFFFF"/>
-                </a:solidFill>
-              </a:rPr>
-              <a:t>Cliente</a:t>
-            </a:r>
-            <a:r>
-              <a:rPr lang="en-US" sz="1200" dirty="0">
-                <a:solidFill>
-                  <a:srgbClr val="FFFFFF"/>
-                </a:solidFill>
-              </a:rPr>
-              <a:t> </a:t>
-            </a:r>
-            <a:r>
-              <a:rPr lang="en-US" sz="1200" dirty="0" err="1">
-                <a:solidFill>
-                  <a:srgbClr val="FFFFFF"/>
-                </a:solidFill>
-              </a:rPr>
-              <a:t>inicia</a:t>
-            </a:r>
-            <a:r>
-              <a:rPr lang="en-US" sz="1200" dirty="0">
-                <a:solidFill>
-                  <a:srgbClr val="FFFFFF"/>
-                </a:solidFill>
-              </a:rPr>
-              <a:t> </a:t>
-            </a:r>
-            <a:r>
-              <a:rPr lang="en-US" sz="1200" dirty="0" err="1">
-                <a:solidFill>
-                  <a:srgbClr val="FFFFFF"/>
-                </a:solidFill>
-              </a:rPr>
-              <a:t>el</a:t>
-            </a:r>
-            <a:r>
-              <a:rPr lang="en-US" sz="1200" dirty="0">
-                <a:solidFill>
-                  <a:srgbClr val="FFFFFF"/>
-                </a:solidFill>
-              </a:rPr>
-              <a:t> </a:t>
-            </a:r>
-            <a:r>
-              <a:rPr lang="en-US" sz="1200" dirty="0" err="1">
-                <a:solidFill>
-                  <a:srgbClr val="FFFFFF"/>
-                </a:solidFill>
-              </a:rPr>
-              <a:t>flujo</a:t>
-            </a:r>
-            <a:r>
-              <a:rPr lang="en-US" sz="1200" dirty="0">
-                <a:solidFill>
-                  <a:srgbClr val="FFFFFF"/>
-                </a:solidFill>
-              </a:rPr>
-              <a:t> de </a:t>
-            </a:r>
-            <a:r>
-              <a:rPr lang="en-US" sz="1200" dirty="0" err="1">
-                <a:solidFill>
-                  <a:srgbClr val="FFFFFF"/>
-                </a:solidFill>
-              </a:rPr>
-              <a:t>trabajo</a:t>
-            </a:r>
-            <a:r>
-              <a:rPr lang="en-US" sz="1200" dirty="0">
-                <a:solidFill>
-                  <a:srgbClr val="FFFFFF"/>
-                </a:solidFill>
-              </a:rPr>
-              <a:t>.</a:t>
-            </a:r>
-            <a:endParaRPr lang="en-US" sz="1200" dirty="0"/>
-          </a:p>
-        </p:txBody>
-      </p:sp>
-      <p:sp>
-        <p:nvSpPr>
-          <p:cNvPr id="9" name="Shape 7"/>
-          <p:cNvSpPr/>
-          <p:nvPr/>
-        </p:nvSpPr>
-        <p:spPr>
-          <a:xfrm>
-            <a:off x="3200400" y="1005840"/>
-            <a:ext cx="2743200" cy="1325880"/>
-          </a:xfrm>
-          <a:prstGeom prst="rect">
-            <a:avLst/>
-          </a:prstGeom>
-          <a:solidFill>
-            <a:srgbClr val="112236"/>
-          </a:solidFill>
-          <a:ln w="19050">
-            <a:solidFill>
-              <a:srgbClr val="1B6CA8"/>
-            </a:solidFill>
-            <a:prstDash val="solid"/>
-          </a:ln>
-          <a:effectLst>
-            <a:outerShdw blurRad="101600" dist="38100" dir="8100000" algn="bl" rotWithShape="0">
-              <a:srgbClr val="000000">
-                <a:alpha val="18000"/>
-              </a:srgbClr>
-            </a:outerShdw>
-          </a:effectLst>
-        </p:spPr>
-        <p:txBody>
-          <a:bodyPr/>
-          <a:lstStyle/>
-          <a:p>
-            <a:endParaRPr lang="pt-PT"/>
-          </a:p>
-        </p:txBody>
-      </p:sp>
-      <p:sp>
-        <p:nvSpPr>
-          <p:cNvPr id="10" name="Shape 8"/>
-          <p:cNvSpPr/>
-          <p:nvPr/>
-        </p:nvSpPr>
-        <p:spPr>
-          <a:xfrm>
-            <a:off x="3291840" y="1097280"/>
-            <a:ext cx="502920" cy="502920"/>
-          </a:xfrm>
-          <a:prstGeom prst="ellipse">
-            <a:avLst/>
-          </a:prstGeom>
-          <a:solidFill>
-            <a:srgbClr val="1B6CA8"/>
-          </a:solidFill>
-          <a:ln w="12700">
-            <a:solidFill>
-              <a:srgbClr val="1B6CA8"/>
-            </a:solidFill>
-            <a:prstDash val="solid"/>
-          </a:ln>
-        </p:spPr>
-        <p:txBody>
-          <a:bodyPr/>
-          <a:lstStyle/>
-          <a:p>
-            <a:endParaRPr lang="pt-PT"/>
-          </a:p>
-        </p:txBody>
-      </p:sp>
-      <p:sp>
-        <p:nvSpPr>
-          <p:cNvPr id="11" name="Text 9"/>
-          <p:cNvSpPr/>
-          <p:nvPr/>
-        </p:nvSpPr>
-        <p:spPr>
-          <a:xfrm>
-            <a:off x="3291840" y="1097280"/>
-            <a:ext cx="502920" cy="502920"/>
-          </a:xfrm>
-          <a:prstGeom prst="rect">
-            <a:avLst/>
-          </a:prstGeom>
-          <a:noFill/>
-          <a:ln/>
-        </p:spPr>
-        <p:txBody>
-          <a:bodyPr wrap="square" lIns="0" tIns="0" rIns="0" bIns="0" rtlCol="0" anchor="ctr"/>
-          <a:lstStyle/>
-          <a:p>
-            <a:pPr marL="0" indent="0" algn="ctr">
-              <a:buNone/>
-            </a:pPr>
-            <a:r>
-              <a:rPr lang="en-US" sz="1600" b="1" dirty="0">
-                <a:solidFill>
-                  <a:srgbClr val="0D1B2A"/>
-                </a:solidFill>
-              </a:rPr>
-              <a:t>2</a:t>
-            </a:r>
-            <a:endParaRPr lang="en-US" sz="1600" dirty="0"/>
-          </a:p>
-        </p:txBody>
-      </p:sp>
-      <p:sp>
-        <p:nvSpPr>
-          <p:cNvPr id="12" name="Text 10"/>
-          <p:cNvSpPr/>
-          <p:nvPr/>
-        </p:nvSpPr>
-        <p:spPr>
-          <a:xfrm>
-            <a:off x="3886200" y="1078992"/>
-            <a:ext cx="1965960" cy="1097280"/>
-          </a:xfrm>
-          <a:prstGeom prst="rect">
-            <a:avLst/>
-          </a:prstGeom>
-          <a:noFill/>
-          <a:ln/>
-        </p:spPr>
-        <p:txBody>
-          <a:bodyPr wrap="square" rtlCol="0" anchor="ctr"/>
-          <a:lstStyle/>
-          <a:p>
-            <a:pPr marL="0" indent="0">
-              <a:buNone/>
-            </a:pPr>
-            <a:r>
-              <a:rPr lang="en-US" sz="1200" dirty="0">
-                <a:solidFill>
-                  <a:srgbClr val="FFFFFF"/>
-                </a:solidFill>
-              </a:rPr>
-              <a:t>Temporal Service </a:t>
-            </a:r>
-            <a:r>
-              <a:rPr lang="en-US" sz="1200" dirty="0" err="1">
-                <a:solidFill>
-                  <a:srgbClr val="FFFFFF"/>
-                </a:solidFill>
-              </a:rPr>
-              <a:t>registra</a:t>
-            </a:r>
-            <a:r>
-              <a:rPr lang="en-US" sz="1200" dirty="0">
-                <a:solidFill>
-                  <a:srgbClr val="FFFFFF"/>
-                </a:solidFill>
-              </a:rPr>
-              <a:t> </a:t>
-            </a:r>
-            <a:r>
-              <a:rPr lang="en-US" sz="1200" dirty="0" err="1">
-                <a:solidFill>
-                  <a:srgbClr val="FFFFFF"/>
-                </a:solidFill>
-              </a:rPr>
-              <a:t>el</a:t>
-            </a:r>
-            <a:r>
-              <a:rPr lang="en-US" sz="1200" dirty="0">
-                <a:solidFill>
-                  <a:srgbClr val="FFFFFF"/>
-                </a:solidFill>
-              </a:rPr>
-              <a:t> </a:t>
-            </a:r>
-            <a:r>
-              <a:rPr lang="en-US" sz="1200" dirty="0" err="1">
-                <a:solidFill>
-                  <a:srgbClr val="FFFFFF"/>
-                </a:solidFill>
-              </a:rPr>
-              <a:t>evento</a:t>
-            </a:r>
-            <a:r>
-              <a:rPr lang="en-US" sz="1200" dirty="0">
-                <a:solidFill>
-                  <a:srgbClr val="FFFFFF"/>
-                </a:solidFill>
-              </a:rPr>
-              <a:t>.</a:t>
-            </a:r>
-            <a:endParaRPr lang="en-US" sz="1200" dirty="0"/>
-          </a:p>
-        </p:txBody>
-      </p:sp>
-      <p:sp>
-        <p:nvSpPr>
-          <p:cNvPr id="14" name="Shape 12"/>
-          <p:cNvSpPr/>
-          <p:nvPr/>
-        </p:nvSpPr>
-        <p:spPr>
-          <a:xfrm>
-            <a:off x="6126480" y="1005840"/>
-            <a:ext cx="2743200" cy="1325880"/>
-          </a:xfrm>
-          <a:prstGeom prst="rect">
-            <a:avLst/>
-          </a:prstGeom>
-          <a:solidFill>
-            <a:srgbClr val="112236"/>
-          </a:solidFill>
-          <a:ln w="19050">
-            <a:solidFill>
-              <a:srgbClr val="9B59B6"/>
-            </a:solidFill>
-            <a:prstDash val="solid"/>
-          </a:ln>
-          <a:effectLst>
-            <a:outerShdw blurRad="101600" dist="38100" dir="8100000" algn="bl" rotWithShape="0">
-              <a:srgbClr val="000000">
-                <a:alpha val="18000"/>
-              </a:srgbClr>
-            </a:outerShdw>
-          </a:effectLst>
-        </p:spPr>
-        <p:txBody>
-          <a:bodyPr/>
-          <a:lstStyle/>
-          <a:p>
-            <a:endParaRPr lang="pt-PT"/>
-          </a:p>
-        </p:txBody>
-      </p:sp>
-      <p:sp>
-        <p:nvSpPr>
-          <p:cNvPr id="15" name="Shape 13"/>
-          <p:cNvSpPr/>
-          <p:nvPr/>
-        </p:nvSpPr>
-        <p:spPr>
-          <a:xfrm>
-            <a:off x="6217920" y="1097280"/>
-            <a:ext cx="502920" cy="502920"/>
-          </a:xfrm>
-          <a:prstGeom prst="ellipse">
-            <a:avLst/>
-          </a:prstGeom>
-          <a:solidFill>
-            <a:srgbClr val="9B59B6"/>
-          </a:solidFill>
-          <a:ln w="12700">
-            <a:solidFill>
-              <a:srgbClr val="9B59B6"/>
-            </a:solidFill>
-            <a:prstDash val="solid"/>
-          </a:ln>
-        </p:spPr>
-        <p:txBody>
-          <a:bodyPr/>
-          <a:lstStyle/>
-          <a:p>
-            <a:endParaRPr lang="pt-PT"/>
-          </a:p>
-        </p:txBody>
-      </p:sp>
-      <p:sp>
-        <p:nvSpPr>
-          <p:cNvPr id="16" name="Text 14"/>
-          <p:cNvSpPr/>
-          <p:nvPr/>
-        </p:nvSpPr>
-        <p:spPr>
-          <a:xfrm>
-            <a:off x="6217920" y="1097280"/>
-            <a:ext cx="502920" cy="502920"/>
-          </a:xfrm>
-          <a:prstGeom prst="rect">
-            <a:avLst/>
-          </a:prstGeom>
-          <a:noFill/>
-          <a:ln/>
-        </p:spPr>
-        <p:txBody>
-          <a:bodyPr wrap="square" lIns="0" tIns="0" rIns="0" bIns="0" rtlCol="0" anchor="ctr"/>
-          <a:lstStyle/>
-          <a:p>
-            <a:pPr marL="0" indent="0" algn="ctr">
-              <a:buNone/>
-            </a:pPr>
-            <a:r>
-              <a:rPr lang="en-US" sz="1600" b="1" dirty="0">
-                <a:solidFill>
-                  <a:srgbClr val="0D1B2A"/>
-                </a:solidFill>
-              </a:rPr>
-              <a:t>3</a:t>
-            </a:r>
-            <a:endParaRPr lang="en-US" sz="1600" dirty="0"/>
-          </a:p>
-        </p:txBody>
-      </p:sp>
-      <p:sp>
-        <p:nvSpPr>
-          <p:cNvPr id="17" name="Text 15"/>
-          <p:cNvSpPr/>
-          <p:nvPr/>
-        </p:nvSpPr>
-        <p:spPr>
-          <a:xfrm>
-            <a:off x="6812280" y="1078992"/>
-            <a:ext cx="1965960" cy="1097280"/>
-          </a:xfrm>
-          <a:prstGeom prst="rect">
-            <a:avLst/>
-          </a:prstGeom>
-          <a:noFill/>
-          <a:ln/>
-        </p:spPr>
-        <p:txBody>
-          <a:bodyPr wrap="square" rtlCol="0" anchor="ctr"/>
-          <a:lstStyle/>
-          <a:p>
-            <a:pPr marL="0" indent="0">
-              <a:buNone/>
-            </a:pPr>
-            <a:r>
-              <a:rPr lang="en-US" sz="1200" dirty="0">
-                <a:solidFill>
-                  <a:srgbClr val="FFFFFF"/>
-                </a:solidFill>
-              </a:rPr>
-              <a:t>Las </a:t>
-            </a:r>
-            <a:r>
-              <a:rPr lang="en-US" sz="1200" dirty="0" err="1">
-                <a:solidFill>
-                  <a:srgbClr val="FFFFFF"/>
-                </a:solidFill>
-              </a:rPr>
-              <a:t>tareas</a:t>
-            </a:r>
-            <a:r>
-              <a:rPr lang="en-US" sz="1200" dirty="0">
-                <a:solidFill>
-                  <a:srgbClr val="FFFFFF"/>
-                </a:solidFill>
-              </a:rPr>
-              <a:t> se </a:t>
-            </a:r>
-            <a:r>
-              <a:rPr lang="en-US" sz="1200" dirty="0" err="1">
-                <a:solidFill>
-                  <a:srgbClr val="FFFFFF"/>
-                </a:solidFill>
-              </a:rPr>
-              <a:t>programan</a:t>
-            </a:r>
-            <a:r>
-              <a:rPr lang="en-US" sz="1200" dirty="0">
-                <a:solidFill>
-                  <a:srgbClr val="FFFFFF"/>
-                </a:solidFill>
-              </a:rPr>
-              <a:t> </a:t>
-            </a:r>
-            <a:r>
-              <a:rPr lang="en-US" sz="1200" dirty="0" err="1">
-                <a:solidFill>
-                  <a:srgbClr val="FFFFFF"/>
-                </a:solidFill>
-              </a:rPr>
-              <a:t>en</a:t>
-            </a:r>
-            <a:r>
-              <a:rPr lang="en-US" sz="1200" dirty="0">
-                <a:solidFill>
-                  <a:srgbClr val="FFFFFF"/>
-                </a:solidFill>
-              </a:rPr>
-              <a:t> Task Queue.</a:t>
-            </a:r>
-            <a:endParaRPr lang="en-US" sz="1200" dirty="0"/>
-          </a:p>
-        </p:txBody>
-      </p:sp>
-      <p:sp>
-        <p:nvSpPr>
-          <p:cNvPr id="18" name="Shape 16"/>
-          <p:cNvSpPr/>
-          <p:nvPr/>
-        </p:nvSpPr>
-        <p:spPr>
-          <a:xfrm>
-            <a:off x="274320" y="2651760"/>
-            <a:ext cx="2743200" cy="1325880"/>
-          </a:xfrm>
-          <a:prstGeom prst="rect">
-            <a:avLst/>
-          </a:prstGeom>
-          <a:solidFill>
-            <a:srgbClr val="112236"/>
-          </a:solidFill>
-          <a:ln w="19050">
-            <a:solidFill>
-              <a:srgbClr val="E67E22"/>
-            </a:solidFill>
-            <a:prstDash val="solid"/>
-          </a:ln>
-          <a:effectLst>
-            <a:outerShdw blurRad="101600" dist="38100" dir="8100000" algn="bl" rotWithShape="0">
-              <a:srgbClr val="000000">
-                <a:alpha val="18000"/>
-              </a:srgbClr>
-            </a:outerShdw>
-          </a:effectLst>
-        </p:spPr>
-        <p:txBody>
-          <a:bodyPr/>
-          <a:lstStyle/>
-          <a:p>
-            <a:endParaRPr lang="pt-PT"/>
-          </a:p>
-        </p:txBody>
-      </p:sp>
-      <p:sp>
-        <p:nvSpPr>
-          <p:cNvPr id="19" name="Shape 17"/>
-          <p:cNvSpPr/>
-          <p:nvPr/>
-        </p:nvSpPr>
-        <p:spPr>
-          <a:xfrm>
-            <a:off x="365760" y="2743200"/>
-            <a:ext cx="502920" cy="502920"/>
-          </a:xfrm>
-          <a:prstGeom prst="ellipse">
-            <a:avLst/>
-          </a:prstGeom>
-          <a:solidFill>
-            <a:srgbClr val="E67E22"/>
-          </a:solidFill>
-          <a:ln w="12700">
-            <a:solidFill>
-              <a:srgbClr val="E67E22"/>
-            </a:solidFill>
-            <a:prstDash val="solid"/>
-          </a:ln>
-        </p:spPr>
-        <p:txBody>
-          <a:bodyPr/>
-          <a:lstStyle/>
-          <a:p>
-            <a:endParaRPr lang="pt-PT"/>
-          </a:p>
-        </p:txBody>
-      </p:sp>
-      <p:sp>
-        <p:nvSpPr>
-          <p:cNvPr id="20" name="Text 18"/>
-          <p:cNvSpPr/>
-          <p:nvPr/>
-        </p:nvSpPr>
-        <p:spPr>
-          <a:xfrm>
-            <a:off x="365760" y="2743200"/>
-            <a:ext cx="502920" cy="502920"/>
-          </a:xfrm>
-          <a:prstGeom prst="rect">
-            <a:avLst/>
-          </a:prstGeom>
-          <a:noFill/>
-          <a:ln/>
-        </p:spPr>
-        <p:txBody>
-          <a:bodyPr wrap="square" lIns="0" tIns="0" rIns="0" bIns="0" rtlCol="0" anchor="ctr"/>
-          <a:lstStyle/>
-          <a:p>
-            <a:pPr marL="0" indent="0" algn="ctr">
-              <a:buNone/>
-            </a:pPr>
-            <a:r>
-              <a:rPr lang="en-US" sz="1600" b="1" dirty="0">
-                <a:solidFill>
-                  <a:srgbClr val="0D1B2A"/>
-                </a:solidFill>
-              </a:rPr>
-              <a:t>4</a:t>
-            </a:r>
-            <a:endParaRPr lang="en-US" sz="1600" dirty="0"/>
-          </a:p>
-        </p:txBody>
-      </p:sp>
-      <p:sp>
-        <p:nvSpPr>
-          <p:cNvPr id="21" name="Text 19"/>
-          <p:cNvSpPr/>
-          <p:nvPr/>
-        </p:nvSpPr>
-        <p:spPr>
-          <a:xfrm>
-            <a:off x="960120" y="2724912"/>
-            <a:ext cx="1965960" cy="1097280"/>
-          </a:xfrm>
-          <a:prstGeom prst="rect">
-            <a:avLst/>
-          </a:prstGeom>
-          <a:noFill/>
-          <a:ln/>
-        </p:spPr>
-        <p:txBody>
-          <a:bodyPr wrap="square" rtlCol="0" anchor="ctr"/>
-          <a:lstStyle/>
-          <a:p>
-            <a:pPr marL="0" indent="0">
-              <a:buNone/>
-            </a:pPr>
-            <a:r>
-              <a:rPr lang="en-US" sz="1200" dirty="0">
-                <a:solidFill>
-                  <a:srgbClr val="FFFFFF"/>
-                </a:solidFill>
-              </a:rPr>
-              <a:t>Worker consume y </a:t>
-            </a:r>
-            <a:r>
-              <a:rPr lang="en-US" sz="1200" dirty="0" err="1">
-                <a:solidFill>
-                  <a:srgbClr val="FFFFFF"/>
-                </a:solidFill>
-              </a:rPr>
-              <a:t>ejecuta</a:t>
-            </a:r>
-            <a:r>
-              <a:rPr lang="en-US" sz="1200" dirty="0">
-                <a:solidFill>
-                  <a:srgbClr val="FFFFFF"/>
-                </a:solidFill>
-              </a:rPr>
-              <a:t> la </a:t>
-            </a:r>
-            <a:r>
-              <a:rPr lang="en-US" sz="1200" dirty="0" err="1">
-                <a:solidFill>
-                  <a:srgbClr val="FFFFFF"/>
-                </a:solidFill>
-              </a:rPr>
-              <a:t>tarea</a:t>
-            </a:r>
-            <a:r>
-              <a:rPr lang="en-US" sz="1200" dirty="0">
-                <a:solidFill>
-                  <a:srgbClr val="FFFFFF"/>
-                </a:solidFill>
-              </a:rPr>
-              <a:t>.</a:t>
-            </a:r>
-            <a:endParaRPr lang="en-US" sz="1200" dirty="0"/>
-          </a:p>
-        </p:txBody>
-      </p:sp>
-      <p:sp>
-        <p:nvSpPr>
-          <p:cNvPr id="23" name="Shape 21"/>
-          <p:cNvSpPr/>
-          <p:nvPr/>
-        </p:nvSpPr>
-        <p:spPr>
-          <a:xfrm>
-            <a:off x="3200400" y="2651760"/>
-            <a:ext cx="2743200" cy="1325880"/>
-          </a:xfrm>
-          <a:prstGeom prst="rect">
-            <a:avLst/>
-          </a:prstGeom>
-          <a:solidFill>
-            <a:srgbClr val="112236"/>
-          </a:solidFill>
-          <a:ln w="19050">
-            <a:solidFill>
-              <a:srgbClr val="27AE60"/>
-            </a:solidFill>
-            <a:prstDash val="solid"/>
-          </a:ln>
-          <a:effectLst>
-            <a:outerShdw blurRad="101600" dist="38100" dir="8100000" algn="bl" rotWithShape="0">
-              <a:srgbClr val="000000">
-                <a:alpha val="18000"/>
-              </a:srgbClr>
-            </a:outerShdw>
-          </a:effectLst>
-        </p:spPr>
-        <p:txBody>
-          <a:bodyPr/>
-          <a:lstStyle/>
-          <a:p>
-            <a:endParaRPr lang="pt-PT"/>
-          </a:p>
-        </p:txBody>
-      </p:sp>
-      <p:sp>
-        <p:nvSpPr>
-          <p:cNvPr id="24" name="Shape 22"/>
-          <p:cNvSpPr/>
-          <p:nvPr/>
-        </p:nvSpPr>
-        <p:spPr>
-          <a:xfrm>
-            <a:off x="3291840" y="2743200"/>
-            <a:ext cx="502920" cy="502920"/>
-          </a:xfrm>
-          <a:prstGeom prst="ellipse">
-            <a:avLst/>
-          </a:prstGeom>
-          <a:solidFill>
-            <a:srgbClr val="27AE60"/>
-          </a:solidFill>
-          <a:ln w="12700">
-            <a:solidFill>
-              <a:srgbClr val="27AE60"/>
-            </a:solidFill>
-            <a:prstDash val="solid"/>
-          </a:ln>
-        </p:spPr>
-        <p:txBody>
-          <a:bodyPr/>
-          <a:lstStyle/>
-          <a:p>
-            <a:endParaRPr lang="pt-PT"/>
-          </a:p>
-        </p:txBody>
-      </p:sp>
-      <p:sp>
-        <p:nvSpPr>
-          <p:cNvPr id="25" name="Text 23"/>
-          <p:cNvSpPr/>
-          <p:nvPr/>
-        </p:nvSpPr>
-        <p:spPr>
-          <a:xfrm>
-            <a:off x="3291840" y="2743200"/>
-            <a:ext cx="502920" cy="502920"/>
-          </a:xfrm>
-          <a:prstGeom prst="rect">
-            <a:avLst/>
-          </a:prstGeom>
-          <a:noFill/>
-          <a:ln/>
-        </p:spPr>
-        <p:txBody>
-          <a:bodyPr wrap="square" lIns="0" tIns="0" rIns="0" bIns="0" rtlCol="0" anchor="ctr"/>
-          <a:lstStyle/>
-          <a:p>
-            <a:pPr marL="0" indent="0" algn="ctr">
-              <a:buNone/>
-            </a:pPr>
-            <a:r>
-              <a:rPr lang="en-US" sz="1600" b="1" dirty="0">
-                <a:solidFill>
-                  <a:srgbClr val="0D1B2A"/>
-                </a:solidFill>
-              </a:rPr>
-              <a:t>5</a:t>
-            </a:r>
-            <a:endParaRPr lang="en-US" sz="1600" dirty="0"/>
-          </a:p>
-        </p:txBody>
-      </p:sp>
-      <p:sp>
-        <p:nvSpPr>
-          <p:cNvPr id="26" name="Text 24"/>
-          <p:cNvSpPr/>
-          <p:nvPr/>
-        </p:nvSpPr>
-        <p:spPr>
-          <a:xfrm>
-            <a:off x="3886200" y="2724912"/>
-            <a:ext cx="1965960" cy="1097280"/>
-          </a:xfrm>
-          <a:prstGeom prst="rect">
-            <a:avLst/>
-          </a:prstGeom>
-          <a:noFill/>
-          <a:ln/>
-        </p:spPr>
-        <p:txBody>
-          <a:bodyPr wrap="square" rtlCol="0" anchor="ctr"/>
-          <a:lstStyle/>
-          <a:p>
-            <a:pPr marL="0" indent="0">
-              <a:buNone/>
-            </a:pPr>
-            <a:r>
-              <a:rPr lang="en-US" sz="1200" dirty="0">
-                <a:solidFill>
-                  <a:srgbClr val="FFFFFF"/>
-                </a:solidFill>
-              </a:rPr>
-              <a:t>Activity </a:t>
-            </a:r>
-            <a:r>
-              <a:rPr lang="en-US" sz="1200" dirty="0" err="1">
-                <a:solidFill>
-                  <a:srgbClr val="FFFFFF"/>
-                </a:solidFill>
-              </a:rPr>
-              <a:t>realiza</a:t>
-            </a:r>
-            <a:r>
-              <a:rPr lang="en-US" sz="1200" dirty="0">
-                <a:solidFill>
-                  <a:srgbClr val="FFFFFF"/>
-                </a:solidFill>
-              </a:rPr>
-              <a:t> la </a:t>
-            </a:r>
-            <a:r>
-              <a:rPr lang="en-US" sz="1200" dirty="0" err="1">
-                <a:solidFill>
-                  <a:srgbClr val="FFFFFF"/>
-                </a:solidFill>
-              </a:rPr>
-              <a:t>operación</a:t>
-            </a:r>
-            <a:r>
-              <a:rPr lang="en-US" sz="1200" dirty="0">
-                <a:solidFill>
-                  <a:srgbClr val="FFFFFF"/>
-                </a:solidFill>
-              </a:rPr>
-              <a:t> externa.</a:t>
-            </a:r>
-            <a:endParaRPr lang="en-US" sz="1200" dirty="0"/>
-          </a:p>
-        </p:txBody>
-      </p:sp>
-      <p:sp>
-        <p:nvSpPr>
-          <p:cNvPr id="28" name="Shape 26"/>
-          <p:cNvSpPr/>
-          <p:nvPr/>
-        </p:nvSpPr>
-        <p:spPr>
-          <a:xfrm>
-            <a:off x="6126480" y="2651760"/>
-            <a:ext cx="2743200" cy="1325880"/>
-          </a:xfrm>
-          <a:prstGeom prst="rect">
-            <a:avLst/>
-          </a:prstGeom>
-          <a:solidFill>
-            <a:srgbClr val="112236"/>
-          </a:solidFill>
-          <a:ln w="19050">
-            <a:solidFill>
-              <a:srgbClr val="00D4AA"/>
-            </a:solidFill>
-            <a:prstDash val="solid"/>
-          </a:ln>
-          <a:effectLst>
-            <a:outerShdw blurRad="101600" dist="38100" dir="8100000" algn="bl" rotWithShape="0">
-              <a:srgbClr val="000000">
-                <a:alpha val="18000"/>
-              </a:srgbClr>
-            </a:outerShdw>
-          </a:effectLst>
-        </p:spPr>
-        <p:txBody>
-          <a:bodyPr/>
-          <a:lstStyle/>
-          <a:p>
-            <a:endParaRPr lang="pt-PT"/>
-          </a:p>
-        </p:txBody>
-      </p:sp>
-      <p:sp>
-        <p:nvSpPr>
-          <p:cNvPr id="29" name="Shape 27"/>
-          <p:cNvSpPr/>
-          <p:nvPr/>
-        </p:nvSpPr>
-        <p:spPr>
-          <a:xfrm>
-            <a:off x="6217920" y="2743200"/>
-            <a:ext cx="502920" cy="502920"/>
-          </a:xfrm>
-          <a:prstGeom prst="ellipse">
-            <a:avLst/>
-          </a:prstGeom>
-          <a:solidFill>
-            <a:srgbClr val="00D4AA"/>
-          </a:solidFill>
-          <a:ln w="12700">
-            <a:solidFill>
-              <a:srgbClr val="00D4AA"/>
-            </a:solidFill>
-            <a:prstDash val="solid"/>
-          </a:ln>
-        </p:spPr>
-        <p:txBody>
-          <a:bodyPr/>
-          <a:lstStyle/>
-          <a:p>
-            <a:endParaRPr lang="pt-PT"/>
-          </a:p>
-        </p:txBody>
-      </p:sp>
-      <p:sp>
-        <p:nvSpPr>
-          <p:cNvPr id="30" name="Text 28"/>
-          <p:cNvSpPr/>
-          <p:nvPr/>
-        </p:nvSpPr>
-        <p:spPr>
-          <a:xfrm>
-            <a:off x="6217920" y="2743200"/>
-            <a:ext cx="502920" cy="502920"/>
-          </a:xfrm>
-          <a:prstGeom prst="rect">
-            <a:avLst/>
-          </a:prstGeom>
-          <a:noFill/>
-          <a:ln/>
-        </p:spPr>
-        <p:txBody>
-          <a:bodyPr wrap="square" lIns="0" tIns="0" rIns="0" bIns="0" rtlCol="0" anchor="ctr"/>
-          <a:lstStyle/>
-          <a:p>
-            <a:pPr marL="0" indent="0" algn="ctr">
-              <a:buNone/>
-            </a:pPr>
-            <a:r>
-              <a:rPr lang="en-US" sz="1600" b="1" dirty="0">
-                <a:solidFill>
-                  <a:srgbClr val="0D1B2A"/>
-                </a:solidFill>
-              </a:rPr>
-              <a:t>6</a:t>
-            </a:r>
-            <a:endParaRPr lang="en-US" sz="1600" dirty="0"/>
-          </a:p>
-        </p:txBody>
-      </p:sp>
-      <p:sp>
-        <p:nvSpPr>
-          <p:cNvPr id="31" name="Text 29"/>
-          <p:cNvSpPr/>
-          <p:nvPr/>
-        </p:nvSpPr>
-        <p:spPr>
-          <a:xfrm>
-            <a:off x="6812280" y="2724912"/>
-            <a:ext cx="1965960" cy="1097280"/>
-          </a:xfrm>
-          <a:prstGeom prst="rect">
-            <a:avLst/>
-          </a:prstGeom>
-          <a:noFill/>
-          <a:ln/>
-        </p:spPr>
-        <p:txBody>
-          <a:bodyPr wrap="square" rtlCol="0" anchor="ctr"/>
-          <a:lstStyle/>
-          <a:p>
-            <a:pPr marL="0" indent="0">
-              <a:buNone/>
-            </a:pPr>
-            <a:r>
-              <a:rPr lang="en-US" sz="1200" dirty="0">
-                <a:solidFill>
-                  <a:srgbClr val="FFFFFF"/>
-                </a:solidFill>
-              </a:rPr>
-              <a:t>Se </a:t>
-            </a:r>
-            <a:r>
-              <a:rPr lang="en-US" sz="1200" dirty="0" err="1">
-                <a:solidFill>
-                  <a:srgbClr val="FFFFFF"/>
-                </a:solidFill>
-              </a:rPr>
-              <a:t>devuelve</a:t>
-            </a:r>
-            <a:r>
-              <a:rPr lang="en-US" sz="1200" dirty="0">
-                <a:solidFill>
-                  <a:srgbClr val="FFFFFF"/>
-                </a:solidFill>
-              </a:rPr>
-              <a:t> </a:t>
-            </a:r>
-            <a:r>
-              <a:rPr lang="en-US" sz="1200" dirty="0" err="1">
-                <a:solidFill>
-                  <a:srgbClr val="FFFFFF"/>
-                </a:solidFill>
-              </a:rPr>
-              <a:t>el</a:t>
-            </a:r>
-            <a:r>
-              <a:rPr lang="en-US" sz="1200" dirty="0">
-                <a:solidFill>
-                  <a:srgbClr val="FFFFFF"/>
-                </a:solidFill>
-              </a:rPr>
-              <a:t> </a:t>
-            </a:r>
-            <a:r>
-              <a:rPr lang="en-US" sz="1200" dirty="0" err="1">
-                <a:solidFill>
-                  <a:srgbClr val="FFFFFF"/>
-                </a:solidFill>
-              </a:rPr>
-              <a:t>resultado</a:t>
-            </a:r>
-            <a:r>
-              <a:rPr lang="en-US" sz="1200" dirty="0">
-                <a:solidFill>
-                  <a:srgbClr val="FFFFFF"/>
-                </a:solidFill>
-              </a:rPr>
-              <a:t> y se </a:t>
-            </a:r>
-            <a:r>
-              <a:rPr lang="en-US" sz="1200" dirty="0" err="1">
-                <a:solidFill>
-                  <a:srgbClr val="FFFFFF"/>
-                </a:solidFill>
-              </a:rPr>
-              <a:t>actualiza</a:t>
-            </a:r>
-            <a:r>
-              <a:rPr lang="en-US" sz="1200" dirty="0">
-                <a:solidFill>
-                  <a:srgbClr val="FFFFFF"/>
-                </a:solidFill>
-              </a:rPr>
-              <a:t> </a:t>
-            </a:r>
-            <a:r>
-              <a:rPr lang="en-US" sz="1200" dirty="0" err="1">
-                <a:solidFill>
-                  <a:srgbClr val="FFFFFF"/>
-                </a:solidFill>
-              </a:rPr>
-              <a:t>el</a:t>
-            </a:r>
-            <a:r>
-              <a:rPr lang="en-US" sz="1200" dirty="0">
-                <a:solidFill>
-                  <a:srgbClr val="FFFFFF"/>
-                </a:solidFill>
-              </a:rPr>
-              <a:t> </a:t>
-            </a:r>
-            <a:r>
-              <a:rPr lang="en-US" sz="1200" dirty="0" err="1">
-                <a:solidFill>
-                  <a:srgbClr val="FFFFFF"/>
-                </a:solidFill>
-              </a:rPr>
-              <a:t>historial</a:t>
-            </a:r>
-            <a:r>
-              <a:rPr lang="en-US" sz="1200" dirty="0">
-                <a:solidFill>
-                  <a:srgbClr val="FFFFFF"/>
-                </a:solidFill>
-              </a:rPr>
-              <a:t>.</a:t>
-            </a:r>
-            <a:endParaRPr lang="en-US" sz="1200" dirty="0"/>
-          </a:p>
-        </p:txBody>
-      </p:sp>
-      <p:sp>
-        <p:nvSpPr>
-          <p:cNvPr id="32" name="Shape 30"/>
-          <p:cNvSpPr/>
-          <p:nvPr/>
-        </p:nvSpPr>
-        <p:spPr>
-          <a:xfrm>
-            <a:off x="274320" y="4434840"/>
-            <a:ext cx="8595360" cy="457200"/>
-          </a:xfrm>
-          <a:prstGeom prst="rect">
-            <a:avLst/>
-          </a:prstGeom>
-          <a:solidFill>
-            <a:srgbClr val="1B6CA8"/>
-          </a:solidFill>
-          <a:ln w="12700">
-            <a:solidFill>
-              <a:srgbClr val="1B6CA8"/>
-            </a:solidFill>
-            <a:prstDash val="solid"/>
-          </a:ln>
-        </p:spPr>
-        <p:txBody>
-          <a:bodyPr/>
-          <a:lstStyle/>
-          <a:p>
-            <a:endParaRPr lang="pt-PT"/>
-          </a:p>
-        </p:txBody>
-      </p:sp>
-      <p:sp>
-        <p:nvSpPr>
-          <p:cNvPr id="33" name="Text 31"/>
-          <p:cNvSpPr/>
-          <p:nvPr/>
-        </p:nvSpPr>
-        <p:spPr>
-          <a:xfrm>
-            <a:off x="457200" y="4434840"/>
-            <a:ext cx="8229600" cy="457200"/>
-          </a:xfrm>
-          <a:prstGeom prst="rect">
-            <a:avLst/>
-          </a:prstGeom>
-          <a:noFill/>
-          <a:ln/>
-        </p:spPr>
-        <p:txBody>
-          <a:bodyPr wrap="square" rtlCol="0" anchor="ctr"/>
-          <a:lstStyle/>
-          <a:p>
-            <a:pPr marL="0" indent="0">
-              <a:buNone/>
-            </a:pPr>
-            <a:r>
-              <a:rPr lang="en-US" sz="1100" i="1" dirty="0">
-                <a:solidFill>
-                  <a:srgbClr val="FFFFFF"/>
-                </a:solidFill>
-              </a:rPr>
-              <a:t>🔄  En </a:t>
-            </a:r>
-            <a:r>
-              <a:rPr lang="en-US" sz="1100" i="1" dirty="0" err="1">
-                <a:solidFill>
-                  <a:srgbClr val="FFFFFF"/>
-                </a:solidFill>
-              </a:rPr>
-              <a:t>caso</a:t>
-            </a:r>
-            <a:r>
-              <a:rPr lang="en-US" sz="1100" i="1" dirty="0">
-                <a:solidFill>
-                  <a:srgbClr val="FFFFFF"/>
-                </a:solidFill>
-              </a:rPr>
-              <a:t> de </a:t>
-            </a:r>
-            <a:r>
-              <a:rPr lang="en-US" sz="1100" i="1" dirty="0" err="1">
-                <a:solidFill>
-                  <a:srgbClr val="FFFFFF"/>
-                </a:solidFill>
-              </a:rPr>
-              <a:t>fallo</a:t>
-            </a:r>
-            <a:r>
-              <a:rPr lang="en-US" sz="1100" i="1" dirty="0">
-                <a:solidFill>
-                  <a:srgbClr val="FFFFFF"/>
-                </a:solidFill>
-              </a:rPr>
-              <a:t>: Temporal </a:t>
-            </a:r>
-            <a:r>
-              <a:rPr lang="en-US" sz="1100" i="1" dirty="0" err="1">
-                <a:solidFill>
-                  <a:srgbClr val="FFFFFF"/>
-                </a:solidFill>
-              </a:rPr>
-              <a:t>aplica</a:t>
-            </a:r>
-            <a:r>
-              <a:rPr lang="en-US" sz="1100" i="1" dirty="0">
-                <a:solidFill>
-                  <a:srgbClr val="FFFFFF"/>
-                </a:solidFill>
-              </a:rPr>
-              <a:t> las </a:t>
-            </a:r>
-            <a:r>
-              <a:rPr lang="en-US" sz="1100" i="1" dirty="0" err="1">
-                <a:solidFill>
-                  <a:srgbClr val="FFFFFF"/>
-                </a:solidFill>
-              </a:rPr>
-              <a:t>políticas</a:t>
-            </a:r>
-            <a:r>
-              <a:rPr lang="en-US" sz="1100" i="1" dirty="0">
-                <a:solidFill>
-                  <a:srgbClr val="FFFFFF"/>
-                </a:solidFill>
-              </a:rPr>
-              <a:t> de </a:t>
-            </a:r>
-            <a:r>
-              <a:rPr lang="en-US" sz="1100" i="1" dirty="0" err="1">
-                <a:solidFill>
-                  <a:srgbClr val="FFFFFF"/>
-                </a:solidFill>
-              </a:rPr>
-              <a:t>reintento</a:t>
-            </a:r>
-            <a:r>
-              <a:rPr lang="en-US" sz="1100" i="1" dirty="0">
-                <a:solidFill>
-                  <a:srgbClr val="FFFFFF"/>
-                </a:solidFill>
-              </a:rPr>
-              <a:t> y </a:t>
-            </a:r>
-            <a:r>
-              <a:rPr lang="en-US" sz="1100" i="1" dirty="0" err="1">
-                <a:solidFill>
-                  <a:srgbClr val="FFFFFF"/>
-                </a:solidFill>
-              </a:rPr>
-              <a:t>reanuda</a:t>
-            </a:r>
-            <a:r>
-              <a:rPr lang="en-US" sz="1100" i="1" dirty="0">
-                <a:solidFill>
-                  <a:srgbClr val="FFFFFF"/>
-                </a:solidFill>
-              </a:rPr>
-              <a:t> la </a:t>
-            </a:r>
-            <a:r>
-              <a:rPr lang="en-US" sz="1100" i="1" dirty="0" err="1">
-                <a:solidFill>
-                  <a:srgbClr val="FFFFFF"/>
-                </a:solidFill>
-              </a:rPr>
-              <a:t>ejecución</a:t>
-            </a:r>
-            <a:r>
-              <a:rPr lang="en-US" sz="1100" i="1" dirty="0">
-                <a:solidFill>
-                  <a:srgbClr val="FFFFFF"/>
-                </a:solidFill>
-              </a:rPr>
-              <a:t> </a:t>
-            </a:r>
-            <a:r>
-              <a:rPr lang="en-US" sz="1100" i="1" dirty="0" err="1">
-                <a:solidFill>
-                  <a:srgbClr val="FFFFFF"/>
-                </a:solidFill>
-              </a:rPr>
-              <a:t>en</a:t>
-            </a:r>
-            <a:r>
-              <a:rPr lang="en-US" sz="1100" i="1" dirty="0">
-                <a:solidFill>
-                  <a:srgbClr val="FFFFFF"/>
-                </a:solidFill>
-              </a:rPr>
-              <a:t> </a:t>
-            </a:r>
-            <a:r>
-              <a:rPr lang="en-US" sz="1100" i="1" dirty="0" err="1">
-                <a:solidFill>
-                  <a:srgbClr val="FFFFFF"/>
-                </a:solidFill>
-              </a:rPr>
-              <a:t>función</a:t>
-            </a:r>
-            <a:r>
-              <a:rPr lang="en-US" sz="1100" i="1" dirty="0">
-                <a:solidFill>
-                  <a:srgbClr val="FFFFFF"/>
-                </a:solidFill>
-              </a:rPr>
-              <a:t> del </a:t>
-            </a:r>
-            <a:r>
-              <a:rPr lang="en-US" sz="1100" i="1" dirty="0" err="1">
-                <a:solidFill>
-                  <a:srgbClr val="FFFFFF"/>
-                </a:solidFill>
-              </a:rPr>
-              <a:t>historial</a:t>
-            </a:r>
-            <a:r>
-              <a:rPr lang="en-US" sz="1100" i="1" dirty="0">
-                <a:solidFill>
-                  <a:srgbClr val="FFFFFF"/>
-                </a:solidFill>
-              </a:rPr>
-              <a:t> de </a:t>
-            </a:r>
-            <a:r>
-              <a:rPr lang="en-US" sz="1100" i="1" dirty="0" err="1">
-                <a:solidFill>
-                  <a:srgbClr val="FFFFFF"/>
-                </a:solidFill>
-              </a:rPr>
-              <a:t>eventos</a:t>
-            </a:r>
-            <a:r>
-              <a:rPr lang="en-US" sz="1100" i="1" dirty="0">
-                <a:solidFill>
-                  <a:srgbClr val="FFFFFF"/>
-                </a:solidFill>
-              </a:rPr>
-              <a:t>.</a:t>
-            </a:r>
-            <a:endParaRPr lang="en-US" sz="1100" dirty="0"/>
-          </a:p>
-        </p:txBody>
-      </p:sp>
-      <p:cxnSp>
-        <p:nvCxnSpPr>
-          <p:cNvPr id="34" name="Conexão Reta Unidirecional 33">
-            <a:extLst>
-              <a:ext uri="{FF2B5EF4-FFF2-40B4-BE49-F238E27FC236}">
-                <a16:creationId xmlns:a16="http://schemas.microsoft.com/office/drawing/2014/main" id="{06BC731E-5FA7-9DE4-0099-4DDF5EC35A24}"/>
-              </a:ext>
-            </a:extLst>
-          </p:cNvPr>
-          <p:cNvCxnSpPr>
-            <a:cxnSpLocks/>
-          </p:cNvCxnSpPr>
-          <p:nvPr/>
-        </p:nvCxnSpPr>
-        <p:spPr>
-          <a:xfrm>
-            <a:off x="3017520" y="1668780"/>
-            <a:ext cx="182880" cy="0"/>
-          </a:xfrm>
-          <a:prstGeom prst="straightConnector1">
-            <a:avLst/>
-          </a:prstGeom>
-          <a:ln w="19050">
-            <a:solidFill>
-              <a:schemeClr val="tx1"/>
-            </a:solidFill>
-            <a:tailEnd type="triangle"/>
-          </a:ln>
-        </p:spPr>
-        <p:style>
-          <a:lnRef idx="1">
-            <a:schemeClr val="accent1"/>
-          </a:lnRef>
-          <a:fillRef idx="0">
-            <a:schemeClr val="accent1"/>
-          </a:fillRef>
-          <a:effectRef idx="0">
-            <a:schemeClr val="accent1"/>
-          </a:effectRef>
-          <a:fontRef idx="minor">
-            <a:schemeClr val="tx1"/>
-          </a:fontRef>
-        </p:style>
-      </p:cxnSp>
-      <p:cxnSp>
-        <p:nvCxnSpPr>
-          <p:cNvPr id="35" name="Conexão Reta Unidirecional 34">
-            <a:extLst>
-              <a:ext uri="{FF2B5EF4-FFF2-40B4-BE49-F238E27FC236}">
-                <a16:creationId xmlns:a16="http://schemas.microsoft.com/office/drawing/2014/main" id="{5ADA2D49-254B-8274-AABC-40F9046D3AC7}"/>
-              </a:ext>
-            </a:extLst>
-          </p:cNvPr>
-          <p:cNvCxnSpPr>
-            <a:cxnSpLocks/>
-          </p:cNvCxnSpPr>
-          <p:nvPr/>
-        </p:nvCxnSpPr>
-        <p:spPr>
-          <a:xfrm>
-            <a:off x="5943600" y="1668780"/>
-            <a:ext cx="182880" cy="0"/>
-          </a:xfrm>
-          <a:prstGeom prst="straightConnector1">
-            <a:avLst/>
-          </a:prstGeom>
-          <a:ln w="19050">
-            <a:solidFill>
-              <a:schemeClr val="tx1"/>
-            </a:solidFill>
-            <a:tailEnd type="triangle"/>
-          </a:ln>
-        </p:spPr>
-        <p:style>
-          <a:lnRef idx="1">
-            <a:schemeClr val="accent1"/>
-          </a:lnRef>
-          <a:fillRef idx="0">
-            <a:schemeClr val="accent1"/>
-          </a:fillRef>
-          <a:effectRef idx="0">
-            <a:schemeClr val="accent1"/>
-          </a:effectRef>
-          <a:fontRef idx="minor">
-            <a:schemeClr val="tx1"/>
-          </a:fontRef>
-        </p:style>
-      </p:cxnSp>
-      <p:cxnSp>
-        <p:nvCxnSpPr>
-          <p:cNvPr id="36" name="Conexão Reta Unidirecional 35">
-            <a:extLst>
-              <a:ext uri="{FF2B5EF4-FFF2-40B4-BE49-F238E27FC236}">
-                <a16:creationId xmlns:a16="http://schemas.microsoft.com/office/drawing/2014/main" id="{B8D804C8-CA41-F327-9B64-FC25871AA272}"/>
-              </a:ext>
-            </a:extLst>
-          </p:cNvPr>
-          <p:cNvCxnSpPr>
-            <a:cxnSpLocks/>
-          </p:cNvCxnSpPr>
-          <p:nvPr/>
-        </p:nvCxnSpPr>
-        <p:spPr>
-          <a:xfrm>
-            <a:off x="3017520" y="3314700"/>
-            <a:ext cx="182880" cy="0"/>
-          </a:xfrm>
-          <a:prstGeom prst="straightConnector1">
-            <a:avLst/>
-          </a:prstGeom>
-          <a:ln w="19050">
-            <a:solidFill>
-              <a:schemeClr val="tx1"/>
-            </a:solidFill>
-            <a:tailEnd type="triangle"/>
-          </a:ln>
-        </p:spPr>
-        <p:style>
-          <a:lnRef idx="1">
-            <a:schemeClr val="accent1"/>
-          </a:lnRef>
-          <a:fillRef idx="0">
-            <a:schemeClr val="accent1"/>
-          </a:fillRef>
-          <a:effectRef idx="0">
-            <a:schemeClr val="accent1"/>
-          </a:effectRef>
-          <a:fontRef idx="minor">
-            <a:schemeClr val="tx1"/>
-          </a:fontRef>
-        </p:style>
-      </p:cxnSp>
-      <p:cxnSp>
-        <p:nvCxnSpPr>
-          <p:cNvPr id="37" name="Conexão Reta Unidirecional 36">
-            <a:extLst>
-              <a:ext uri="{FF2B5EF4-FFF2-40B4-BE49-F238E27FC236}">
-                <a16:creationId xmlns:a16="http://schemas.microsoft.com/office/drawing/2014/main" id="{073E7D96-C155-470F-114A-C83D50DC5996}"/>
-              </a:ext>
-            </a:extLst>
-          </p:cNvPr>
-          <p:cNvCxnSpPr>
-            <a:cxnSpLocks/>
-          </p:cNvCxnSpPr>
-          <p:nvPr/>
-        </p:nvCxnSpPr>
-        <p:spPr>
-          <a:xfrm flipV="1">
-            <a:off x="5943600" y="3310944"/>
-            <a:ext cx="182880" cy="3756"/>
           </a:xfrm>
           <a:prstGeom prst="straightConnector1">
             <a:avLst/>
